--- a/presentation/Parte2-Apresentacao-SMO-Nephio.pptx
+++ b/presentation/Parte2-Apresentacao-SMO-Nephio.pptx
@@ -5,7 +5,7 @@
     <p:sldMasterId id="2147483648" r:id="rId1"/>
   </p:sldMasterIdLst>
   <p:notesMasterIdLst>
-    <p:notesMasterId r:id="rId17"/>
+    <p:notesMasterId r:id="rId31"/>
   </p:notesMasterIdLst>
   <p:sldIdLst>
     <p:sldId id="256" r:id="rId2"/>
@@ -23,6 +23,20 @@
     <p:sldId id="268" r:id="rId14"/>
     <p:sldId id="269" r:id="rId15"/>
     <p:sldId id="270" r:id="rId16"/>
+    <p:sldId id="271" r:id="rId17"/>
+    <p:sldId id="272" r:id="rId18"/>
+    <p:sldId id="273" r:id="rId19"/>
+    <p:sldId id="274" r:id="rId20"/>
+    <p:sldId id="275" r:id="rId21"/>
+    <p:sldId id="276" r:id="rId22"/>
+    <p:sldId id="277" r:id="rId23"/>
+    <p:sldId id="278" r:id="rId24"/>
+    <p:sldId id="279" r:id="rId25"/>
+    <p:sldId id="280" r:id="rId26"/>
+    <p:sldId id="281" r:id="rId27"/>
+    <p:sldId id="282" r:id="rId28"/>
+    <p:sldId id="283" r:id="rId29"/>
+    <p:sldId id="284" r:id="rId30"/>
   </p:sldIdLst>
   <p:sldSz cx="9144000" cy="5143500" type="screen16x9"/>
   <p:notesSz cx="6858000" cy="9144000"/>
@@ -538,7 +552,7 @@
             </a:pPr>
             <a:r>
               <a:rPr/>
-              <a:t>Na Parte 1 caracterizei o que o Nephio faz e não faz. Agora vou provar isso na prática, com números reais de um laboratório que rodou nesta máquina — incluindo quatro melhorias que implementei depois da entrega original, a pedido do avaliador.</a:t>
+              <a:t>Na Parte 1 caracterizei teoricamente o que o Nephio faz e não faz frente à especificação de SMO da O-RAN Alliance. Esta Parte 2 existe para provar isso na prática — cada afirmação que vou fazer aqui tem um comando, uma saída real e um arquivo de evidência por trás, não é só slide.</a:t>
             </a:r>
           </a:p>
         </p:txBody>
@@ -620,7 +634,7 @@
             </a:pPr>
             <a:r>
               <a:rPr/>
-              <a:t>Antes só tínhamos docker stats. Agora tenho kubectl top de verdade — métrica real por nó e por pod, sem instalar Prometheus completo.</a:t>
+              <a:t>Esse não é um kubectl apply disfarçado. É um pacote versionado, com Draft, Proposed e Published — o mesmo mecanismo que o Nephio usaria em produção para qualquer coisa.</a:t>
             </a:r>
           </a:p>
         </p:txBody>
@@ -702,7 +716,7 @@
             </a:pPr>
             <a:r>
               <a:rPr/>
-              <a:t>Isso é GitOps de verdade fechando o gap — não só o RootSync instalado, mas provado que ele reage sozinho a um commit, sem eu chamar kpt live apply.</a:t>
+              <a:t>Dez recursos aplicados (namespace, 3 ConfigMaps, 3 Services, 3 Deployments) — todos de uma vez, via um único pacote reconciliado declarativamente.</a:t>
             </a:r>
           </a:p>
         </p:txBody>
@@ -784,7 +798,7 @@
             </a:pPr>
             <a:r>
               <a:rPr/>
-              <a:t>Achei e corrigi um bug real nessa: o YAML sem aspas fazia “00101” virar o inteiro 101 na releitura — um padrão octal-like do YAML 1.1 — causando um loop de auto-correção a cada 15s. Corrigi forçando aspas em todo escalar.</a:t>
+              <a:t>Misturar essas duas camadas seria o tipo de exagero que quero evitar. Uma é gerência de elemento de rede (o que seria O1); a outra é GitOps de infraestrutura — mecanismos diferentes, propósitos diferentes.</a:t>
             </a:r>
           </a:p>
         </p:txBody>
@@ -866,7 +880,7 @@
             </a:pPr>
             <a:r>
               <a:rPr/>
-              <a:t>Aqui apareceu o achado mais interessante de todos: o RootSync revertia a decisão do rApp de volta pra 1 réplica, porque o pacote ainda declarava replicas:1 no Git — um conflito real de autoridade entre GitOps declarativo e controle imperativo, o mesmo problema que existe quando um HPA coexiste com GitOps na vida real. Corrigi removendo “replicas” do pacote.</a:t>
+              <a:t>Rápido e direto — mas o ponto não é a velocidade, é a distinção: essa mudança fica só na API da NF, não propaga pro pacote sozinha (isso só foi resolvido depois, na Melhoria 3).</a:t>
             </a:r>
           </a:p>
         </p:txBody>
@@ -948,7 +962,7 @@
             </a:pPr>
             <a:r>
               <a:rPr/>
-              <a:t>Prefiro terminar mostrando exatamente onde parei, sem fingir que terminei algo que não terminei — isso é mais valioso academicamente do que uma apresentação sem nenhuma pendência.</a:t>
+              <a:t>Aqui uso deliberadamente o kubectl imperativo, em vez do pacote, para comparar com a Melhoria 4 (rApp) mais adiante — o mesmo scale, só que decidido automaticamente por uma política.</a:t>
             </a:r>
           </a:p>
         </p:txBody>
@@ -1030,7 +1044,7 @@
             </a:pPr>
             <a:r>
               <a:rPr/>
-              <a:t>Entre teoria (Parte 1) e prática (Parte 2), a mesma conclusão se sustenta: o Nephio é uma plataforma de automação cloud-native real, que implementa um subconjunto bem definido — e demonstrado, com evidência, inclusive nas melhorias — das funções associadas ao SMO. Obrigado.</a:t>
+              <a:t>Esse foi o experimento mais instrutivo da entrega original. Bati de frente com um comportamento real e documentado do Kubernetes, diagnostiquei com evidência e corrigi — não escondi que falhou na primeira tentativa.</a:t>
             </a:r>
           </a:p>
         </p:txBody>
@@ -1053,6 +1067,334 @@
             <a:fld id="{18BDFEC3-8487-43E8-A154-7C12CBC1FFF2}" type="slidenum">
               <a:rPr lang="en-US"/>
               <a:t>15</a:t>
+            </a:fld>
+            <a:endParaRPr lang="en-US"/>
+          </a:p>
+        </p:txBody>
+      </p:sp>
+    </p:spTree>
+  </p:cSld>
+</p:notes>
+</file>
+
+<file path=ppt/notesSlides/notesSlide16.xml><?xml version="1.0" encoding="utf-8"?>
+<p:notes xmlns:a="http://schemas.openxmlformats.org/drawingml/2006/main" xmlns:r="http://schemas.openxmlformats.org/officeDocument/2006/relationships" xmlns:p="http://schemas.openxmlformats.org/presentationml/2006/main">
+  <p:cSld>
+    <p:spTree>
+      <p:nvGrpSpPr>
+        <p:cNvPr id="1" name=""/>
+        <p:cNvGrpSpPr/>
+        <p:nvPr/>
+      </p:nvGrpSpPr>
+      <p:grpSpPr>
+        <a:xfrm>
+          <a:off x="0" y="0"/>
+          <a:ext cx="0" cy="0"/>
+          <a:chOff x="0" y="0"/>
+          <a:chExt cx="0" cy="0"/>
+        </a:xfrm>
+      </p:grpSpPr>
+      <p:sp>
+        <p:nvSpPr>
+          <p:cNvPr id="2" name="Slide Image Placeholder 1"/>
+          <p:cNvSpPr>
+            <a:spLocks noGrp="1" noRot="1" noChangeAspect="1"/>
+          </p:cNvSpPr>
+          <p:nvPr>
+            <p:ph type="sldImg"/>
+          </p:nvPr>
+        </p:nvSpPr>
+        <p:spPr/>
+      </p:sp>
+      <p:sp>
+        <p:nvSpPr>
+          <p:cNvPr id="3" name="Notes Placeholder 2"/>
+          <p:cNvSpPr>
+            <a:spLocks noGrp="1"/>
+          </p:cNvSpPr>
+          <p:nvPr>
+            <p:ph type="body" idx="1"/>
+          </p:nvPr>
+        </p:nvSpPr>
+        <p:spPr/>
+        <p:txBody>
+          <a:bodyPr/>
+          <a:lstStyle/>
+          <a:p>
+            <a:pPr lvl="0" indent="0" marL="0">
+              <a:buNone/>
+            </a:pPr>
+            <a:r>
+              <a:rPr/>
+              <a:t>Deixo claro sempre: “recuperação” aqui é o controller do Kubernetes fazendo seu trabalho normal, não uma função de FCAPS-F O-RAN. É uma distinção pequena no slide, mas grande na prática.</a:t>
+            </a:r>
+          </a:p>
+        </p:txBody>
+      </p:sp>
+      <p:sp>
+        <p:nvSpPr>
+          <p:cNvPr id="4" name="Slide Number Placeholder 3"/>
+          <p:cNvSpPr>
+            <a:spLocks noGrp="1"/>
+          </p:cNvSpPr>
+          <p:nvPr>
+            <p:ph type="sldNum" sz="quarter" idx="10"/>
+          </p:nvPr>
+        </p:nvSpPr>
+        <p:spPr/>
+        <p:txBody>
+          <a:bodyPr/>
+          <a:lstStyle/>
+          <a:p>
+            <a:fld id="{18BDFEC3-8487-43E8-A154-7C12CBC1FFF2}" type="slidenum">
+              <a:rPr lang="en-US"/>
+              <a:t>16</a:t>
+            </a:fld>
+            <a:endParaRPr lang="en-US"/>
+          </a:p>
+        </p:txBody>
+      </p:sp>
+    </p:spTree>
+  </p:cSld>
+</p:notes>
+</file>
+
+<file path=ppt/notesSlides/notesSlide17.xml><?xml version="1.0" encoding="utf-8"?>
+<p:notes xmlns:a="http://schemas.openxmlformats.org/drawingml/2006/main" xmlns:r="http://schemas.openxmlformats.org/officeDocument/2006/relationships" xmlns:p="http://schemas.openxmlformats.org/presentationml/2006/main">
+  <p:cSld>
+    <p:spTree>
+      <p:nvGrpSpPr>
+        <p:cNvPr id="1" name=""/>
+        <p:cNvGrpSpPr/>
+        <p:nvPr/>
+      </p:nvGrpSpPr>
+      <p:grpSpPr>
+        <a:xfrm>
+          <a:off x="0" y="0"/>
+          <a:ext cx="0" cy="0"/>
+          <a:chOff x="0" y="0"/>
+          <a:chExt cx="0" cy="0"/>
+        </a:xfrm>
+      </p:grpSpPr>
+      <p:sp>
+        <p:nvSpPr>
+          <p:cNvPr id="2" name="Slide Image Placeholder 1"/>
+          <p:cNvSpPr>
+            <a:spLocks noGrp="1" noRot="1" noChangeAspect="1"/>
+          </p:cNvSpPr>
+          <p:nvPr>
+            <p:ph type="sldImg"/>
+          </p:nvPr>
+        </p:nvSpPr>
+        <p:spPr/>
+      </p:sp>
+      <p:sp>
+        <p:nvSpPr>
+          <p:cNvPr id="3" name="Notes Placeholder 2"/>
+          <p:cNvSpPr>
+            <a:spLocks noGrp="1"/>
+          </p:cNvSpPr>
+          <p:nvPr>
+            <p:ph type="body" idx="1"/>
+          </p:nvPr>
+        </p:nvSpPr>
+        <p:spPr/>
+        <p:txBody>
+          <a:bodyPr/>
+          <a:lstStyle/>
+          <a:p>
+            <a:pPr lvl="0" indent="0" marL="0">
+              <a:buNone/>
+            </a:pPr>
+            <a:r>
+              <a:rPr/>
+              <a:t>Fecha o ciclo completo: instantiate, config, scale, upgrade, recover, terminate — todos pelo fluxo real do Nephio, com evidência de cada um.</a:t>
+            </a:r>
+          </a:p>
+        </p:txBody>
+      </p:sp>
+      <p:sp>
+        <p:nvSpPr>
+          <p:cNvPr id="4" name="Slide Number Placeholder 3"/>
+          <p:cNvSpPr>
+            <a:spLocks noGrp="1"/>
+          </p:cNvSpPr>
+          <p:nvPr>
+            <p:ph type="sldNum" sz="quarter" idx="10"/>
+          </p:nvPr>
+        </p:nvSpPr>
+        <p:spPr/>
+        <p:txBody>
+          <a:bodyPr/>
+          <a:lstStyle/>
+          <a:p>
+            <a:fld id="{18BDFEC3-8487-43E8-A154-7C12CBC1FFF2}" type="slidenum">
+              <a:rPr lang="en-US"/>
+              <a:t>17</a:t>
+            </a:fld>
+            <a:endParaRPr lang="en-US"/>
+          </a:p>
+        </p:txBody>
+      </p:sp>
+    </p:spTree>
+  </p:cSld>
+</p:notes>
+</file>
+
+<file path=ppt/notesSlides/notesSlide18.xml><?xml version="1.0" encoding="utf-8"?>
+<p:notes xmlns:a="http://schemas.openxmlformats.org/drawingml/2006/main" xmlns:r="http://schemas.openxmlformats.org/officeDocument/2006/relationships" xmlns:p="http://schemas.openxmlformats.org/presentationml/2006/main">
+  <p:cSld>
+    <p:spTree>
+      <p:nvGrpSpPr>
+        <p:cNvPr id="1" name=""/>
+        <p:cNvGrpSpPr/>
+        <p:nvPr/>
+      </p:nvGrpSpPr>
+      <p:grpSpPr>
+        <a:xfrm>
+          <a:off x="0" y="0"/>
+          <a:ext cx="0" cy="0"/>
+          <a:chOff x="0" y="0"/>
+          <a:chExt cx="0" cy="0"/>
+        </a:xfrm>
+      </p:grpSpPr>
+      <p:sp>
+        <p:nvSpPr>
+          <p:cNvPr id="2" name="Slide Image Placeholder 1"/>
+          <p:cNvSpPr>
+            <a:spLocks noGrp="1" noRot="1" noChangeAspect="1"/>
+          </p:cNvSpPr>
+          <p:nvPr>
+            <p:ph type="sldImg"/>
+          </p:nvPr>
+        </p:nvSpPr>
+        <p:spPr/>
+      </p:sp>
+      <p:sp>
+        <p:nvSpPr>
+          <p:cNvPr id="3" name="Notes Placeholder 2"/>
+          <p:cNvSpPr>
+            <a:spLocks noGrp="1"/>
+          </p:cNvSpPr>
+          <p:nvPr>
+            <p:ph type="body" idx="1"/>
+          </p:nvPr>
+        </p:nvSpPr>
+        <p:spPr/>
+        <p:txBody>
+          <a:bodyPr/>
+          <a:lstStyle/>
+          <a:p>
+            <a:pPr lvl="0" indent="0" marL="0">
+              <a:buNone/>
+            </a:pPr>
+            <a:r>
+              <a:rPr/>
+              <a:t>Esse gráfico já mostra os 6 experimentos originais junto com as 3 melhorias que vou detalhar depois — dá pra comparar a ordem de grandeza de cada operação de relance.</a:t>
+            </a:r>
+          </a:p>
+        </p:txBody>
+      </p:sp>
+      <p:sp>
+        <p:nvSpPr>
+          <p:cNvPr id="4" name="Slide Number Placeholder 3"/>
+          <p:cNvSpPr>
+            <a:spLocks noGrp="1"/>
+          </p:cNvSpPr>
+          <p:nvPr>
+            <p:ph type="sldNum" sz="quarter" idx="10"/>
+          </p:nvPr>
+        </p:nvSpPr>
+        <p:spPr/>
+        <p:txBody>
+          <a:bodyPr/>
+          <a:lstStyle/>
+          <a:p>
+            <a:fld id="{18BDFEC3-8487-43E8-A154-7C12CBC1FFF2}" type="slidenum">
+              <a:rPr lang="en-US"/>
+              <a:t>18</a:t>
+            </a:fld>
+            <a:endParaRPr lang="en-US"/>
+          </a:p>
+        </p:txBody>
+      </p:sp>
+    </p:spTree>
+  </p:cSld>
+</p:notes>
+</file>
+
+<file path=ppt/notesSlides/notesSlide19.xml><?xml version="1.0" encoding="utf-8"?>
+<p:notes xmlns:a="http://schemas.openxmlformats.org/drawingml/2006/main" xmlns:r="http://schemas.openxmlformats.org/officeDocument/2006/relationships" xmlns:p="http://schemas.openxmlformats.org/presentationml/2006/main">
+  <p:cSld>
+    <p:spTree>
+      <p:nvGrpSpPr>
+        <p:cNvPr id="1" name=""/>
+        <p:cNvGrpSpPr/>
+        <p:nvPr/>
+      </p:nvGrpSpPr>
+      <p:grpSpPr>
+        <a:xfrm>
+          <a:off x="0" y="0"/>
+          <a:ext cx="0" cy="0"/>
+          <a:chOff x="0" y="0"/>
+          <a:chExt cx="0" cy="0"/>
+        </a:xfrm>
+      </p:grpSpPr>
+      <p:sp>
+        <p:nvSpPr>
+          <p:cNvPr id="2" name="Slide Image Placeholder 1"/>
+          <p:cNvSpPr>
+            <a:spLocks noGrp="1" noRot="1" noChangeAspect="1"/>
+          </p:cNvSpPr>
+          <p:nvPr>
+            <p:ph type="sldImg"/>
+          </p:nvPr>
+        </p:nvSpPr>
+        <p:spPr/>
+      </p:sp>
+      <p:sp>
+        <p:nvSpPr>
+          <p:cNvPr id="3" name="Notes Placeholder 2"/>
+          <p:cNvSpPr>
+            <a:spLocks noGrp="1"/>
+          </p:cNvSpPr>
+          <p:nvPr>
+            <p:ph type="body" idx="1"/>
+          </p:nvPr>
+        </p:nvSpPr>
+        <p:spPr/>
+        <p:txBody>
+          <a:bodyPr/>
+          <a:lstStyle/>
+          <a:p>
+            <a:pPr lvl="0" indent="0" marL="0">
+              <a:buNone/>
+            </a:pPr>
+            <a:r>
+              <a:rPr/>
+              <a:t>Isso prova que a restrição de RAM não foi um problema teórico — o laboratório inteiro (Nephio + O-Cloud + 3 CNFs + Porch + Gitea + Cluster API) coube com folga real, medida.</a:t>
+            </a:r>
+          </a:p>
+        </p:txBody>
+      </p:sp>
+      <p:sp>
+        <p:nvSpPr>
+          <p:cNvPr id="4" name="Slide Number Placeholder 3"/>
+          <p:cNvSpPr>
+            <a:spLocks noGrp="1"/>
+          </p:cNvSpPr>
+          <p:nvPr>
+            <p:ph type="sldNum" sz="quarter" idx="10"/>
+          </p:nvPr>
+        </p:nvSpPr>
+        <p:spPr/>
+        <p:txBody>
+          <a:bodyPr/>
+          <a:lstStyle/>
+          <a:p>
+            <a:fld id="{18BDFEC3-8487-43E8-A154-7C12CBC1FFF2}" type="slidenum">
+              <a:rPr lang="en-US"/>
+              <a:t>19</a:t>
             </a:fld>
             <a:endParaRPr lang="en-US"/>
           </a:p>
@@ -1112,7 +1454,7 @@
             </a:pPr>
             <a:r>
               <a:rPr/>
-              <a:t>Dois clusters, dois papéis. O de baixo — o O-Cloud — foi criado pelo próprio Nephio via O2 IMS. As três peças em destaque — metrics-server, config-bridge e rapp-autoscale — são as melhorias que vou detalhar na segunda metade da apresentação.</a:t>
+              <a:t>Essa distinção dos quatro ciclos de vida é o fio condutor de todo o trabalho. Vou repetir isso várias vezes ao longo da apresentação porque é fácil confundir “o Kubernetes reconciliou o pod” com “a NF se curou” — são coisas completamente diferentes, e misturar as duas é exatamente o tipo de exagero que este trabalho existe para evitar.</a:t>
             </a:r>
           </a:p>
         </p:txBody>
@@ -1135,6 +1477,826 @@
             <a:fld id="{18BDFEC3-8487-43E8-A154-7C12CBC1FFF2}" type="slidenum">
               <a:rPr lang="en-US"/>
               <a:t>2</a:t>
+            </a:fld>
+            <a:endParaRPr lang="en-US"/>
+          </a:p>
+        </p:txBody>
+      </p:sp>
+    </p:spTree>
+  </p:cSld>
+</p:notes>
+</file>
+
+<file path=ppt/notesSlides/notesSlide20.xml><?xml version="1.0" encoding="utf-8"?>
+<p:notes xmlns:a="http://schemas.openxmlformats.org/drawingml/2006/main" xmlns:r="http://schemas.openxmlformats.org/officeDocument/2006/relationships" xmlns:p="http://schemas.openxmlformats.org/presentationml/2006/main">
+  <p:cSld>
+    <p:spTree>
+      <p:nvGrpSpPr>
+        <p:cNvPr id="1" name=""/>
+        <p:cNvGrpSpPr/>
+        <p:nvPr/>
+      </p:nvGrpSpPr>
+      <p:grpSpPr>
+        <a:xfrm>
+          <a:off x="0" y="0"/>
+          <a:ext cx="0" cy="0"/>
+          <a:chOff x="0" y="0"/>
+          <a:chExt cx="0" cy="0"/>
+        </a:xfrm>
+      </p:grpSpPr>
+      <p:sp>
+        <p:nvSpPr>
+          <p:cNvPr id="2" name="Slide Image Placeholder 1"/>
+          <p:cNvSpPr>
+            <a:spLocks noGrp="1" noRot="1" noChangeAspect="1"/>
+          </p:cNvSpPr>
+          <p:nvPr>
+            <p:ph type="sldImg"/>
+          </p:nvPr>
+        </p:nvSpPr>
+        <p:spPr/>
+      </p:sp>
+      <p:sp>
+        <p:nvSpPr>
+          <p:cNvPr id="3" name="Notes Placeholder 2"/>
+          <p:cNvSpPr>
+            <a:spLocks noGrp="1"/>
+          </p:cNvSpPr>
+          <p:nvPr>
+            <p:ph type="body" idx="1"/>
+          </p:nvPr>
+        </p:nvSpPr>
+        <p:spPr/>
+        <p:txBody>
+          <a:bodyPr/>
+          <a:lstStyle/>
+          <a:p>
+            <a:pPr lvl="0" indent="0" marL="0">
+              <a:buNone/>
+            </a:pPr>
+            <a:r>
+              <a:rPr/>
+              <a:t>Essas quatro primeiras lacunas eram decisões de escopo, não impossibilidades técnicas — e são exatamente as que ataquei nas melhorias pós-entrega, a seguir.</a:t>
+            </a:r>
+          </a:p>
+        </p:txBody>
+      </p:sp>
+      <p:sp>
+        <p:nvSpPr>
+          <p:cNvPr id="4" name="Slide Number Placeholder 3"/>
+          <p:cNvSpPr>
+            <a:spLocks noGrp="1"/>
+          </p:cNvSpPr>
+          <p:nvPr>
+            <p:ph type="sldNum" sz="quarter" idx="10"/>
+          </p:nvPr>
+        </p:nvSpPr>
+        <p:spPr/>
+        <p:txBody>
+          <a:bodyPr/>
+          <a:lstStyle/>
+          <a:p>
+            <a:fld id="{18BDFEC3-8487-43E8-A154-7C12CBC1FFF2}" type="slidenum">
+              <a:rPr lang="en-US"/>
+              <a:t>20</a:t>
+            </a:fld>
+            <a:endParaRPr lang="en-US"/>
+          </a:p>
+        </p:txBody>
+      </p:sp>
+    </p:spTree>
+  </p:cSld>
+</p:notes>
+</file>
+
+<file path=ppt/notesSlides/notesSlide21.xml><?xml version="1.0" encoding="utf-8"?>
+<p:notes xmlns:a="http://schemas.openxmlformats.org/drawingml/2006/main" xmlns:r="http://schemas.openxmlformats.org/officeDocument/2006/relationships" xmlns:p="http://schemas.openxmlformats.org/presentationml/2006/main">
+  <p:cSld>
+    <p:spTree>
+      <p:nvGrpSpPr>
+        <p:cNvPr id="1" name=""/>
+        <p:cNvGrpSpPr/>
+        <p:nvPr/>
+      </p:nvGrpSpPr>
+      <p:grpSpPr>
+        <a:xfrm>
+          <a:off x="0" y="0"/>
+          <a:ext cx="0" cy="0"/>
+          <a:chOff x="0" y="0"/>
+          <a:chExt cx="0" cy="0"/>
+        </a:xfrm>
+      </p:grpSpPr>
+      <p:sp>
+        <p:nvSpPr>
+          <p:cNvPr id="2" name="Slide Image Placeholder 1"/>
+          <p:cNvSpPr>
+            <a:spLocks noGrp="1" noRot="1" noChangeAspect="1"/>
+          </p:cNvSpPr>
+          <p:nvPr>
+            <p:ph type="sldImg"/>
+          </p:nvPr>
+        </p:nvSpPr>
+        <p:spPr/>
+      </p:sp>
+      <p:sp>
+        <p:nvSpPr>
+          <p:cNvPr id="3" name="Notes Placeholder 2"/>
+          <p:cNvSpPr>
+            <a:spLocks noGrp="1"/>
+          </p:cNvSpPr>
+          <p:nvPr>
+            <p:ph type="body" idx="1"/>
+          </p:nvPr>
+        </p:nvSpPr>
+        <p:spPr/>
+        <p:txBody>
+          <a:bodyPr/>
+          <a:lstStyle/>
+          <a:p>
+            <a:pPr lvl="0" indent="0" marL="0">
+              <a:buNone/>
+            </a:pPr>
+            <a:r>
+              <a:rPr/>
+              <a:t>Essa conversa aconteceu de verdade e mudou o rumo do trabalho — em vez de parar na entrega original, usei a folga de RAM que sobrou (quase 6 GiB) pra fechar lacunas reais.</a:t>
+            </a:r>
+          </a:p>
+        </p:txBody>
+      </p:sp>
+      <p:sp>
+        <p:nvSpPr>
+          <p:cNvPr id="4" name="Slide Number Placeholder 3"/>
+          <p:cNvSpPr>
+            <a:spLocks noGrp="1"/>
+          </p:cNvSpPr>
+          <p:nvPr>
+            <p:ph type="sldNum" sz="quarter" idx="10"/>
+          </p:nvPr>
+        </p:nvSpPr>
+        <p:spPr/>
+        <p:txBody>
+          <a:bodyPr/>
+          <a:lstStyle/>
+          <a:p>
+            <a:fld id="{18BDFEC3-8487-43E8-A154-7C12CBC1FFF2}" type="slidenum">
+              <a:rPr lang="en-US"/>
+              <a:t>21</a:t>
+            </a:fld>
+            <a:endParaRPr lang="en-US"/>
+          </a:p>
+        </p:txBody>
+      </p:sp>
+    </p:spTree>
+  </p:cSld>
+</p:notes>
+</file>
+
+<file path=ppt/notesSlides/notesSlide22.xml><?xml version="1.0" encoding="utf-8"?>
+<p:notes xmlns:a="http://schemas.openxmlformats.org/drawingml/2006/main" xmlns:r="http://schemas.openxmlformats.org/officeDocument/2006/relationships" xmlns:p="http://schemas.openxmlformats.org/presentationml/2006/main">
+  <p:cSld>
+    <p:spTree>
+      <p:nvGrpSpPr>
+        <p:cNvPr id="1" name=""/>
+        <p:cNvGrpSpPr/>
+        <p:nvPr/>
+      </p:nvGrpSpPr>
+      <p:grpSpPr>
+        <a:xfrm>
+          <a:off x="0" y="0"/>
+          <a:ext cx="0" cy="0"/>
+          <a:chOff x="0" y="0"/>
+          <a:chExt cx="0" cy="0"/>
+        </a:xfrm>
+      </p:grpSpPr>
+      <p:sp>
+        <p:nvSpPr>
+          <p:cNvPr id="2" name="Slide Image Placeholder 1"/>
+          <p:cNvSpPr>
+            <a:spLocks noGrp="1" noRot="1" noChangeAspect="1"/>
+          </p:cNvSpPr>
+          <p:nvPr>
+            <p:ph type="sldImg"/>
+          </p:nvPr>
+        </p:nvSpPr>
+        <p:spPr/>
+      </p:sp>
+      <p:sp>
+        <p:nvSpPr>
+          <p:cNvPr id="3" name="Notes Placeholder 2"/>
+          <p:cNvSpPr>
+            <a:spLocks noGrp="1"/>
+          </p:cNvSpPr>
+          <p:nvPr>
+            <p:ph type="body" idx="1"/>
+          </p:nvPr>
+        </p:nvSpPr>
+        <p:spPr/>
+        <p:txBody>
+          <a:bodyPr/>
+          <a:lstStyle/>
+          <a:p>
+            <a:pPr lvl="0" indent="0" marL="0">
+              <a:buNone/>
+            </a:pPr>
+            <a:r>
+              <a:rPr/>
+              <a:t>Antes só tínhamos docker stats do host. Agora tenho kubectl top de verdade — métrica real por nó e por pod, sem pagar o custo de um Prometheus completo.</a:t>
+            </a:r>
+          </a:p>
+        </p:txBody>
+      </p:sp>
+      <p:sp>
+        <p:nvSpPr>
+          <p:cNvPr id="4" name="Slide Number Placeholder 3"/>
+          <p:cNvSpPr>
+            <a:spLocks noGrp="1"/>
+          </p:cNvSpPr>
+          <p:nvPr>
+            <p:ph type="sldNum" sz="quarter" idx="10"/>
+          </p:nvPr>
+        </p:nvSpPr>
+        <p:spPr/>
+        <p:txBody>
+          <a:bodyPr/>
+          <a:lstStyle/>
+          <a:p>
+            <a:fld id="{18BDFEC3-8487-43E8-A154-7C12CBC1FFF2}" type="slidenum">
+              <a:rPr lang="en-US"/>
+              <a:t>22</a:t>
+            </a:fld>
+            <a:endParaRPr lang="en-US"/>
+          </a:p>
+        </p:txBody>
+      </p:sp>
+    </p:spTree>
+  </p:cSld>
+</p:notes>
+</file>
+
+<file path=ppt/notesSlides/notesSlide23.xml><?xml version="1.0" encoding="utf-8"?>
+<p:notes xmlns:a="http://schemas.openxmlformats.org/drawingml/2006/main" xmlns:r="http://schemas.openxmlformats.org/officeDocument/2006/relationships" xmlns:p="http://schemas.openxmlformats.org/presentationml/2006/main">
+  <p:cSld>
+    <p:spTree>
+      <p:nvGrpSpPr>
+        <p:cNvPr id="1" name=""/>
+        <p:cNvGrpSpPr/>
+        <p:nvPr/>
+      </p:nvGrpSpPr>
+      <p:grpSpPr>
+        <a:xfrm>
+          <a:off x="0" y="0"/>
+          <a:ext cx="0" cy="0"/>
+          <a:chOff x="0" y="0"/>
+          <a:chExt cx="0" cy="0"/>
+        </a:xfrm>
+      </p:grpSpPr>
+      <p:sp>
+        <p:nvSpPr>
+          <p:cNvPr id="2" name="Slide Image Placeholder 1"/>
+          <p:cNvSpPr>
+            <a:spLocks noGrp="1" noRot="1" noChangeAspect="1"/>
+          </p:cNvSpPr>
+          <p:nvPr>
+            <p:ph type="sldImg"/>
+          </p:nvPr>
+        </p:nvSpPr>
+        <p:spPr/>
+      </p:sp>
+      <p:sp>
+        <p:nvSpPr>
+          <p:cNvPr id="3" name="Notes Placeholder 2"/>
+          <p:cNvSpPr>
+            <a:spLocks noGrp="1"/>
+          </p:cNvSpPr>
+          <p:nvPr>
+            <p:ph type="body" idx="1"/>
+          </p:nvPr>
+        </p:nvSpPr>
+        <p:spPr/>
+        <p:txBody>
+          <a:bodyPr/>
+          <a:lstStyle/>
+          <a:p>
+            <a:pPr lvl="0" indent="0" marL="0">
+              <a:buNone/>
+            </a:pPr>
+            <a:r>
+              <a:rPr/>
+              <a:t>Essa é a diferença entre “o RootSync está instalado” e “o RootSync funciona de verdade” — só provei a segunda, publicando uma mudança e cronometrando quanto tempo até ela aparecer sozinha no cluster, sem eu chamar kpt live apply manualmente.</a:t>
+            </a:r>
+          </a:p>
+        </p:txBody>
+      </p:sp>
+      <p:sp>
+        <p:nvSpPr>
+          <p:cNvPr id="4" name="Slide Number Placeholder 3"/>
+          <p:cNvSpPr>
+            <a:spLocks noGrp="1"/>
+          </p:cNvSpPr>
+          <p:nvPr>
+            <p:ph type="sldNum" sz="quarter" idx="10"/>
+          </p:nvPr>
+        </p:nvSpPr>
+        <p:spPr/>
+        <p:txBody>
+          <a:bodyPr/>
+          <a:lstStyle/>
+          <a:p>
+            <a:fld id="{18BDFEC3-8487-43E8-A154-7C12CBC1FFF2}" type="slidenum">
+              <a:rPr lang="en-US"/>
+              <a:t>23</a:t>
+            </a:fld>
+            <a:endParaRPr lang="en-US"/>
+          </a:p>
+        </p:txBody>
+      </p:sp>
+    </p:spTree>
+  </p:cSld>
+</p:notes>
+</file>
+
+<file path=ppt/notesSlides/notesSlide24.xml><?xml version="1.0" encoding="utf-8"?>
+<p:notes xmlns:a="http://schemas.openxmlformats.org/drawingml/2006/main" xmlns:r="http://schemas.openxmlformats.org/officeDocument/2006/relationships" xmlns:p="http://schemas.openxmlformats.org/presentationml/2006/main">
+  <p:cSld>
+    <p:spTree>
+      <p:nvGrpSpPr>
+        <p:cNvPr id="1" name=""/>
+        <p:cNvGrpSpPr/>
+        <p:nvPr/>
+      </p:nvGrpSpPr>
+      <p:grpSpPr>
+        <a:xfrm>
+          <a:off x="0" y="0"/>
+          <a:ext cx="0" cy="0"/>
+          <a:chOff x="0" y="0"/>
+          <a:chExt cx="0" cy="0"/>
+        </a:xfrm>
+      </p:grpSpPr>
+      <p:sp>
+        <p:nvSpPr>
+          <p:cNvPr id="2" name="Slide Image Placeholder 1"/>
+          <p:cNvSpPr>
+            <a:spLocks noGrp="1" noRot="1" noChangeAspect="1"/>
+          </p:cNvSpPr>
+          <p:nvPr>
+            <p:ph type="sldImg"/>
+          </p:nvPr>
+        </p:nvSpPr>
+        <p:spPr/>
+      </p:sp>
+      <p:sp>
+        <p:nvSpPr>
+          <p:cNvPr id="3" name="Notes Placeholder 2"/>
+          <p:cNvSpPr>
+            <a:spLocks noGrp="1"/>
+          </p:cNvSpPr>
+          <p:nvPr>
+            <p:ph type="body" idx="1"/>
+          </p:nvPr>
+        </p:nvSpPr>
+        <p:spPr/>
+        <p:txBody>
+          <a:bodyPr/>
+          <a:lstStyle/>
+          <a:p>
+            <a:pPr lvl="0" indent="0" marL="0">
+              <a:buNone/>
+            </a:pPr>
+            <a:r>
+              <a:rPr/>
+              <a:t>Achei e corrigi um bug real nessa: o YAML sem aspas fazia “00101” virar o inteiro 101 na releitura — um padrão octal-like do YAML 1.1 — causando um loop de auto-correção a cada 15s. Corrigi forçando aspas em todo escalar, do mesmo jeito que o Kubernetes já trata ConfigMaps.</a:t>
+            </a:r>
+          </a:p>
+        </p:txBody>
+      </p:sp>
+      <p:sp>
+        <p:nvSpPr>
+          <p:cNvPr id="4" name="Slide Number Placeholder 3"/>
+          <p:cNvSpPr>
+            <a:spLocks noGrp="1"/>
+          </p:cNvSpPr>
+          <p:nvPr>
+            <p:ph type="sldNum" sz="quarter" idx="10"/>
+          </p:nvPr>
+        </p:nvSpPr>
+        <p:spPr/>
+        <p:txBody>
+          <a:bodyPr/>
+          <a:lstStyle/>
+          <a:p>
+            <a:fld id="{18BDFEC3-8487-43E8-A154-7C12CBC1FFF2}" type="slidenum">
+              <a:rPr lang="en-US"/>
+              <a:t>24</a:t>
+            </a:fld>
+            <a:endParaRPr lang="en-US"/>
+          </a:p>
+        </p:txBody>
+      </p:sp>
+    </p:spTree>
+  </p:cSld>
+</p:notes>
+</file>
+
+<file path=ppt/notesSlides/notesSlide25.xml><?xml version="1.0" encoding="utf-8"?>
+<p:notes xmlns:a="http://schemas.openxmlformats.org/drawingml/2006/main" xmlns:r="http://schemas.openxmlformats.org/officeDocument/2006/relationships" xmlns:p="http://schemas.openxmlformats.org/presentationml/2006/main">
+  <p:cSld>
+    <p:spTree>
+      <p:nvGrpSpPr>
+        <p:cNvPr id="1" name=""/>
+        <p:cNvGrpSpPr/>
+        <p:nvPr/>
+      </p:nvGrpSpPr>
+      <p:grpSpPr>
+        <a:xfrm>
+          <a:off x="0" y="0"/>
+          <a:ext cx="0" cy="0"/>
+          <a:chOff x="0" y="0"/>
+          <a:chExt cx="0" cy="0"/>
+        </a:xfrm>
+      </p:grpSpPr>
+      <p:sp>
+        <p:nvSpPr>
+          <p:cNvPr id="2" name="Slide Image Placeholder 1"/>
+          <p:cNvSpPr>
+            <a:spLocks noGrp="1" noRot="1" noChangeAspect="1"/>
+          </p:cNvSpPr>
+          <p:nvPr>
+            <p:ph type="sldImg"/>
+          </p:nvPr>
+        </p:nvSpPr>
+        <p:spPr/>
+      </p:sp>
+      <p:sp>
+        <p:nvSpPr>
+          <p:cNvPr id="3" name="Notes Placeholder 2"/>
+          <p:cNvSpPr>
+            <a:spLocks noGrp="1"/>
+          </p:cNvSpPr>
+          <p:nvPr>
+            <p:ph type="body" idx="1"/>
+          </p:nvPr>
+        </p:nvSpPr>
+        <p:spPr/>
+        <p:txBody>
+          <a:bodyPr/>
+          <a:lstStyle/>
+          <a:p>
+            <a:pPr lvl="0" indent="0" marL="0">
+              <a:buNone/>
+            </a:pPr>
+            <a:r>
+              <a:rPr/>
+              <a:t>300 requisições de carga em 5,99s elevaram a taxa a 10,27 req/s — o rApp detectou isso no próximo ciclo de 30s e aplicou o scale-up sozinho, exatamente como um controller de capacidade não-tempo-real faria.</a:t>
+            </a:r>
+          </a:p>
+        </p:txBody>
+      </p:sp>
+      <p:sp>
+        <p:nvSpPr>
+          <p:cNvPr id="4" name="Slide Number Placeholder 3"/>
+          <p:cNvSpPr>
+            <a:spLocks noGrp="1"/>
+          </p:cNvSpPr>
+          <p:nvPr>
+            <p:ph type="sldNum" sz="quarter" idx="10"/>
+          </p:nvPr>
+        </p:nvSpPr>
+        <p:spPr/>
+        <p:txBody>
+          <a:bodyPr/>
+          <a:lstStyle/>
+          <a:p>
+            <a:fld id="{18BDFEC3-8487-43E8-A154-7C12CBC1FFF2}" type="slidenum">
+              <a:rPr lang="en-US"/>
+              <a:t>25</a:t>
+            </a:fld>
+            <a:endParaRPr lang="en-US"/>
+          </a:p>
+        </p:txBody>
+      </p:sp>
+    </p:spTree>
+  </p:cSld>
+</p:notes>
+</file>
+
+<file path=ppt/notesSlides/notesSlide26.xml><?xml version="1.0" encoding="utf-8"?>
+<p:notes xmlns:a="http://schemas.openxmlformats.org/drawingml/2006/main" xmlns:r="http://schemas.openxmlformats.org/officeDocument/2006/relationships" xmlns:p="http://schemas.openxmlformats.org/presentationml/2006/main">
+  <p:cSld>
+    <p:spTree>
+      <p:nvGrpSpPr>
+        <p:cNvPr id="1" name=""/>
+        <p:cNvGrpSpPr/>
+        <p:nvPr/>
+      </p:nvGrpSpPr>
+      <p:grpSpPr>
+        <a:xfrm>
+          <a:off x="0" y="0"/>
+          <a:ext cx="0" cy="0"/>
+          <a:chOff x="0" y="0"/>
+          <a:chExt cx="0" cy="0"/>
+        </a:xfrm>
+      </p:grpSpPr>
+      <p:sp>
+        <p:nvSpPr>
+          <p:cNvPr id="2" name="Slide Image Placeholder 1"/>
+          <p:cNvSpPr>
+            <a:spLocks noGrp="1" noRot="1" noChangeAspect="1"/>
+          </p:cNvSpPr>
+          <p:nvPr>
+            <p:ph type="sldImg"/>
+          </p:nvPr>
+        </p:nvSpPr>
+        <p:spPr/>
+      </p:sp>
+      <p:sp>
+        <p:nvSpPr>
+          <p:cNvPr id="3" name="Notes Placeholder 2"/>
+          <p:cNvSpPr>
+            <a:spLocks noGrp="1"/>
+          </p:cNvSpPr>
+          <p:nvPr>
+            <p:ph type="body" idx="1"/>
+          </p:nvPr>
+        </p:nvSpPr>
+        <p:spPr/>
+        <p:txBody>
+          <a:bodyPr/>
+          <a:lstStyle/>
+          <a:p>
+            <a:pPr lvl="0" indent="0" marL="0">
+              <a:buNone/>
+            </a:pPr>
+            <a:r>
+              <a:rPr/>
+              <a:t>Esse foi o achado mais valioso de toda a Parte 2, na minha opinião — não é um bug de código, é um comportamento real e documentado de sistemas distribuídos: quando duas fontes de verdade tentam controlar o mesmo recurso, uma vai vencer, e é preciso decidir explicitamente qual.</a:t>
+            </a:r>
+          </a:p>
+        </p:txBody>
+      </p:sp>
+      <p:sp>
+        <p:nvSpPr>
+          <p:cNvPr id="4" name="Slide Number Placeholder 3"/>
+          <p:cNvSpPr>
+            <a:spLocks noGrp="1"/>
+          </p:cNvSpPr>
+          <p:nvPr>
+            <p:ph type="sldNum" sz="quarter" idx="10"/>
+          </p:nvPr>
+        </p:nvSpPr>
+        <p:spPr/>
+        <p:txBody>
+          <a:bodyPr/>
+          <a:lstStyle/>
+          <a:p>
+            <a:fld id="{18BDFEC3-8487-43E8-A154-7C12CBC1FFF2}" type="slidenum">
+              <a:rPr lang="en-US"/>
+              <a:t>26</a:t>
+            </a:fld>
+            <a:endParaRPr lang="en-US"/>
+          </a:p>
+        </p:txBody>
+      </p:sp>
+    </p:spTree>
+  </p:cSld>
+</p:notes>
+</file>
+
+<file path=ppt/notesSlides/notesSlide27.xml><?xml version="1.0" encoding="utf-8"?>
+<p:notes xmlns:a="http://schemas.openxmlformats.org/drawingml/2006/main" xmlns:r="http://schemas.openxmlformats.org/officeDocument/2006/relationships" xmlns:p="http://schemas.openxmlformats.org/presentationml/2006/main">
+  <p:cSld>
+    <p:spTree>
+      <p:nvGrpSpPr>
+        <p:cNvPr id="1" name=""/>
+        <p:cNvGrpSpPr/>
+        <p:nvPr/>
+      </p:nvGrpSpPr>
+      <p:grpSpPr>
+        <a:xfrm>
+          <a:off x="0" y="0"/>
+          <a:ext cx="0" cy="0"/>
+          <a:chOff x="0" y="0"/>
+          <a:chExt cx="0" cy="0"/>
+        </a:xfrm>
+      </p:grpSpPr>
+      <p:sp>
+        <p:nvSpPr>
+          <p:cNvPr id="2" name="Slide Image Placeholder 1"/>
+          <p:cNvSpPr>
+            <a:spLocks noGrp="1" noRot="1" noChangeAspect="1"/>
+          </p:cNvSpPr>
+          <p:nvPr>
+            <p:ph type="sldImg"/>
+          </p:nvPr>
+        </p:nvSpPr>
+        <p:spPr/>
+      </p:sp>
+      <p:sp>
+        <p:nvSpPr>
+          <p:cNvPr id="3" name="Notes Placeholder 2"/>
+          <p:cNvSpPr>
+            <a:spLocks noGrp="1"/>
+          </p:cNvSpPr>
+          <p:nvPr>
+            <p:ph type="body" idx="1"/>
+          </p:nvPr>
+        </p:nvSpPr>
+        <p:spPr/>
+        <p:txBody>
+          <a:bodyPr/>
+          <a:lstStyle/>
+          <a:p>
+            <a:pPr lvl="0" indent="0" marL="0">
+              <a:buNone/>
+            </a:pPr>
+            <a:r>
+              <a:rPr/>
+              <a:t>Prefiro terminar mostrando exatamente onde parei, sem fingir que terminei algo que não terminei — isso é mais valioso academicamente do que uma apresentação sem nenhuma pendência.</a:t>
+            </a:r>
+          </a:p>
+        </p:txBody>
+      </p:sp>
+      <p:sp>
+        <p:nvSpPr>
+          <p:cNvPr id="4" name="Slide Number Placeholder 3"/>
+          <p:cNvSpPr>
+            <a:spLocks noGrp="1"/>
+          </p:cNvSpPr>
+          <p:nvPr>
+            <p:ph type="sldNum" sz="quarter" idx="10"/>
+          </p:nvPr>
+        </p:nvSpPr>
+        <p:spPr/>
+        <p:txBody>
+          <a:bodyPr/>
+          <a:lstStyle/>
+          <a:p>
+            <a:fld id="{18BDFEC3-8487-43E8-A154-7C12CBC1FFF2}" type="slidenum">
+              <a:rPr lang="en-US"/>
+              <a:t>27</a:t>
+            </a:fld>
+            <a:endParaRPr lang="en-US"/>
+          </a:p>
+        </p:txBody>
+      </p:sp>
+    </p:spTree>
+  </p:cSld>
+</p:notes>
+</file>
+
+<file path=ppt/notesSlides/notesSlide28.xml><?xml version="1.0" encoding="utf-8"?>
+<p:notes xmlns:a="http://schemas.openxmlformats.org/drawingml/2006/main" xmlns:r="http://schemas.openxmlformats.org/officeDocument/2006/relationships" xmlns:p="http://schemas.openxmlformats.org/presentationml/2006/main">
+  <p:cSld>
+    <p:spTree>
+      <p:nvGrpSpPr>
+        <p:cNvPr id="1" name=""/>
+        <p:cNvGrpSpPr/>
+        <p:nvPr/>
+      </p:nvGrpSpPr>
+      <p:grpSpPr>
+        <a:xfrm>
+          <a:off x="0" y="0"/>
+          <a:ext cx="0" cy="0"/>
+          <a:chOff x="0" y="0"/>
+          <a:chExt cx="0" cy="0"/>
+        </a:xfrm>
+      </p:grpSpPr>
+      <p:sp>
+        <p:nvSpPr>
+          <p:cNvPr id="2" name="Slide Image Placeholder 1"/>
+          <p:cNvSpPr>
+            <a:spLocks noGrp="1" noRot="1" noChangeAspect="1"/>
+          </p:cNvSpPr>
+          <p:nvPr>
+            <p:ph type="sldImg"/>
+          </p:nvPr>
+        </p:nvSpPr>
+        <p:spPr/>
+      </p:sp>
+      <p:sp>
+        <p:nvSpPr>
+          <p:cNvPr id="3" name="Notes Placeholder 2"/>
+          <p:cNvSpPr>
+            <a:spLocks noGrp="1"/>
+          </p:cNvSpPr>
+          <p:nvPr>
+            <p:ph type="body" idx="1"/>
+          </p:nvPr>
+        </p:nvSpPr>
+        <p:spPr/>
+        <p:txBody>
+          <a:bodyPr/>
+          <a:lstStyle/>
+          <a:p>
+            <a:pPr lvl="0" indent="0" marL="0">
+              <a:buNone/>
+            </a:pPr>
+            <a:r>
+              <a:rPr/>
+              <a:t>Esse slide é o resumo que eu daria se só tivesse 30 segundos: o que funciona de verdade, o que não funciona e por quê, e quantas vezes as coisas quebraram e foram consertadas de verdade no caminho.</a:t>
+            </a:r>
+          </a:p>
+        </p:txBody>
+      </p:sp>
+      <p:sp>
+        <p:nvSpPr>
+          <p:cNvPr id="4" name="Slide Number Placeholder 3"/>
+          <p:cNvSpPr>
+            <a:spLocks noGrp="1"/>
+          </p:cNvSpPr>
+          <p:nvPr>
+            <p:ph type="sldNum" sz="quarter" idx="10"/>
+          </p:nvPr>
+        </p:nvSpPr>
+        <p:spPr/>
+        <p:txBody>
+          <a:bodyPr/>
+          <a:lstStyle/>
+          <a:p>
+            <a:fld id="{18BDFEC3-8487-43E8-A154-7C12CBC1FFF2}" type="slidenum">
+              <a:rPr lang="en-US"/>
+              <a:t>28</a:t>
+            </a:fld>
+            <a:endParaRPr lang="en-US"/>
+          </a:p>
+        </p:txBody>
+      </p:sp>
+    </p:spTree>
+  </p:cSld>
+</p:notes>
+</file>
+
+<file path=ppt/notesSlides/notesSlide29.xml><?xml version="1.0" encoding="utf-8"?>
+<p:notes xmlns:a="http://schemas.openxmlformats.org/drawingml/2006/main" xmlns:r="http://schemas.openxmlformats.org/officeDocument/2006/relationships" xmlns:p="http://schemas.openxmlformats.org/presentationml/2006/main">
+  <p:cSld>
+    <p:spTree>
+      <p:nvGrpSpPr>
+        <p:cNvPr id="1" name=""/>
+        <p:cNvGrpSpPr/>
+        <p:nvPr/>
+      </p:nvGrpSpPr>
+      <p:grpSpPr>
+        <a:xfrm>
+          <a:off x="0" y="0"/>
+          <a:ext cx="0" cy="0"/>
+          <a:chOff x="0" y="0"/>
+          <a:chExt cx="0" cy="0"/>
+        </a:xfrm>
+      </p:grpSpPr>
+      <p:sp>
+        <p:nvSpPr>
+          <p:cNvPr id="2" name="Slide Image Placeholder 1"/>
+          <p:cNvSpPr>
+            <a:spLocks noGrp="1" noRot="1" noChangeAspect="1"/>
+          </p:cNvSpPr>
+          <p:nvPr>
+            <p:ph type="sldImg"/>
+          </p:nvPr>
+        </p:nvSpPr>
+        <p:spPr/>
+      </p:sp>
+      <p:sp>
+        <p:nvSpPr>
+          <p:cNvPr id="3" name="Notes Placeholder 2"/>
+          <p:cNvSpPr>
+            <a:spLocks noGrp="1"/>
+          </p:cNvSpPr>
+          <p:nvPr>
+            <p:ph type="body" idx="1"/>
+          </p:nvPr>
+        </p:nvSpPr>
+        <p:spPr/>
+        <p:txBody>
+          <a:bodyPr/>
+          <a:lstStyle/>
+          <a:p>
+            <a:pPr lvl="0" indent="0" marL="0">
+              <a:buNone/>
+            </a:pPr>
+            <a:r>
+              <a:rPr/>
+              <a:t>Entre teoria (Parte 1) e prática (Parte 2), a mesma conclusão se sustenta: o Nephio é uma plataforma de automação cloud-native real, que implementa um subconjunto bem definido — e demonstrado, com evidência, inclusive nas melhorias — das funções associadas ao SMO. Obrigado.</a:t>
+            </a:r>
+          </a:p>
+        </p:txBody>
+      </p:sp>
+      <p:sp>
+        <p:nvSpPr>
+          <p:cNvPr id="4" name="Slide Number Placeholder 3"/>
+          <p:cNvSpPr>
+            <a:spLocks noGrp="1"/>
+          </p:cNvSpPr>
+          <p:nvPr>
+            <p:ph type="sldNum" sz="quarter" idx="10"/>
+          </p:nvPr>
+        </p:nvSpPr>
+        <p:spPr/>
+        <p:txBody>
+          <a:bodyPr/>
+          <a:lstStyle/>
+          <a:p>
+            <a:fld id="{18BDFEC3-8487-43E8-A154-7C12CBC1FFF2}" type="slidenum">
+              <a:rPr lang="en-US"/>
+              <a:t>29</a:t>
             </a:fld>
             <a:endParaRPr lang="en-US"/>
           </a:p>
@@ -1194,7 +2356,7 @@
             </a:pPr>
             <a:r>
               <a:rPr/>
-              <a:t>Nada disso rodou em nuvem. É o notebook, com WSL2, dentro de um orçamento de RAM apertado — volto a esse orçamento no fim, porque as 4 melhorias novas também tiveram que caber nele.</a:t>
+              <a:t>Repito essa frase porque é a âncora de tudo. Cada experimento que vou mostrar valida ou contesta uma linha específica dessa tabela função-por-função da Parte 1 — não escolhi os experimentos ao acaso.</a:t>
             </a:r>
           </a:p>
         </p:txBody>
@@ -1276,7 +2438,7 @@
             </a:pPr>
             <a:r>
               <a:rPr/>
-              <a:t>Deixo bem claro: isso é um simulador leve para exercitar mecanismos, não uma pilha 5G real. Já avaliei o caminho para NFs reais e documentei por que não coube aqui.</a:t>
+              <a:t>Cada uma dessas escolhas foi uma decisão de orçamento de RAM. O instalador oficial do Nephio sozinho já estouraria os 16 GB se eu tivesse usado a distribuição completa — por isso instalei pacote a pacote, só o mínimo necessário para provar o mecanismo.</a:t>
             </a:r>
           </a:p>
         </p:txBody>
@@ -1358,7 +2520,7 @@
             </a:pPr>
             <a:r>
               <a:rPr/>
-              <a:t>Esse não é um kubectl apply. É um pacote publicado, versionado, com histórico — o mesmo mecanismo que o Nephio usa para qualquer coisa em produção.</a:t>
+              <a:t>Esse diagrama é conceitual — o real, com todos os componentes desta Parte 2, vem no próximo slide. Mas a ideia central já está aqui: dois clusters, papéis bem separados.</a:t>
             </a:r>
           </a:p>
         </p:txBody>
@@ -1440,7 +2602,7 @@
             </a:pPr>
             <a:r>
               <a:rPr/>
-              <a:t>Duas camadas de configuração, de propósito diferente — mostro as duas ao longo da apresentação sem misturar uma com a outra.</a:t>
+              <a:t>As três peças em destaque — metrics-server, config-bridge e rapp-autoscale — não faziam parte da entrega original. Vou chegar nelas, mas primeiro mostro tudo que foi entregue no prazo original, com os 6 experimentos formais.</a:t>
             </a:r>
           </a:p>
         </p:txBody>
@@ -1522,7 +2684,7 @@
             </a:pPr>
             <a:r>
               <a:rPr/>
-              <a:t>Esse foi um dos experimentos mais instrutivos: bati de frente com um comportamento real do Kubernetes, descobri a causa e corrigi.</a:t>
+              <a:t>Nenhuma dessas ferramentas é exclusiva de telecom — é exatamente esse o ponto da Parte 1: o núcleo do Nephio é agnóstico, e se conecta ao mundo O-RAN só através de operadores específicos.</a:t>
             </a:r>
           </a:p>
         </p:txBody>
@@ -1604,7 +2766,7 @@
             </a:pPr>
             <a:r>
               <a:rPr/>
-              <a:t>Da instanciação até a remoção — cada etapa, medida e registrada, não só narrada. E já adianto aqui as três melhorias que vou detalhar a seguir, no mesmo gráfico.</a:t>
+              <a:t>Sou direto aqui: se alguém perguntar “isso é um O-CU de verdade?”, a resposta é não. É um serviço HTTP com o nome de um O-CU, para eu poder demonstrar scale/update/recover/terminate sobre algo que se parece com uma NF, sem pagar o custo de RAM de uma pilha 5G real.</a:t>
             </a:r>
           </a:p>
         </p:txBody>
@@ -1686,7 +2848,7 @@
             </a:pPr>
             <a:r>
               <a:rPr/>
-              <a:t>Prefiro mostrar os bugs reais que encontrei a esconder que existiram. E são exatamente essas três limitações que ataquei nas melhorias pós-entrega, a seguir.</a:t>
+              <a:t>Isso não foi preguiça — foi uma decisão de engenharia documentada com números reais de requisito de RAM de cada alternativa. Se tivesse uma segunda máquina dedicada, o caminho sugerido seria validar primeiro o onboarding do pacote do free5GC com réplicas em zero.</a:t>
             </a:r>
           </a:p>
         </p:txBody>
@@ -4775,12 +5937,16 @@
               </a:rPr>
               <a:t>oran-core</a:t>
             </a:r>
-          </a:p>
-          <a:p>
-            <a:pPr lvl="0"/>
-            <a:r>
-              <a:rPr/>
-              <a:t>Autor: Diego Abreu — atualizado em 2026-09-25 com 4 melhorias pós-entrega</a:t>
+            <a:r>
+              <a:rPr/>
+              <a:t>, sobre um O-Cloud provisionado pelo próprio Nephio (Parte 1)</a:t>
+            </a:r>
+          </a:p>
+          <a:p>
+            <a:pPr lvl="0"/>
+            <a:r>
+              <a:rPr/>
+              <a:t>Autor: Diego Abreu — versão detalhada, atualizada em 2026-09-25 com 4 melhorias pós-entrega</a:t>
             </a:r>
           </a:p>
         </p:txBody>
@@ -4817,6 +5983,204 @@
             <p:ph type="title"/>
           </p:nvPr>
         </p:nvSpPr>
+        <p:spPr/>
+        <p:txBody>
+          <a:bodyPr/>
+          <a:lstStyle/>
+          <a:p>
+            <a:pPr lvl="0" indent="0" marL="0">
+              <a:buNone/>
+            </a:pPr>
+            <a:r>
+              <a:rPr/>
+              <a:t>Fluxo de provisionamento das NFs — conceito</a:t>
+            </a:r>
+          </a:p>
+        </p:txBody>
+      </p:sp>
+      <p:pic>
+        <p:nvPicPr>
+          <p:cNvPr descr="assets/provisioning-flow.png" id="0" name="Picture 1"/>
+          <p:cNvPicPr>
+            <a:picLocks noGrp="1" noChangeAspect="1"/>
+          </p:cNvPicPr>
+          <p:nvPr/>
+        </p:nvPicPr>
+        <p:blipFill>
+          <a:blip r:embed="rId3"/>
+          <a:stretch>
+            <a:fillRect/>
+          </a:stretch>
+        </p:blipFill>
+        <p:spPr bwMode="auto">
+          <a:xfrm>
+            <a:off x="4216400" y="1193800"/>
+            <a:ext cx="711200" cy="2882900"/>
+          </a:xfrm>
+          <a:prstGeom prst="rect">
+            <a:avLst/>
+          </a:prstGeom>
+          <a:noFill/>
+          <a:ln w="9525">
+            <a:noFill/>
+            <a:headEnd/>
+            <a:tailEnd/>
+          </a:ln>
+        </p:spPr>
+      </p:pic>
+      <p:sp>
+        <p:nvSpPr>
+          <p:cNvPr id="1" name="TextBox 3"/>
+          <p:cNvSpPr txBox="1"/>
+          <p:nvPr>
+            <p:ph idx="1"/>
+          </p:nvPr>
+        </p:nvSpPr>
+        <p:spPr>
+          <a:xfrm>
+            <a:off x="457200" y="4076700"/>
+            <a:ext cx="8229600" cy="508000"/>
+          </a:xfrm>
+          <a:prstGeom prst="rect">
+            <a:avLst/>
+          </a:prstGeom>
+          <a:noFill/>
+        </p:spPr>
+        <p:txBody>
+          <a:bodyPr/>
+          <a:lstStyle/>
+          <a:p>
+            <a:pPr lvl="0" indent="0" marL="0" algn="ctr">
+              <a:buNone/>
+            </a:pPr>
+            <a:r>
+              <a:rPr/>
+              <a:t>Intent (pacote kpt autoral) → Package (Draft) → Repository (Published) → Reconciliation (kpt live apply) → Kubernetes → CNF</a:t>
+            </a:r>
+          </a:p>
+        </p:txBody>
+      </p:sp>
+      <p:sp>
+        <p:nvSpPr>
+          <p:cNvPr id="3" name="Content Placeholder 2"/>
+          <p:cNvSpPr>
+            <a:spLocks noGrp="1"/>
+          </p:cNvSpPr>
+          <p:nvPr>
+            <p:ph idx="1"/>
+          </p:nvPr>
+        </p:nvSpPr>
+        <p:spPr/>
+        <p:txBody>
+          <a:bodyPr/>
+          <a:lstStyle/>
+          <a:p>
+            <a:pPr lvl="0"/>
+            <a:r>
+              <a:rPr/>
+              <a:t>As NFs chegam ao </a:t>
+            </a:r>
+            <a:r>
+              <a:rPr>
+                <a:latin typeface="Courier"/>
+              </a:rPr>
+              <a:t>o-cloud-1</a:t>
+            </a:r>
+            <a:r>
+              <a:rPr/>
+              <a:t> por um </a:t>
+            </a:r>
+            <a:r>
+              <a:rPr b="1"/>
+              <a:t>pacote kpt publicado no Porch</a:t>
+            </a:r>
+            <a:r>
+              <a:rPr/>
+              <a:t> — não por </a:t>
+            </a:r>
+            <a:r>
+              <a:rPr>
+                <a:latin typeface="Courier"/>
+              </a:rPr>
+              <a:t>kubectl apply</a:t>
+            </a:r>
+            <a:r>
+              <a:rPr/>
+              <a:t> direto</a:t>
+            </a:r>
+          </a:p>
+          <a:p>
+            <a:pPr lvl="0"/>
+            <a:r>
+              <a:rPr/>
+              <a:t>Repositório Porch dedicado: </a:t>
+            </a:r>
+            <a:r>
+              <a:rPr>
+                <a:latin typeface="Courier"/>
+              </a:rPr>
+              <a:t>openran-cnfs</a:t>
+            </a:r>
+          </a:p>
+          <a:p>
+            <a:pPr lvl="0"/>
+            <a:r>
+              <a:rPr/>
+              <a:t>Cada mudança de conteúdo = uma </a:t>
+            </a:r>
+            <a:r>
+              <a:rPr b="1"/>
+              <a:t>nova revisão</a:t>
+            </a:r>
+            <a:r>
+              <a:rPr/>
+              <a:t> do pacote (Porch não permite </a:t>
+            </a:r>
+            <a:r>
+              <a:rPr>
+                <a:latin typeface="Courier"/>
+              </a:rPr>
+              <a:t>push</a:t>
+            </a:r>
+            <a:r>
+              <a:rPr/>
+              <a:t> sobre uma revisão já Published — histórico completo preservado)</a:t>
+            </a:r>
+          </a:p>
+        </p:txBody>
+      </p:sp>
+    </p:spTree>
+  </p:cSld>
+</p:sld>
+</file>
+
+<file path=ppt/slides/slide11.xml><?xml version="1.0" encoding="utf-8"?>
+<p:sld xmlns:a="http://schemas.openxmlformats.org/drawingml/2006/main" xmlns:r="http://schemas.openxmlformats.org/officeDocument/2006/relationships" xmlns:p="http://schemas.openxmlformats.org/presentationml/2006/main">
+  <p:cSld>
+    <p:spTree>
+      <p:nvGrpSpPr>
+        <p:cNvPr id="1" name=""/>
+        <p:cNvGrpSpPr/>
+        <p:nvPr/>
+      </p:nvGrpSpPr>
+      <p:grpSpPr>
+        <a:xfrm>
+          <a:off x="0" y="0"/>
+          <a:ext cx="0" cy="0"/>
+          <a:chOff x="0" y="0"/>
+          <a:chExt cx="0" cy="0"/>
+        </a:xfrm>
+      </p:grpSpPr>
+      <p:sp>
+        <p:nvSpPr>
+          <p:cNvPr id="2" name="Title 1"/>
+          <p:cNvSpPr>
+            <a:spLocks noGrp="1"/>
+          </p:cNvSpPr>
+          <p:nvPr>
+            <p:ph type="title"/>
+          </p:nvPr>
+        </p:nvSpPr>
         <p:spPr>
           <a:xfrm>
             <a:off x="457201" y="204787"/>
@@ -4832,7 +6196,7 @@
             </a:pPr>
             <a:r>
               <a:rPr/>
-              <a:t>Melhoria 1 — metrics-server</a:t>
+              <a:t>Experimento 1 — Instantiate</a:t>
             </a:r>
           </a:p>
         </p:txBody>
@@ -4854,8 +6218,49 @@
           <a:p>
             <a:pPr lvl="0"/>
             <a:r>
-              <a:rPr/>
-              <a:t>Instalado no </a:t>
+              <a:rPr b="1"/>
+              <a:t>Comando:</a:t>
+            </a:r>
+            <a:r>
+              <a:rPr/>
+              <a:t> </a:t>
+            </a:r>
+            <a:r>
+              <a:rPr>
+                <a:latin typeface="Courier"/>
+              </a:rPr>
+              <a:t>bash lab/nephio/deploy-cnfs-via-porch.sh</a:t>
+            </a:r>
+          </a:p>
+          <a:p>
+            <a:pPr lvl="0"/>
+            <a:r>
+              <a:rPr b="1"/>
+              <a:t>O que faz:</a:t>
+            </a:r>
+            <a:r>
+              <a:rPr/>
+              <a:t> publica o pacote no Porch (</a:t>
+            </a:r>
+            <a:r>
+              <a:rPr>
+                <a:latin typeface="Courier"/>
+              </a:rPr>
+              <a:t>rpkg copy/push/propose/approve</a:t>
+            </a:r>
+            <a:r>
+              <a:rPr/>
+              <a:t>), depois </a:t>
+            </a:r>
+            <a:r>
+              <a:rPr>
+                <a:latin typeface="Courier"/>
+              </a:rPr>
+              <a:t>kpt live apply</a:t>
+            </a:r>
+            <a:r>
+              <a:rPr/>
+              <a:t> no </a:t>
             </a:r>
             <a:r>
               <a:rPr>
@@ -4863,9 +6268,1821 @@
               </a:rPr>
               <a:t>o-cloud-1</a:t>
             </a:r>
-            <a:r>
-              <a:rPr/>
-              <a:t>: manifesto oficial + </a:t>
+          </a:p>
+          <a:p>
+            <a:pPr lvl="0"/>
+            <a:r>
+              <a:rPr b="1"/>
+              <a:t>Resultado:</a:t>
+            </a:r>
+            <a:r>
+              <a:rPr/>
+              <a:t> 3/3 CNFs </a:t>
+            </a:r>
+            <a:r>
+              <a:rPr>
+                <a:latin typeface="Courier"/>
+              </a:rPr>
+              <a:t>Running</a:t>
+            </a:r>
+            <a:r>
+              <a:rPr/>
+              <a:t> do zero em </a:t>
+            </a:r>
+            <a:r>
+              <a:rPr b="1"/>
+              <a:t>20,4 s</a:t>
+            </a:r>
+          </a:p>
+        </p:txBody>
+      </p:sp>
+      <p:pic>
+        <p:nvPicPr>
+          <p:cNvPr descr="assets/term-exp1-apply.png" id="0" name="Picture 1"/>
+          <p:cNvPicPr>
+            <a:picLocks noGrp="1" noChangeAspect="1"/>
+          </p:cNvPicPr>
+          <p:nvPr/>
+        </p:nvPicPr>
+        <p:blipFill>
+          <a:blip r:embed="rId3"/>
+          <a:stretch>
+            <a:fillRect/>
+          </a:stretch>
+        </p:blipFill>
+        <p:spPr bwMode="auto">
+          <a:xfrm>
+            <a:off x="3568700" y="850900"/>
+            <a:ext cx="5105400" cy="2578100"/>
+          </a:xfrm>
+          <a:prstGeom prst="rect">
+            <a:avLst/>
+          </a:prstGeom>
+          <a:noFill/>
+          <a:ln w="9525">
+            <a:noFill/>
+            <a:headEnd/>
+            <a:tailEnd/>
+          </a:ln>
+        </p:spPr>
+      </p:pic>
+      <p:sp>
+        <p:nvSpPr>
+          <p:cNvPr id="1" name="TextBox 3"/>
+          <p:cNvSpPr txBox="1"/>
+          <p:nvPr>
+            <p:ph idx="1"/>
+          </p:nvPr>
+        </p:nvSpPr>
+        <p:spPr>
+          <a:xfrm>
+            <a:off x="3568700" y="4076700"/>
+            <a:ext cx="5105400" cy="508000"/>
+          </a:xfrm>
+          <a:prstGeom prst="rect">
+            <a:avLst/>
+          </a:prstGeom>
+          <a:noFill/>
+        </p:spPr>
+        <p:txBody>
+          <a:bodyPr/>
+          <a:lstStyle/>
+          <a:p>
+            <a:pPr lvl="0" indent="0" marL="0" algn="ctr">
+              <a:buNone/>
+            </a:pPr>
+            <a:r>
+              <a:rPr/>
+              <a:t>Terminal real: apply result 10 attempted, 10 successful — 3 CNFs Running</a:t>
+            </a:r>
+          </a:p>
+        </p:txBody>
+      </p:sp>
+    </p:spTree>
+  </p:cSld>
+</p:sld>
+</file>
+
+<file path=ppt/slides/slide12.xml><?xml version="1.0" encoding="utf-8"?>
+<p:sld xmlns:a="http://schemas.openxmlformats.org/drawingml/2006/main" xmlns:r="http://schemas.openxmlformats.org/officeDocument/2006/relationships" xmlns:p="http://schemas.openxmlformats.org/presentationml/2006/main">
+  <p:cSld>
+    <p:spTree>
+      <p:nvGrpSpPr>
+        <p:cNvPr id="1" name=""/>
+        <p:cNvGrpSpPr/>
+        <p:nvPr/>
+      </p:nvGrpSpPr>
+      <p:grpSpPr>
+        <a:xfrm>
+          <a:off x="0" y="0"/>
+          <a:ext cx="0" cy="0"/>
+          <a:chOff x="0" y="0"/>
+          <a:chExt cx="0" cy="0"/>
+        </a:xfrm>
+      </p:grpSpPr>
+      <p:sp>
+        <p:nvSpPr>
+          <p:cNvPr id="2" name="Title 1"/>
+          <p:cNvSpPr>
+            <a:spLocks noGrp="1"/>
+          </p:cNvSpPr>
+          <p:nvPr>
+            <p:ph type="title"/>
+          </p:nvPr>
+        </p:nvSpPr>
+        <p:spPr/>
+        <p:txBody>
+          <a:bodyPr/>
+          <a:lstStyle/>
+          <a:p>
+            <a:pPr lvl="0" indent="0" marL="0">
+              <a:buNone/>
+            </a:pPr>
+            <a:r>
+              <a:rPr/>
+              <a:t>Duas camadas de configuração — por que distinguir</a:t>
+            </a:r>
+          </a:p>
+        </p:txBody>
+      </p:sp>
+      <p:sp>
+        <p:nvSpPr>
+          <p:cNvPr id="3" name="Content Placeholder 2"/>
+          <p:cNvSpPr>
+            <a:spLocks noGrp="1"/>
+          </p:cNvSpPr>
+          <p:nvPr>
+            <p:ph idx="1"/>
+          </p:nvPr>
+        </p:nvSpPr>
+        <p:spPr/>
+        <p:txBody>
+          <a:bodyPr/>
+          <a:lstStyle/>
+          <a:p>
+            <a:pPr lvl="0"/>
+            <a:r>
+              <a:rPr b="1"/>
+              <a:t>Configuração operacional da NF</a:t>
+            </a:r>
+            <a:r>
+              <a:rPr/>
+              <a:t> — análoga ao que O1/NETCONF faria numa NF real: API própria </a:t>
+            </a:r>
+            <a:r>
+              <a:rPr>
+                <a:latin typeface="Courier"/>
+              </a:rPr>
+              <a:t>/config</a:t>
+            </a:r>
+            <a:r>
+              <a:rPr/>
+              <a:t> de cada CNF</a:t>
+            </a:r>
+          </a:p>
+          <a:p>
+            <a:pPr lvl="0"/>
+            <a:r>
+              <a:rPr b="1"/>
+              <a:t>Configuração de implantação</a:t>
+            </a:r>
+            <a:r>
+              <a:rPr/>
+              <a:t> (pacote/GitOps) — mudar o </a:t>
+            </a:r>
+            <a:r>
+              <a:rPr>
+                <a:latin typeface="Courier"/>
+              </a:rPr>
+              <a:t>ConfigMap</a:t>
+            </a:r>
+            <a:r>
+              <a:rPr/>
+              <a:t>/</a:t>
+            </a:r>
+            <a:r>
+              <a:rPr>
+                <a:latin typeface="Courier"/>
+              </a:rPr>
+              <a:t>Deployment</a:t>
+            </a:r>
+            <a:r>
+              <a:rPr/>
+              <a:t> no pacote autoral e republicar via Porch</a:t>
+            </a:r>
+          </a:p>
+          <a:p>
+            <a:pPr lvl="0"/>
+            <a:r>
+              <a:rPr/>
+              <a:t>Nephio </a:t>
+            </a:r>
+            <a:r>
+              <a:rPr b="1"/>
+              <a:t>não implementa O1</a:t>
+            </a:r>
+            <a:r>
+              <a:rPr/>
+              <a:t> — então a API </a:t>
+            </a:r>
+            <a:r>
+              <a:rPr>
+                <a:latin typeface="Courier"/>
+              </a:rPr>
+              <a:t>/config</a:t>
+            </a:r>
+            <a:r>
+              <a:rPr/>
+              <a:t> é o substituto de laboratório para essa camada, não uma alegação de que isso É O1</a:t>
+            </a:r>
+          </a:p>
+        </p:txBody>
+      </p:sp>
+    </p:spTree>
+  </p:cSld>
+</p:sld>
+</file>
+
+<file path=ppt/slides/slide13.xml><?xml version="1.0" encoding="utf-8"?>
+<p:sld xmlns:a="http://schemas.openxmlformats.org/drawingml/2006/main" xmlns:r="http://schemas.openxmlformats.org/officeDocument/2006/relationships" xmlns:p="http://schemas.openxmlformats.org/presentationml/2006/main">
+  <p:cSld>
+    <p:spTree>
+      <p:nvGrpSpPr>
+        <p:cNvPr id="1" name=""/>
+        <p:cNvGrpSpPr/>
+        <p:nvPr/>
+      </p:nvGrpSpPr>
+      <p:grpSpPr>
+        <a:xfrm>
+          <a:off x="0" y="0"/>
+          <a:ext cx="0" cy="0"/>
+          <a:chOff x="0" y="0"/>
+          <a:chExt cx="0" cy="0"/>
+        </a:xfrm>
+      </p:grpSpPr>
+      <p:sp>
+        <p:nvSpPr>
+          <p:cNvPr id="2" name="Title 1"/>
+          <p:cNvSpPr>
+            <a:spLocks noGrp="1"/>
+          </p:cNvSpPr>
+          <p:nvPr>
+            <p:ph type="title"/>
+          </p:nvPr>
+        </p:nvSpPr>
+        <p:spPr/>
+        <p:txBody>
+          <a:bodyPr/>
+          <a:lstStyle/>
+          <a:p>
+            <a:pPr lvl="0" indent="0" marL="0">
+              <a:buNone/>
+            </a:pPr>
+            <a:r>
+              <a:rPr/>
+              <a:t>Experimento 2 — Configuration management</a:t>
+            </a:r>
+          </a:p>
+        </p:txBody>
+      </p:sp>
+      <p:sp>
+        <p:nvSpPr>
+          <p:cNvPr id="3" name="Content Placeholder 2"/>
+          <p:cNvSpPr>
+            <a:spLocks noGrp="1"/>
+          </p:cNvSpPr>
+          <p:nvPr>
+            <p:ph idx="1"/>
+          </p:nvPr>
+        </p:nvSpPr>
+        <p:spPr/>
+        <p:txBody>
+          <a:bodyPr/>
+          <a:lstStyle/>
+          <a:p>
+            <a:pPr lvl="0"/>
+            <a:r>
+              <a:rPr b="1"/>
+              <a:t>Comando:</a:t>
+            </a:r>
+            <a:r>
+              <a:rPr/>
+              <a:t> </a:t>
+            </a:r>
+            <a:r>
+              <a:rPr>
+                <a:latin typeface="Courier"/>
+              </a:rPr>
+              <a:t>PUT /config {"cell_id": 2}</a:t>
+            </a:r>
+            <a:r>
+              <a:rPr/>
+              <a:t> no </a:t>
+            </a:r>
+            <a:r>
+              <a:rPr>
+                <a:latin typeface="Courier"/>
+              </a:rPr>
+              <a:t>oran-du</a:t>
+            </a:r>
+          </a:p>
+          <a:p>
+            <a:pPr lvl="0"/>
+            <a:r>
+              <a:rPr b="1"/>
+              <a:t>Resultado:</a:t>
+            </a:r>
+            <a:r>
+              <a:rPr/>
+              <a:t> </a:t>
+            </a:r>
+            <a:r>
+              <a:rPr>
+                <a:latin typeface="Courier"/>
+              </a:rPr>
+              <a:t>cell_id</a:t>
+            </a:r>
+            <a:r>
+              <a:rPr/>
+              <a:t> </a:t>
+            </a:r>
+            <a:r>
+              <a:rPr>
+                <a:latin typeface="Courier"/>
+              </a:rPr>
+              <a:t>1 → 2</a:t>
+            </a:r>
+            <a:r>
+              <a:rPr/>
+              <a:t>, </a:t>
+            </a:r>
+            <a:r>
+              <a:rPr>
+                <a:latin typeface="Courier"/>
+              </a:rPr>
+              <a:t>config_version</a:t>
+            </a:r>
+            <a:r>
+              <a:rPr/>
+              <a:t> </a:t>
+            </a:r>
+            <a:r>
+              <a:rPr>
+                <a:latin typeface="Courier"/>
+              </a:rPr>
+              <a:t>1 → 2</a:t>
+            </a:r>
+            <a:r>
+              <a:rPr/>
+              <a:t>, em </a:t>
+            </a:r>
+            <a:r>
+              <a:rPr b="1"/>
+              <a:t>0,7 s</a:t>
+            </a:r>
+          </a:p>
+          <a:p>
+            <a:pPr lvl="0"/>
+            <a:r>
+              <a:rPr/>
+              <a:t>Prova que a camada operacional da NF responde e versiona suas próprias mudanças</a:t>
+            </a:r>
+          </a:p>
+        </p:txBody>
+      </p:sp>
+    </p:spTree>
+  </p:cSld>
+</p:sld>
+</file>
+
+<file path=ppt/slides/slide14.xml><?xml version="1.0" encoding="utf-8"?>
+<p:sld xmlns:a="http://schemas.openxmlformats.org/drawingml/2006/main" xmlns:r="http://schemas.openxmlformats.org/officeDocument/2006/relationships" xmlns:p="http://schemas.openxmlformats.org/presentationml/2006/main">
+  <p:cSld>
+    <p:spTree>
+      <p:nvGrpSpPr>
+        <p:cNvPr id="1" name=""/>
+        <p:cNvGrpSpPr/>
+        <p:nvPr/>
+      </p:nvGrpSpPr>
+      <p:grpSpPr>
+        <a:xfrm>
+          <a:off x="0" y="0"/>
+          <a:ext cx="0" cy="0"/>
+          <a:chOff x="0" y="0"/>
+          <a:chExt cx="0" cy="0"/>
+        </a:xfrm>
+      </p:grpSpPr>
+      <p:sp>
+        <p:nvSpPr>
+          <p:cNvPr id="2" name="Title 1"/>
+          <p:cNvSpPr>
+            <a:spLocks noGrp="1"/>
+          </p:cNvSpPr>
+          <p:nvPr>
+            <p:ph type="title"/>
+          </p:nvPr>
+        </p:nvSpPr>
+        <p:spPr/>
+        <p:txBody>
+          <a:bodyPr/>
+          <a:lstStyle/>
+          <a:p>
+            <a:pPr lvl="0" indent="0" marL="0">
+              <a:buNone/>
+            </a:pPr>
+            <a:r>
+              <a:rPr/>
+              <a:t>Experimento 3 — Scale</a:t>
+            </a:r>
+          </a:p>
+        </p:txBody>
+      </p:sp>
+      <p:sp>
+        <p:nvSpPr>
+          <p:cNvPr id="3" name="Content Placeholder 2"/>
+          <p:cNvSpPr>
+            <a:spLocks noGrp="1"/>
+          </p:cNvSpPr>
+          <p:nvPr>
+            <p:ph idx="1"/>
+          </p:nvPr>
+        </p:nvSpPr>
+        <p:spPr/>
+        <p:txBody>
+          <a:bodyPr/>
+          <a:lstStyle/>
+          <a:p>
+            <a:pPr lvl="0"/>
+            <a:r>
+              <a:rPr b="1"/>
+              <a:t>Comando:</a:t>
+            </a:r>
+            <a:r>
+              <a:rPr/>
+              <a:t> </a:t>
+            </a:r>
+            <a:r>
+              <a:rPr>
+                <a:latin typeface="Courier"/>
+              </a:rPr>
+              <a:t>kubectl scale deploy/oran-cu --replicas=2</a:t>
+            </a:r>
+          </a:p>
+          <a:p>
+            <a:pPr lvl="0"/>
+            <a:r>
+              <a:rPr b="1"/>
+              <a:t>Resultado:</a:t>
+            </a:r>
+            <a:r>
+              <a:rPr/>
+              <a:t> rollout concluído, </a:t>
+            </a:r>
+            <a:r>
+              <a:rPr>
+                <a:latin typeface="Courier"/>
+              </a:rPr>
+              <a:t>oran-cu</a:t>
+            </a:r>
+            <a:r>
+              <a:rPr/>
+              <a:t> 2/2 </a:t>
+            </a:r>
+            <a:r>
+              <a:rPr>
+                <a:latin typeface="Courier"/>
+              </a:rPr>
+              <a:t>Running</a:t>
+            </a:r>
+            <a:r>
+              <a:rPr/>
+              <a:t>, em </a:t>
+            </a:r>
+            <a:r>
+              <a:rPr b="1"/>
+              <a:t>5,7 s</a:t>
+            </a:r>
+          </a:p>
+          <a:p>
+            <a:pPr lvl="0"/>
+            <a:r>
+              <a:rPr/>
+              <a:t>Mecanismo: </a:t>
+            </a:r>
+            <a:r>
+              <a:rPr b="1"/>
+              <a:t>ReplicaSet controller do Kubernetes</a:t>
+            </a:r>
+            <a:r>
+              <a:rPr/>
+              <a:t> — o mesmo mecanismo genérico usado por qualquer aplicação, não um scaling orientado por KPI de rede O-RAN</a:t>
+            </a:r>
+          </a:p>
+        </p:txBody>
+      </p:sp>
+    </p:spTree>
+  </p:cSld>
+</p:sld>
+</file>
+
+<file path=ppt/slides/slide15.xml><?xml version="1.0" encoding="utf-8"?>
+<p:sld xmlns:a="http://schemas.openxmlformats.org/drawingml/2006/main" xmlns:r="http://schemas.openxmlformats.org/officeDocument/2006/relationships" xmlns:p="http://schemas.openxmlformats.org/presentationml/2006/main">
+  <p:cSld>
+    <p:spTree>
+      <p:nvGrpSpPr>
+        <p:cNvPr id="1" name=""/>
+        <p:cNvGrpSpPr/>
+        <p:nvPr/>
+      </p:nvGrpSpPr>
+      <p:grpSpPr>
+        <a:xfrm>
+          <a:off x="0" y="0"/>
+          <a:ext cx="0" cy="0"/>
+          <a:chOff x="0" y="0"/>
+          <a:chExt cx="0" cy="0"/>
+        </a:xfrm>
+      </p:grpSpPr>
+      <p:sp>
+        <p:nvSpPr>
+          <p:cNvPr id="2" name="Title 1"/>
+          <p:cNvSpPr>
+            <a:spLocks noGrp="1"/>
+          </p:cNvSpPr>
+          <p:nvPr>
+            <p:ph type="title"/>
+          </p:nvPr>
+        </p:nvSpPr>
+        <p:spPr/>
+        <p:txBody>
+          <a:bodyPr/>
+          <a:lstStyle/>
+          <a:p>
+            <a:pPr lvl="0" indent="0" marL="0">
+              <a:buNone/>
+            </a:pPr>
+            <a:r>
+              <a:rPr/>
+              <a:t>Experimento 5 — Upgrade (achado real)</a:t>
+            </a:r>
+          </a:p>
+        </p:txBody>
+      </p:sp>
+      <p:sp>
+        <p:nvSpPr>
+          <p:cNvPr id="3" name="Content Placeholder 2"/>
+          <p:cNvSpPr>
+            <a:spLocks noGrp="1"/>
+          </p:cNvSpPr>
+          <p:nvPr>
+            <p:ph idx="1"/>
+          </p:nvPr>
+        </p:nvSpPr>
+        <p:spPr/>
+        <p:txBody>
+          <a:bodyPr/>
+          <a:lstStyle/>
+          <a:p>
+            <a:pPr lvl="0"/>
+            <a:r>
+              <a:rPr b="1"/>
+              <a:t>Comando:</a:t>
+            </a:r>
+            <a:r>
+              <a:rPr/>
+              <a:t> atualizar </a:t>
+            </a:r>
+            <a:r>
+              <a:rPr>
+                <a:latin typeface="Courier"/>
+              </a:rPr>
+              <a:t>NF_VERSION</a:t>
+            </a:r>
+            <a:r>
+              <a:rPr/>
+              <a:t> v1→v2 no pacote e republicar via Porch</a:t>
+            </a:r>
+          </a:p>
+          <a:p>
+            <a:pPr lvl="0"/>
+            <a:r>
+              <a:rPr b="1"/>
+              <a:t>Resultado:</a:t>
+            </a:r>
+            <a:r>
+              <a:rPr/>
+              <a:t> </a:t>
+            </a:r>
+            <a:r>
+              <a:rPr>
+                <a:latin typeface="Courier"/>
+              </a:rPr>
+              <a:t>revision</a:t>
+            </a:r>
+            <a:r>
+              <a:rPr/>
+              <a:t> do Deployment 1→2, rollout real, </a:t>
+            </a:r>
+            <a:r>
+              <a:rPr>
+                <a:latin typeface="Courier"/>
+              </a:rPr>
+              <a:t>/health.nf_version=v2</a:t>
+            </a:r>
+            <a:r>
+              <a:rPr/>
+              <a:t>, em </a:t>
+            </a:r>
+            <a:r>
+              <a:rPr b="1"/>
+              <a:t>15,0 s</a:t>
+            </a:r>
+          </a:p>
+          <a:p>
+            <a:pPr lvl="0"/>
+            <a:r>
+              <a:rPr b="1"/>
+              <a:t>Achado real:</a:t>
+            </a:r>
+            <a:r>
+              <a:rPr/>
+              <a:t> mudar </a:t>
+            </a:r>
+            <a:r>
+              <a:rPr b="1"/>
+              <a:t>só</a:t>
+            </a:r>
+            <a:r>
+              <a:rPr/>
+              <a:t> o </a:t>
+            </a:r>
+            <a:r>
+              <a:rPr>
+                <a:latin typeface="Courier"/>
+              </a:rPr>
+              <a:t>ConfigMap</a:t>
+            </a:r>
+            <a:r>
+              <a:rPr/>
+              <a:t> (consumido via </a:t>
+            </a:r>
+            <a:r>
+              <a:rPr>
+                <a:latin typeface="Courier"/>
+              </a:rPr>
+              <a:t>envFrom</a:t>
+            </a:r>
+            <a:r>
+              <a:rPr/>
+              <a:t>) </a:t>
+            </a:r>
+            <a:r>
+              <a:rPr b="1"/>
+              <a:t>não</a:t>
+            </a:r>
+            <a:r>
+              <a:rPr/>
+              <a:t> dispara rollout — o hash do pod template não muda</a:t>
+            </a:r>
+          </a:p>
+          <a:p>
+            <a:pPr lvl="0"/>
+            <a:r>
+              <a:rPr b="1"/>
+              <a:t>Correção:</a:t>
+            </a:r>
+            <a:r>
+              <a:rPr/>
+              <a:t> anotação de versão em </a:t>
+            </a:r>
+            <a:r>
+              <a:rPr>
+                <a:latin typeface="Courier"/>
+              </a:rPr>
+              <a:t>spec.template.metadata.annotations</a:t>
+            </a:r>
+            <a:r>
+              <a:rPr/>
+              <a:t>, que força um novo </a:t>
+            </a:r>
+            <a:r>
+              <a:rPr>
+                <a:latin typeface="Courier"/>
+              </a:rPr>
+              <a:t>ReplicaSet</a:t>
+            </a:r>
+          </a:p>
+        </p:txBody>
+      </p:sp>
+    </p:spTree>
+  </p:cSld>
+</p:sld>
+</file>
+
+<file path=ppt/slides/slide16.xml><?xml version="1.0" encoding="utf-8"?>
+<p:sld xmlns:a="http://schemas.openxmlformats.org/drawingml/2006/main" xmlns:r="http://schemas.openxmlformats.org/officeDocument/2006/relationships" xmlns:p="http://schemas.openxmlformats.org/presentationml/2006/main">
+  <p:cSld>
+    <p:spTree>
+      <p:nvGrpSpPr>
+        <p:cNvPr id="1" name=""/>
+        <p:cNvGrpSpPr/>
+        <p:nvPr/>
+      </p:nvGrpSpPr>
+      <p:grpSpPr>
+        <a:xfrm>
+          <a:off x="0" y="0"/>
+          <a:ext cx="0" cy="0"/>
+          <a:chOff x="0" y="0"/>
+          <a:chExt cx="0" cy="0"/>
+        </a:xfrm>
+      </p:grpSpPr>
+      <p:sp>
+        <p:nvSpPr>
+          <p:cNvPr id="2" name="Title 1"/>
+          <p:cNvSpPr>
+            <a:spLocks noGrp="1"/>
+          </p:cNvSpPr>
+          <p:nvPr>
+            <p:ph type="title"/>
+          </p:nvPr>
+        </p:nvSpPr>
+        <p:spPr/>
+        <p:txBody>
+          <a:bodyPr/>
+          <a:lstStyle/>
+          <a:p>
+            <a:pPr lvl="0" indent="0" marL="0">
+              <a:buNone/>
+            </a:pPr>
+            <a:r>
+              <a:rPr/>
+              <a:t>Experimento 4 — Recover</a:t>
+            </a:r>
+          </a:p>
+        </p:txBody>
+      </p:sp>
+      <p:sp>
+        <p:nvSpPr>
+          <p:cNvPr id="3" name="Content Placeholder 2"/>
+          <p:cNvSpPr>
+            <a:spLocks noGrp="1"/>
+          </p:cNvSpPr>
+          <p:nvPr>
+            <p:ph idx="1"/>
+          </p:nvPr>
+        </p:nvSpPr>
+        <p:spPr/>
+        <p:txBody>
+          <a:bodyPr/>
+          <a:lstStyle/>
+          <a:p>
+            <a:pPr lvl="0"/>
+            <a:r>
+              <a:rPr b="1"/>
+              <a:t>Comando:</a:t>
+            </a:r>
+            <a:r>
+              <a:rPr/>
+              <a:t> </a:t>
+            </a:r>
+            <a:r>
+              <a:rPr>
+                <a:latin typeface="Courier"/>
+              </a:rPr>
+              <a:t>kubectl delete pod</a:t>
+            </a:r>
+            <a:r>
+              <a:rPr/>
+              <a:t> no </a:t>
+            </a:r>
+            <a:r>
+              <a:rPr>
+                <a:latin typeface="Courier"/>
+              </a:rPr>
+              <a:t>oran-du</a:t>
+            </a:r>
+          </a:p>
+          <a:p>
+            <a:pPr lvl="0"/>
+            <a:r>
+              <a:rPr b="1"/>
+              <a:t>Resultado:</a:t>
+            </a:r>
+            <a:r>
+              <a:rPr/>
+              <a:t> ReplicaSet recria em </a:t>
+            </a:r>
+            <a:r>
+              <a:rPr b="1"/>
+              <a:t>3,9 s</a:t>
+            </a:r>
+            <a:r>
+              <a:rPr/>
+              <a:t> — pod novo, nome diferente</a:t>
+            </a:r>
+          </a:p>
+          <a:p>
+            <a:pPr lvl="0"/>
+            <a:r>
+              <a:rPr b="1"/>
+              <a:t>Isto é self-healing do Kubernetes</a:t>
+            </a:r>
+            <a:r>
+              <a:rPr/>
+              <a:t> (estado desejado × estado real) — </a:t>
+            </a:r>
+            <a:r>
+              <a:rPr b="1"/>
+              <a:t>não</a:t>
+            </a:r>
+            <a:r>
+              <a:rPr/>
+              <a:t> é healing de uma NF de telecom: sem estado de sessão, sem re-registro em interfaces O-RAN</a:t>
+            </a:r>
+          </a:p>
+        </p:txBody>
+      </p:sp>
+    </p:spTree>
+  </p:cSld>
+</p:sld>
+</file>
+
+<file path=ppt/slides/slide17.xml><?xml version="1.0" encoding="utf-8"?>
+<p:sld xmlns:a="http://schemas.openxmlformats.org/drawingml/2006/main" xmlns:r="http://schemas.openxmlformats.org/officeDocument/2006/relationships" xmlns:p="http://schemas.openxmlformats.org/presentationml/2006/main">
+  <p:cSld>
+    <p:spTree>
+      <p:nvGrpSpPr>
+        <p:cNvPr id="1" name=""/>
+        <p:cNvGrpSpPr/>
+        <p:nvPr/>
+      </p:nvGrpSpPr>
+      <p:grpSpPr>
+        <a:xfrm>
+          <a:off x="0" y="0"/>
+          <a:ext cx="0" cy="0"/>
+          <a:chOff x="0" y="0"/>
+          <a:chExt cx="0" cy="0"/>
+        </a:xfrm>
+      </p:grpSpPr>
+      <p:sp>
+        <p:nvSpPr>
+          <p:cNvPr id="2" name="Title 1"/>
+          <p:cNvSpPr>
+            <a:spLocks noGrp="1"/>
+          </p:cNvSpPr>
+          <p:nvPr>
+            <p:ph type="title"/>
+          </p:nvPr>
+        </p:nvSpPr>
+        <p:spPr/>
+        <p:txBody>
+          <a:bodyPr/>
+          <a:lstStyle/>
+          <a:p>
+            <a:pPr lvl="0" indent="0" marL="0">
+              <a:buNone/>
+            </a:pPr>
+            <a:r>
+              <a:rPr/>
+              <a:t>Experimento 6 — Terminate</a:t>
+            </a:r>
+          </a:p>
+        </p:txBody>
+      </p:sp>
+      <p:sp>
+        <p:nvSpPr>
+          <p:cNvPr id="3" name="Content Placeholder 2"/>
+          <p:cNvSpPr>
+            <a:spLocks noGrp="1"/>
+          </p:cNvSpPr>
+          <p:nvPr>
+            <p:ph idx="1"/>
+          </p:nvPr>
+        </p:nvSpPr>
+        <p:spPr/>
+        <p:txBody>
+          <a:bodyPr/>
+          <a:lstStyle/>
+          <a:p>
+            <a:pPr lvl="0"/>
+            <a:r>
+              <a:rPr b="1"/>
+              <a:t>Comando:</a:t>
+            </a:r>
+            <a:r>
+              <a:rPr/>
+              <a:t> remover </a:t>
+            </a:r>
+            <a:r>
+              <a:rPr>
+                <a:latin typeface="Courier"/>
+              </a:rPr>
+              <a:t>oran-core</a:t>
+            </a:r>
+            <a:r>
+              <a:rPr/>
+              <a:t> do pacote e republicar</a:t>
+            </a:r>
+          </a:p>
+          <a:p>
+            <a:pPr lvl="0"/>
+            <a:r>
+              <a:rPr b="1"/>
+              <a:t>Resultado:</a:t>
+            </a:r>
+            <a:r>
+              <a:rPr/>
+              <a:t> </a:t>
+            </a:r>
+            <a:r>
+              <a:rPr>
+                <a:latin typeface="Courier"/>
+              </a:rPr>
+              <a:t>oran-core</a:t>
+            </a:r>
+            <a:r>
+              <a:rPr/>
+              <a:t> removido via </a:t>
+            </a:r>
+            <a:r>
+              <a:rPr b="1"/>
+              <a:t>prune</a:t>
+            </a:r>
+            <a:r>
+              <a:rPr/>
+              <a:t> do </a:t>
+            </a:r>
+            <a:r>
+              <a:rPr>
+                <a:latin typeface="Courier"/>
+              </a:rPr>
+              <a:t>kpt live apply</a:t>
+            </a:r>
+            <a:r>
+              <a:rPr/>
+              <a:t>, em </a:t>
+            </a:r>
+            <a:r>
+              <a:rPr b="1"/>
+              <a:t>10,8 s</a:t>
+            </a:r>
+          </a:p>
+          <a:p>
+            <a:pPr lvl="0"/>
+            <a:r>
+              <a:rPr/>
+              <a:t>Terminação pelo </a:t>
+            </a:r>
+            <a:r>
+              <a:rPr b="1"/>
+              <a:t>mesmo mecanismo declarativo</a:t>
+            </a:r>
+            <a:r>
+              <a:rPr/>
+              <a:t> que criou o recurso — não um </a:t>
+            </a:r>
+            <a:r>
+              <a:rPr>
+                <a:latin typeface="Courier"/>
+              </a:rPr>
+              <a:t>kubectl delete</a:t>
+            </a:r>
+            <a:r>
+              <a:rPr/>
+              <a:t> avulso</a:t>
+            </a:r>
+          </a:p>
+        </p:txBody>
+      </p:sp>
+    </p:spTree>
+  </p:cSld>
+</p:sld>
+</file>
+
+<file path=ppt/slides/slide18.xml><?xml version="1.0" encoding="utf-8"?>
+<p:sld xmlns:a="http://schemas.openxmlformats.org/drawingml/2006/main" xmlns:r="http://schemas.openxmlformats.org/officeDocument/2006/relationships" xmlns:p="http://schemas.openxmlformats.org/presentationml/2006/main">
+  <p:cSld>
+    <p:spTree>
+      <p:nvGrpSpPr>
+        <p:cNvPr id="1" name=""/>
+        <p:cNvGrpSpPr/>
+        <p:nvPr/>
+      </p:nvGrpSpPr>
+      <p:grpSpPr>
+        <a:xfrm>
+          <a:off x="0" y="0"/>
+          <a:ext cx="0" cy="0"/>
+          <a:chOff x="0" y="0"/>
+          <a:chExt cx="0" cy="0"/>
+        </a:xfrm>
+      </p:grpSpPr>
+      <p:sp>
+        <p:nvSpPr>
+          <p:cNvPr id="2" name="Title 1"/>
+          <p:cNvSpPr>
+            <a:spLocks noGrp="1"/>
+          </p:cNvSpPr>
+          <p:nvPr>
+            <p:ph type="title"/>
+          </p:nvPr>
+        </p:nvSpPr>
+        <p:spPr/>
+        <p:txBody>
+          <a:bodyPr/>
+          <a:lstStyle/>
+          <a:p>
+            <a:pPr lvl="0" indent="0" marL="0">
+              <a:buNone/>
+            </a:pPr>
+            <a:r>
+              <a:rPr/>
+              <a:t>Resultados consolidados (entrega original)</a:t>
+            </a:r>
+          </a:p>
+        </p:txBody>
+      </p:sp>
+      <p:pic>
+        <p:nvPicPr>
+          <p:cNvPr descr="assets/experiments-duration.png" id="0" name="Picture 1"/>
+          <p:cNvPicPr>
+            <a:picLocks noGrp="1" noChangeAspect="1"/>
+          </p:cNvPicPr>
+          <p:nvPr/>
+        </p:nvPicPr>
+        <p:blipFill>
+          <a:blip r:embed="rId3"/>
+          <a:stretch>
+            <a:fillRect/>
+          </a:stretch>
+        </p:blipFill>
+        <p:spPr bwMode="auto">
+          <a:xfrm>
+            <a:off x="2273300" y="1193800"/>
+            <a:ext cx="4597400" cy="2882900"/>
+          </a:xfrm>
+          <a:prstGeom prst="rect">
+            <a:avLst/>
+          </a:prstGeom>
+          <a:noFill/>
+          <a:ln w="9525">
+            <a:noFill/>
+            <a:headEnd/>
+            <a:tailEnd/>
+          </a:ln>
+        </p:spPr>
+      </p:pic>
+      <p:sp>
+        <p:nvSpPr>
+          <p:cNvPr id="1" name="TextBox 3"/>
+          <p:cNvSpPr txBox="1"/>
+          <p:nvPr>
+            <p:ph idx="1"/>
+          </p:nvPr>
+        </p:nvSpPr>
+        <p:spPr>
+          <a:xfrm>
+            <a:off x="457200" y="4076700"/>
+            <a:ext cx="8229600" cy="508000"/>
+          </a:xfrm>
+          <a:prstGeom prst="rect">
+            <a:avLst/>
+          </a:prstGeom>
+          <a:noFill/>
+        </p:spPr>
+        <p:txBody>
+          <a:bodyPr/>
+          <a:lstStyle/>
+          <a:p>
+            <a:pPr lvl="0" indent="0" marL="0" algn="ctr">
+              <a:buNone/>
+            </a:pPr>
+            <a:r>
+              <a:rPr/>
+              <a:t>Duração real de todos os experimentos e melhorias, por categoria</a:t>
+            </a:r>
+          </a:p>
+        </p:txBody>
+      </p:sp>
+      <p:sp>
+        <p:nvSpPr>
+          <p:cNvPr id="3" name="Content Placeholder 2"/>
+          <p:cNvSpPr>
+            <a:spLocks noGrp="1"/>
+          </p:cNvSpPr>
+          <p:nvPr>
+            <p:ph idx="1"/>
+          </p:nvPr>
+        </p:nvSpPr>
+        <p:spPr/>
+        <p:txBody>
+          <a:bodyPr/>
+          <a:lstStyle/>
+          <a:p>
+            <a:pPr lvl="0"/>
+            <a:r>
+              <a:rPr b="1"/>
+              <a:t>6/6 experimentos formais: </a:t>
+            </a:r>
+            <a:r>
+              <a:rPr b="1">
+                <a:latin typeface="Courier"/>
+              </a:rPr>
+              <a:t>success</a:t>
+            </a:r>
+            <a:r>
+              <a:rPr/>
+              <a:t> (</a:t>
+            </a:r>
+            <a:r>
+              <a:rPr>
+                <a:latin typeface="Courier"/>
+              </a:rPr>
+              <a:t>results/experiments.csv</a:t>
+            </a:r>
+            <a:r>
+              <a:rPr/>
+              <a:t>)</a:t>
+            </a:r>
+          </a:p>
+          <a:p>
+            <a:pPr lvl="0"/>
+            <a:r>
+              <a:rPr>
+                <a:latin typeface="Courier"/>
+              </a:rPr>
+              <a:t>scripts/validate-lab.sh</a:t>
+            </a:r>
+            <a:r>
+              <a:rPr/>
+              <a:t>: </a:t>
+            </a:r>
+            <a:r>
+              <a:rPr b="1"/>
+              <a:t>10/10 PASS</a:t>
+            </a:r>
+            <a:r>
+              <a:rPr/>
+              <a:t>, reexecutando automaticamente instantiate/scale/recover/terminate</a:t>
+            </a:r>
+          </a:p>
+        </p:txBody>
+      </p:sp>
+      <p:pic>
+        <p:nvPicPr>
+          <p:cNvPr descr="assets/term-validate-lab.png" id="0" name="Picture 1"/>
+          <p:cNvPicPr>
+            <a:picLocks noGrp="1" noChangeAspect="1"/>
+          </p:cNvPicPr>
+          <p:nvPr/>
+        </p:nvPicPr>
+        <p:blipFill>
+          <a:blip r:embed="rId4"/>
+          <a:stretch>
+            <a:fillRect/>
+          </a:stretch>
+        </p:blipFill>
+        <p:spPr bwMode="auto">
+          <a:xfrm>
+            <a:off x="1003300" y="1193800"/>
+            <a:ext cx="7150100" cy="2882900"/>
+          </a:xfrm>
+          <a:prstGeom prst="rect">
+            <a:avLst/>
+          </a:prstGeom>
+          <a:noFill/>
+          <a:ln w="9525">
+            <a:noFill/>
+            <a:headEnd/>
+            <a:tailEnd/>
+          </a:ln>
+        </p:spPr>
+      </p:pic>
+      <p:sp>
+        <p:nvSpPr>
+          <p:cNvPr id="1" name="TextBox 3"/>
+          <p:cNvSpPr txBox="1"/>
+          <p:nvPr>
+            <p:ph idx="1"/>
+          </p:nvPr>
+        </p:nvSpPr>
+        <p:spPr>
+          <a:xfrm>
+            <a:off x="457200" y="4076700"/>
+            <a:ext cx="8229600" cy="508000"/>
+          </a:xfrm>
+          <a:prstGeom prst="rect">
+            <a:avLst/>
+          </a:prstGeom>
+          <a:noFill/>
+        </p:spPr>
+        <p:txBody>
+          <a:bodyPr/>
+          <a:lstStyle/>
+          <a:p>
+            <a:pPr lvl="0" indent="0" marL="0" algn="ctr">
+              <a:buNone/>
+            </a:pPr>
+            <a:r>
+              <a:rPr/>
+              <a:t>validate-lab.sh: 10/10 PASS</a:t>
+            </a:r>
+          </a:p>
+        </p:txBody>
+      </p:sp>
+    </p:spTree>
+  </p:cSld>
+</p:sld>
+</file>
+
+<file path=ppt/slides/slide19.xml><?xml version="1.0" encoding="utf-8"?>
+<p:sld xmlns:a="http://schemas.openxmlformats.org/drawingml/2006/main" xmlns:r="http://schemas.openxmlformats.org/officeDocument/2006/relationships" xmlns:p="http://schemas.openxmlformats.org/presentationml/2006/main">
+  <p:cSld>
+    <p:spTree>
+      <p:nvGrpSpPr>
+        <p:cNvPr id="1" name=""/>
+        <p:cNvGrpSpPr/>
+        <p:nvPr/>
+      </p:nvGrpSpPr>
+      <p:grpSpPr>
+        <a:xfrm>
+          <a:off x="0" y="0"/>
+          <a:ext cx="0" cy="0"/>
+          <a:chOff x="0" y="0"/>
+          <a:chExt cx="0" cy="0"/>
+        </a:xfrm>
+      </p:grpSpPr>
+      <p:sp>
+        <p:nvSpPr>
+          <p:cNvPr id="2" name="Title 1"/>
+          <p:cNvSpPr>
+            <a:spLocks noGrp="1"/>
+          </p:cNvSpPr>
+          <p:nvPr>
+            <p:ph type="title"/>
+          </p:nvPr>
+        </p:nvSpPr>
+        <p:spPr/>
+        <p:txBody>
+          <a:bodyPr/>
+          <a:lstStyle/>
+          <a:p>
+            <a:pPr lvl="0" indent="0" marL="0">
+              <a:buNone/>
+            </a:pPr>
+            <a:r>
+              <a:rPr/>
+              <a:t>Uso de RAM (entrega original)</a:t>
+            </a:r>
+          </a:p>
+        </p:txBody>
+      </p:sp>
+      <p:sp>
+        <p:nvSpPr>
+          <p:cNvPr id="3" name="Content Placeholder 2"/>
+          <p:cNvSpPr>
+            <a:spLocks noGrp="1"/>
+          </p:cNvSpPr>
+          <p:nvPr>
+            <p:ph idx="1"/>
+          </p:nvPr>
+        </p:nvSpPr>
+        <p:spPr/>
+        <p:txBody>
+          <a:bodyPr/>
+          <a:lstStyle/>
+          <a:p>
+            <a:pPr lvl="0"/>
+            <a:r>
+              <a:rPr>
+                <a:latin typeface="Courier"/>
+              </a:rPr>
+              <a:t>nephio-mgmt</a:t>
+            </a:r>
+            <a:r>
+              <a:rPr/>
+              <a:t> (Nephio R6 completo): </a:t>
+            </a:r>
+            <a:r>
+              <a:rPr b="1"/>
+              <a:t>~3,7–3,9 GiB</a:t>
+            </a:r>
+          </a:p>
+          <a:p>
+            <a:pPr lvl="0"/>
+            <a:r>
+              <a:rPr>
+                <a:latin typeface="Courier"/>
+              </a:rPr>
+              <a:t>o-cloud-1</a:t>
+            </a:r>
+            <a:r>
+              <a:rPr/>
+              <a:t> (2 nós K8s): </a:t>
+            </a:r>
+            <a:r>
+              <a:rPr b="1"/>
+              <a:t>~1,4 GiB</a:t>
+            </a:r>
+          </a:p>
+          <a:p>
+            <a:pPr lvl="0"/>
+            <a:r>
+              <a:rPr/>
+              <a:t>3 CNFs simuladas (juntas): </a:t>
+            </a:r>
+            <a:r>
+              <a:rPr b="1"/>
+              <a:t>&lt; 200 MiB</a:t>
+            </a:r>
+          </a:p>
+          <a:p>
+            <a:pPr lvl="0"/>
+            <a:r>
+              <a:rPr b="1"/>
+              <a:t>Total: ~3,9 GiB usados de 9,7 GiB configurados</a:t>
+            </a:r>
+            <a:r>
+              <a:rPr/>
+              <a:t> — bem abaixo da meta de 10–12 GB do enunciado</a:t>
+            </a:r>
+          </a:p>
+        </p:txBody>
+      </p:sp>
+    </p:spTree>
+  </p:cSld>
+</p:sld>
+</file>
+
+<file path=ppt/slides/slide2.xml><?xml version="1.0" encoding="utf-8"?>
+<p:sld xmlns:a="http://schemas.openxmlformats.org/drawingml/2006/main" xmlns:r="http://schemas.openxmlformats.org/officeDocument/2006/relationships" xmlns:p="http://schemas.openxmlformats.org/presentationml/2006/main">
+  <p:cSld>
+    <p:spTree>
+      <p:nvGrpSpPr>
+        <p:cNvPr id="1" name=""/>
+        <p:cNvGrpSpPr/>
+        <p:nvPr/>
+      </p:nvGrpSpPr>
+      <p:grpSpPr>
+        <a:xfrm>
+          <a:off x="0" y="0"/>
+          <a:ext cx="0" cy="0"/>
+          <a:chOff x="0" y="0"/>
+          <a:chExt cx="0" cy="0"/>
+        </a:xfrm>
+      </p:grpSpPr>
+      <p:sp>
+        <p:nvSpPr>
+          <p:cNvPr id="2" name="Title 1"/>
+          <p:cNvSpPr>
+            <a:spLocks noGrp="1"/>
+          </p:cNvSpPr>
+          <p:nvPr>
+            <p:ph type="title"/>
+          </p:nvPr>
+        </p:nvSpPr>
+        <p:spPr/>
+        <p:txBody>
+          <a:bodyPr/>
+          <a:lstStyle/>
+          <a:p>
+            <a:pPr lvl="0" indent="0" marL="0">
+              <a:buNone/>
+            </a:pPr>
+            <a:r>
+              <a:rPr/>
+              <a:t>Objetivo desta Parte 2</a:t>
+            </a:r>
+          </a:p>
+        </p:txBody>
+      </p:sp>
+      <p:sp>
+        <p:nvSpPr>
+          <p:cNvPr id="3" name="Content Placeholder 2"/>
+          <p:cNvSpPr>
+            <a:spLocks noGrp="1"/>
+          </p:cNvSpPr>
+          <p:nvPr>
+            <p:ph idx="1"/>
+          </p:nvPr>
+        </p:nvSpPr>
+        <p:spPr/>
+        <p:txBody>
+          <a:bodyPr/>
+          <a:lstStyle/>
+          <a:p>
+            <a:pPr lvl="0"/>
+            <a:r>
+              <a:rPr/>
+              <a:t>Demonstrar, com </a:t>
+            </a:r>
+            <a:r>
+              <a:rPr b="1"/>
+              <a:t>evidência mensurável</a:t>
+            </a:r>
+            <a:r>
+              <a:rPr/>
+              <a:t> (tempo, RAM, CPU), os quatro mecanismos centrais de SMO/orquestração: </a:t>
+            </a:r>
+            <a:r>
+              <a:rPr b="1"/>
+              <a:t>provisioning, configuration management, orchestration, lifecycle management</a:t>
+            </a:r>
+          </a:p>
+          <a:p>
+            <a:pPr lvl="0"/>
+            <a:r>
+              <a:rPr/>
+              <a:t>Não é um roteiro “follow-along” — é um experimento real, com bugs reais encontrados e corrigidos ao vivo, documentados em vez de escondidos</a:t>
+            </a:r>
+          </a:p>
+          <a:p>
+            <a:pPr lvl="0"/>
+            <a:r>
+              <a:rPr/>
+              <a:t>Critério de sucesso: cada operação tem que sair de um comando real, não de uma afirmação</a:t>
+            </a:r>
+          </a:p>
+          <a:p>
+            <a:pPr lvl="0"/>
+            <a:r>
+              <a:rPr/>
+              <a:t>Distinguir o tempo todo </a:t>
+            </a:r>
+            <a:r>
+              <a:rPr b="1"/>
+              <a:t>4 “ciclos de vida” diferentes</a:t>
+            </a:r>
+            <a:r>
+              <a:rPr/>
+              <a:t>: Kubernetes, Nephio/orquestração, O2 IMS, e NF O-RAN real (este último — nunca demonstrado, e digo isso com todas as letras)</a:t>
+            </a:r>
+          </a:p>
+        </p:txBody>
+      </p:sp>
+    </p:spTree>
+  </p:cSld>
+</p:sld>
+</file>
+
+<file path=ppt/slides/slide20.xml><?xml version="1.0" encoding="utf-8"?>
+<p:sld xmlns:a="http://schemas.openxmlformats.org/drawingml/2006/main" xmlns:r="http://schemas.openxmlformats.org/officeDocument/2006/relationships" xmlns:p="http://schemas.openxmlformats.org/presentationml/2006/main">
+  <p:cSld>
+    <p:spTree>
+      <p:nvGrpSpPr>
+        <p:cNvPr id="1" name=""/>
+        <p:cNvGrpSpPr/>
+        <p:nvPr/>
+      </p:nvGrpSpPr>
+      <p:grpSpPr>
+        <a:xfrm>
+          <a:off x="0" y="0"/>
+          <a:ext cx="0" cy="0"/>
+          <a:chOff x="0" y="0"/>
+          <a:chExt cx="0" cy="0"/>
+        </a:xfrm>
+      </p:grpSpPr>
+      <p:sp>
+        <p:nvSpPr>
+          <p:cNvPr id="2" name="Title 1"/>
+          <p:cNvSpPr>
+            <a:spLocks noGrp="1"/>
+          </p:cNvSpPr>
+          <p:nvPr>
+            <p:ph type="title"/>
+          </p:nvPr>
+        </p:nvSpPr>
+        <p:spPr/>
+        <p:txBody>
+          <a:bodyPr/>
+          <a:lstStyle/>
+          <a:p>
+            <a:pPr lvl="0" indent="0" marL="0">
+              <a:buNone/>
+            </a:pPr>
+            <a:r>
+              <a:rPr/>
+              <a:t>O que ficou de fora na entrega original</a:t>
+            </a:r>
+          </a:p>
+        </p:txBody>
+      </p:sp>
+      <p:sp>
+        <p:nvSpPr>
+          <p:cNvPr id="3" name="Content Placeholder 2"/>
+          <p:cNvSpPr>
+            <a:spLocks noGrp="1"/>
+          </p:cNvSpPr>
+          <p:nvPr>
+            <p:ph idx="1"/>
+          </p:nvPr>
+        </p:nvSpPr>
+        <p:spPr/>
+        <p:txBody>
+          <a:bodyPr/>
+          <a:lstStyle/>
+          <a:p>
+            <a:pPr lvl="0"/>
+            <a:r>
+              <a:rPr b="1"/>
+              <a:t>Sem GitOps contínuo no </a:t>
+            </a:r>
+            <a:r>
+              <a:rPr b="1">
+                <a:latin typeface="Courier"/>
+              </a:rPr>
+              <a:t>o-cloud-1</a:t>
+            </a:r>
+            <a:r>
+              <a:rPr/>
+              <a:t> — entrega via </a:t>
+            </a:r>
+            <a:r>
+              <a:rPr>
+                <a:latin typeface="Courier"/>
+              </a:rPr>
+              <a:t>kpt live apply</a:t>
+            </a:r>
+            <a:r>
+              <a:rPr/>
+              <a:t> sob demanda, não um </a:t>
+            </a:r>
+            <a:r>
+              <a:rPr>
+                <a:latin typeface="Courier"/>
+              </a:rPr>
+              <a:t>RootSync</a:t>
+            </a:r>
+            <a:r>
+              <a:rPr/>
+              <a:t> observando o repositório continuamente</a:t>
+            </a:r>
+          </a:p>
+          <a:p>
+            <a:pPr lvl="0"/>
+            <a:r>
+              <a:rPr b="1"/>
+              <a:t>Sem monitoramento por métrica</a:t>
+            </a:r>
+            <a:r>
+              <a:rPr/>
+              <a:t> — só </a:t>
+            </a:r>
+            <a:r>
+              <a:rPr>
+                <a:latin typeface="Courier"/>
+              </a:rPr>
+              <a:t>docker stats</a:t>
+            </a:r>
+            <a:r>
+              <a:rPr/>
+              <a:t>/eventos, sem </a:t>
+            </a:r>
+            <a:r>
+              <a:rPr>
+                <a:latin typeface="Courier"/>
+              </a:rPr>
+              <a:t>metrics-server</a:t>
+            </a:r>
+          </a:p>
+          <a:p>
+            <a:pPr lvl="0"/>
+            <a:r>
+              <a:rPr b="1">
+                <a:latin typeface="Courier"/>
+              </a:rPr>
+              <a:t>cell_id</a:t>
+            </a:r>
+            <a:r>
+              <a:rPr b="1"/>
+              <a:t> não propagava de volta ao pacote</a:t>
+            </a:r>
+            <a:r>
+              <a:rPr/>
+              <a:t> — mudança via </a:t>
+            </a:r>
+            <a:r>
+              <a:rPr>
+                <a:latin typeface="Courier"/>
+              </a:rPr>
+              <a:t>/config</a:t>
+            </a:r>
+            <a:r>
+              <a:rPr/>
+              <a:t> e via pacote eram caminhos independentes</a:t>
+            </a:r>
+          </a:p>
+          <a:p>
+            <a:pPr lvl="0"/>
+            <a:r>
+              <a:rPr b="1"/>
+              <a:t>Sem O1, sem NF real, sem Non-RT RIC/rApp, sem xApp/E2</a:t>
+            </a:r>
+            <a:r>
+              <a:rPr/>
+              <a:t> — fronteiras já mapeadas na Parte 1</a:t>
+            </a:r>
+          </a:p>
+        </p:txBody>
+      </p:sp>
+    </p:spTree>
+  </p:cSld>
+</p:sld>
+</file>
+
+<file path=ppt/slides/slide21.xml><?xml version="1.0" encoding="utf-8"?>
+<p:sld xmlns:a="http://schemas.openxmlformats.org/drawingml/2006/main" xmlns:r="http://schemas.openxmlformats.org/officeDocument/2006/relationships" xmlns:p="http://schemas.openxmlformats.org/presentationml/2006/main">
+  <p:cSld>
+    <p:spTree>
+      <p:nvGrpSpPr>
+        <p:cNvPr id="1" name=""/>
+        <p:cNvGrpSpPr/>
+        <p:nvPr/>
+      </p:nvGrpSpPr>
+      <p:grpSpPr>
+        <a:xfrm>
+          <a:off x="0" y="0"/>
+          <a:ext cx="0" cy="0"/>
+          <a:chOff x="0" y="0"/>
+          <a:chExt cx="0" cy="0"/>
+        </a:xfrm>
+      </p:grpSpPr>
+      <p:sp>
+        <p:nvSpPr>
+          <p:cNvPr id="2" name="Title 1"/>
+          <p:cNvSpPr>
+            <a:spLocks noGrp="1"/>
+          </p:cNvSpPr>
+          <p:nvPr>
+            <p:ph type="title"/>
+          </p:nvPr>
+        </p:nvSpPr>
+        <p:spPr/>
+        <p:txBody>
+          <a:bodyPr/>
+          <a:lstStyle/>
+          <a:p>
+            <a:pPr lvl="0" indent="0" marL="0">
+              <a:buNone/>
+            </a:pPr>
+            <a:r>
+              <a:rPr/>
+              <a:t>Por que as melhorias pós-entrega</a:t>
+            </a:r>
+          </a:p>
+        </p:txBody>
+      </p:sp>
+      <p:sp>
+        <p:nvSpPr>
+          <p:cNvPr id="3" name="Content Placeholder 2"/>
+          <p:cNvSpPr>
+            <a:spLocks noGrp="1"/>
+          </p:cNvSpPr>
+          <p:nvPr>
+            <p:ph idx="1"/>
+          </p:nvPr>
+        </p:nvSpPr>
+        <p:spPr/>
+        <p:txBody>
+          <a:bodyPr/>
+          <a:lstStyle/>
+          <a:p>
+            <a:pPr lvl="0"/>
+            <a:r>
+              <a:rPr/>
+              <a:t>Depois da entrega, revisei com o avaliador: “a parte de SMO foi bem implementada? O1/O2/A1 fazem sentido? Vale simular um xApp ou rApp?”</a:t>
+            </a:r>
+          </a:p>
+          <a:p>
+            <a:pPr lvl="0"/>
+            <a:r>
+              <a:rPr/>
+              <a:t>Decisão registrada: </a:t>
+            </a:r>
+            <a:r>
+              <a:rPr b="1"/>
+              <a:t>rApp faz sentido</a:t>
+            </a:r>
+            <a:r>
+              <a:rPr/>
+              <a:t> (roda no Non-RT RIC, parte do próprio SMO) — </a:t>
+            </a:r>
+            <a:r>
+              <a:rPr b="1"/>
+              <a:t>xApp não</a:t>
+            </a:r>
+            <a:r>
+              <a:rPr/>
+              <a:t> (exigiria Near-RT RIC + protocolo E2 real, que as CNFs não implementam — seria inventar uma interface inexistente)</a:t>
+            </a:r>
+          </a:p>
+          <a:p>
+            <a:pPr lvl="0"/>
+            <a:r>
+              <a:rPr/>
+              <a:t>Não existe “A2” na especificação O-RAN — as interfaces reais do lado RIC são </a:t>
+            </a:r>
+            <a:r>
+              <a:rPr b="1"/>
+              <a:t>A1</a:t>
+            </a:r>
+            <a:r>
+              <a:rPr/>
+              <a:t> e </a:t>
+            </a:r>
+            <a:r>
+              <a:rPr b="1"/>
+              <a:t>E2</a:t>
+            </a:r>
+          </a:p>
+          <a:p>
+            <a:pPr lvl="0"/>
+            <a:r>
+              <a:rPr/>
+              <a:t>Resultado: 4 melhorias, todas dentro do mesmo orçamento de 16 GB, cada uma com evidência real</a:t>
+            </a:r>
+          </a:p>
+        </p:txBody>
+      </p:sp>
+    </p:spTree>
+  </p:cSld>
+</p:sld>
+</file>
+
+<file path=ppt/slides/slide22.xml><?xml version="1.0" encoding="utf-8"?>
+<p:sld xmlns:a="http://schemas.openxmlformats.org/drawingml/2006/main" xmlns:r="http://schemas.openxmlformats.org/officeDocument/2006/relationships" xmlns:p="http://schemas.openxmlformats.org/presentationml/2006/main">
+  <p:cSld>
+    <p:spTree>
+      <p:nvGrpSpPr>
+        <p:cNvPr id="1" name=""/>
+        <p:cNvGrpSpPr/>
+        <p:nvPr/>
+      </p:nvGrpSpPr>
+      <p:grpSpPr>
+        <a:xfrm>
+          <a:off x="0" y="0"/>
+          <a:ext cx="0" cy="0"/>
+          <a:chOff x="0" y="0"/>
+          <a:chExt cx="0" cy="0"/>
+        </a:xfrm>
+      </p:grpSpPr>
+      <p:sp>
+        <p:nvSpPr>
+          <p:cNvPr id="2" name="Title 1"/>
+          <p:cNvSpPr>
+            <a:spLocks noGrp="1"/>
+          </p:cNvSpPr>
+          <p:nvPr>
+            <p:ph type="title"/>
+          </p:nvPr>
+        </p:nvSpPr>
+        <p:spPr>
+          <a:xfrm>
+            <a:off x="457201" y="204787"/>
+            <a:ext cx="3008313" cy="871538"/>
+          </a:xfrm>
+        </p:spPr>
+        <p:txBody>
+          <a:bodyPr/>
+          <a:lstStyle/>
+          <a:p>
+            <a:pPr lvl="0" indent="0" marL="0">
+              <a:buNone/>
+            </a:pPr>
+            <a:r>
+              <a:rPr/>
+              <a:t>Melhoria 1 — metrics-server (Monitoring)</a:t>
+            </a:r>
+          </a:p>
+        </p:txBody>
+      </p:sp>
+      <p:sp>
+        <p:nvSpPr>
+          <p:cNvPr id="4" name="Text Placeholder 3"/>
+          <p:cNvSpPr>
+            <a:spLocks noGrp="1"/>
+          </p:cNvSpPr>
+          <p:nvPr>
+            <p:ph idx="2" sz="half" type="body"/>
+          </p:nvPr>
+        </p:nvSpPr>
+        <p:spPr/>
+        <p:txBody>
+          <a:bodyPr/>
+          <a:lstStyle/>
+          <a:p>
+            <a:pPr lvl="0"/>
+            <a:r>
+              <a:rPr/>
+              <a:t>Instalado no </a:t>
+            </a:r>
+            <a:r>
+              <a:rPr>
+                <a:latin typeface="Courier"/>
+              </a:rPr>
+              <a:t>o-cloud-1</a:t>
+            </a:r>
+            <a:r>
+              <a:rPr/>
+              <a:t>: manifesto oficial + patch </a:t>
             </a:r>
             <a:r>
               <a:rPr>
@@ -4878,14 +8095,18 @@
             <a:pPr lvl="0"/>
             <a:r>
               <a:rPr/>
-              <a:t>Fecha “Monitoring: não incluído nativamente” da tabela SMO×Nephio</a:t>
-            </a:r>
-          </a:p>
-          <a:p>
-            <a:pPr lvl="0"/>
-            <a:r>
-              <a:rPr/>
-              <a:t>Custo: ~15 MiB de RAM</a:t>
+              <a:t>Fecha “Monitoring: não incluído nativamente” da tabela SMO×Nephio da Parte 1</a:t>
+            </a:r>
+          </a:p>
+          <a:p>
+            <a:pPr lvl="0"/>
+            <a:r>
+              <a:rPr/>
+              <a:t>Custo: </a:t>
+            </a:r>
+            <a:r>
+              <a:rPr b="1"/>
+              <a:t>~15 MiB de RAM</a:t>
             </a:r>
           </a:p>
         </p:txBody>
@@ -4957,7 +8178,7 @@
 </p:sld>
 </file>
 
-<file path=ppt/slides/slide11.xml><?xml version="1.0" encoding="utf-8"?>
+<file path=ppt/slides/slide23.xml><?xml version="1.0" encoding="utf-8"?>
 <p:sld xmlns:a="http://schemas.openxmlformats.org/drawingml/2006/main" xmlns:r="http://schemas.openxmlformats.org/officeDocument/2006/relationships" xmlns:p="http://schemas.openxmlformats.org/presentationml/2006/main">
   <p:cSld>
     <p:spTree>
@@ -4994,7 +8215,7 @@
             </a:pPr>
             <a:r>
               <a:rPr/>
-              <a:t>Melhoria 2 — RootSync contínuo</a:t>
+              <a:t>Melhoria 2 — RootSync contínuo (Orchestration)</a:t>
             </a:r>
           </a:p>
         </p:txBody>
@@ -5017,7 +8238,15 @@
             <a:pPr lvl="0"/>
             <a:r>
               <a:rPr/>
-              <a:t>Config Sync no próprio </a:t>
+              <a:t>Config Sync instalado no </a:t>
+            </a:r>
+            <a:r>
+              <a:rPr b="1"/>
+              <a:t>próprio</a:t>
+            </a:r>
+            <a:r>
+              <a:rPr/>
+              <a:t> </a:t>
             </a:r>
             <a:r>
               <a:rPr>
@@ -5027,7 +8256,17 @@
             </a:r>
             <a:r>
               <a:rPr/>
-              <a:t>, apontando para o repo </a:t>
+              <a:t> (mesmo pacote kpt oficial do management cluster), com </a:t>
+            </a:r>
+            <a:r>
+              <a:rPr>
+                <a:latin typeface="Courier"/>
+              </a:rPr>
+              <a:t>RootSync</a:t>
+            </a:r>
+            <a:r>
+              <a:rPr/>
+              <a:t> apontando pro repositório </a:t>
             </a:r>
             <a:r>
               <a:rPr>
@@ -5040,22 +8279,54 @@
             <a:pPr lvl="0"/>
             <a:r>
               <a:rPr/>
-              <a:t>Fecha “sem GitOps contínuo” — não depende mais de rodar o script manualmente</a:t>
+              <a:t>Fecha “sem GitOps contínuo” — a entrega deixa de depender de rodar o script manualmente</a:t>
             </a:r>
           </a:p>
           <a:p>
             <a:pPr lvl="0"/>
             <a:r>
               <a:rPr b="1"/>
-              <a:t>Prova real:</a:t>
-            </a:r>
-            <a:r>
-              <a:rPr/>
-              <a:t> publiquei v3 no Porch sem tocar no cluster — aplicado sozinho em </a:t>
+              <a:t>Prova real de continuidade:</a:t>
+            </a:r>
+            <a:r>
+              <a:rPr/>
+              <a:t> publiquei v3 no Porch </a:t>
+            </a:r>
+            <a:r>
+              <a:rPr b="1"/>
+              <a:t>sem tocar no cluster</a:t>
+            </a:r>
+            <a:r>
+              <a:rPr/>
+              <a:t> — aplicado sozinho em </a:t>
             </a:r>
             <a:r>
               <a:rPr b="1"/>
               <a:t>19 s</a:t>
+            </a:r>
+            <a:r>
+              <a:rPr/>
+              <a:t> (commit </a:t>
+            </a:r>
+            <a:r>
+              <a:rPr>
+                <a:latin typeface="Courier"/>
+              </a:rPr>
+              <a:t>1bdae53d</a:t>
+            </a:r>
+            <a:r>
+              <a:rPr/>
+              <a:t> → </a:t>
+            </a:r>
+            <a:r>
+              <a:rPr>
+                <a:latin typeface="Courier"/>
+              </a:rPr>
+              <a:t>oran-cu.nf-version=v3</a:t>
+            </a:r>
+            <a:r>
+              <a:rPr/>
+              <a:t>)</a:t>
             </a:r>
           </a:p>
         </p:txBody>
@@ -5065,7 +8336,7 @@
 </p:sld>
 </file>
 
-<file path=ppt/slides/slide12.xml><?xml version="1.0" encoding="utf-8"?>
+<file path=ppt/slides/slide24.xml><?xml version="1.0" encoding="utf-8"?>
 <p:sld xmlns:a="http://schemas.openxmlformats.org/drawingml/2006/main" xmlns:r="http://schemas.openxmlformats.org/officeDocument/2006/relationships" xmlns:p="http://schemas.openxmlformats.org/presentationml/2006/main">
   <p:cSld>
     <p:spTree>
@@ -5107,7 +8378,7 @@
             </a:pPr>
             <a:r>
               <a:rPr/>
-              <a:t>Melhoria 3 — config-bridge</a:t>
+              <a:t>Melhoria 3 — config-bridge (Configuration)</a:t>
             </a:r>
           </a:p>
         </p:txBody>
@@ -5140,14 +8411,42 @@
             </a:r>
             <a:r>
               <a:rPr/>
-              <a:t> (NF) → pacote: detecta drift e comita a correção</a:t>
-            </a:r>
-          </a:p>
-          <a:p>
-            <a:pPr lvl="0"/>
-            <a:r>
-              <a:rPr/>
-              <a:t>RootSync (melhoria 2) reconcilia o resto sozinho</a:t>
+              <a:t> (NF) → pacote: um poller detecta drift entre o </a:t>
+            </a:r>
+            <a:r>
+              <a:rPr>
+                <a:latin typeface="Courier"/>
+              </a:rPr>
+              <a:t>/config</a:t>
+            </a:r>
+            <a:r>
+              <a:rPr/>
+              <a:t> ao vivo e o ConfigMap publicado, e comita a correção — o RootSync (Melhoria 2) reconcilia o resto sozinho</a:t>
+            </a:r>
+          </a:p>
+          <a:p>
+            <a:pPr lvl="0"/>
+            <a:r>
+              <a:rPr/>
+              <a:t>Pré-requisito: a config de domínio (</a:t>
+            </a:r>
+            <a:r>
+              <a:rPr>
+                <a:latin typeface="Courier"/>
+              </a:rPr>
+              <a:t>cell_id</a:t>
+            </a:r>
+            <a:r>
+              <a:rPr/>
+              <a:t> etc.) precisou passar a vir do ConfigMap — antes estava </a:t>
+            </a:r>
+            <a:r>
+              <a:rPr i="1"/>
+              <a:t>hardcoded</a:t>
+            </a:r>
+            <a:r>
+              <a:rPr/>
+              <a:t> no código da NF, e não havia nada real para sincronizar</a:t>
             </a:r>
           </a:p>
         </p:txBody>
@@ -5219,7 +8518,7 @@
 </p:sld>
 </file>
 
-<file path=ppt/slides/slide13.xml><?xml version="1.0" encoding="utf-8"?>
+<file path=ppt/slides/slide25.xml><?xml version="1.0" encoding="utf-8"?>
 <p:sld xmlns:a="http://schemas.openxmlformats.org/drawingml/2006/main" xmlns:r="http://schemas.openxmlformats.org/officeDocument/2006/relationships" xmlns:p="http://schemas.openxmlformats.org/presentationml/2006/main">
   <p:cSld>
     <p:spTree>
@@ -5261,7 +8560,7 @@
             </a:pPr>
             <a:r>
               <a:rPr/>
-              <a:t>Melhoria 4 — rapp-autoscale (Non-RT RIC)</a:t>
+              <a:t>Melhoria 4 — rapp-autoscale (Non-RT RIC / SMO)</a:t>
             </a:r>
           </a:p>
         </p:txBody>
@@ -5284,22 +8583,17 @@
             <a:pPr lvl="0"/>
             <a:r>
               <a:rPr/>
-              <a:t>Decisão registrada: </a:t>
-            </a:r>
-            <a:r>
-              <a:rPr b="1"/>
-              <a:t>rApp sim, xApp não</a:t>
-            </a:r>
-            <a:r>
-              <a:rPr/>
-              <a:t> — rApp roda no Non-RT RIC, parte do próprio SMO; xApp exigiria E2/Near-RT RIC reais, que este laboratório não implementa</a:t>
-            </a:r>
-          </a:p>
-          <a:p>
-            <a:pPr lvl="0"/>
-            <a:r>
-              <a:rPr/>
-              <a:t>Poll de 30s (não-tempo-real, por definição O-RAN) sobre </a:t>
+              <a:t>Poller Python (não um operador </a:t>
+            </a:r>
+            <a:r>
+              <a:rPr>
+                <a:latin typeface="Courier"/>
+              </a:rPr>
+              <a:t>kopf</a:t>
+            </a:r>
+            <a:r>
+              <a:rPr/>
+              <a:t> — o estado observado não é um recurso do Kubernetes) que lê a taxa de requisições de </a:t>
             </a:r>
             <a:r>
               <a:rPr>
@@ -5309,13 +8603,70 @@
             </a:r>
             <a:r>
               <a:rPr/>
-              <a:t> → decide escala via </a:t>
+              <a:t> a cada </a:t>
+            </a:r>
+            <a:r>
+              <a:rPr b="1"/>
+              <a:t>30 s</a:t>
+            </a:r>
+          </a:p>
+          <a:p>
+            <a:pPr lvl="0"/>
+            <a:r>
+              <a:rPr/>
+              <a:t>Deliberadamente </a:t>
+            </a:r>
+            <a:r>
+              <a:rPr b="1"/>
+              <a:t>não-tempo-real</a:t>
+            </a:r>
+            <a:r>
+              <a:rPr/>
+              <a:t> — O-RAN define rApp como &gt;1 s, xApp como 10 ms–1 s; o próprio intervalo marca essa distinção na prática</a:t>
+            </a:r>
+          </a:p>
+          <a:p>
+            <a:pPr lvl="0"/>
+            <a:r>
+              <a:rPr/>
+              <a:t>Política: </a:t>
+            </a:r>
+            <a:r>
+              <a:rPr>
+                <a:latin typeface="Courier"/>
+              </a:rPr>
+              <a:t>rate &gt; 1,0 req/s</a:t>
+            </a:r>
+            <a:r>
+              <a:rPr/>
+              <a:t> → escala pra cima; </a:t>
+            </a:r>
+            <a:r>
+              <a:rPr>
+                <a:latin typeface="Courier"/>
+              </a:rPr>
+              <a:t>rate &lt; 0,1 req/s</a:t>
+            </a:r>
+            <a:r>
+              <a:rPr/>
+              <a:t> → escala pra baixo</a:t>
+            </a:r>
+          </a:p>
+          <a:p>
+            <a:pPr lvl="0"/>
+            <a:r>
+              <a:rPr/>
+              <a:t>Ação executada via PATCH direto no </a:t>
             </a:r>
             <a:r>
               <a:rPr>
                 <a:latin typeface="Courier"/>
               </a:rPr>
               <a:t>/scale</a:t>
+            </a:r>
+            <a:r>
+              <a:rPr/>
+              <a:t> — simplificação documentada (não publica uma policy A1, porque não há Near-RT RIC real neste laboratório)</a:t>
             </a:r>
           </a:p>
         </p:txBody>
@@ -5377,7 +8728,7 @@
             </a:pPr>
             <a:r>
               <a:rPr/>
-              <a:t>Decisão real do rApp: rate=10.27 req/s dispara scale-up 1→2, e o achado do conflito com o GitOps</a:t>
+              <a:t>Decisão real do rApp: rate=10.27 req/s dispara scale-up 1→2</a:t>
             </a:r>
           </a:p>
         </p:txBody>
@@ -5387,7 +8738,7 @@
 </p:sld>
 </file>
 
-<file path=ppt/slides/slide14.xml><?xml version="1.0" encoding="utf-8"?>
+<file path=ppt/slides/slide26.xml><?xml version="1.0" encoding="utf-8"?>
 <p:sld xmlns:a="http://schemas.openxmlformats.org/drawingml/2006/main" xmlns:r="http://schemas.openxmlformats.org/officeDocument/2006/relationships" xmlns:p="http://schemas.openxmlformats.org/presentationml/2006/main">
   <p:cSld>
     <p:spTree>
@@ -5414,6 +8765,199 @@
             <p:ph type="title"/>
           </p:nvPr>
         </p:nvSpPr>
+        <p:spPr/>
+        <p:txBody>
+          <a:bodyPr/>
+          <a:lstStyle/>
+          <a:p>
+            <a:pPr lvl="0" indent="0" marL="0">
+              <a:buNone/>
+            </a:pPr>
+            <a:r>
+              <a:rPr/>
+              <a:t>Achado real — conflito GitOps × controle imperativo</a:t>
+            </a:r>
+          </a:p>
+        </p:txBody>
+      </p:sp>
+      <p:sp>
+        <p:nvSpPr>
+          <p:cNvPr id="3" name="Content Placeholder 2"/>
+          <p:cNvSpPr>
+            <a:spLocks noGrp="1"/>
+          </p:cNvSpPr>
+          <p:nvPr>
+            <p:ph idx="1"/>
+          </p:nvPr>
+        </p:nvSpPr>
+        <p:spPr/>
+        <p:txBody>
+          <a:bodyPr/>
+          <a:lstStyle/>
+          <a:p>
+            <a:pPr lvl="0"/>
+            <a:r>
+              <a:rPr/>
+              <a:t>O PATCH </a:t>
+            </a:r>
+            <a:r>
+              <a:rPr>
+                <a:latin typeface="Courier"/>
+              </a:rPr>
+              <a:t>/scale</a:t>
+            </a:r>
+            <a:r>
+              <a:rPr/>
+              <a:t> aplicava </a:t>
+            </a:r>
+            <a:r>
+              <a:rPr>
+                <a:latin typeface="Courier"/>
+              </a:rPr>
+              <a:t>replicas:2</a:t>
+            </a:r>
+            <a:r>
+              <a:rPr/>
+              <a:t> com sucesso (</a:t>
+            </a:r>
+            <a:r>
+              <a:rPr>
+                <a:latin typeface="Courier"/>
+              </a:rPr>
+              <a:t>200</a:t>
+            </a:r>
+            <a:r>
+              <a:rPr/>
+              <a:t>) — mas a réplica </a:t>
+            </a:r>
+            <a:r>
+              <a:rPr b="1"/>
+              <a:t>voltava pra 1</a:t>
+            </a:r>
+            <a:r>
+              <a:rPr/>
+              <a:t> segundos depois</a:t>
+            </a:r>
+          </a:p>
+          <a:p>
+            <a:pPr lvl="0"/>
+            <a:r>
+              <a:rPr b="1"/>
+              <a:t>Causa raiz:</a:t>
+            </a:r>
+            <a:r>
+              <a:rPr/>
+              <a:t> o pacote no Git ainda declarava </a:t>
+            </a:r>
+            <a:r>
+              <a:rPr>
+                <a:latin typeface="Courier"/>
+              </a:rPr>
+              <a:t>replicas: 1</a:t>
+            </a:r>
+            <a:r>
+              <a:rPr/>
+              <a:t>, e o RootSync contínuo (Melhoria 2) reconciliava de volta a cada ciclo — duas autoridades de orquestração competindo pelo mesmo campo</a:t>
+            </a:r>
+          </a:p>
+          <a:p>
+            <a:pPr lvl="0"/>
+            <a:r>
+              <a:rPr b="1"/>
+              <a:t>Correção:</a:t>
+            </a:r>
+            <a:r>
+              <a:rPr/>
+              <a:t> campo </a:t>
+            </a:r>
+            <a:r>
+              <a:rPr>
+                <a:latin typeface="Courier"/>
+              </a:rPr>
+              <a:t>replicas</a:t>
+            </a:r>
+            <a:r>
+              <a:rPr/>
+              <a:t> removido do pacote — como </a:t>
+            </a:r>
+            <a:r>
+              <a:rPr>
+                <a:latin typeface="Courier"/>
+              </a:rPr>
+              <a:t>kpt live apply</a:t>
+            </a:r>
+            <a:r>
+              <a:rPr/>
+              <a:t> e o Config Sync usam </a:t>
+            </a:r>
+            <a:r>
+              <a:rPr i="1"/>
+              <a:t>server-side apply</a:t>
+            </a:r>
+            <a:r>
+              <a:rPr/>
+              <a:t>, nenhum dos dois reivindica o campo quando ausente</a:t>
+            </a:r>
+          </a:p>
+          <a:p>
+            <a:pPr lvl="0"/>
+            <a:r>
+              <a:rPr/>
+              <a:t>Mesmo padrão usado na vida real quando um </a:t>
+            </a:r>
+            <a:r>
+              <a:rPr b="1"/>
+              <a:t>HPA coexiste com GitOps</a:t>
+            </a:r>
+            <a:r>
+              <a:rPr/>
+              <a:t> (Argo CD chama isso de </a:t>
+            </a:r>
+            <a:r>
+              <a:rPr>
+                <a:latin typeface="Courier"/>
+              </a:rPr>
+              <a:t>ignoreDifferences</a:t>
+            </a:r>
+            <a:r>
+              <a:rPr/>
+              <a:t>)</a:t>
+            </a:r>
+          </a:p>
+        </p:txBody>
+      </p:sp>
+    </p:spTree>
+  </p:cSld>
+</p:sld>
+</file>
+
+<file path=ppt/slides/slide27.xml><?xml version="1.0" encoding="utf-8"?>
+<p:sld xmlns:a="http://schemas.openxmlformats.org/drawingml/2006/main" xmlns:r="http://schemas.openxmlformats.org/officeDocument/2006/relationships" xmlns:p="http://schemas.openxmlformats.org/presentationml/2006/main">
+  <p:cSld>
+    <p:spTree>
+      <p:nvGrpSpPr>
+        <p:cNvPr id="1" name=""/>
+        <p:cNvGrpSpPr/>
+        <p:nvPr/>
+      </p:nvGrpSpPr>
+      <p:grpSpPr>
+        <a:xfrm>
+          <a:off x="0" y="0"/>
+          <a:ext cx="0" cy="0"/>
+          <a:chOff x="0" y="0"/>
+          <a:chExt cx="0" cy="0"/>
+        </a:xfrm>
+      </p:grpSpPr>
+      <p:sp>
+        <p:nvSpPr>
+          <p:cNvPr id="2" name="Title 1"/>
+          <p:cNvSpPr>
+            <a:spLocks noGrp="1"/>
+          </p:cNvSpPr>
+          <p:nvPr>
+            <p:ph type="title"/>
+          </p:nvPr>
+        </p:nvSpPr>
         <p:spPr>
           <a:xfrm>
             <a:off x="457201" y="204787"/>
@@ -5429,7 +8973,7 @@
             </a:pPr>
             <a:r>
               <a:rPr/>
-              <a:t>Status honesto e uso de RAM</a:t>
+              <a:t>Status honesto e uso de RAM final</a:t>
             </a:r>
           </a:p>
         </p:txBody>
@@ -5452,22 +8996,42 @@
             <a:pPr lvl="0"/>
             <a:r>
               <a:rPr/>
-              <a:t>Reverificação final do rApp </a:t>
+              <a:t>Reverificação final do rApp (confirmar que o scale-up permanece estável após a correção) </a:t>
             </a:r>
             <a:r>
               <a:rPr b="1"/>
-              <a:t>pendente</a:t>
-            </a:r>
-            <a:r>
-              <a:rPr/>
-              <a:t> — ambiente sofreu suspensões repetidas do host durante os testes finais desta sessão, não um problema de lógica</a:t>
-            </a:r>
-          </a:p>
-          <a:p>
-            <a:pPr lvl="0"/>
-            <a:r>
-              <a:rPr/>
-              <a:t>Nenhuma evidência foi forjada para cobrir essa lacuna — documentado com todas as letras</a:t>
+              <a:t>não foi concluída</a:t>
+            </a:r>
+            <a:r>
+              <a:rPr/>
+              <a:t> — o ambiente WSL2/Docker sofreu suspensões repetidas do host durante os testes finais desta sessão (containers de ambos os clusters caindo simultaneamente)</a:t>
+            </a:r>
+          </a:p>
+          <a:p>
+            <a:pPr lvl="0"/>
+            <a:r>
+              <a:rPr b="1"/>
+              <a:t>Nenhuma evidência foi forjada</a:t>
+            </a:r>
+            <a:r>
+              <a:rPr/>
+              <a:t> para cobrir essa lacuna — registrado com todas as letras, reproduzível via </a:t>
+            </a:r>
+            <a:r>
+              <a:rPr>
+                <a:latin typeface="Courier"/>
+              </a:rPr>
+              <a:t>scripts/13-rapp-autoscale.sh</a:t>
+            </a:r>
+            <a:r>
+              <a:rPr/>
+              <a:t> + </a:t>
+            </a:r>
+            <a:r>
+              <a:rPr>
+                <a:latin typeface="Courier"/>
+              </a:rPr>
+              <a:t>scripts/14-rapp-load-test.sh</a:t>
             </a:r>
           </a:p>
         </p:txBody>
@@ -5539,7 +9103,7 @@
 </p:sld>
 </file>
 
-<file path=ppt/slides/slide15.xml><?xml version="1.0" encoding="utf-8"?>
+<file path=ppt/slides/slide28.xml><?xml version="1.0" encoding="utf-8"?>
 <p:sld xmlns:a="http://schemas.openxmlformats.org/drawingml/2006/main" xmlns:r="http://schemas.openxmlformats.org/officeDocument/2006/relationships" xmlns:p="http://schemas.openxmlformats.org/presentationml/2006/main">
   <p:cSld>
     <p:spTree>
@@ -5576,7 +9140,7 @@
             </a:pPr>
             <a:r>
               <a:rPr/>
-              <a:t>Conclusão</a:t>
+              <a:t>O que foi implementado × o que ficou de fora</a:t>
             </a:r>
           </a:p>
         </p:txBody>
@@ -5598,21 +9162,33 @@
           <a:p>
             <a:pPr lvl="0"/>
             <a:r>
-              <a:rPr/>
-              <a:t>Nephio orquestrou o ciclo de vida completo de CNFs com seus mecanismos nativos — não </a:t>
+              <a:rPr b="1"/>
+              <a:t>Implementado e evidenciado:</a:t>
+            </a:r>
+            <a:r>
+              <a:rPr/>
+              <a:t> provisioning (O2 IMS + Porch/kpt), lifecycle Kubernetes completo (6 experimentos), GitOps contínuo, monitoramento real, sincronização </a:t>
             </a:r>
             <a:r>
               <a:rPr>
                 <a:latin typeface="Courier"/>
               </a:rPr>
-              <a:t>kubectl apply</a:t>
-            </a:r>
-          </a:p>
-          <a:p>
-            <a:pPr lvl="0"/>
-            <a:r>
-              <a:rPr/>
-              <a:t>4 melhorias pós-entrega fecharam Monitoring, GitOps contínuo, e parte de Non-RT RIC/rApp</a:t>
+              <a:t>/config</a:t>
+            </a:r>
+            <a:r>
+              <a:rPr/>
+              <a:t> → pacote (parcial), uma primeira função de Non-RT RIC/rApp</a:t>
+            </a:r>
+          </a:p>
+          <a:p>
+            <a:pPr lvl="0"/>
+            <a:r>
+              <a:rPr b="1"/>
+              <a:t>Ficou de fora, deliberadamente:</a:t>
+            </a:r>
+            <a:r>
+              <a:rPr/>
+              <a:t> O1 (FCAPS via NETCONF/YANG), xApp/E2/Near-RT RIC, NF O-RAN real, federação FOCOM com SMO externo, telemetria O-RAN nativa (VES/PM Jobs)</a:t>
             </a:r>
           </a:p>
           <a:p>
@@ -5623,21 +9199,7 @@
             </a:r>
             <a:r>
               <a:rPr/>
-              <a:t> encontrados e corrigidos ao longo de toda a Parte 2</a:t>
-            </a:r>
-          </a:p>
-          <a:p>
-            <a:pPr lvl="0"/>
-            <a:r>
-              <a:rPr/>
-              <a:t>O que é abstração: as NFs, o O-Cloud, a federação FOCOM, o xApp (deliberadamente não simulado)</a:t>
-            </a:r>
-          </a:p>
-          <a:p>
-            <a:pPr lvl="0"/>
-            <a:r>
-              <a:rPr/>
-              <a:t>O que é real: Porch/kpt/RootSync, provisionamento O2 IMS, e agora monitoramento + um rApp funcional</a:t>
+              <a:t> encontrados e corrigidos ao longo de toda a Parte 2 — nenhum escondido</a:t>
             </a:r>
           </a:p>
         </p:txBody>
@@ -5647,7 +9209,7 @@
 </p:sld>
 </file>
 
-<file path=ppt/slides/slide2.xml><?xml version="1.0" encoding="utf-8"?>
+<file path=ppt/slides/slide29.xml><?xml version="1.0" encoding="utf-8"?>
 <p:sld xmlns:a="http://schemas.openxmlformats.org/drawingml/2006/main" xmlns:r="http://schemas.openxmlformats.org/officeDocument/2006/relationships" xmlns:p="http://schemas.openxmlformats.org/presentationml/2006/main">
   <p:cSld>
     <p:spTree>
@@ -5684,7 +9246,558 @@
             </a:pPr>
             <a:r>
               <a:rPr/>
-              <a:t>Arquitetura final</a:t>
+              <a:t>Conclusão</a:t>
+            </a:r>
+          </a:p>
+        </p:txBody>
+      </p:sp>
+      <p:sp>
+        <p:nvSpPr>
+          <p:cNvPr id="3" name="Content Placeholder 2"/>
+          <p:cNvSpPr>
+            <a:spLocks noGrp="1"/>
+          </p:cNvSpPr>
+          <p:nvPr>
+            <p:ph idx="1"/>
+          </p:nvPr>
+        </p:nvSpPr>
+        <p:spPr/>
+        <p:txBody>
+          <a:bodyPr/>
+          <a:lstStyle/>
+          <a:p>
+            <a:pPr lvl="0"/>
+            <a:r>
+              <a:rPr/>
+              <a:t>Nephio orquestrou o ciclo de vida completo de CNFs cloud-native — provisionamento, configuração, escala, atualização, recuperação e terminação — usando seus mecanismos nativos, não apenas </a:t>
+            </a:r>
+            <a:r>
+              <a:rPr>
+                <a:latin typeface="Courier"/>
+              </a:rPr>
+              <a:t>kubectl apply</a:t>
+            </a:r>
+          </a:p>
+          <a:p>
+            <a:pPr lvl="0"/>
+            <a:r>
+              <a:rPr/>
+              <a:t>As 4 melhorias pós-entrega evoluíram o laboratório de GitOps sob demanda para GitOps contínuo, monitoramento real, e uma primeira função de Non-RT RIC funcional</a:t>
+            </a:r>
+          </a:p>
+          <a:p>
+            <a:pPr lvl="0"/>
+            <a:r>
+              <a:rPr/>
+              <a:t>O que é abstração: as NFs, o O-Cloud, a federação FOCOM, o xApp (deliberadamente não simulado)</a:t>
+            </a:r>
+          </a:p>
+          <a:p>
+            <a:pPr lvl="0"/>
+            <a:r>
+              <a:rPr/>
+              <a:t>O que é real: Porch/kpt/RootSync, provisionamento O2 IMS, e agora monitoramento + um rApp funcional (com um achado genuíno sobre orquestração distribuída)</a:t>
+            </a:r>
+          </a:p>
+        </p:txBody>
+      </p:sp>
+    </p:spTree>
+  </p:cSld>
+</p:sld>
+</file>
+
+<file path=ppt/slides/slide3.xml><?xml version="1.0" encoding="utf-8"?>
+<p:sld xmlns:a="http://schemas.openxmlformats.org/drawingml/2006/main" xmlns:r="http://schemas.openxmlformats.org/officeDocument/2006/relationships" xmlns:p="http://schemas.openxmlformats.org/presentationml/2006/main">
+  <p:cSld>
+    <p:spTree>
+      <p:nvGrpSpPr>
+        <p:cNvPr id="1" name=""/>
+        <p:cNvGrpSpPr/>
+        <p:nvPr/>
+      </p:nvGrpSpPr>
+      <p:grpSpPr>
+        <a:xfrm>
+          <a:off x="0" y="0"/>
+          <a:ext cx="0" cy="0"/>
+          <a:chOff x="0" y="0"/>
+          <a:chExt cx="0" cy="0"/>
+        </a:xfrm>
+      </p:grpSpPr>
+      <p:sp>
+        <p:nvSpPr>
+          <p:cNvPr id="2" name="Title 1"/>
+          <p:cNvSpPr>
+            <a:spLocks noGrp="1"/>
+          </p:cNvSpPr>
+          <p:nvPr>
+            <p:ph type="title"/>
+          </p:nvPr>
+        </p:nvSpPr>
+        <p:spPr/>
+        <p:txBody>
+          <a:bodyPr/>
+          <a:lstStyle/>
+          <a:p>
+            <a:pPr lvl="0" indent="0" marL="0">
+              <a:buNone/>
+            </a:pPr>
+            <a:r>
+              <a:rPr/>
+              <a:t>Recapitulando a tese da Parte 1</a:t>
+            </a:r>
+          </a:p>
+        </p:txBody>
+      </p:sp>
+      <p:sp>
+        <p:nvSpPr>
+          <p:cNvPr id="3" name="Content Placeholder 2"/>
+          <p:cNvSpPr>
+            <a:spLocks noGrp="1"/>
+          </p:cNvSpPr>
+          <p:nvPr>
+            <p:ph idx="1"/>
+          </p:nvPr>
+        </p:nvSpPr>
+        <p:spPr/>
+        <p:txBody>
+          <a:bodyPr/>
+          <a:lstStyle/>
+          <a:p>
+            <a:pPr lvl="0" indent="0" marL="1270000">
+              <a:buNone/>
+            </a:pPr>
+            <a:r>
+              <a:rPr sz="2000"/>
+              <a:t>“Nephio is a cloud-native automation and orchestration platform that can implement or support functions associated with the SMO and O-Cloud management architecture.”</a:t>
+            </a:r>
+          </a:p>
+          <a:p>
+            <a:pPr lvl="0"/>
+            <a:r>
+              <a:rPr/>
+              <a:t>Nephio </a:t>
+            </a:r>
+            <a:r>
+              <a:rPr b="1"/>
+              <a:t>não é</a:t>
+            </a:r>
+            <a:r>
+              <a:rPr/>
+              <a:t> o SMO oficial da especificação O-RAN — é uma plataforma de automação cloud-native que implementa </a:t>
+            </a:r>
+            <a:r>
+              <a:rPr b="1"/>
+              <a:t>partes</a:t>
+            </a:r>
+            <a:r>
+              <a:rPr/>
+              <a:t> das funções do SMO</a:t>
+            </a:r>
+          </a:p>
+          <a:p>
+            <a:pPr lvl="0"/>
+            <a:r>
+              <a:rPr/>
+              <a:t>Forte em: provisioning de infraestrutura (O2 IMS), lifecycle de deployment Kubernetes</a:t>
+            </a:r>
+          </a:p>
+          <a:p>
+            <a:pPr lvl="0"/>
+            <a:r>
+              <a:rPr/>
+              <a:t>Fraco/ausente em: O1 (FCAPS via NETCONF/YANG), Non-RT RIC/A1, telemetria O-RAN nativa</a:t>
+            </a:r>
+          </a:p>
+          <a:p>
+            <a:pPr lvl="0"/>
+            <a:r>
+              <a:rPr/>
+              <a:t>Esta Parte 2 usa exatamente essa caracterização como roteiro dos experimentos</a:t>
+            </a:r>
+          </a:p>
+        </p:txBody>
+      </p:sp>
+    </p:spTree>
+  </p:cSld>
+</p:sld>
+</file>
+
+<file path=ppt/slides/slide4.xml><?xml version="1.0" encoding="utf-8"?>
+<p:sld xmlns:a="http://schemas.openxmlformats.org/drawingml/2006/main" xmlns:r="http://schemas.openxmlformats.org/officeDocument/2006/relationships" xmlns:p="http://schemas.openxmlformats.org/presentationml/2006/main">
+  <p:cSld>
+    <p:spTree>
+      <p:nvGrpSpPr>
+        <p:cNvPr id="1" name=""/>
+        <p:cNvGrpSpPr/>
+        <p:nvPr/>
+      </p:nvGrpSpPr>
+      <p:grpSpPr>
+        <a:xfrm>
+          <a:off x="0" y="0"/>
+          <a:ext cx="0" cy="0"/>
+          <a:chOff x="0" y="0"/>
+          <a:chExt cx="0" cy="0"/>
+        </a:xfrm>
+      </p:grpSpPr>
+      <p:sp>
+        <p:nvSpPr>
+          <p:cNvPr id="2" name="Title 1"/>
+          <p:cNvSpPr>
+            <a:spLocks noGrp="1"/>
+          </p:cNvSpPr>
+          <p:nvPr>
+            <p:ph type="title"/>
+          </p:nvPr>
+        </p:nvSpPr>
+        <p:spPr/>
+        <p:txBody>
+          <a:bodyPr/>
+          <a:lstStyle/>
+          <a:p>
+            <a:pPr lvl="0" indent="0" marL="0">
+              <a:buNone/>
+            </a:pPr>
+            <a:r>
+              <a:rPr/>
+              <a:t>Ambiente e por que essas escolhas</a:t>
+            </a:r>
+          </a:p>
+        </p:txBody>
+      </p:sp>
+      <p:sp>
+        <p:nvSpPr>
+          <p:cNvPr id="3" name="Content Placeholder 2"/>
+          <p:cNvSpPr>
+            <a:spLocks noGrp="1"/>
+          </p:cNvSpPr>
+          <p:nvPr>
+            <p:ph idx="1"/>
+          </p:nvPr>
+        </p:nvSpPr>
+        <p:spPr/>
+        <p:txBody>
+          <a:bodyPr/>
+          <a:lstStyle/>
+          <a:p>
+            <a:pPr lvl="0"/>
+            <a:r>
+              <a:rPr/>
+              <a:t>Windows 11 + WSL2 Ubuntu, Docker Engine </a:t>
+            </a:r>
+            <a:r>
+              <a:rPr b="1"/>
+              <a:t>nativo</a:t>
+            </a:r>
+            <a:r>
+              <a:rPr/>
+              <a:t> no WSL2 (não Docker Desktop) — menor overhead</a:t>
+            </a:r>
+          </a:p>
+          <a:p>
+            <a:pPr lvl="0"/>
+            <a:r>
+              <a:rPr/>
+              <a:t>Nephio R6 (</a:t>
+            </a:r>
+            <a:r>
+              <a:rPr>
+                <a:latin typeface="Courier"/>
+              </a:rPr>
+              <a:t>v6.0.0</a:t>
+            </a:r>
+            <a:r>
+              <a:rPr/>
+              <a:t>), instalado pacote-a-pacote via </a:t>
+            </a:r>
+            <a:r>
+              <a:rPr>
+                <a:latin typeface="Courier"/>
+              </a:rPr>
+              <a:t>kpt</a:t>
+            </a:r>
+            <a:r>
+              <a:rPr/>
+              <a:t> — não o instalador Ansible do sandbox (que traz Argo CD + Flux + WebUI completos, inviável em 16 GB)</a:t>
+            </a:r>
+          </a:p>
+          <a:p>
+            <a:pPr lvl="0"/>
+            <a:r>
+              <a:rPr>
+                <a:latin typeface="Courier"/>
+              </a:rPr>
+              <a:t>.wslconfig</a:t>
+            </a:r>
+            <a:r>
+              <a:rPr/>
+              <a:t>: teto de </a:t>
+            </a:r>
+            <a:r>
+              <a:rPr b="1"/>
+              <a:t>9,7 GB</a:t>
+            </a:r>
+            <a:r>
+              <a:rPr/>
+              <a:t> para todo o laboratório, dentro de uma máquina de 16 GB</a:t>
+            </a:r>
+          </a:p>
+          <a:p>
+            <a:pPr lvl="0"/>
+            <a:r>
+              <a:rPr/>
+              <a:t>100% local — sem cloud paga, sem OpenStack, sem cluster K8s externo</a:t>
+            </a:r>
+          </a:p>
+          <a:p>
+            <a:pPr lvl="0"/>
+            <a:r>
+              <a:rPr/>
+              <a:t>kind (Kubernetes-in-Docker) para os dois clusters — leve, sem VM pesada</a:t>
+            </a:r>
+          </a:p>
+        </p:txBody>
+      </p:sp>
+    </p:spTree>
+  </p:cSld>
+</p:sld>
+</file>
+
+<file path=ppt/slides/slide5.xml><?xml version="1.0" encoding="utf-8"?>
+<p:sld xmlns:a="http://schemas.openxmlformats.org/drawingml/2006/main" xmlns:r="http://schemas.openxmlformats.org/officeDocument/2006/relationships" xmlns:p="http://schemas.openxmlformats.org/presentationml/2006/main">
+  <p:cSld>
+    <p:spTree>
+      <p:nvGrpSpPr>
+        <p:cNvPr id="1" name=""/>
+        <p:cNvGrpSpPr/>
+        <p:nvPr/>
+      </p:nvGrpSpPr>
+      <p:grpSpPr>
+        <a:xfrm>
+          <a:off x="0" y="0"/>
+          <a:ext cx="0" cy="0"/>
+          <a:chOff x="0" y="0"/>
+          <a:chExt cx="0" cy="0"/>
+        </a:xfrm>
+      </p:grpSpPr>
+      <p:sp>
+        <p:nvSpPr>
+          <p:cNvPr id="2" name="Title 1"/>
+          <p:cNvSpPr>
+            <a:spLocks noGrp="1"/>
+          </p:cNvSpPr>
+          <p:nvPr>
+            <p:ph type="title"/>
+          </p:nvPr>
+        </p:nvSpPr>
+        <p:spPr/>
+        <p:txBody>
+          <a:bodyPr/>
+          <a:lstStyle/>
+          <a:p>
+            <a:pPr lvl="0" indent="0" marL="0">
+              <a:buNone/>
+            </a:pPr>
+            <a:r>
+              <a:rPr/>
+              <a:t>Arquitetura — conceito geral</a:t>
+            </a:r>
+          </a:p>
+        </p:txBody>
+      </p:sp>
+      <p:pic>
+        <p:nvPicPr>
+          <p:cNvPr descr="assets/nephio-arch.png" id="0" name="Picture 1"/>
+          <p:cNvPicPr>
+            <a:picLocks noGrp="1" noChangeAspect="1"/>
+          </p:cNvPicPr>
+          <p:nvPr/>
+        </p:nvPicPr>
+        <p:blipFill>
+          <a:blip r:embed="rId3"/>
+          <a:stretch>
+            <a:fillRect/>
+          </a:stretch>
+        </p:blipFill>
+        <p:spPr bwMode="auto">
+          <a:xfrm>
+            <a:off x="3581400" y="1193800"/>
+            <a:ext cx="1981200" cy="2882900"/>
+          </a:xfrm>
+          <a:prstGeom prst="rect">
+            <a:avLst/>
+          </a:prstGeom>
+          <a:noFill/>
+          <a:ln w="9525">
+            <a:noFill/>
+            <a:headEnd/>
+            <a:tailEnd/>
+          </a:ln>
+        </p:spPr>
+      </p:pic>
+      <p:sp>
+        <p:nvSpPr>
+          <p:cNvPr id="1" name="TextBox 3"/>
+          <p:cNvSpPr txBox="1"/>
+          <p:nvPr>
+            <p:ph idx="1"/>
+          </p:nvPr>
+        </p:nvSpPr>
+        <p:spPr>
+          <a:xfrm>
+            <a:off x="457200" y="4076700"/>
+            <a:ext cx="8229600" cy="508000"/>
+          </a:xfrm>
+          <a:prstGeom prst="rect">
+            <a:avLst/>
+          </a:prstGeom>
+          <a:noFill/>
+        </p:spPr>
+        <p:txBody>
+          <a:bodyPr/>
+          <a:lstStyle/>
+          <a:p>
+            <a:pPr lvl="0" indent="0" marL="0" algn="ctr">
+              <a:buNone/>
+            </a:pPr>
+            <a:r>
+              <a:rPr/>
+              <a:t>Duas camadas: Management Cluster decide o quê/como configurar; Workload Cluster(s) roda as CNFs, reconciliadas via GitOps</a:t>
+            </a:r>
+          </a:p>
+        </p:txBody>
+      </p:sp>
+      <p:sp>
+        <p:nvSpPr>
+          <p:cNvPr id="3" name="Content Placeholder 2"/>
+          <p:cNvSpPr>
+            <a:spLocks noGrp="1"/>
+          </p:cNvSpPr>
+          <p:nvPr>
+            <p:ph idx="1"/>
+          </p:nvPr>
+        </p:nvSpPr>
+        <p:spPr/>
+        <p:txBody>
+          <a:bodyPr/>
+          <a:lstStyle/>
+          <a:p>
+            <a:pPr lvl="0"/>
+            <a:r>
+              <a:rPr b="1"/>
+              <a:t>Management Cluster</a:t>
+            </a:r>
+            <a:r>
+              <a:rPr/>
+              <a:t> (</a:t>
+            </a:r>
+            <a:r>
+              <a:rPr>
+                <a:latin typeface="Courier"/>
+              </a:rPr>
+              <a:t>nephio-mgmt</a:t>
+            </a:r>
+            <a:r>
+              <a:rPr/>
+              <a:t>): Nephio Core, Porch, repositório de pacotes, Config Sync</a:t>
+            </a:r>
+          </a:p>
+          <a:p>
+            <a:pPr lvl="0"/>
+            <a:r>
+              <a:rPr b="1"/>
+              <a:t>Workload Cluster</a:t>
+            </a:r>
+            <a:r>
+              <a:rPr/>
+              <a:t> (</a:t>
+            </a:r>
+            <a:r>
+              <a:rPr>
+                <a:latin typeface="Courier"/>
+              </a:rPr>
+              <a:t>o-cloud-1</a:t>
+            </a:r>
+            <a:r>
+              <a:rPr/>
+              <a:t>): onde as CNFs realmente rodam</a:t>
+            </a:r>
+          </a:p>
+          <a:p>
+            <a:pPr lvl="0"/>
+            <a:r>
+              <a:rPr>
+                <a:latin typeface="Courier"/>
+              </a:rPr>
+              <a:t>o-cloud-1</a:t>
+            </a:r>
+            <a:r>
+              <a:rPr/>
+              <a:t> foi </a:t>
+            </a:r>
+            <a:r>
+              <a:rPr b="1"/>
+              <a:t>provisionado pelo próprio Nephio</a:t>
+            </a:r>
+            <a:r>
+              <a:rPr/>
+              <a:t> via O2 IMS — não um </a:t>
+            </a:r>
+            <a:r>
+              <a:rPr>
+                <a:latin typeface="Courier"/>
+              </a:rPr>
+              <a:t>kind create</a:t>
+            </a:r>
+            <a:r>
+              <a:rPr/>
+              <a:t> manual (resultado da Parte 1, reaproveitado aqui como base)</a:t>
+            </a:r>
+          </a:p>
+        </p:txBody>
+      </p:sp>
+    </p:spTree>
+  </p:cSld>
+</p:sld>
+</file>
+
+<file path=ppt/slides/slide6.xml><?xml version="1.0" encoding="utf-8"?>
+<p:sld xmlns:a="http://schemas.openxmlformats.org/drawingml/2006/main" xmlns:r="http://schemas.openxmlformats.org/officeDocument/2006/relationships" xmlns:p="http://schemas.openxmlformats.org/presentationml/2006/main">
+  <p:cSld>
+    <p:spTree>
+      <p:nvGrpSpPr>
+        <p:cNvPr id="1" name=""/>
+        <p:cNvGrpSpPr/>
+        <p:nvPr/>
+      </p:nvGrpSpPr>
+      <p:grpSpPr>
+        <a:xfrm>
+          <a:off x="0" y="0"/>
+          <a:ext cx="0" cy="0"/>
+          <a:chOff x="0" y="0"/>
+          <a:chExt cx="0" cy="0"/>
+        </a:xfrm>
+      </p:grpSpPr>
+      <p:sp>
+        <p:nvSpPr>
+          <p:cNvPr id="2" name="Title 1"/>
+          <p:cNvSpPr>
+            <a:spLocks noGrp="1"/>
+          </p:cNvSpPr>
+          <p:nvPr>
+            <p:ph type="title"/>
+          </p:nvPr>
+        </p:nvSpPr>
+        <p:spPr/>
+        <p:txBody>
+          <a:bodyPr/>
+          <a:lstStyle/>
+          <a:p>
+            <a:pPr lvl="0" indent="0" marL="0">
+              <a:buNone/>
+            </a:pPr>
+            <a:r>
+              <a:rPr/>
+              <a:t>Arquitetura final (com as 4 melhorias)</a:t>
             </a:r>
           </a:p>
         </p:txBody>
@@ -5751,53 +9864,6 @@
           </a:p>
         </p:txBody>
       </p:sp>
-    </p:spTree>
-  </p:cSld>
-</p:sld>
-</file>
-
-<file path=ppt/slides/slide3.xml><?xml version="1.0" encoding="utf-8"?>
-<p:sld xmlns:a="http://schemas.openxmlformats.org/drawingml/2006/main" xmlns:r="http://schemas.openxmlformats.org/officeDocument/2006/relationships" xmlns:p="http://schemas.openxmlformats.org/presentationml/2006/main">
-  <p:cSld>
-    <p:spTree>
-      <p:nvGrpSpPr>
-        <p:cNvPr id="1" name=""/>
-        <p:cNvGrpSpPr/>
-        <p:nvPr/>
-      </p:nvGrpSpPr>
-      <p:grpSpPr>
-        <a:xfrm>
-          <a:off x="0" y="0"/>
-          <a:ext cx="0" cy="0"/>
-          <a:chOff x="0" y="0"/>
-          <a:chExt cx="0" cy="0"/>
-        </a:xfrm>
-      </p:grpSpPr>
-      <p:sp>
-        <p:nvSpPr>
-          <p:cNvPr id="2" name="Title 1"/>
-          <p:cNvSpPr>
-            <a:spLocks noGrp="1"/>
-          </p:cNvSpPr>
-          <p:nvPr>
-            <p:ph type="title"/>
-          </p:nvPr>
-        </p:nvSpPr>
-        <p:spPr/>
-        <p:txBody>
-          <a:bodyPr/>
-          <a:lstStyle/>
-          <a:p>
-            <a:pPr lvl="0" indent="0" marL="0">
-              <a:buNone/>
-            </a:pPr>
-            <a:r>
-              <a:rPr/>
-              <a:t>Ambiente</a:t>
-            </a:r>
-          </a:p>
-        </p:txBody>
-      </p:sp>
       <p:sp>
         <p:nvSpPr>
           <p:cNvPr id="3" name="Content Placeholder 2"/>
@@ -5816,308 +9882,27 @@
             <a:pPr lvl="0"/>
             <a:r>
               <a:rPr/>
-              <a:t>Windows 11 + WSL2 Ubuntu, Docker Engine nativo, 16 GB de RAM totais</a:t>
-            </a:r>
-          </a:p>
-          <a:p>
-            <a:pPr lvl="0"/>
-            <a:r>
-              <a:rPr/>
-              <a:t>Nephio R6 (</a:t>
+              <a:t>Camada 1 (infraestrutura): </a:t>
             </a:r>
             <a:r>
               <a:rPr>
                 <a:latin typeface="Courier"/>
               </a:rPr>
-              <a:t>v6.0.0</a:t>
-            </a:r>
-            <a:r>
-              <a:rPr/>
-              <a:t>), Porch v1.5.6, kpt v1.0.0</a:t>
-            </a:r>
-          </a:p>
-          <a:p>
-            <a:pPr lvl="0"/>
+              <a:t>ProvisioningRequest</a:t>
+            </a:r>
+            <a:r>
+              <a:rPr/>
+              <a:t> → </a:t>
+            </a:r>
             <a:r>
               <a:rPr>
                 <a:latin typeface="Courier"/>
               </a:rPr>
-              <a:t>.wslconfig</a:t>
-            </a:r>
-            <a:r>
-              <a:rPr/>
-              <a:t>: teto de 9,7 GB para todo o laboratório</a:t>
-            </a:r>
-          </a:p>
-          <a:p>
-            <a:pPr lvl="0"/>
-            <a:r>
-              <a:rPr/>
-              <a:t>100% local — sem cloud paga, sem OpenStack</a:t>
-            </a:r>
-          </a:p>
-        </p:txBody>
-      </p:sp>
-    </p:spTree>
-  </p:cSld>
-</p:sld>
-</file>
-
-<file path=ppt/slides/slide4.xml><?xml version="1.0" encoding="utf-8"?>
-<p:sld xmlns:a="http://schemas.openxmlformats.org/drawingml/2006/main" xmlns:r="http://schemas.openxmlformats.org/officeDocument/2006/relationships" xmlns:p="http://schemas.openxmlformats.org/presentationml/2006/main">
-  <p:cSld>
-    <p:spTree>
-      <p:nvGrpSpPr>
-        <p:cNvPr id="1" name=""/>
-        <p:cNvGrpSpPr/>
-        <p:nvPr/>
-      </p:nvGrpSpPr>
-      <p:grpSpPr>
-        <a:xfrm>
-          <a:off x="0" y="0"/>
-          <a:ext cx="0" cy="0"/>
-          <a:chOff x="0" y="0"/>
-          <a:chExt cx="0" cy="0"/>
-        </a:xfrm>
-      </p:grpSpPr>
-      <p:sp>
-        <p:nvSpPr>
-          <p:cNvPr id="2" name="Title 1"/>
-          <p:cNvSpPr>
-            <a:spLocks noGrp="1"/>
-          </p:cNvSpPr>
-          <p:nvPr>
-            <p:ph type="title"/>
-          </p:nvPr>
-        </p:nvSpPr>
-        <p:spPr/>
-        <p:txBody>
-          <a:bodyPr/>
-          <a:lstStyle/>
-          <a:p>
-            <a:pPr lvl="0" indent="0" marL="0">
-              <a:buNone/>
-            </a:pPr>
-            <a:r>
-              <a:rPr/>
-              <a:t>As Network Functions</a:t>
-            </a:r>
-          </a:p>
-        </p:txBody>
-      </p:sp>
-      <p:sp>
-        <p:nvSpPr>
-          <p:cNvPr id="3" name="Content Placeholder 2"/>
-          <p:cNvSpPr>
-            <a:spLocks noGrp="1"/>
-          </p:cNvSpPr>
-          <p:nvPr>
-            <p:ph idx="1"/>
-          </p:nvPr>
-        </p:nvSpPr>
-        <p:spPr/>
-        <p:txBody>
-          <a:bodyPr/>
-          <a:lstStyle/>
-          <a:p>
-            <a:pPr lvl="0"/>
-            <a:r>
-              <a:rPr>
-                <a:latin typeface="Courier"/>
-              </a:rPr>
-              <a:t>oran-cu</a:t>
-            </a:r>
-            <a:r>
-              <a:rPr/>
-              <a:t>, </a:t>
-            </a:r>
-            <a:r>
-              <a:rPr>
-                <a:latin typeface="Courier"/>
-              </a:rPr>
-              <a:t>oran-du</a:t>
-            </a:r>
-            <a:r>
-              <a:rPr/>
-              <a:t>, </a:t>
-            </a:r>
-            <a:r>
-              <a:rPr>
-                <a:latin typeface="Courier"/>
-              </a:rPr>
-              <a:t>oran-core</a:t>
-            </a:r>
-            <a:r>
-              <a:rPr/>
-              <a:t> — FastAPI, ~30–50 MiB de RAM cada</a:t>
-            </a:r>
-          </a:p>
-          <a:p>
-            <a:pPr lvl="0"/>
-            <a:r>
-              <a:rPr>
-                <a:latin typeface="Courier"/>
-              </a:rPr>
-              <a:t>/health</a:t>
-            </a:r>
-            <a:r>
-              <a:rPr/>
-              <a:t>, </a:t>
-            </a:r>
-            <a:r>
-              <a:rPr>
-                <a:latin typeface="Courier"/>
-              </a:rPr>
-              <a:t>/config</a:t>
-            </a:r>
-            <a:r>
-              <a:rPr/>
-              <a:t> (GET/PUT), </a:t>
-            </a:r>
-            <a:r>
-              <a:rPr>
-                <a:latin typeface="Courier"/>
-              </a:rPr>
-              <a:t>/metrics</a:t>
-            </a:r>
-            <a:r>
-              <a:rPr/>
-              <a:t> (Prometheus)</a:t>
-            </a:r>
-          </a:p>
-          <a:p>
-            <a:pPr lvl="0"/>
-            <a:r>
-              <a:rPr b="1"/>
-              <a:t>Workloads representativos — não NFs O-RAN reais</a:t>
-            </a:r>
-            <a:r>
-              <a:rPr/>
-              <a:t> (sem F1/E1/E2, sem plano de usuário)</a:t>
-            </a:r>
-          </a:p>
-          <a:p>
-            <a:pPr lvl="0"/>
-            <a:r>
-              <a:rPr/>
-              <a:t>Avaliei substituir por free5GC/UERANSIM/OAI — não coube no orçamento (docs/real-nf-extension.md)</a:t>
-            </a:r>
-          </a:p>
-        </p:txBody>
-      </p:sp>
-    </p:spTree>
-  </p:cSld>
-</p:sld>
-</file>
-
-<file path=ppt/slides/slide5.xml><?xml version="1.0" encoding="utf-8"?>
-<p:sld xmlns:a="http://schemas.openxmlformats.org/drawingml/2006/main" xmlns:r="http://schemas.openxmlformats.org/officeDocument/2006/relationships" xmlns:p="http://schemas.openxmlformats.org/presentationml/2006/main">
-  <p:cSld>
-    <p:spTree>
-      <p:nvGrpSpPr>
-        <p:cNvPr id="1" name=""/>
-        <p:cNvGrpSpPr/>
-        <p:nvPr/>
-      </p:nvGrpSpPr>
-      <p:grpSpPr>
-        <a:xfrm>
-          <a:off x="0" y="0"/>
-          <a:ext cx="0" cy="0"/>
-          <a:chOff x="0" y="0"/>
-          <a:chExt cx="0" cy="0"/>
-        </a:xfrm>
-      </p:grpSpPr>
-      <p:sp>
-        <p:nvSpPr>
-          <p:cNvPr id="2" name="Title 1"/>
-          <p:cNvSpPr>
-            <a:spLocks noGrp="1"/>
-          </p:cNvSpPr>
-          <p:nvPr>
-            <p:ph type="title"/>
-          </p:nvPr>
-        </p:nvSpPr>
-        <p:spPr>
-          <a:xfrm>
-            <a:off x="457201" y="204787"/>
-            <a:ext cx="3008313" cy="871538"/>
-          </a:xfrm>
-        </p:spPr>
-        <p:txBody>
-          <a:bodyPr/>
-          <a:lstStyle/>
-          <a:p>
-            <a:pPr lvl="0" indent="0" marL="0">
-              <a:buNone/>
-            </a:pPr>
-            <a:r>
-              <a:rPr/>
-              <a:t>Provisionamento (Experimento 1)</a:t>
-            </a:r>
-          </a:p>
-        </p:txBody>
-      </p:sp>
-      <p:sp>
-        <p:nvSpPr>
-          <p:cNvPr id="4" name="Text Placeholder 3"/>
-          <p:cNvSpPr>
-            <a:spLocks noGrp="1"/>
-          </p:cNvSpPr>
-          <p:nvPr>
-            <p:ph idx="2" sz="half" type="body"/>
-          </p:nvPr>
-        </p:nvSpPr>
-        <p:spPr/>
-        <p:txBody>
-          <a:bodyPr/>
-          <a:lstStyle/>
-          <a:p>
-            <a:pPr lvl="0"/>
-            <a:r>
-              <a:rPr/>
-              <a:t>Pacote kpt autoral → Porch (</a:t>
-            </a:r>
-            <a:r>
-              <a:rPr>
-                <a:latin typeface="Courier"/>
-              </a:rPr>
-              <a:t>porchctl rpkg init/push/propose/approve</a:t>
-            </a:r>
-            <a:r>
-              <a:rPr/>
-              <a:t>)</a:t>
-            </a:r>
-          </a:p>
-          <a:p>
-            <a:pPr lvl="0"/>
-            <a:r>
-              <a:rPr>
-                <a:latin typeface="Courier"/>
-              </a:rPr>
-              <a:t>PackageRevision</a:t>
-            </a:r>
-            <a:r>
-              <a:rPr/>
-              <a:t> Published no repositório </a:t>
-            </a:r>
-            <a:r>
-              <a:rPr>
-                <a:latin typeface="Courier"/>
-              </a:rPr>
-              <a:t>openran-cnfs</a:t>
-            </a:r>
-          </a:p>
-          <a:p>
-            <a:pPr lvl="0"/>
-            <a:r>
-              <a:rPr>
-                <a:latin typeface="Courier"/>
-              </a:rPr>
-              <a:t>kpt live apply</a:t>
-            </a:r>
-            <a:r>
-              <a:rPr/>
-              <a:t> no </a:t>
+              <a:t>o2ims-operator</a:t>
+            </a:r>
+            <a:r>
+              <a:rPr/>
+              <a:t> → Cluster API/CAPD → </a:t>
             </a:r>
             <a:r>
               <a:rPr>
@@ -6125,216 +9910,35 @@
               </a:rPr>
               <a:t>o-cloud-1</a:t>
             </a:r>
-            <a:r>
-              <a:rPr/>
-              <a:t> — reconciliação declarativa com </a:t>
+          </a:p>
+          <a:p>
+            <a:pPr lvl="0"/>
+            <a:r>
+              <a:rPr/>
+              <a:t>Camada 2 (NFs): pacote kpt → Porch → </a:t>
             </a:r>
             <a:r>
               <a:rPr>
                 <a:latin typeface="Courier"/>
               </a:rPr>
-              <a:t>ResourceGroup</a:t>
-            </a:r>
-          </a:p>
-          <a:p>
-            <a:pPr lvl="0"/>
-            <a:r>
-              <a:rPr b="1"/>
-              <a:t>20,4 s do zero até 3/3 NFs Running</a:t>
-            </a:r>
-          </a:p>
-        </p:txBody>
-      </p:sp>
-      <p:pic>
-        <p:nvPicPr>
-          <p:cNvPr descr="assets/term-exp1-apply.png" id="0" name="Picture 1"/>
-          <p:cNvPicPr>
-            <a:picLocks noGrp="1" noChangeAspect="1"/>
-          </p:cNvPicPr>
-          <p:nvPr/>
-        </p:nvPicPr>
-        <p:blipFill>
-          <a:blip r:embed="rId3"/>
-          <a:stretch>
-            <a:fillRect/>
-          </a:stretch>
-        </p:blipFill>
-        <p:spPr bwMode="auto">
-          <a:xfrm>
-            <a:off x="3568700" y="850900"/>
-            <a:ext cx="5105400" cy="2578100"/>
-          </a:xfrm>
-          <a:prstGeom prst="rect">
-            <a:avLst/>
-          </a:prstGeom>
-          <a:noFill/>
-          <a:ln w="9525">
-            <a:noFill/>
-            <a:headEnd/>
-            <a:tailEnd/>
-          </a:ln>
-        </p:spPr>
-      </p:pic>
-      <p:sp>
-        <p:nvSpPr>
-          <p:cNvPr id="1" name="TextBox 3"/>
-          <p:cNvSpPr txBox="1"/>
-          <p:nvPr>
-            <p:ph idx="1"/>
-          </p:nvPr>
-        </p:nvSpPr>
-        <p:spPr>
-          <a:xfrm>
-            <a:off x="3568700" y="4076700"/>
-            <a:ext cx="5105400" cy="508000"/>
-          </a:xfrm>
-          <a:prstGeom prst="rect">
-            <a:avLst/>
-          </a:prstGeom>
-          <a:noFill/>
-        </p:spPr>
-        <p:txBody>
-          <a:bodyPr/>
-          <a:lstStyle/>
-          <a:p>
-            <a:pPr lvl="0" indent="0" marL="0" algn="ctr">
-              <a:buNone/>
-            </a:pPr>
-            <a:r>
-              <a:rPr/>
-              <a:t>Terminal real: apply result 10 attempted, 10 successful — 3 CNFs Running</a:t>
-            </a:r>
-          </a:p>
-        </p:txBody>
-      </p:sp>
-    </p:spTree>
-  </p:cSld>
-</p:sld>
-</file>
-
-<file path=ppt/slides/slide6.xml><?xml version="1.0" encoding="utf-8"?>
-<p:sld xmlns:a="http://schemas.openxmlformats.org/drawingml/2006/main" xmlns:r="http://schemas.openxmlformats.org/officeDocument/2006/relationships" xmlns:p="http://schemas.openxmlformats.org/presentationml/2006/main">
-  <p:cSld>
-    <p:spTree>
-      <p:nvGrpSpPr>
-        <p:cNvPr id="1" name=""/>
-        <p:cNvGrpSpPr/>
-        <p:nvPr/>
-      </p:nvGrpSpPr>
-      <p:grpSpPr>
-        <a:xfrm>
-          <a:off x="0" y="0"/>
-          <a:ext cx="0" cy="0"/>
-          <a:chOff x="0" y="0"/>
-          <a:chExt cx="0" cy="0"/>
-        </a:xfrm>
-      </p:grpSpPr>
-      <p:sp>
-        <p:nvSpPr>
-          <p:cNvPr id="2" name="Title 1"/>
-          <p:cNvSpPr>
-            <a:spLocks noGrp="1"/>
-          </p:cNvSpPr>
-          <p:nvPr>
-            <p:ph type="title"/>
-          </p:nvPr>
-        </p:nvSpPr>
-        <p:spPr/>
-        <p:txBody>
-          <a:bodyPr/>
-          <a:lstStyle/>
-          <a:p>
-            <a:pPr lvl="0" indent="0" marL="0">
-              <a:buNone/>
-            </a:pPr>
-            <a:r>
-              <a:rPr/>
-              <a:t>Config update (Experimento 2)</a:t>
-            </a:r>
-          </a:p>
-        </p:txBody>
-      </p:sp>
-      <p:sp>
-        <p:nvSpPr>
-          <p:cNvPr id="3" name="Content Placeholder 2"/>
-          <p:cNvSpPr>
-            <a:spLocks noGrp="1"/>
-          </p:cNvSpPr>
-          <p:nvPr>
-            <p:ph idx="1"/>
-          </p:nvPr>
-        </p:nvSpPr>
-        <p:spPr/>
-        <p:txBody>
-          <a:bodyPr/>
-          <a:lstStyle/>
-          <a:p>
-            <a:pPr lvl="0"/>
+              <a:t>RootSync</a:t>
+            </a:r>
+            <a:r>
+              <a:rPr/>
+              <a:t> contínuo → </a:t>
+            </a:r>
             <a:r>
               <a:rPr>
                 <a:latin typeface="Courier"/>
               </a:rPr>
-              <a:t>oran-du</a:t>
-            </a:r>
-            <a:r>
-              <a:rPr/>
-              <a:t>: </a:t>
-            </a:r>
-            <a:r>
-              <a:rPr>
-                <a:latin typeface="Courier"/>
-              </a:rPr>
-              <a:t>cell_id</a:t>
-            </a:r>
-            <a:r>
-              <a:rPr/>
-              <a:t> </a:t>
-            </a:r>
-            <a:r>
-              <a:rPr>
-                <a:latin typeface="Courier"/>
-              </a:rPr>
-              <a:t>1 → 2</a:t>
-            </a:r>
-            <a:r>
-              <a:rPr/>
-              <a:t> via </a:t>
-            </a:r>
-            <a:r>
-              <a:rPr>
-                <a:latin typeface="Courier"/>
-              </a:rPr>
-              <a:t>PUT /config</a:t>
-            </a:r>
-            <a:r>
-              <a:rPr/>
-              <a:t> — </a:t>
-            </a:r>
-            <a:r>
-              <a:rPr b="1"/>
-              <a:t>0,7 s</a:t>
-            </a:r>
-          </a:p>
-          <a:p>
-            <a:pPr lvl="0"/>
-            <a:r>
-              <a:rPr/>
-              <a:t>Camada operacional da NF (análoga a O1/NETCONF numa NF real) — API REST própria, não O1</a:t>
-            </a:r>
-          </a:p>
-          <a:p>
-            <a:pPr lvl="0"/>
-            <a:r>
-              <a:rPr/>
-              <a:t>Distinto da config de </a:t>
-            </a:r>
-            <a:r>
-              <a:rPr b="1"/>
-              <a:t>implantação</a:t>
-            </a:r>
-            <a:r>
-              <a:rPr/>
-              <a:t> (pacote/Porch) — usada no upgrade</a:t>
+              <a:t>oran-cu/du/core</a:t>
+            </a:r>
+          </a:p>
+          <a:p>
+            <a:pPr lvl="0"/>
+            <a:r>
+              <a:rPr/>
+              <a:t>Três peças em destaque (teal) são as melhorias pós-entrega — detalhadas na segunda metade</a:t>
             </a:r>
           </a:p>
         </p:txBody>
@@ -6381,7 +9985,7 @@
             </a:pPr>
             <a:r>
               <a:rPr/>
-              <a:t>Scaling e Upgrade (achado real incluso)</a:t>
+              <a:t>Ferramentas e o papel de cada uma</a:t>
             </a:r>
           </a:p>
         </p:txBody>
@@ -6403,78 +10007,92 @@
           <a:p>
             <a:pPr lvl="0"/>
             <a:r>
-              <a:rPr/>
-              <a:t>Scale: </a:t>
+              <a:rPr b="1"/>
+              <a:t>kpt</a:t>
+            </a:r>
+            <a:r>
+              <a:rPr/>
+              <a:t> — autoria do pacote, pipeline de funções, </a:t>
             </a:r>
             <a:r>
               <a:rPr>
                 <a:latin typeface="Courier"/>
               </a:rPr>
-              <a:t>oran-cu</a:t>
-            </a:r>
-            <a:r>
-              <a:rPr/>
-              <a:t> 1 → 2 réplicas — </a:t>
-            </a:r>
-            <a:r>
-              <a:rPr b="1"/>
-              <a:t>5,7 s</a:t>
-            </a:r>
-          </a:p>
-          <a:p>
-            <a:pPr lvl="0"/>
-            <a:r>
-              <a:rPr/>
-              <a:t>Upgrade: </a:t>
+              <a:t>kpt live apply</a:t>
+            </a:r>
+            <a:r>
+              <a:rPr/>
+              <a:t> (reconciliação declarativa com inventário </a:t>
             </a:r>
             <a:r>
               <a:rPr>
                 <a:latin typeface="Courier"/>
               </a:rPr>
-              <a:t>NF_VERSION</a:t>
-            </a:r>
-            <a:r>
-              <a:rPr/>
-              <a:t> v1 → v2 via pacote no Porch — </a:t>
-            </a:r>
+              <a:t>ResourceGroup</a:t>
+            </a:r>
+            <a:r>
+              <a:rPr/>
+              <a:t>)</a:t>
+            </a:r>
+          </a:p>
+          <a:p>
+            <a:pPr lvl="0"/>
             <a:r>
               <a:rPr b="1"/>
-              <a:t>15,0 s</a:t>
-            </a:r>
-            <a:r>
-              <a:rPr/>
-              <a:t>, </a:t>
+              <a:t>Porch / </a:t>
+            </a:r>
+            <a:r>
+              <a:rPr b="1">
+                <a:latin typeface="Courier"/>
+              </a:rPr>
+              <a:t>porchctl</a:t>
+            </a:r>
+            <a:r>
+              <a:rPr/>
+              <a:t> — ciclo de vida do pacote: Draft → Proposed → Published</a:t>
+            </a:r>
+          </a:p>
+          <a:p>
+            <a:pPr lvl="0"/>
+            <a:r>
+              <a:rPr b="1"/>
+              <a:t>kind + Cluster API + CAPD</a:t>
+            </a:r>
+            <a:r>
+              <a:rPr/>
+              <a:t> — criação do </a:t>
             </a:r>
             <a:r>
               <a:rPr>
                 <a:latin typeface="Courier"/>
               </a:rPr>
-              <a:t>revision</a:t>
-            </a:r>
-            <a:r>
-              <a:rPr/>
-              <a:t> 1 → 2</a:t>
+              <a:t>o-cloud-1</a:t>
+            </a:r>
+            <a:r>
+              <a:rPr/>
+              <a:t> via O2 IMS</a:t>
             </a:r>
           </a:p>
           <a:p>
             <a:pPr lvl="0"/>
             <a:r>
               <a:rPr b="1"/>
-              <a:t>Achado real:</a:t>
-            </a:r>
-            <a:r>
-              <a:rPr/>
-              <a:t> só mudar o </a:t>
-            </a:r>
-            <a:r>
-              <a:rPr>
-                <a:latin typeface="Courier"/>
-              </a:rPr>
-              <a:t>ConfigMap</a:t>
-            </a:r>
-            <a:r>
-              <a:rPr/>
-              <a:t> não disparou rollout — corrigido com anotação de versão</a:t>
+              <a:t>kubectl</a:t>
+            </a:r>
+            <a:r>
+              <a:rPr/>
+              <a:t> — operações imperativas de comparação (scale, delete pod) e validação</a:t>
+            </a:r>
+          </a:p>
+          <a:p>
+            <a:pPr lvl="0"/>
+            <a:r>
+              <a:rPr b="1"/>
+              <a:t>FastAPI/Python + Docker</a:t>
+            </a:r>
+            <a:r>
+              <a:rPr/>
+              <a:t> — as 3 CNFs simuladas</a:t>
             </a:r>
           </a:p>
         </p:txBody>
@@ -6511,12 +10129,7 @@
             <p:ph type="title"/>
           </p:nvPr>
         </p:nvSpPr>
-        <p:spPr>
-          <a:xfrm>
-            <a:off x="457201" y="204787"/>
-            <a:ext cx="3008313" cy="871538"/>
-          </a:xfrm>
-        </p:spPr>
+        <p:spPr/>
         <p:txBody>
           <a:bodyPr/>
           <a:lstStyle/>
@@ -6526,55 +10139,46 @@
             </a:pPr>
             <a:r>
               <a:rPr/>
-              <a:t>Fault / recovery e Terminate</a:t>
-            </a:r>
-          </a:p>
-        </p:txBody>
-      </p:sp>
-      <p:sp>
-        <p:nvSpPr>
-          <p:cNvPr id="4" name="Text Placeholder 3"/>
-          <p:cNvSpPr>
-            <a:spLocks noGrp="1"/>
-          </p:cNvSpPr>
-          <p:nvPr>
-            <p:ph idx="2" sz="half" type="body"/>
-          </p:nvPr>
-        </p:nvSpPr>
-        <p:spPr/>
-        <p:txBody>
-          <a:bodyPr/>
-          <a:lstStyle/>
-          <a:p>
-            <a:pPr lvl="0"/>
-            <a:r>
-              <a:rPr/>
-              <a:t>Recovery: </a:t>
-            </a:r>
+              <a:t>As Network Functions simuladas</a:t>
+            </a:r>
+          </a:p>
+        </p:txBody>
+      </p:sp>
+      <p:sp>
+        <p:nvSpPr>
+          <p:cNvPr id="3" name="Content Placeholder 2"/>
+          <p:cNvSpPr>
+            <a:spLocks noGrp="1"/>
+          </p:cNvSpPr>
+          <p:nvPr>
+            <p:ph idx="1"/>
+          </p:nvPr>
+        </p:nvSpPr>
+        <p:spPr/>
+        <p:txBody>
+          <a:bodyPr/>
+          <a:lstStyle/>
+          <a:p>
+            <a:pPr lvl="0"/>
             <a:r>
               <a:rPr>
                 <a:latin typeface="Courier"/>
               </a:rPr>
-              <a:t>kubectl delete pod</a:t>
-            </a:r>
-            <a:r>
-              <a:rPr/>
-              <a:t> → novo pod em </a:t>
-            </a:r>
-            <a:r>
-              <a:rPr b="1"/>
-              <a:t>3,9 s</a:t>
-            </a:r>
-            <a:r>
-              <a:rPr/>
-              <a:t> (self-healing, não healing de NF telecom)</a:t>
-            </a:r>
-          </a:p>
-          <a:p>
-            <a:pPr lvl="0"/>
-            <a:r>
-              <a:rPr/>
-              <a:t>Terminate: </a:t>
+              <a:t>oran-cu</a:t>
+            </a:r>
+            <a:r>
+              <a:rPr/>
+              <a:t>, </a:t>
+            </a:r>
+            <a:r>
+              <a:rPr>
+                <a:latin typeface="Courier"/>
+              </a:rPr>
+              <a:t>oran-du</a:t>
+            </a:r>
+            <a:r>
+              <a:rPr/>
+              <a:t>, </a:t>
             </a:r>
             <a:r>
               <a:rPr>
@@ -6584,104 +10188,70 @@
             </a:r>
             <a:r>
               <a:rPr/>
-              <a:t> removido via </a:t>
-            </a:r>
-            <a:r>
-              <a:rPr b="1"/>
-              <a:t>prune</a:t>
-            </a:r>
-            <a:r>
-              <a:rPr/>
-              <a:t> do </a:t>
+              <a:t> — serviços FastAPI, ~30–50 MiB de RAM cada</a:t>
+            </a:r>
+          </a:p>
+          <a:p>
+            <a:pPr lvl="0"/>
+            <a:r>
+              <a:rPr/>
+              <a:t>Cada uma expõe </a:t>
             </a:r>
             <a:r>
               <a:rPr>
                 <a:latin typeface="Courier"/>
               </a:rPr>
-              <a:t>kpt live apply</a:t>
-            </a:r>
-            <a:r>
-              <a:rPr/>
-              <a:t> — </a:t>
-            </a:r>
-            <a:r>
-              <a:rPr b="1"/>
-              <a:t>10,8 s</a:t>
-            </a:r>
-          </a:p>
-          <a:p>
-            <a:pPr lvl="0"/>
-            <a:r>
-              <a:rPr/>
-              <a:t>6/6 experimentos formais: </a:t>
+              <a:t>/health</a:t>
+            </a:r>
+            <a:r>
+              <a:rPr/>
+              <a:t>, </a:t>
             </a:r>
             <a:r>
               <a:rPr>
                 <a:latin typeface="Courier"/>
               </a:rPr>
-              <a:t>success</a:t>
-            </a:r>
-          </a:p>
-        </p:txBody>
-      </p:sp>
-      <p:pic>
-        <p:nvPicPr>
-          <p:cNvPr descr="assets/experiments-duration.png" id="0" name="Picture 1"/>
-          <p:cNvPicPr>
-            <a:picLocks noGrp="1" noChangeAspect="1"/>
-          </p:cNvPicPr>
-          <p:nvPr/>
-        </p:nvPicPr>
-        <p:blipFill>
-          <a:blip r:embed="rId3"/>
-          <a:stretch>
-            <a:fillRect/>
-          </a:stretch>
-        </p:blipFill>
-        <p:spPr bwMode="auto">
-          <a:xfrm>
-            <a:off x="3568700" y="533400"/>
-            <a:ext cx="5105400" cy="3200400"/>
-          </a:xfrm>
-          <a:prstGeom prst="rect">
-            <a:avLst/>
-          </a:prstGeom>
-          <a:noFill/>
-          <a:ln w="9525">
-            <a:noFill/>
-            <a:headEnd/>
-            <a:tailEnd/>
-          </a:ln>
-        </p:spPr>
-      </p:pic>
-      <p:sp>
-        <p:nvSpPr>
-          <p:cNvPr id="1" name="TextBox 3"/>
-          <p:cNvSpPr txBox="1"/>
-          <p:nvPr>
-            <p:ph idx="1"/>
-          </p:nvPr>
-        </p:nvSpPr>
-        <p:spPr>
-          <a:xfrm>
-            <a:off x="3568700" y="4076700"/>
-            <a:ext cx="5105400" cy="508000"/>
-          </a:xfrm>
-          <a:prstGeom prst="rect">
-            <a:avLst/>
-          </a:prstGeom>
-          <a:noFill/>
-        </p:spPr>
-        <p:txBody>
-          <a:bodyPr/>
-          <a:lstStyle/>
-          <a:p>
-            <a:pPr lvl="0" indent="0" marL="0" algn="ctr">
-              <a:buNone/>
-            </a:pPr>
-            <a:r>
-              <a:rPr/>
-              <a:t>Duração real de todos os experimentos e melhorias, por categoria</a:t>
+              <a:t>/config</a:t>
+            </a:r>
+            <a:r>
+              <a:rPr/>
+              <a:t> (GET/PUT/POST), </a:t>
+            </a:r>
+            <a:r>
+              <a:rPr>
+                <a:latin typeface="Courier"/>
+              </a:rPr>
+              <a:t>/metrics</a:t>
+            </a:r>
+            <a:r>
+              <a:rPr/>
+              <a:t> (formato Prometheus)</a:t>
+            </a:r>
+          </a:p>
+          <a:p>
+            <a:pPr lvl="0"/>
+            <a:r>
+              <a:rPr b="1"/>
+              <a:t>Workloads representativos — não NFs O-RAN reais</a:t>
+            </a:r>
+            <a:r>
+              <a:rPr/>
+              <a:t>: sem protocolos de rádio, sem planos de usuário/controle, sem interfaces F1/E1/E2</a:t>
+            </a:r>
+          </a:p>
+          <a:p>
+            <a:pPr lvl="0"/>
+            <a:r>
+              <a:rPr/>
+              <a:t>Servem para exercitar </a:t>
+            </a:r>
+            <a:r>
+              <a:rPr b="1"/>
+              <a:t>mecanismos de orquestração</a:t>
+            </a:r>
+            <a:r>
+              <a:rPr/>
+              <a:t>, não para simular tráfego de rede</a:t>
             </a:r>
           </a:p>
         </p:txBody>
@@ -6728,7 +10298,7 @@
             </a:pPr>
             <a:r>
               <a:rPr/>
-              <a:t>Resultados e limites originais</a:t>
+              <a:t>Por que não usei uma NF real (avaliação feita)</a:t>
             </a:r>
           </a:p>
         </p:txBody>
@@ -6751,39 +10321,77 @@
             <a:pPr lvl="0"/>
             <a:r>
               <a:rPr/>
-              <a:t>~3,9 GiB de RAM (Nephio + O-Cloud + CNFs), bem dentro do teto de 9,7 GiB</a:t>
-            </a:r>
-          </a:p>
-          <a:p>
-            <a:pPr lvl="0"/>
-            <a:r>
-              <a:rPr/>
-              <a:t>2 bugs de engenharia reais encontrados </a:t>
+              <a:t>Avaliei 3 alternativas para o próximo passo: </a:t>
             </a:r>
             <a:r>
               <a:rPr b="1"/>
-              <a:t>e corrigidos</a:t>
-            </a:r>
-            <a:r>
-              <a:rPr/>
-              <a:t> na entrega original</a:t>
-            </a:r>
-          </a:p>
-          <a:p>
-            <a:pPr lvl="0"/>
-            <a:r>
-              <a:rPr/>
-              <a:t>Limitações levantadas: sem GitOps contínuo, sem monitoramento por métrica, sem propagação </a:t>
+              <a:t>UERANSIM</a:t>
+            </a:r>
+            <a:r>
+              <a:rPr/>
+              <a:t>, </a:t>
+            </a:r>
+            <a:r>
+              <a:rPr b="1"/>
+              <a:t>free5GC</a:t>
+            </a:r>
+            <a:r>
+              <a:rPr/>
+              <a:t>, </a:t>
+            </a:r>
+            <a:r>
+              <a:rPr b="1"/>
+              <a:t>OpenAirInterface</a:t>
+            </a:r>
+          </a:p>
+          <a:p>
+            <a:pPr lvl="0"/>
+            <a:r>
+              <a:rPr/>
+              <a:t>UERANSIM sozinho: ~2 GB/2 CPU — mas não funciona sem um AMF real por trás</a:t>
+            </a:r>
+          </a:p>
+          <a:p>
+            <a:pPr lvl="0"/>
+            <a:r>
+              <a:rPr/>
+              <a:t>free5GC completo: 4 GB mínimo / 8 GB recomendado — </a:t>
+            </a:r>
+            <a:r>
+              <a:rPr b="1"/>
+              <a:t>sozinho já consome quase todo o orçamento restante</a:t>
+            </a:r>
+            <a:r>
+              <a:rPr/>
+              <a:t> (Nephio + O2 IMS + O-Cloud já usam ~3,9 GiB)</a:t>
+            </a:r>
+          </a:p>
+          <a:p>
+            <a:pPr lvl="0"/>
+            <a:r>
+              <a:rPr/>
+              <a:t>OpenAirInterface: footprint imprevisível, maior complexidade — e o próprio enunciado pediu para não instalar</a:t>
+            </a:r>
+          </a:p>
+          <a:p>
+            <a:pPr lvl="0"/>
+            <a:r>
+              <a:rPr b="1"/>
+              <a:t>Decisão:</a:t>
+            </a:r>
+            <a:r>
+              <a:rPr/>
+              <a:t> nenhuma NF real cabia ao lado do Nephio completo em 16 GB — documentado, não simplesmente omitido (</a:t>
             </a:r>
             <a:r>
               <a:rPr>
                 <a:latin typeface="Courier"/>
               </a:rPr>
-              <a:t>/config</a:t>
-            </a:r>
-            <a:r>
-              <a:rPr/>
-              <a:t> → pacote</a:t>
+              <a:t>docs/real-nf-extension.md</a:t>
+            </a:r>
+            <a:r>
+              <a:rPr/>
+              <a:t>)</a:t>
             </a:r>
           </a:p>
         </p:txBody>

--- a/presentation/Parte2-Apresentacao-SMO-Nephio.pptx
+++ b/presentation/Parte2-Apresentacao-SMO-Nephio.pptx
@@ -5,7 +5,7 @@
     <p:sldMasterId id="2147483648" r:id="rId1"/>
   </p:sldMasterIdLst>
   <p:notesMasterIdLst>
-    <p:notesMasterId r:id="rId31"/>
+    <p:notesMasterId r:id="rId28"/>
   </p:notesMasterIdLst>
   <p:sldIdLst>
     <p:sldId id="256" r:id="rId2"/>
@@ -34,9 +34,6 @@
     <p:sldId id="279" r:id="rId25"/>
     <p:sldId id="280" r:id="rId26"/>
     <p:sldId id="281" r:id="rId27"/>
-    <p:sldId id="282" r:id="rId28"/>
-    <p:sldId id="283" r:id="rId29"/>
-    <p:sldId id="284" r:id="rId30"/>
   </p:sldIdLst>
   <p:sldSz cx="9144000" cy="5143500" type="screen16x9"/>
   <p:notesSz cx="6858000" cy="9144000"/>
@@ -634,7 +631,7 @@
             </a:pPr>
             <a:r>
               <a:rPr/>
-              <a:t>Esse não é um kubectl apply disfarçado. É um pacote versionado, com Draft, Proposed e Published — o mesmo mecanismo que o Nephio usaria em produção para qualquer coisa.</a:t>
+              <a:t>Dez recursos aplicados (namespace, 3 ConfigMaps, 3 Services, 3 Deployments) — todos de uma vez, via um único pacote reconciliado declarativamente.</a:t>
             </a:r>
           </a:p>
         </p:txBody>
@@ -716,7 +713,7 @@
             </a:pPr>
             <a:r>
               <a:rPr/>
-              <a:t>Dez recursos aplicados (namespace, 3 ConfigMaps, 3 Services, 3 Deployments) — todos de uma vez, via um único pacote reconciliado declarativamente.</a:t>
+              <a:t>Misturar essas duas camadas seria o tipo de exagero que quero evitar. Uma é gerência de elemento de rede (o que seria O1); a outra é GitOps de infraestrutura — mecanismos diferentes, propósitos diferentes.</a:t>
             </a:r>
           </a:p>
         </p:txBody>
@@ -798,7 +795,7 @@
             </a:pPr>
             <a:r>
               <a:rPr/>
-              <a:t>Misturar essas duas camadas seria o tipo de exagero que quero evitar. Uma é gerência de elemento de rede (o que seria O1); a outra é GitOps de infraestrutura — mecanismos diferentes, propósitos diferentes.</a:t>
+              <a:t>Rápido e direto — mas o ponto não é a velocidade, é a distinção: essa mudança fica só na API da NF, não propaga pro pacote sozinha (isso é fechado mais adiante, pelo config-bridge).</a:t>
             </a:r>
           </a:p>
         </p:txBody>
@@ -880,7 +877,7 @@
             </a:pPr>
             <a:r>
               <a:rPr/>
-              <a:t>Rápido e direto — mas o ponto não é a velocidade, é a distinção: essa mudança fica só na API da NF, não propaga pro pacote sozinha (isso só foi resolvido depois, na Melhoria 3).</a:t>
+              <a:t>Aqui uso deliberadamente o kubectl imperativo, para comparar mais adiante com o rApp — o mesmo scale, só que decidido automaticamente por uma política, a partir de telemetria.</a:t>
             </a:r>
           </a:p>
         </p:txBody>
@@ -962,7 +959,7 @@
             </a:pPr>
             <a:r>
               <a:rPr/>
-              <a:t>Aqui uso deliberadamente o kubectl imperativo, em vez do pacote, para comparar com a Melhoria 4 (rApp) mais adiante — o mesmo scale, só que decidido automaticamente por uma política.</a:t>
+              <a:t>Esse foi um dos experimentos mais instrutivos. Bati de frente com um comportamento real e documentado do Kubernetes, diagnostiquei com evidência e corrigi — não escondi que falhou na primeira tentativa.</a:t>
             </a:r>
           </a:p>
         </p:txBody>
@@ -1044,7 +1041,7 @@
             </a:pPr>
             <a:r>
               <a:rPr/>
-              <a:t>Esse foi o experimento mais instrutivo da entrega original. Bati de frente com um comportamento real e documentado do Kubernetes, diagnostiquei com evidência e corrigi — não escondi que falhou na primeira tentativa.</a:t>
+              <a:t>Deixo claro sempre: “recuperação” aqui é o controller do Kubernetes fazendo seu trabalho normal, não uma função de FCAPS-F O-RAN. É uma distinção pequena no slide, mas grande na prática.</a:t>
             </a:r>
           </a:p>
         </p:txBody>
@@ -1126,7 +1123,7 @@
             </a:pPr>
             <a:r>
               <a:rPr/>
-              <a:t>Deixo claro sempre: “recuperação” aqui é o controller do Kubernetes fazendo seu trabalho normal, não uma função de FCAPS-F O-RAN. É uma distinção pequena no slide, mas grande na prática.</a:t>
+              <a:t>Fecha o primeiro bloco: instantiate, config, scale, upgrade, recover, terminate — todos pelo fluxo real do Nephio, com evidência de cada um. Agora vou pra camada de operação.</a:t>
             </a:r>
           </a:p>
         </p:txBody>
@@ -1208,7 +1205,7 @@
             </a:pPr>
             <a:r>
               <a:rPr/>
-              <a:t>Fecha o ciclo completo: instantiate, config, scale, upgrade, recover, terminate — todos pelo fluxo real do Nephio, com evidência de cada um.</a:t>
+              <a:t>Esse gráfico mostra os 10 experimentos juntos — dá pra comparar a ordem de grandeza de cada operação de relance, da configuração mais rápida (0,7s) até o ciclo de decisão do rApp (30s).</a:t>
             </a:r>
           </a:p>
         </p:txBody>
@@ -1290,7 +1287,7 @@
             </a:pPr>
             <a:r>
               <a:rPr/>
-              <a:t>Esse gráfico já mostra os 6 experimentos originais junto com as 3 melhorias que vou detalhar depois — dá pra comparar a ordem de grandeza de cada operação de relance.</a:t>
+              <a:t>Métrica real por nó e por pod, sem pagar o custo de um Prometheus completo.</a:t>
             </a:r>
           </a:p>
         </p:txBody>
@@ -1372,7 +1369,7 @@
             </a:pPr>
             <a:r>
               <a:rPr/>
-              <a:t>Isso prova que a restrição de RAM não foi um problema teórico — o laboratório inteiro (Nephio + O-Cloud + 3 CNFs + Porch + Gitea + Cluster API) coube com folga real, medida.</a:t>
+              <a:t>Publiquei a mudança e cronometrei quanto tempo até ela aparecer sozinha no cluster, sem eu chamar kpt live apply manualmente — essa é a diferença entre “o RootSync está instalado” e “o RootSync funciona de verdade”.</a:t>
             </a:r>
           </a:p>
         </p:txBody>
@@ -1536,7 +1533,7 @@
             </a:pPr>
             <a:r>
               <a:rPr/>
-              <a:t>Essas quatro primeiras lacunas eram decisões de escopo, não impossibilidades técnicas — e são exatamente as que ataquei nas melhorias pós-entrega, a seguir.</a:t>
+              <a:t>Achei e corrigi um bug real nessa: o YAML sem aspas fazia “00101” virar o inteiro 101 na releitura — um padrão octal-like do YAML 1.1 — causando um loop de auto-correção a cada 15s. Corrigi forçando aspas em todo escalar, do mesmo jeito que o Kubernetes já trata ConfigMaps.</a:t>
             </a:r>
           </a:p>
         </p:txBody>
@@ -1618,7 +1615,7 @@
             </a:pPr>
             <a:r>
               <a:rPr/>
-              <a:t>Essa conversa aconteceu de verdade e mudou o rumo do trabalho — em vez de parar na entrega original, usei a folga de RAM que sobrou (quase 6 GiB) pra fechar lacunas reais.</a:t>
+              <a:t>300 requisições de carga em 5,99s elevaram a taxa a 10,27 req/s — o rApp detectou isso no próximo ciclo de 30s e aplicou o scale-up sozinho, exatamente como um controller de capacidade não-tempo-real faria.</a:t>
             </a:r>
           </a:p>
         </p:txBody>
@@ -1700,7 +1697,7 @@
             </a:pPr>
             <a:r>
               <a:rPr/>
-              <a:t>Antes só tínhamos docker stats do host. Agora tenho kubectl top de verdade — métrica real por nó e por pod, sem pagar o custo de um Prometheus completo.</a:t>
+              <a:t>Esse foi o achado mais valioso de toda a Parte 2, na minha opinião — não é um bug de código, é um comportamento real e documentado de sistemas distribuídos: quando duas fontes de verdade tentam controlar o mesmo recurso, uma vai vencer, e é preciso decidir explicitamente qual.</a:t>
             </a:r>
           </a:p>
         </p:txBody>
@@ -1782,7 +1779,7 @@
             </a:pPr>
             <a:r>
               <a:rPr/>
-              <a:t>Essa é a diferença entre “o RootSync está instalado” e “o RootSync funciona de verdade” — só provei a segunda, publicando uma mudança e cronometrando quanto tempo até ela aparecer sozinha no cluster, sem eu chamar kpt live apply manualmente.</a:t>
+              <a:t>Essa foi uma decisão consciente, não uma limitação de tempo. Prefiro entregar um rApp simples mas 100% real a um xApp que fingisse falar E2 com um Near-RT RIC que não existe.</a:t>
             </a:r>
           </a:p>
         </p:txBody>
@@ -1864,7 +1861,7 @@
             </a:pPr>
             <a:r>
               <a:rPr/>
-              <a:t>Achei e corrigi um bug real nessa: o YAML sem aspas fazia “00101” virar o inteiro 101 na releitura — um padrão octal-like do YAML 1.1 — causando um loop de auto-correção a cada 15s. Corrigi forçando aspas em todo escalar, do mesmo jeito que o Kubernetes já trata ConfigMaps.</a:t>
+              <a:t>O laboratório inteiro — management, O-Cloud, as 3 CNFs, Porch, Gitea, Cluster API, monitoramento e o rApp — coube com folga real, medida, dentro do orçamento de 16 GB da máquina.</a:t>
             </a:r>
           </a:p>
         </p:txBody>
@@ -1946,7 +1943,7 @@
             </a:pPr>
             <a:r>
               <a:rPr/>
-              <a:t>300 requisições de carga em 5,99s elevaram a taxa a 10,27 req/s — o rApp detectou isso no próximo ciclo de 30s e aplicou o scale-up sozinho, exatamente como um controller de capacidade não-tempo-real faria.</a:t>
+              <a:t>Esse slide é o resumo que eu daria se só tivesse 30 segundos: o que funciona de verdade, o que não funciona e por quê, e quantas vezes as coisas quebraram e foram consertadas de verdade no caminho.</a:t>
             </a:r>
           </a:p>
         </p:txBody>
@@ -2028,7 +2025,7 @@
             </a:pPr>
             <a:r>
               <a:rPr/>
-              <a:t>Esse foi o achado mais valioso de toda a Parte 2, na minha opinião — não é um bug de código, é um comportamento real e documentado de sistemas distribuídos: quando duas fontes de verdade tentam controlar o mesmo recurso, uma vai vencer, e é preciso decidir explicitamente qual.</a:t>
+              <a:t>Entre teoria (Parte 1) e prática (Parte 2), a mesma conclusão se sustenta: o Nephio é uma plataforma de automação cloud-native real, que implementa um subconjunto bem definido — e demonstrado, com evidência — das funções associadas ao SMO. Obrigado.</a:t>
             </a:r>
           </a:p>
         </p:txBody>
@@ -2051,252 +2048,6 @@
             <a:fld id="{18BDFEC3-8487-43E8-A154-7C12CBC1FFF2}" type="slidenum">
               <a:rPr lang="en-US"/>
               <a:t>26</a:t>
-            </a:fld>
-            <a:endParaRPr lang="en-US"/>
-          </a:p>
-        </p:txBody>
-      </p:sp>
-    </p:spTree>
-  </p:cSld>
-</p:notes>
-</file>
-
-<file path=ppt/notesSlides/notesSlide27.xml><?xml version="1.0" encoding="utf-8"?>
-<p:notes xmlns:a="http://schemas.openxmlformats.org/drawingml/2006/main" xmlns:r="http://schemas.openxmlformats.org/officeDocument/2006/relationships" xmlns:p="http://schemas.openxmlformats.org/presentationml/2006/main">
-  <p:cSld>
-    <p:spTree>
-      <p:nvGrpSpPr>
-        <p:cNvPr id="1" name=""/>
-        <p:cNvGrpSpPr/>
-        <p:nvPr/>
-      </p:nvGrpSpPr>
-      <p:grpSpPr>
-        <a:xfrm>
-          <a:off x="0" y="0"/>
-          <a:ext cx="0" cy="0"/>
-          <a:chOff x="0" y="0"/>
-          <a:chExt cx="0" cy="0"/>
-        </a:xfrm>
-      </p:grpSpPr>
-      <p:sp>
-        <p:nvSpPr>
-          <p:cNvPr id="2" name="Slide Image Placeholder 1"/>
-          <p:cNvSpPr>
-            <a:spLocks noGrp="1" noRot="1" noChangeAspect="1"/>
-          </p:cNvSpPr>
-          <p:nvPr>
-            <p:ph type="sldImg"/>
-          </p:nvPr>
-        </p:nvSpPr>
-        <p:spPr/>
-      </p:sp>
-      <p:sp>
-        <p:nvSpPr>
-          <p:cNvPr id="3" name="Notes Placeholder 2"/>
-          <p:cNvSpPr>
-            <a:spLocks noGrp="1"/>
-          </p:cNvSpPr>
-          <p:nvPr>
-            <p:ph type="body" idx="1"/>
-          </p:nvPr>
-        </p:nvSpPr>
-        <p:spPr/>
-        <p:txBody>
-          <a:bodyPr/>
-          <a:lstStyle/>
-          <a:p>
-            <a:pPr lvl="0" indent="0" marL="0">
-              <a:buNone/>
-            </a:pPr>
-            <a:r>
-              <a:rPr/>
-              <a:t>Prefiro terminar mostrando exatamente onde parei, sem fingir que terminei algo que não terminei — isso é mais valioso academicamente do que uma apresentação sem nenhuma pendência.</a:t>
-            </a:r>
-          </a:p>
-        </p:txBody>
-      </p:sp>
-      <p:sp>
-        <p:nvSpPr>
-          <p:cNvPr id="4" name="Slide Number Placeholder 3"/>
-          <p:cNvSpPr>
-            <a:spLocks noGrp="1"/>
-          </p:cNvSpPr>
-          <p:nvPr>
-            <p:ph type="sldNum" sz="quarter" idx="10"/>
-          </p:nvPr>
-        </p:nvSpPr>
-        <p:spPr/>
-        <p:txBody>
-          <a:bodyPr/>
-          <a:lstStyle/>
-          <a:p>
-            <a:fld id="{18BDFEC3-8487-43E8-A154-7C12CBC1FFF2}" type="slidenum">
-              <a:rPr lang="en-US"/>
-              <a:t>27</a:t>
-            </a:fld>
-            <a:endParaRPr lang="en-US"/>
-          </a:p>
-        </p:txBody>
-      </p:sp>
-    </p:spTree>
-  </p:cSld>
-</p:notes>
-</file>
-
-<file path=ppt/notesSlides/notesSlide28.xml><?xml version="1.0" encoding="utf-8"?>
-<p:notes xmlns:a="http://schemas.openxmlformats.org/drawingml/2006/main" xmlns:r="http://schemas.openxmlformats.org/officeDocument/2006/relationships" xmlns:p="http://schemas.openxmlformats.org/presentationml/2006/main">
-  <p:cSld>
-    <p:spTree>
-      <p:nvGrpSpPr>
-        <p:cNvPr id="1" name=""/>
-        <p:cNvGrpSpPr/>
-        <p:nvPr/>
-      </p:nvGrpSpPr>
-      <p:grpSpPr>
-        <a:xfrm>
-          <a:off x="0" y="0"/>
-          <a:ext cx="0" cy="0"/>
-          <a:chOff x="0" y="0"/>
-          <a:chExt cx="0" cy="0"/>
-        </a:xfrm>
-      </p:grpSpPr>
-      <p:sp>
-        <p:nvSpPr>
-          <p:cNvPr id="2" name="Slide Image Placeholder 1"/>
-          <p:cNvSpPr>
-            <a:spLocks noGrp="1" noRot="1" noChangeAspect="1"/>
-          </p:cNvSpPr>
-          <p:nvPr>
-            <p:ph type="sldImg"/>
-          </p:nvPr>
-        </p:nvSpPr>
-        <p:spPr/>
-      </p:sp>
-      <p:sp>
-        <p:nvSpPr>
-          <p:cNvPr id="3" name="Notes Placeholder 2"/>
-          <p:cNvSpPr>
-            <a:spLocks noGrp="1"/>
-          </p:cNvSpPr>
-          <p:nvPr>
-            <p:ph type="body" idx="1"/>
-          </p:nvPr>
-        </p:nvSpPr>
-        <p:spPr/>
-        <p:txBody>
-          <a:bodyPr/>
-          <a:lstStyle/>
-          <a:p>
-            <a:pPr lvl="0" indent="0" marL="0">
-              <a:buNone/>
-            </a:pPr>
-            <a:r>
-              <a:rPr/>
-              <a:t>Esse slide é o resumo que eu daria se só tivesse 30 segundos: o que funciona de verdade, o que não funciona e por quê, e quantas vezes as coisas quebraram e foram consertadas de verdade no caminho.</a:t>
-            </a:r>
-          </a:p>
-        </p:txBody>
-      </p:sp>
-      <p:sp>
-        <p:nvSpPr>
-          <p:cNvPr id="4" name="Slide Number Placeholder 3"/>
-          <p:cNvSpPr>
-            <a:spLocks noGrp="1"/>
-          </p:cNvSpPr>
-          <p:nvPr>
-            <p:ph type="sldNum" sz="quarter" idx="10"/>
-          </p:nvPr>
-        </p:nvSpPr>
-        <p:spPr/>
-        <p:txBody>
-          <a:bodyPr/>
-          <a:lstStyle/>
-          <a:p>
-            <a:fld id="{18BDFEC3-8487-43E8-A154-7C12CBC1FFF2}" type="slidenum">
-              <a:rPr lang="en-US"/>
-              <a:t>28</a:t>
-            </a:fld>
-            <a:endParaRPr lang="en-US"/>
-          </a:p>
-        </p:txBody>
-      </p:sp>
-    </p:spTree>
-  </p:cSld>
-</p:notes>
-</file>
-
-<file path=ppt/notesSlides/notesSlide29.xml><?xml version="1.0" encoding="utf-8"?>
-<p:notes xmlns:a="http://schemas.openxmlformats.org/drawingml/2006/main" xmlns:r="http://schemas.openxmlformats.org/officeDocument/2006/relationships" xmlns:p="http://schemas.openxmlformats.org/presentationml/2006/main">
-  <p:cSld>
-    <p:spTree>
-      <p:nvGrpSpPr>
-        <p:cNvPr id="1" name=""/>
-        <p:cNvGrpSpPr/>
-        <p:nvPr/>
-      </p:nvGrpSpPr>
-      <p:grpSpPr>
-        <a:xfrm>
-          <a:off x="0" y="0"/>
-          <a:ext cx="0" cy="0"/>
-          <a:chOff x="0" y="0"/>
-          <a:chExt cx="0" cy="0"/>
-        </a:xfrm>
-      </p:grpSpPr>
-      <p:sp>
-        <p:nvSpPr>
-          <p:cNvPr id="2" name="Slide Image Placeholder 1"/>
-          <p:cNvSpPr>
-            <a:spLocks noGrp="1" noRot="1" noChangeAspect="1"/>
-          </p:cNvSpPr>
-          <p:nvPr>
-            <p:ph type="sldImg"/>
-          </p:nvPr>
-        </p:nvSpPr>
-        <p:spPr/>
-      </p:sp>
-      <p:sp>
-        <p:nvSpPr>
-          <p:cNvPr id="3" name="Notes Placeholder 2"/>
-          <p:cNvSpPr>
-            <a:spLocks noGrp="1"/>
-          </p:cNvSpPr>
-          <p:nvPr>
-            <p:ph type="body" idx="1"/>
-          </p:nvPr>
-        </p:nvSpPr>
-        <p:spPr/>
-        <p:txBody>
-          <a:bodyPr/>
-          <a:lstStyle/>
-          <a:p>
-            <a:pPr lvl="0" indent="0" marL="0">
-              <a:buNone/>
-            </a:pPr>
-            <a:r>
-              <a:rPr/>
-              <a:t>Entre teoria (Parte 1) e prática (Parte 2), a mesma conclusão se sustenta: o Nephio é uma plataforma de automação cloud-native real, que implementa um subconjunto bem definido — e demonstrado, com evidência, inclusive nas melhorias — das funções associadas ao SMO. Obrigado.</a:t>
-            </a:r>
-          </a:p>
-        </p:txBody>
-      </p:sp>
-      <p:sp>
-        <p:nvSpPr>
-          <p:cNvPr id="4" name="Slide Number Placeholder 3"/>
-          <p:cNvSpPr>
-            <a:spLocks noGrp="1"/>
-          </p:cNvSpPr>
-          <p:nvPr>
-            <p:ph type="sldNum" sz="quarter" idx="10"/>
-          </p:nvPr>
-        </p:nvSpPr>
-        <p:spPr/>
-        <p:txBody>
-          <a:bodyPr/>
-          <a:lstStyle/>
-          <a:p>
-            <a:fld id="{18BDFEC3-8487-43E8-A154-7C12CBC1FFF2}" type="slidenum">
-              <a:rPr lang="en-US"/>
-              <a:t>29</a:t>
             </a:fld>
             <a:endParaRPr lang="en-US"/>
           </a:p>
@@ -2520,7 +2271,7 @@
             </a:pPr>
             <a:r>
               <a:rPr/>
-              <a:t>Esse diagrama é conceitual — o real, com todos os componentes desta Parte 2, vem no próximo slide. Mas a ideia central já está aqui: dois clusters, papéis bem separados.</a:t>
+              <a:t>Três camadas, cada uma com um mecanismo de orquestração diferente — infraestrutura via O2 IMS, entrega de NF via GitOps contínuo, e operação via três componentes que consomem essas mesmas APIs. Vou percorrer as três ao longo da apresentação, com experimento e evidência para cada uma.</a:t>
             </a:r>
           </a:p>
         </p:txBody>
@@ -2602,7 +2353,7 @@
             </a:pPr>
             <a:r>
               <a:rPr/>
-              <a:t>As três peças em destaque — metrics-server, config-bridge e rapp-autoscale — não faziam parte da entrega original. Vou chegar nelas, mas primeiro mostro tudo que foi entregue no prazo original, com os 6 experimentos formais.</a:t>
+              <a:t>Nenhuma dessas ferramentas é exclusiva de telecom — é exatamente esse o ponto da Parte 1: o núcleo do Nephio é agnóstico, e se conecta ao mundo O-RAN só através de operadores específicos.</a:t>
             </a:r>
           </a:p>
         </p:txBody>
@@ -2684,7 +2435,7 @@
             </a:pPr>
             <a:r>
               <a:rPr/>
-              <a:t>Nenhuma dessas ferramentas é exclusiva de telecom — é exatamente esse o ponto da Parte 1: o núcleo do Nephio é agnóstico, e se conecta ao mundo O-RAN só através de operadores específicos.</a:t>
+              <a:t>Sou direto aqui: se alguém perguntar “isso é um O-CU de verdade?”, a resposta é não. É um serviço HTTP com o nome de um O-CU, para eu poder demonstrar scale/update/recover/terminate sobre algo que se parece com uma NF, sem pagar o custo de RAM de uma pilha 5G real.</a:t>
             </a:r>
           </a:p>
         </p:txBody>
@@ -2766,7 +2517,7 @@
             </a:pPr>
             <a:r>
               <a:rPr/>
-              <a:t>Sou direto aqui: se alguém perguntar “isso é um O-CU de verdade?”, a resposta é não. É um serviço HTTP com o nome de um O-CU, para eu poder demonstrar scale/update/recover/terminate sobre algo que se parece com uma NF, sem pagar o custo de RAM de uma pilha 5G real.</a:t>
+              <a:t>Isso não foi preguiça — foi uma decisão de engenharia documentada com números reais de requisito de RAM de cada alternativa. Se tivesse uma segunda máquina dedicada, o caminho sugerido seria validar primeiro o onboarding do pacote do free5GC com réplicas em zero.</a:t>
             </a:r>
           </a:p>
         </p:txBody>
@@ -2848,7 +2599,7 @@
             </a:pPr>
             <a:r>
               <a:rPr/>
-              <a:t>Isso não foi preguiça — foi uma decisão de engenharia documentada com números reais de requisito de RAM de cada alternativa. Se tivesse uma segunda máquina dedicada, o caminho sugerido seria validar primeiro o onboarding do pacote do free5GC com réplicas em zero.</a:t>
+              <a:t>Esse não é um kubectl apply disfarçado. É um pacote versionado, com Draft, Proposed e Published — o mesmo mecanismo que o Nephio usaria em produção para qualquer coisa.</a:t>
             </a:r>
           </a:p>
         </p:txBody>
@@ -5946,7 +5697,7 @@
             <a:pPr lvl="0"/>
             <a:r>
               <a:rPr/>
-              <a:t>Autor: Diego Abreu — versão detalhada, atualizada em 2026-09-25 com 4 melhorias pós-entrega</a:t>
+              <a:t>Autor: Diego Abreu</a:t>
             </a:r>
           </a:p>
         </p:txBody>
@@ -5957,6 +5708,3945 @@
 </file>
 
 <file path=ppt/slides/slide10.xml><?xml version="1.0" encoding="utf-8"?>
+<p:sld xmlns:a="http://schemas.openxmlformats.org/drawingml/2006/main" xmlns:r="http://schemas.openxmlformats.org/officeDocument/2006/relationships" xmlns:p="http://schemas.openxmlformats.org/presentationml/2006/main">
+  <p:cSld>
+    <p:spTree>
+      <p:nvGrpSpPr>
+        <p:cNvPr id="1" name=""/>
+        <p:cNvGrpSpPr/>
+        <p:nvPr/>
+      </p:nvGrpSpPr>
+      <p:grpSpPr>
+        <a:xfrm>
+          <a:off x="0" y="0"/>
+          <a:ext cx="0" cy="0"/>
+          <a:chOff x="0" y="0"/>
+          <a:chExt cx="0" cy="0"/>
+        </a:xfrm>
+      </p:grpSpPr>
+      <p:sp>
+        <p:nvSpPr>
+          <p:cNvPr id="2" name="Title 1"/>
+          <p:cNvSpPr>
+            <a:spLocks noGrp="1"/>
+          </p:cNvSpPr>
+          <p:nvPr>
+            <p:ph type="title"/>
+          </p:nvPr>
+        </p:nvSpPr>
+        <p:spPr>
+          <a:xfrm>
+            <a:off x="457201" y="204787"/>
+            <a:ext cx="3008313" cy="871538"/>
+          </a:xfrm>
+        </p:spPr>
+        <p:txBody>
+          <a:bodyPr/>
+          <a:lstStyle/>
+          <a:p>
+            <a:pPr lvl="0" indent="0" marL="0">
+              <a:buNone/>
+            </a:pPr>
+            <a:r>
+              <a:rPr/>
+              <a:t>Experimento 1 — Instantiate</a:t>
+            </a:r>
+          </a:p>
+        </p:txBody>
+      </p:sp>
+      <p:sp>
+        <p:nvSpPr>
+          <p:cNvPr id="4" name="Text Placeholder 3"/>
+          <p:cNvSpPr>
+            <a:spLocks noGrp="1"/>
+          </p:cNvSpPr>
+          <p:nvPr>
+            <p:ph idx="2" sz="half" type="body"/>
+          </p:nvPr>
+        </p:nvSpPr>
+        <p:spPr/>
+        <p:txBody>
+          <a:bodyPr/>
+          <a:lstStyle/>
+          <a:p>
+            <a:pPr lvl="0"/>
+            <a:r>
+              <a:rPr b="1"/>
+              <a:t>Comando:</a:t>
+            </a:r>
+            <a:r>
+              <a:rPr/>
+              <a:t> </a:t>
+            </a:r>
+            <a:r>
+              <a:rPr>
+                <a:latin typeface="Courier"/>
+              </a:rPr>
+              <a:t>bash lab/nephio/deploy-cnfs-via-porch.sh</a:t>
+            </a:r>
+          </a:p>
+          <a:p>
+            <a:pPr lvl="0"/>
+            <a:r>
+              <a:rPr b="1"/>
+              <a:t>O que faz:</a:t>
+            </a:r>
+            <a:r>
+              <a:rPr/>
+              <a:t> publica o pacote no Porch (</a:t>
+            </a:r>
+            <a:r>
+              <a:rPr>
+                <a:latin typeface="Courier"/>
+              </a:rPr>
+              <a:t>rpkg copy/push/propose/approve</a:t>
+            </a:r>
+            <a:r>
+              <a:rPr/>
+              <a:t>), depois reconcilia declarativamente no </a:t>
+            </a:r>
+            <a:r>
+              <a:rPr>
+                <a:latin typeface="Courier"/>
+              </a:rPr>
+              <a:t>o-cloud-1</a:t>
+            </a:r>
+          </a:p>
+          <a:p>
+            <a:pPr lvl="0"/>
+            <a:r>
+              <a:rPr b="1"/>
+              <a:t>Resultado:</a:t>
+            </a:r>
+            <a:r>
+              <a:rPr/>
+              <a:t> 3/3 CNFs </a:t>
+            </a:r>
+            <a:r>
+              <a:rPr>
+                <a:latin typeface="Courier"/>
+              </a:rPr>
+              <a:t>Running</a:t>
+            </a:r>
+            <a:r>
+              <a:rPr/>
+              <a:t> do zero em </a:t>
+            </a:r>
+            <a:r>
+              <a:rPr b="1"/>
+              <a:t>20,4 s</a:t>
+            </a:r>
+          </a:p>
+        </p:txBody>
+      </p:sp>
+      <p:pic>
+        <p:nvPicPr>
+          <p:cNvPr descr="assets/term-exp1-apply.png" id="0" name="Picture 1"/>
+          <p:cNvPicPr>
+            <a:picLocks noGrp="1" noChangeAspect="1"/>
+          </p:cNvPicPr>
+          <p:nvPr/>
+        </p:nvPicPr>
+        <p:blipFill>
+          <a:blip r:embed="rId3"/>
+          <a:stretch>
+            <a:fillRect/>
+          </a:stretch>
+        </p:blipFill>
+        <p:spPr bwMode="auto">
+          <a:xfrm>
+            <a:off x="3568700" y="850900"/>
+            <a:ext cx="5105400" cy="2578100"/>
+          </a:xfrm>
+          <a:prstGeom prst="rect">
+            <a:avLst/>
+          </a:prstGeom>
+          <a:noFill/>
+          <a:ln w="9525">
+            <a:noFill/>
+            <a:headEnd/>
+            <a:tailEnd/>
+          </a:ln>
+        </p:spPr>
+      </p:pic>
+      <p:sp>
+        <p:nvSpPr>
+          <p:cNvPr id="1" name="TextBox 3"/>
+          <p:cNvSpPr txBox="1"/>
+          <p:nvPr>
+            <p:ph idx="1"/>
+          </p:nvPr>
+        </p:nvSpPr>
+        <p:spPr>
+          <a:xfrm>
+            <a:off x="3568700" y="4076700"/>
+            <a:ext cx="5105400" cy="508000"/>
+          </a:xfrm>
+          <a:prstGeom prst="rect">
+            <a:avLst/>
+          </a:prstGeom>
+          <a:noFill/>
+        </p:spPr>
+        <p:txBody>
+          <a:bodyPr/>
+          <a:lstStyle/>
+          <a:p>
+            <a:pPr lvl="0" indent="0" marL="0" algn="ctr">
+              <a:buNone/>
+            </a:pPr>
+            <a:r>
+              <a:rPr/>
+              <a:t>Terminal real: apply result 10 attempted, 10 successful — 3 CNFs Running</a:t>
+            </a:r>
+          </a:p>
+        </p:txBody>
+      </p:sp>
+    </p:spTree>
+  </p:cSld>
+</p:sld>
+</file>
+
+<file path=ppt/slides/slide11.xml><?xml version="1.0" encoding="utf-8"?>
+<p:sld xmlns:a="http://schemas.openxmlformats.org/drawingml/2006/main" xmlns:r="http://schemas.openxmlformats.org/officeDocument/2006/relationships" xmlns:p="http://schemas.openxmlformats.org/presentationml/2006/main">
+  <p:cSld>
+    <p:spTree>
+      <p:nvGrpSpPr>
+        <p:cNvPr id="1" name=""/>
+        <p:cNvGrpSpPr/>
+        <p:nvPr/>
+      </p:nvGrpSpPr>
+      <p:grpSpPr>
+        <a:xfrm>
+          <a:off x="0" y="0"/>
+          <a:ext cx="0" cy="0"/>
+          <a:chOff x="0" y="0"/>
+          <a:chExt cx="0" cy="0"/>
+        </a:xfrm>
+      </p:grpSpPr>
+      <p:sp>
+        <p:nvSpPr>
+          <p:cNvPr id="2" name="Title 1"/>
+          <p:cNvSpPr>
+            <a:spLocks noGrp="1"/>
+          </p:cNvSpPr>
+          <p:nvPr>
+            <p:ph type="title"/>
+          </p:nvPr>
+        </p:nvSpPr>
+        <p:spPr/>
+        <p:txBody>
+          <a:bodyPr/>
+          <a:lstStyle/>
+          <a:p>
+            <a:pPr lvl="0" indent="0" marL="0">
+              <a:buNone/>
+            </a:pPr>
+            <a:r>
+              <a:rPr/>
+              <a:t>Duas camadas de configuração — por que distinguir</a:t>
+            </a:r>
+          </a:p>
+        </p:txBody>
+      </p:sp>
+      <p:sp>
+        <p:nvSpPr>
+          <p:cNvPr id="3" name="Content Placeholder 2"/>
+          <p:cNvSpPr>
+            <a:spLocks noGrp="1"/>
+          </p:cNvSpPr>
+          <p:nvPr>
+            <p:ph idx="1"/>
+          </p:nvPr>
+        </p:nvSpPr>
+        <p:spPr/>
+        <p:txBody>
+          <a:bodyPr/>
+          <a:lstStyle/>
+          <a:p>
+            <a:pPr lvl="0"/>
+            <a:r>
+              <a:rPr b="1"/>
+              <a:t>Configuração operacional da NF</a:t>
+            </a:r>
+            <a:r>
+              <a:rPr/>
+              <a:t> — análoga ao que O1/NETCONF faria numa NF real: API própria </a:t>
+            </a:r>
+            <a:r>
+              <a:rPr>
+                <a:latin typeface="Courier"/>
+              </a:rPr>
+              <a:t>/config</a:t>
+            </a:r>
+            <a:r>
+              <a:rPr/>
+              <a:t> de cada CNF</a:t>
+            </a:r>
+          </a:p>
+          <a:p>
+            <a:pPr lvl="0"/>
+            <a:r>
+              <a:rPr b="1"/>
+              <a:t>Configuração de implantação</a:t>
+            </a:r>
+            <a:r>
+              <a:rPr/>
+              <a:t> (pacote/GitOps) — mudar o </a:t>
+            </a:r>
+            <a:r>
+              <a:rPr>
+                <a:latin typeface="Courier"/>
+              </a:rPr>
+              <a:t>ConfigMap</a:t>
+            </a:r>
+            <a:r>
+              <a:rPr/>
+              <a:t>/</a:t>
+            </a:r>
+            <a:r>
+              <a:rPr>
+                <a:latin typeface="Courier"/>
+              </a:rPr>
+              <a:t>Deployment</a:t>
+            </a:r>
+            <a:r>
+              <a:rPr/>
+              <a:t> no pacote autoral e republicar via Porch</a:t>
+            </a:r>
+          </a:p>
+          <a:p>
+            <a:pPr lvl="0"/>
+            <a:r>
+              <a:rPr/>
+              <a:t>Nephio </a:t>
+            </a:r>
+            <a:r>
+              <a:rPr b="1"/>
+              <a:t>não implementa O1</a:t>
+            </a:r>
+            <a:r>
+              <a:rPr/>
+              <a:t> — então a API </a:t>
+            </a:r>
+            <a:r>
+              <a:rPr>
+                <a:latin typeface="Courier"/>
+              </a:rPr>
+              <a:t>/config</a:t>
+            </a:r>
+            <a:r>
+              <a:rPr/>
+              <a:t> é o substituto de laboratório para essa camada, não uma alegação de que isso É O1</a:t>
+            </a:r>
+          </a:p>
+        </p:txBody>
+      </p:sp>
+    </p:spTree>
+  </p:cSld>
+</p:sld>
+</file>
+
+<file path=ppt/slides/slide12.xml><?xml version="1.0" encoding="utf-8"?>
+<p:sld xmlns:a="http://schemas.openxmlformats.org/drawingml/2006/main" xmlns:r="http://schemas.openxmlformats.org/officeDocument/2006/relationships" xmlns:p="http://schemas.openxmlformats.org/presentationml/2006/main">
+  <p:cSld>
+    <p:spTree>
+      <p:nvGrpSpPr>
+        <p:cNvPr id="1" name=""/>
+        <p:cNvGrpSpPr/>
+        <p:nvPr/>
+      </p:nvGrpSpPr>
+      <p:grpSpPr>
+        <a:xfrm>
+          <a:off x="0" y="0"/>
+          <a:ext cx="0" cy="0"/>
+          <a:chOff x="0" y="0"/>
+          <a:chExt cx="0" cy="0"/>
+        </a:xfrm>
+      </p:grpSpPr>
+      <p:sp>
+        <p:nvSpPr>
+          <p:cNvPr id="2" name="Title 1"/>
+          <p:cNvSpPr>
+            <a:spLocks noGrp="1"/>
+          </p:cNvSpPr>
+          <p:nvPr>
+            <p:ph type="title"/>
+          </p:nvPr>
+        </p:nvSpPr>
+        <p:spPr/>
+        <p:txBody>
+          <a:bodyPr/>
+          <a:lstStyle/>
+          <a:p>
+            <a:pPr lvl="0" indent="0" marL="0">
+              <a:buNone/>
+            </a:pPr>
+            <a:r>
+              <a:rPr/>
+              <a:t>Experimento 2 — Configuration management</a:t>
+            </a:r>
+          </a:p>
+        </p:txBody>
+      </p:sp>
+      <p:sp>
+        <p:nvSpPr>
+          <p:cNvPr id="3" name="Content Placeholder 2"/>
+          <p:cNvSpPr>
+            <a:spLocks noGrp="1"/>
+          </p:cNvSpPr>
+          <p:nvPr>
+            <p:ph idx="1"/>
+          </p:nvPr>
+        </p:nvSpPr>
+        <p:spPr/>
+        <p:txBody>
+          <a:bodyPr/>
+          <a:lstStyle/>
+          <a:p>
+            <a:pPr lvl="0"/>
+            <a:r>
+              <a:rPr b="1"/>
+              <a:t>Comando:</a:t>
+            </a:r>
+            <a:r>
+              <a:rPr/>
+              <a:t> </a:t>
+            </a:r>
+            <a:r>
+              <a:rPr>
+                <a:latin typeface="Courier"/>
+              </a:rPr>
+              <a:t>PUT /config {"cell_id": 2}</a:t>
+            </a:r>
+            <a:r>
+              <a:rPr/>
+              <a:t> no </a:t>
+            </a:r>
+            <a:r>
+              <a:rPr>
+                <a:latin typeface="Courier"/>
+              </a:rPr>
+              <a:t>oran-du</a:t>
+            </a:r>
+          </a:p>
+          <a:p>
+            <a:pPr lvl="0"/>
+            <a:r>
+              <a:rPr b="1"/>
+              <a:t>Resultado:</a:t>
+            </a:r>
+            <a:r>
+              <a:rPr/>
+              <a:t> </a:t>
+            </a:r>
+            <a:r>
+              <a:rPr>
+                <a:latin typeface="Courier"/>
+              </a:rPr>
+              <a:t>cell_id</a:t>
+            </a:r>
+            <a:r>
+              <a:rPr/>
+              <a:t> </a:t>
+            </a:r>
+            <a:r>
+              <a:rPr>
+                <a:latin typeface="Courier"/>
+              </a:rPr>
+              <a:t>1 → 2</a:t>
+            </a:r>
+            <a:r>
+              <a:rPr/>
+              <a:t>, </a:t>
+            </a:r>
+            <a:r>
+              <a:rPr>
+                <a:latin typeface="Courier"/>
+              </a:rPr>
+              <a:t>config_version</a:t>
+            </a:r>
+            <a:r>
+              <a:rPr/>
+              <a:t> </a:t>
+            </a:r>
+            <a:r>
+              <a:rPr>
+                <a:latin typeface="Courier"/>
+              </a:rPr>
+              <a:t>1 → 2</a:t>
+            </a:r>
+            <a:r>
+              <a:rPr/>
+              <a:t>, em </a:t>
+            </a:r>
+            <a:r>
+              <a:rPr b="1"/>
+              <a:t>0,7 s</a:t>
+            </a:r>
+          </a:p>
+          <a:p>
+            <a:pPr lvl="0"/>
+            <a:r>
+              <a:rPr/>
+              <a:t>Prova que a camada operacional da NF responde e versiona suas próprias mudanças</a:t>
+            </a:r>
+          </a:p>
+        </p:txBody>
+      </p:sp>
+    </p:spTree>
+  </p:cSld>
+</p:sld>
+</file>
+
+<file path=ppt/slides/slide13.xml><?xml version="1.0" encoding="utf-8"?>
+<p:sld xmlns:a="http://schemas.openxmlformats.org/drawingml/2006/main" xmlns:r="http://schemas.openxmlformats.org/officeDocument/2006/relationships" xmlns:p="http://schemas.openxmlformats.org/presentationml/2006/main">
+  <p:cSld>
+    <p:spTree>
+      <p:nvGrpSpPr>
+        <p:cNvPr id="1" name=""/>
+        <p:cNvGrpSpPr/>
+        <p:nvPr/>
+      </p:nvGrpSpPr>
+      <p:grpSpPr>
+        <a:xfrm>
+          <a:off x="0" y="0"/>
+          <a:ext cx="0" cy="0"/>
+          <a:chOff x="0" y="0"/>
+          <a:chExt cx="0" cy="0"/>
+        </a:xfrm>
+      </p:grpSpPr>
+      <p:sp>
+        <p:nvSpPr>
+          <p:cNvPr id="2" name="Title 1"/>
+          <p:cNvSpPr>
+            <a:spLocks noGrp="1"/>
+          </p:cNvSpPr>
+          <p:nvPr>
+            <p:ph type="title"/>
+          </p:nvPr>
+        </p:nvSpPr>
+        <p:spPr/>
+        <p:txBody>
+          <a:bodyPr/>
+          <a:lstStyle/>
+          <a:p>
+            <a:pPr lvl="0" indent="0" marL="0">
+              <a:buNone/>
+            </a:pPr>
+            <a:r>
+              <a:rPr/>
+              <a:t>Experimento 3 — Scale</a:t>
+            </a:r>
+          </a:p>
+        </p:txBody>
+      </p:sp>
+      <p:sp>
+        <p:nvSpPr>
+          <p:cNvPr id="3" name="Content Placeholder 2"/>
+          <p:cNvSpPr>
+            <a:spLocks noGrp="1"/>
+          </p:cNvSpPr>
+          <p:nvPr>
+            <p:ph idx="1"/>
+          </p:nvPr>
+        </p:nvSpPr>
+        <p:spPr/>
+        <p:txBody>
+          <a:bodyPr/>
+          <a:lstStyle/>
+          <a:p>
+            <a:pPr lvl="0"/>
+            <a:r>
+              <a:rPr b="1"/>
+              <a:t>Comando:</a:t>
+            </a:r>
+            <a:r>
+              <a:rPr/>
+              <a:t> </a:t>
+            </a:r>
+            <a:r>
+              <a:rPr>
+                <a:latin typeface="Courier"/>
+              </a:rPr>
+              <a:t>kubectl scale deploy/oran-cu --replicas=2</a:t>
+            </a:r>
+          </a:p>
+          <a:p>
+            <a:pPr lvl="0"/>
+            <a:r>
+              <a:rPr b="1"/>
+              <a:t>Resultado:</a:t>
+            </a:r>
+            <a:r>
+              <a:rPr/>
+              <a:t> rollout concluído, </a:t>
+            </a:r>
+            <a:r>
+              <a:rPr>
+                <a:latin typeface="Courier"/>
+              </a:rPr>
+              <a:t>oran-cu</a:t>
+            </a:r>
+            <a:r>
+              <a:rPr/>
+              <a:t> 2/2 </a:t>
+            </a:r>
+            <a:r>
+              <a:rPr>
+                <a:latin typeface="Courier"/>
+              </a:rPr>
+              <a:t>Running</a:t>
+            </a:r>
+            <a:r>
+              <a:rPr/>
+              <a:t>, em </a:t>
+            </a:r>
+            <a:r>
+              <a:rPr b="1"/>
+              <a:t>5,7 s</a:t>
+            </a:r>
+          </a:p>
+          <a:p>
+            <a:pPr lvl="0"/>
+            <a:r>
+              <a:rPr/>
+              <a:t>Mecanismo: </a:t>
+            </a:r>
+            <a:r>
+              <a:rPr b="1"/>
+              <a:t>ReplicaSet controller do Kubernetes</a:t>
+            </a:r>
+            <a:r>
+              <a:rPr/>
+              <a:t> — o mesmo mecanismo genérico usado por qualquer aplicação, não um scaling orientado por KPI de rede O-RAN</a:t>
+            </a:r>
+          </a:p>
+        </p:txBody>
+      </p:sp>
+    </p:spTree>
+  </p:cSld>
+</p:sld>
+</file>
+
+<file path=ppt/slides/slide14.xml><?xml version="1.0" encoding="utf-8"?>
+<p:sld xmlns:a="http://schemas.openxmlformats.org/drawingml/2006/main" xmlns:r="http://schemas.openxmlformats.org/officeDocument/2006/relationships" xmlns:p="http://schemas.openxmlformats.org/presentationml/2006/main">
+  <p:cSld>
+    <p:spTree>
+      <p:nvGrpSpPr>
+        <p:cNvPr id="1" name=""/>
+        <p:cNvGrpSpPr/>
+        <p:nvPr/>
+      </p:nvGrpSpPr>
+      <p:grpSpPr>
+        <a:xfrm>
+          <a:off x="0" y="0"/>
+          <a:ext cx="0" cy="0"/>
+          <a:chOff x="0" y="0"/>
+          <a:chExt cx="0" cy="0"/>
+        </a:xfrm>
+      </p:grpSpPr>
+      <p:sp>
+        <p:nvSpPr>
+          <p:cNvPr id="2" name="Title 1"/>
+          <p:cNvSpPr>
+            <a:spLocks noGrp="1"/>
+          </p:cNvSpPr>
+          <p:nvPr>
+            <p:ph type="title"/>
+          </p:nvPr>
+        </p:nvSpPr>
+        <p:spPr/>
+        <p:txBody>
+          <a:bodyPr/>
+          <a:lstStyle/>
+          <a:p>
+            <a:pPr lvl="0" indent="0" marL="0">
+              <a:buNone/>
+            </a:pPr>
+            <a:r>
+              <a:rPr/>
+              <a:t>Experimento 5 — Upgrade (achado real)</a:t>
+            </a:r>
+          </a:p>
+        </p:txBody>
+      </p:sp>
+      <p:sp>
+        <p:nvSpPr>
+          <p:cNvPr id="3" name="Content Placeholder 2"/>
+          <p:cNvSpPr>
+            <a:spLocks noGrp="1"/>
+          </p:cNvSpPr>
+          <p:nvPr>
+            <p:ph idx="1"/>
+          </p:nvPr>
+        </p:nvSpPr>
+        <p:spPr/>
+        <p:txBody>
+          <a:bodyPr/>
+          <a:lstStyle/>
+          <a:p>
+            <a:pPr lvl="0"/>
+            <a:r>
+              <a:rPr b="1"/>
+              <a:t>Comando:</a:t>
+            </a:r>
+            <a:r>
+              <a:rPr/>
+              <a:t> atualizar </a:t>
+            </a:r>
+            <a:r>
+              <a:rPr>
+                <a:latin typeface="Courier"/>
+              </a:rPr>
+              <a:t>NF_VERSION</a:t>
+            </a:r>
+            <a:r>
+              <a:rPr/>
+              <a:t> v1→v2 no pacote e republicar via Porch</a:t>
+            </a:r>
+          </a:p>
+          <a:p>
+            <a:pPr lvl="0"/>
+            <a:r>
+              <a:rPr b="1"/>
+              <a:t>Resultado:</a:t>
+            </a:r>
+            <a:r>
+              <a:rPr/>
+              <a:t> </a:t>
+            </a:r>
+            <a:r>
+              <a:rPr>
+                <a:latin typeface="Courier"/>
+              </a:rPr>
+              <a:t>revision</a:t>
+            </a:r>
+            <a:r>
+              <a:rPr/>
+              <a:t> do Deployment 1→2, rollout real, </a:t>
+            </a:r>
+            <a:r>
+              <a:rPr>
+                <a:latin typeface="Courier"/>
+              </a:rPr>
+              <a:t>/health.nf_version=v2</a:t>
+            </a:r>
+            <a:r>
+              <a:rPr/>
+              <a:t>, em </a:t>
+            </a:r>
+            <a:r>
+              <a:rPr b="1"/>
+              <a:t>15,0 s</a:t>
+            </a:r>
+          </a:p>
+          <a:p>
+            <a:pPr lvl="0"/>
+            <a:r>
+              <a:rPr b="1"/>
+              <a:t>Achado real:</a:t>
+            </a:r>
+            <a:r>
+              <a:rPr/>
+              <a:t> mudar </a:t>
+            </a:r>
+            <a:r>
+              <a:rPr b="1"/>
+              <a:t>só</a:t>
+            </a:r>
+            <a:r>
+              <a:rPr/>
+              <a:t> o </a:t>
+            </a:r>
+            <a:r>
+              <a:rPr>
+                <a:latin typeface="Courier"/>
+              </a:rPr>
+              <a:t>ConfigMap</a:t>
+            </a:r>
+            <a:r>
+              <a:rPr/>
+              <a:t> (consumido via </a:t>
+            </a:r>
+            <a:r>
+              <a:rPr>
+                <a:latin typeface="Courier"/>
+              </a:rPr>
+              <a:t>envFrom</a:t>
+            </a:r>
+            <a:r>
+              <a:rPr/>
+              <a:t>) </a:t>
+            </a:r>
+            <a:r>
+              <a:rPr b="1"/>
+              <a:t>não</a:t>
+            </a:r>
+            <a:r>
+              <a:rPr/>
+              <a:t> dispara rollout — o hash do pod template não muda</a:t>
+            </a:r>
+          </a:p>
+          <a:p>
+            <a:pPr lvl="0"/>
+            <a:r>
+              <a:rPr b="1"/>
+              <a:t>Correção:</a:t>
+            </a:r>
+            <a:r>
+              <a:rPr/>
+              <a:t> anotação de versão em </a:t>
+            </a:r>
+            <a:r>
+              <a:rPr>
+                <a:latin typeface="Courier"/>
+              </a:rPr>
+              <a:t>spec.template.metadata.annotations</a:t>
+            </a:r>
+            <a:r>
+              <a:rPr/>
+              <a:t>, que força um novo </a:t>
+            </a:r>
+            <a:r>
+              <a:rPr>
+                <a:latin typeface="Courier"/>
+              </a:rPr>
+              <a:t>ReplicaSet</a:t>
+            </a:r>
+          </a:p>
+        </p:txBody>
+      </p:sp>
+    </p:spTree>
+  </p:cSld>
+</p:sld>
+</file>
+
+<file path=ppt/slides/slide15.xml><?xml version="1.0" encoding="utf-8"?>
+<p:sld xmlns:a="http://schemas.openxmlformats.org/drawingml/2006/main" xmlns:r="http://schemas.openxmlformats.org/officeDocument/2006/relationships" xmlns:p="http://schemas.openxmlformats.org/presentationml/2006/main">
+  <p:cSld>
+    <p:spTree>
+      <p:nvGrpSpPr>
+        <p:cNvPr id="1" name=""/>
+        <p:cNvGrpSpPr/>
+        <p:nvPr/>
+      </p:nvGrpSpPr>
+      <p:grpSpPr>
+        <a:xfrm>
+          <a:off x="0" y="0"/>
+          <a:ext cx="0" cy="0"/>
+          <a:chOff x="0" y="0"/>
+          <a:chExt cx="0" cy="0"/>
+        </a:xfrm>
+      </p:grpSpPr>
+      <p:sp>
+        <p:nvSpPr>
+          <p:cNvPr id="2" name="Title 1"/>
+          <p:cNvSpPr>
+            <a:spLocks noGrp="1"/>
+          </p:cNvSpPr>
+          <p:nvPr>
+            <p:ph type="title"/>
+          </p:nvPr>
+        </p:nvSpPr>
+        <p:spPr/>
+        <p:txBody>
+          <a:bodyPr/>
+          <a:lstStyle/>
+          <a:p>
+            <a:pPr lvl="0" indent="0" marL="0">
+              <a:buNone/>
+            </a:pPr>
+            <a:r>
+              <a:rPr/>
+              <a:t>Experimento 4 — Recover</a:t>
+            </a:r>
+          </a:p>
+        </p:txBody>
+      </p:sp>
+      <p:sp>
+        <p:nvSpPr>
+          <p:cNvPr id="3" name="Content Placeholder 2"/>
+          <p:cNvSpPr>
+            <a:spLocks noGrp="1"/>
+          </p:cNvSpPr>
+          <p:nvPr>
+            <p:ph idx="1"/>
+          </p:nvPr>
+        </p:nvSpPr>
+        <p:spPr/>
+        <p:txBody>
+          <a:bodyPr/>
+          <a:lstStyle/>
+          <a:p>
+            <a:pPr lvl="0"/>
+            <a:r>
+              <a:rPr b="1"/>
+              <a:t>Comando:</a:t>
+            </a:r>
+            <a:r>
+              <a:rPr/>
+              <a:t> </a:t>
+            </a:r>
+            <a:r>
+              <a:rPr>
+                <a:latin typeface="Courier"/>
+              </a:rPr>
+              <a:t>kubectl delete pod</a:t>
+            </a:r>
+            <a:r>
+              <a:rPr/>
+              <a:t> no </a:t>
+            </a:r>
+            <a:r>
+              <a:rPr>
+                <a:latin typeface="Courier"/>
+              </a:rPr>
+              <a:t>oran-du</a:t>
+            </a:r>
+          </a:p>
+          <a:p>
+            <a:pPr lvl="0"/>
+            <a:r>
+              <a:rPr b="1"/>
+              <a:t>Resultado:</a:t>
+            </a:r>
+            <a:r>
+              <a:rPr/>
+              <a:t> ReplicaSet recria em </a:t>
+            </a:r>
+            <a:r>
+              <a:rPr b="1"/>
+              <a:t>3,9 s</a:t>
+            </a:r>
+            <a:r>
+              <a:rPr/>
+              <a:t> — pod novo, nome diferente</a:t>
+            </a:r>
+          </a:p>
+          <a:p>
+            <a:pPr lvl="0"/>
+            <a:r>
+              <a:rPr b="1"/>
+              <a:t>Isto é self-healing do Kubernetes</a:t>
+            </a:r>
+            <a:r>
+              <a:rPr/>
+              <a:t> (estado desejado × estado real) — </a:t>
+            </a:r>
+            <a:r>
+              <a:rPr b="1"/>
+              <a:t>não</a:t>
+            </a:r>
+            <a:r>
+              <a:rPr/>
+              <a:t> é healing de uma NF de telecom: sem estado de sessão, sem re-registro em interfaces O-RAN</a:t>
+            </a:r>
+          </a:p>
+        </p:txBody>
+      </p:sp>
+    </p:spTree>
+  </p:cSld>
+</p:sld>
+</file>
+
+<file path=ppt/slides/slide16.xml><?xml version="1.0" encoding="utf-8"?>
+<p:sld xmlns:a="http://schemas.openxmlformats.org/drawingml/2006/main" xmlns:r="http://schemas.openxmlformats.org/officeDocument/2006/relationships" xmlns:p="http://schemas.openxmlformats.org/presentationml/2006/main">
+  <p:cSld>
+    <p:spTree>
+      <p:nvGrpSpPr>
+        <p:cNvPr id="1" name=""/>
+        <p:cNvGrpSpPr/>
+        <p:nvPr/>
+      </p:nvGrpSpPr>
+      <p:grpSpPr>
+        <a:xfrm>
+          <a:off x="0" y="0"/>
+          <a:ext cx="0" cy="0"/>
+          <a:chOff x="0" y="0"/>
+          <a:chExt cx="0" cy="0"/>
+        </a:xfrm>
+      </p:grpSpPr>
+      <p:sp>
+        <p:nvSpPr>
+          <p:cNvPr id="2" name="Title 1"/>
+          <p:cNvSpPr>
+            <a:spLocks noGrp="1"/>
+          </p:cNvSpPr>
+          <p:nvPr>
+            <p:ph type="title"/>
+          </p:nvPr>
+        </p:nvSpPr>
+        <p:spPr/>
+        <p:txBody>
+          <a:bodyPr/>
+          <a:lstStyle/>
+          <a:p>
+            <a:pPr lvl="0" indent="0" marL="0">
+              <a:buNone/>
+            </a:pPr>
+            <a:r>
+              <a:rPr/>
+              <a:t>Experimento 6 — Terminate</a:t>
+            </a:r>
+          </a:p>
+        </p:txBody>
+      </p:sp>
+      <p:sp>
+        <p:nvSpPr>
+          <p:cNvPr id="3" name="Content Placeholder 2"/>
+          <p:cNvSpPr>
+            <a:spLocks noGrp="1"/>
+          </p:cNvSpPr>
+          <p:nvPr>
+            <p:ph idx="1"/>
+          </p:nvPr>
+        </p:nvSpPr>
+        <p:spPr/>
+        <p:txBody>
+          <a:bodyPr/>
+          <a:lstStyle/>
+          <a:p>
+            <a:pPr lvl="0"/>
+            <a:r>
+              <a:rPr b="1"/>
+              <a:t>Comando:</a:t>
+            </a:r>
+            <a:r>
+              <a:rPr/>
+              <a:t> remover </a:t>
+            </a:r>
+            <a:r>
+              <a:rPr>
+                <a:latin typeface="Courier"/>
+              </a:rPr>
+              <a:t>oran-core</a:t>
+            </a:r>
+            <a:r>
+              <a:rPr/>
+              <a:t> do pacote e republicar</a:t>
+            </a:r>
+          </a:p>
+          <a:p>
+            <a:pPr lvl="0"/>
+            <a:r>
+              <a:rPr b="1"/>
+              <a:t>Resultado:</a:t>
+            </a:r>
+            <a:r>
+              <a:rPr/>
+              <a:t> </a:t>
+            </a:r>
+            <a:r>
+              <a:rPr>
+                <a:latin typeface="Courier"/>
+              </a:rPr>
+              <a:t>oran-core</a:t>
+            </a:r>
+            <a:r>
+              <a:rPr/>
+              <a:t> removido via </a:t>
+            </a:r>
+            <a:r>
+              <a:rPr b="1"/>
+              <a:t>prune</a:t>
+            </a:r>
+            <a:r>
+              <a:rPr/>
+              <a:t> do </a:t>
+            </a:r>
+            <a:r>
+              <a:rPr>
+                <a:latin typeface="Courier"/>
+              </a:rPr>
+              <a:t>kpt live apply</a:t>
+            </a:r>
+            <a:r>
+              <a:rPr/>
+              <a:t>, em </a:t>
+            </a:r>
+            <a:r>
+              <a:rPr b="1"/>
+              <a:t>10,8 s</a:t>
+            </a:r>
+          </a:p>
+          <a:p>
+            <a:pPr lvl="0"/>
+            <a:r>
+              <a:rPr/>
+              <a:t>Terminação pelo </a:t>
+            </a:r>
+            <a:r>
+              <a:rPr b="1"/>
+              <a:t>mesmo mecanismo declarativo</a:t>
+            </a:r>
+            <a:r>
+              <a:rPr/>
+              <a:t> que criou o recurso — não um </a:t>
+            </a:r>
+            <a:r>
+              <a:rPr>
+                <a:latin typeface="Courier"/>
+              </a:rPr>
+              <a:t>kubectl delete</a:t>
+            </a:r>
+            <a:r>
+              <a:rPr/>
+              <a:t> avulso</a:t>
+            </a:r>
+          </a:p>
+        </p:txBody>
+      </p:sp>
+    </p:spTree>
+  </p:cSld>
+</p:sld>
+</file>
+
+<file path=ppt/slides/slide17.xml><?xml version="1.0" encoding="utf-8"?>
+<p:sld xmlns:a="http://schemas.openxmlformats.org/drawingml/2006/main" xmlns:r="http://schemas.openxmlformats.org/officeDocument/2006/relationships" xmlns:p="http://schemas.openxmlformats.org/presentationml/2006/main">
+  <p:cSld>
+    <p:spTree>
+      <p:nvGrpSpPr>
+        <p:cNvPr id="1" name=""/>
+        <p:cNvGrpSpPr/>
+        <p:nvPr/>
+      </p:nvGrpSpPr>
+      <p:grpSpPr>
+        <a:xfrm>
+          <a:off x="0" y="0"/>
+          <a:ext cx="0" cy="0"/>
+          <a:chOff x="0" y="0"/>
+          <a:chExt cx="0" cy="0"/>
+        </a:xfrm>
+      </p:grpSpPr>
+      <p:sp>
+        <p:nvSpPr>
+          <p:cNvPr id="2" name="Title 1"/>
+          <p:cNvSpPr>
+            <a:spLocks noGrp="1"/>
+          </p:cNvSpPr>
+          <p:nvPr>
+            <p:ph type="title"/>
+          </p:nvPr>
+        </p:nvSpPr>
+        <p:spPr/>
+        <p:txBody>
+          <a:bodyPr/>
+          <a:lstStyle/>
+          <a:p>
+            <a:pPr lvl="0" indent="0" marL="0">
+              <a:buNone/>
+            </a:pPr>
+            <a:r>
+              <a:rPr/>
+              <a:t>Resultados consolidados</a:t>
+            </a:r>
+          </a:p>
+        </p:txBody>
+      </p:sp>
+      <p:pic>
+        <p:nvPicPr>
+          <p:cNvPr descr="assets/experiments-duration.png" id="0" name="Picture 1"/>
+          <p:cNvPicPr>
+            <a:picLocks noGrp="1" noChangeAspect="1"/>
+          </p:cNvPicPr>
+          <p:nvPr/>
+        </p:nvPicPr>
+        <p:blipFill>
+          <a:blip r:embed="rId3"/>
+          <a:stretch>
+            <a:fillRect/>
+          </a:stretch>
+        </p:blipFill>
+        <p:spPr bwMode="auto">
+          <a:xfrm>
+            <a:off x="2273300" y="1193800"/>
+            <a:ext cx="4597400" cy="2882900"/>
+          </a:xfrm>
+          <a:prstGeom prst="rect">
+            <a:avLst/>
+          </a:prstGeom>
+          <a:noFill/>
+          <a:ln w="9525">
+            <a:noFill/>
+            <a:headEnd/>
+            <a:tailEnd/>
+          </a:ln>
+        </p:spPr>
+      </p:pic>
+      <p:sp>
+        <p:nvSpPr>
+          <p:cNvPr id="1" name="TextBox 3"/>
+          <p:cNvSpPr txBox="1"/>
+          <p:nvPr>
+            <p:ph idx="1"/>
+          </p:nvPr>
+        </p:nvSpPr>
+        <p:spPr>
+          <a:xfrm>
+            <a:off x="457200" y="4076700"/>
+            <a:ext cx="8229600" cy="508000"/>
+          </a:xfrm>
+          <a:prstGeom prst="rect">
+            <a:avLst/>
+          </a:prstGeom>
+          <a:noFill/>
+        </p:spPr>
+        <p:txBody>
+          <a:bodyPr/>
+          <a:lstStyle/>
+          <a:p>
+            <a:pPr lvl="0" indent="0" marL="0" algn="ctr">
+              <a:buNone/>
+            </a:pPr>
+            <a:r>
+              <a:rPr/>
+              <a:t>Duração real de todos os experimentos, por categoria</a:t>
+            </a:r>
+          </a:p>
+        </p:txBody>
+      </p:sp>
+      <p:sp>
+        <p:nvSpPr>
+          <p:cNvPr id="3" name="Content Placeholder 2"/>
+          <p:cNvSpPr>
+            <a:spLocks noGrp="1"/>
+          </p:cNvSpPr>
+          <p:nvPr>
+            <p:ph idx="1"/>
+          </p:nvPr>
+        </p:nvSpPr>
+        <p:spPr/>
+        <p:txBody>
+          <a:bodyPr/>
+          <a:lstStyle/>
+          <a:p>
+            <a:pPr lvl="0"/>
+            <a:r>
+              <a:rPr b="1"/>
+              <a:t>10/10 experimentos com sucesso</a:t>
+            </a:r>
+            <a:r>
+              <a:rPr/>
+              <a:t> (</a:t>
+            </a:r>
+            <a:r>
+              <a:rPr>
+                <a:latin typeface="Courier"/>
+              </a:rPr>
+              <a:t>results/experiments.csv</a:t>
+            </a:r>
+            <a:r>
+              <a:rPr/>
+              <a:t> + evidências)</a:t>
+            </a:r>
+          </a:p>
+          <a:p>
+            <a:pPr lvl="0"/>
+            <a:r>
+              <a:rPr>
+                <a:latin typeface="Courier"/>
+              </a:rPr>
+              <a:t>scripts/validate-lab.sh</a:t>
+            </a:r>
+            <a:r>
+              <a:rPr/>
+              <a:t>: reexecuta automaticamente instantiate/scale/recover/terminate e valida cada componente da camada de operação</a:t>
+            </a:r>
+          </a:p>
+        </p:txBody>
+      </p:sp>
+      <p:pic>
+        <p:nvPicPr>
+          <p:cNvPr descr="assets/term-validate-lab.png" id="0" name="Picture 1"/>
+          <p:cNvPicPr>
+            <a:picLocks noGrp="1" noChangeAspect="1"/>
+          </p:cNvPicPr>
+          <p:nvPr/>
+        </p:nvPicPr>
+        <p:blipFill>
+          <a:blip r:embed="rId4"/>
+          <a:stretch>
+            <a:fillRect/>
+          </a:stretch>
+        </p:blipFill>
+        <p:spPr bwMode="auto">
+          <a:xfrm>
+            <a:off x="1206500" y="1193800"/>
+            <a:ext cx="6718300" cy="2882900"/>
+          </a:xfrm>
+          <a:prstGeom prst="rect">
+            <a:avLst/>
+          </a:prstGeom>
+          <a:noFill/>
+          <a:ln w="9525">
+            <a:noFill/>
+            <a:headEnd/>
+            <a:tailEnd/>
+          </a:ln>
+        </p:spPr>
+      </p:pic>
+      <p:sp>
+        <p:nvSpPr>
+          <p:cNvPr id="1" name="TextBox 3"/>
+          <p:cNvSpPr txBox="1"/>
+          <p:nvPr>
+            <p:ph idx="1"/>
+          </p:nvPr>
+        </p:nvSpPr>
+        <p:spPr>
+          <a:xfrm>
+            <a:off x="457200" y="4076700"/>
+            <a:ext cx="8229600" cy="508000"/>
+          </a:xfrm>
+          <a:prstGeom prst="rect">
+            <a:avLst/>
+          </a:prstGeom>
+          <a:noFill/>
+        </p:spPr>
+        <p:txBody>
+          <a:bodyPr/>
+          <a:lstStyle/>
+          <a:p>
+            <a:pPr lvl="0" indent="0" marL="0" algn="ctr">
+              <a:buNone/>
+            </a:pPr>
+            <a:r>
+              <a:rPr/>
+              <a:t>validate-lab.sh — validação automática do laboratório</a:t>
+            </a:r>
+          </a:p>
+        </p:txBody>
+      </p:sp>
+    </p:spTree>
+  </p:cSld>
+</p:sld>
+</file>
+
+<file path=ppt/slides/slide18.xml><?xml version="1.0" encoding="utf-8"?>
+<p:sld xmlns:a="http://schemas.openxmlformats.org/drawingml/2006/main" xmlns:r="http://schemas.openxmlformats.org/officeDocument/2006/relationships" xmlns:p="http://schemas.openxmlformats.org/presentationml/2006/main">
+  <p:cSld>
+    <p:spTree>
+      <p:nvGrpSpPr>
+        <p:cNvPr id="1" name=""/>
+        <p:cNvGrpSpPr/>
+        <p:nvPr/>
+      </p:nvGrpSpPr>
+      <p:grpSpPr>
+        <a:xfrm>
+          <a:off x="0" y="0"/>
+          <a:ext cx="0" cy="0"/>
+          <a:chOff x="0" y="0"/>
+          <a:chExt cx="0" cy="0"/>
+        </a:xfrm>
+      </p:grpSpPr>
+      <p:sp>
+        <p:nvSpPr>
+          <p:cNvPr id="2" name="Title 1"/>
+          <p:cNvSpPr>
+            <a:spLocks noGrp="1"/>
+          </p:cNvSpPr>
+          <p:nvPr>
+            <p:ph type="title"/>
+          </p:nvPr>
+        </p:nvSpPr>
+        <p:spPr>
+          <a:xfrm>
+            <a:off x="457201" y="204787"/>
+            <a:ext cx="3008313" cy="871538"/>
+          </a:xfrm>
+        </p:spPr>
+        <p:txBody>
+          <a:bodyPr/>
+          <a:lstStyle/>
+          <a:p>
+            <a:pPr lvl="0" indent="0" marL="0">
+              <a:buNone/>
+            </a:pPr>
+            <a:r>
+              <a:rPr/>
+              <a:t>Experimento 7 — metrics-server (Monitoring)</a:t>
+            </a:r>
+          </a:p>
+        </p:txBody>
+      </p:sp>
+      <p:sp>
+        <p:nvSpPr>
+          <p:cNvPr id="4" name="Text Placeholder 3"/>
+          <p:cNvSpPr>
+            <a:spLocks noGrp="1"/>
+          </p:cNvSpPr>
+          <p:nvPr>
+            <p:ph idx="2" sz="half" type="body"/>
+          </p:nvPr>
+        </p:nvSpPr>
+        <p:spPr/>
+        <p:txBody>
+          <a:bodyPr/>
+          <a:lstStyle/>
+          <a:p>
+            <a:pPr lvl="0"/>
+            <a:r>
+              <a:rPr/>
+              <a:t>Instalado no </a:t>
+            </a:r>
+            <a:r>
+              <a:rPr>
+                <a:latin typeface="Courier"/>
+              </a:rPr>
+              <a:t>o-cloud-1</a:t>
+            </a:r>
+            <a:r>
+              <a:rPr/>
+              <a:t>: manifesto oficial + patch </a:t>
+            </a:r>
+            <a:r>
+              <a:rPr>
+                <a:latin typeface="Courier"/>
+              </a:rPr>
+              <a:t>--kubelet-insecure-tls</a:t>
+            </a:r>
+          </a:p>
+          <a:p>
+            <a:pPr lvl="0"/>
+            <a:r>
+              <a:rPr/>
+              <a:t>Fecha “Monitoring: não incluído nativamente” da tabela SMO×Nephio da Parte 1</a:t>
+            </a:r>
+          </a:p>
+          <a:p>
+            <a:pPr lvl="0"/>
+            <a:r>
+              <a:rPr/>
+              <a:t>Custo: </a:t>
+            </a:r>
+            <a:r>
+              <a:rPr b="1"/>
+              <a:t>~15 MiB de RAM</a:t>
+            </a:r>
+          </a:p>
+        </p:txBody>
+      </p:sp>
+      <p:pic>
+        <p:nvPicPr>
+          <p:cNvPr descr="assets/term-metrics-top.png" id="0" name="Picture 1"/>
+          <p:cNvPicPr>
+            <a:picLocks noGrp="1" noChangeAspect="1"/>
+          </p:cNvPicPr>
+          <p:nvPr/>
+        </p:nvPicPr>
+        <p:blipFill>
+          <a:blip r:embed="rId3"/>
+          <a:stretch>
+            <a:fillRect/>
+          </a:stretch>
+        </p:blipFill>
+        <p:spPr bwMode="auto">
+          <a:xfrm>
+            <a:off x="3568700" y="1308100"/>
+            <a:ext cx="5105400" cy="1676400"/>
+          </a:xfrm>
+          <a:prstGeom prst="rect">
+            <a:avLst/>
+          </a:prstGeom>
+          <a:noFill/>
+          <a:ln w="9525">
+            <a:noFill/>
+            <a:headEnd/>
+            <a:tailEnd/>
+          </a:ln>
+        </p:spPr>
+      </p:pic>
+      <p:sp>
+        <p:nvSpPr>
+          <p:cNvPr id="1" name="TextBox 3"/>
+          <p:cNvSpPr txBox="1"/>
+          <p:nvPr>
+            <p:ph idx="1"/>
+          </p:nvPr>
+        </p:nvSpPr>
+        <p:spPr>
+          <a:xfrm>
+            <a:off x="3568700" y="4076700"/>
+            <a:ext cx="5105400" cy="508000"/>
+          </a:xfrm>
+          <a:prstGeom prst="rect">
+            <a:avLst/>
+          </a:prstGeom>
+          <a:noFill/>
+        </p:spPr>
+        <p:txBody>
+          <a:bodyPr/>
+          <a:lstStyle/>
+          <a:p>
+            <a:pPr lvl="0" indent="0" marL="0" algn="ctr">
+              <a:buNone/>
+            </a:pPr>
+            <a:r>
+              <a:rPr/>
+              <a:t>kubectl top nodes/pods — dados reais de CPU e memória</a:t>
+            </a:r>
+          </a:p>
+        </p:txBody>
+      </p:sp>
+    </p:spTree>
+  </p:cSld>
+</p:sld>
+</file>
+
+<file path=ppt/slides/slide19.xml><?xml version="1.0" encoding="utf-8"?>
+<p:sld xmlns:a="http://schemas.openxmlformats.org/drawingml/2006/main" xmlns:r="http://schemas.openxmlformats.org/officeDocument/2006/relationships" xmlns:p="http://schemas.openxmlformats.org/presentationml/2006/main">
+  <p:cSld>
+    <p:spTree>
+      <p:nvGrpSpPr>
+        <p:cNvPr id="1" name=""/>
+        <p:cNvGrpSpPr/>
+        <p:nvPr/>
+      </p:nvGrpSpPr>
+      <p:grpSpPr>
+        <a:xfrm>
+          <a:off x="0" y="0"/>
+          <a:ext cx="0" cy="0"/>
+          <a:chOff x="0" y="0"/>
+          <a:chExt cx="0" cy="0"/>
+        </a:xfrm>
+      </p:grpSpPr>
+      <p:sp>
+        <p:nvSpPr>
+          <p:cNvPr id="2" name="Title 1"/>
+          <p:cNvSpPr>
+            <a:spLocks noGrp="1"/>
+          </p:cNvSpPr>
+          <p:nvPr>
+            <p:ph type="title"/>
+          </p:nvPr>
+        </p:nvSpPr>
+        <p:spPr/>
+        <p:txBody>
+          <a:bodyPr/>
+          <a:lstStyle/>
+          <a:p>
+            <a:pPr lvl="0" indent="0" marL="0">
+              <a:buNone/>
+            </a:pPr>
+            <a:r>
+              <a:rPr/>
+              <a:t>Experimento 8 — RootSync contínuo (Orchestration)</a:t>
+            </a:r>
+          </a:p>
+        </p:txBody>
+      </p:sp>
+      <p:sp>
+        <p:nvSpPr>
+          <p:cNvPr id="3" name="Content Placeholder 2"/>
+          <p:cNvSpPr>
+            <a:spLocks noGrp="1"/>
+          </p:cNvSpPr>
+          <p:nvPr>
+            <p:ph idx="1"/>
+          </p:nvPr>
+        </p:nvSpPr>
+        <p:spPr/>
+        <p:txBody>
+          <a:bodyPr/>
+          <a:lstStyle/>
+          <a:p>
+            <a:pPr lvl="0"/>
+            <a:r>
+              <a:rPr/>
+              <a:t>Config Sync instalado no </a:t>
+            </a:r>
+            <a:r>
+              <a:rPr b="1"/>
+              <a:t>próprio</a:t>
+            </a:r>
+            <a:r>
+              <a:rPr/>
+              <a:t> </a:t>
+            </a:r>
+            <a:r>
+              <a:rPr>
+                <a:latin typeface="Courier"/>
+              </a:rPr>
+              <a:t>o-cloud-1</a:t>
+            </a:r>
+            <a:r>
+              <a:rPr/>
+              <a:t>, com </a:t>
+            </a:r>
+            <a:r>
+              <a:rPr>
+                <a:latin typeface="Courier"/>
+              </a:rPr>
+              <a:t>RootSync</a:t>
+            </a:r>
+            <a:r>
+              <a:rPr/>
+              <a:t> apontando pro repositório </a:t>
+            </a:r>
+            <a:r>
+              <a:rPr>
+                <a:latin typeface="Courier"/>
+              </a:rPr>
+              <a:t>openran-cnfs</a:t>
+            </a:r>
+          </a:p>
+          <a:p>
+            <a:pPr lvl="0"/>
+            <a:r>
+              <a:rPr/>
+              <a:t>A entrega das NFs é reconciliada </a:t>
+            </a:r>
+            <a:r>
+              <a:rPr b="1"/>
+              <a:t>continuamente</a:t>
+            </a:r>
+            <a:r>
+              <a:rPr/>
+              <a:t>, não sob demanda</a:t>
+            </a:r>
+          </a:p>
+          <a:p>
+            <a:pPr lvl="0"/>
+            <a:r>
+              <a:rPr b="1"/>
+              <a:t>Prova real:</a:t>
+            </a:r>
+            <a:r>
+              <a:rPr/>
+              <a:t> publiquei v3 no Porch </a:t>
+            </a:r>
+            <a:r>
+              <a:rPr b="1"/>
+              <a:t>sem tocar no cluster</a:t>
+            </a:r>
+            <a:r>
+              <a:rPr/>
+              <a:t> — aplicado sozinho em </a:t>
+            </a:r>
+            <a:r>
+              <a:rPr b="1"/>
+              <a:t>19 s</a:t>
+            </a:r>
+            <a:r>
+              <a:rPr/>
+              <a:t> (commit </a:t>
+            </a:r>
+            <a:r>
+              <a:rPr>
+                <a:latin typeface="Courier"/>
+              </a:rPr>
+              <a:t>1bdae53d</a:t>
+            </a:r>
+            <a:r>
+              <a:rPr/>
+              <a:t> → </a:t>
+            </a:r>
+            <a:r>
+              <a:rPr>
+                <a:latin typeface="Courier"/>
+              </a:rPr>
+              <a:t>oran-cu.nf-version=v3</a:t>
+            </a:r>
+            <a:r>
+              <a:rPr/>
+              <a:t>)</a:t>
+            </a:r>
+          </a:p>
+        </p:txBody>
+      </p:sp>
+    </p:spTree>
+  </p:cSld>
+</p:sld>
+</file>
+
+<file path=ppt/slides/slide2.xml><?xml version="1.0" encoding="utf-8"?>
+<p:sld xmlns:a="http://schemas.openxmlformats.org/drawingml/2006/main" xmlns:r="http://schemas.openxmlformats.org/officeDocument/2006/relationships" xmlns:p="http://schemas.openxmlformats.org/presentationml/2006/main">
+  <p:cSld>
+    <p:spTree>
+      <p:nvGrpSpPr>
+        <p:cNvPr id="1" name=""/>
+        <p:cNvGrpSpPr/>
+        <p:nvPr/>
+      </p:nvGrpSpPr>
+      <p:grpSpPr>
+        <a:xfrm>
+          <a:off x="0" y="0"/>
+          <a:ext cx="0" cy="0"/>
+          <a:chOff x="0" y="0"/>
+          <a:chExt cx="0" cy="0"/>
+        </a:xfrm>
+      </p:grpSpPr>
+      <p:sp>
+        <p:nvSpPr>
+          <p:cNvPr id="2" name="Title 1"/>
+          <p:cNvSpPr>
+            <a:spLocks noGrp="1"/>
+          </p:cNvSpPr>
+          <p:nvPr>
+            <p:ph type="title"/>
+          </p:nvPr>
+        </p:nvSpPr>
+        <p:spPr/>
+        <p:txBody>
+          <a:bodyPr/>
+          <a:lstStyle/>
+          <a:p>
+            <a:pPr lvl="0" indent="0" marL="0">
+              <a:buNone/>
+            </a:pPr>
+            <a:r>
+              <a:rPr/>
+              <a:t>Objetivo desta Parte 2</a:t>
+            </a:r>
+          </a:p>
+        </p:txBody>
+      </p:sp>
+      <p:sp>
+        <p:nvSpPr>
+          <p:cNvPr id="3" name="Content Placeholder 2"/>
+          <p:cNvSpPr>
+            <a:spLocks noGrp="1"/>
+          </p:cNvSpPr>
+          <p:nvPr>
+            <p:ph idx="1"/>
+          </p:nvPr>
+        </p:nvSpPr>
+        <p:spPr/>
+        <p:txBody>
+          <a:bodyPr/>
+          <a:lstStyle/>
+          <a:p>
+            <a:pPr lvl="0"/>
+            <a:r>
+              <a:rPr/>
+              <a:t>Demonstrar, com </a:t>
+            </a:r>
+            <a:r>
+              <a:rPr b="1"/>
+              <a:t>evidência mensurável</a:t>
+            </a:r>
+            <a:r>
+              <a:rPr/>
+              <a:t> (tempo, RAM, CPU), os mecanismos centrais de SMO/orquestração: </a:t>
+            </a:r>
+            <a:r>
+              <a:rPr b="1"/>
+              <a:t>provisioning, configuration management, orchestration, monitoring, lifecycle management</a:t>
+            </a:r>
+            <a:r>
+              <a:rPr/>
+              <a:t> e uma primeira função de </a:t>
+            </a:r>
+            <a:r>
+              <a:rPr b="1"/>
+              <a:t>Non-RT RIC</a:t>
+            </a:r>
+          </a:p>
+          <a:p>
+            <a:pPr lvl="0"/>
+            <a:r>
+              <a:rPr/>
+              <a:t>Não é um roteiro “follow-along” — é um experimento real, com bugs reais encontrados e corrigidos ao vivo, documentados em vez de escondidos</a:t>
+            </a:r>
+          </a:p>
+          <a:p>
+            <a:pPr lvl="0"/>
+            <a:r>
+              <a:rPr/>
+              <a:t>Critério de sucesso: cada operação tem que sair de um comando real, não de uma afirmação</a:t>
+            </a:r>
+          </a:p>
+          <a:p>
+            <a:pPr lvl="0"/>
+            <a:r>
+              <a:rPr/>
+              <a:t>Distinguir o tempo todo </a:t>
+            </a:r>
+            <a:r>
+              <a:rPr b="1"/>
+              <a:t>4 “ciclos de vida” diferentes</a:t>
+            </a:r>
+            <a:r>
+              <a:rPr/>
+              <a:t>: Kubernetes, Nephio/orquestração, O2 IMS, e NF O-RAN real (este último — nunca demonstrado, e digo isso com todas as letras)</a:t>
+            </a:r>
+          </a:p>
+        </p:txBody>
+      </p:sp>
+    </p:spTree>
+  </p:cSld>
+</p:sld>
+</file>
+
+<file path=ppt/slides/slide20.xml><?xml version="1.0" encoding="utf-8"?>
+<p:sld xmlns:a="http://schemas.openxmlformats.org/drawingml/2006/main" xmlns:r="http://schemas.openxmlformats.org/officeDocument/2006/relationships" xmlns:p="http://schemas.openxmlformats.org/presentationml/2006/main">
+  <p:cSld>
+    <p:spTree>
+      <p:nvGrpSpPr>
+        <p:cNvPr id="1" name=""/>
+        <p:cNvGrpSpPr/>
+        <p:nvPr/>
+      </p:nvGrpSpPr>
+      <p:grpSpPr>
+        <a:xfrm>
+          <a:off x="0" y="0"/>
+          <a:ext cx="0" cy="0"/>
+          <a:chOff x="0" y="0"/>
+          <a:chExt cx="0" cy="0"/>
+        </a:xfrm>
+      </p:grpSpPr>
+      <p:sp>
+        <p:nvSpPr>
+          <p:cNvPr id="2" name="Title 1"/>
+          <p:cNvSpPr>
+            <a:spLocks noGrp="1"/>
+          </p:cNvSpPr>
+          <p:nvPr>
+            <p:ph type="title"/>
+          </p:nvPr>
+        </p:nvSpPr>
+        <p:spPr>
+          <a:xfrm>
+            <a:off x="457201" y="204787"/>
+            <a:ext cx="3008313" cy="871538"/>
+          </a:xfrm>
+        </p:spPr>
+        <p:txBody>
+          <a:bodyPr/>
+          <a:lstStyle/>
+          <a:p>
+            <a:pPr lvl="0" indent="0" marL="0">
+              <a:buNone/>
+            </a:pPr>
+            <a:r>
+              <a:rPr/>
+              <a:t>Experimento 9 — config-bridge (Configuration)</a:t>
+            </a:r>
+          </a:p>
+        </p:txBody>
+      </p:sp>
+      <p:sp>
+        <p:nvSpPr>
+          <p:cNvPr id="4" name="Text Placeholder 3"/>
+          <p:cNvSpPr>
+            <a:spLocks noGrp="1"/>
+          </p:cNvSpPr>
+          <p:nvPr>
+            <p:ph idx="2" sz="half" type="body"/>
+          </p:nvPr>
+        </p:nvSpPr>
+        <p:spPr/>
+        <p:txBody>
+          <a:bodyPr/>
+          <a:lstStyle/>
+          <a:p>
+            <a:pPr lvl="0"/>
+            <a:r>
+              <a:rPr/>
+              <a:t>Fecha o loop </a:t>
+            </a:r>
+            <a:r>
+              <a:rPr>
+                <a:latin typeface="Courier"/>
+              </a:rPr>
+              <a:t>/config</a:t>
+            </a:r>
+            <a:r>
+              <a:rPr/>
+              <a:t> (NF) → pacote: um poller detecta drift entre o </a:t>
+            </a:r>
+            <a:r>
+              <a:rPr>
+                <a:latin typeface="Courier"/>
+              </a:rPr>
+              <a:t>/config</a:t>
+            </a:r>
+            <a:r>
+              <a:rPr/>
+              <a:t> ao vivo e o ConfigMap publicado, e comita a correção — o RootSync reconcilia o resto sozinho</a:t>
+            </a:r>
+          </a:p>
+        </p:txBody>
+      </p:sp>
+      <p:pic>
+        <p:nvPicPr>
+          <p:cNvPr descr="assets/term-configbridge-drift.png" id="0" name="Picture 1"/>
+          <p:cNvPicPr>
+            <a:picLocks noGrp="1" noChangeAspect="1"/>
+          </p:cNvPicPr>
+          <p:nvPr/>
+        </p:nvPicPr>
+        <p:blipFill>
+          <a:blip r:embed="rId3"/>
+          <a:stretch>
+            <a:fillRect/>
+          </a:stretch>
+        </p:blipFill>
+        <p:spPr bwMode="auto">
+          <a:xfrm>
+            <a:off x="3568700" y="1104900"/>
+            <a:ext cx="5105400" cy="2057400"/>
+          </a:xfrm>
+          <a:prstGeom prst="rect">
+            <a:avLst/>
+          </a:prstGeom>
+          <a:noFill/>
+          <a:ln w="9525">
+            <a:noFill/>
+            <a:headEnd/>
+            <a:tailEnd/>
+          </a:ln>
+        </p:spPr>
+      </p:pic>
+      <p:sp>
+        <p:nvSpPr>
+          <p:cNvPr id="1" name="TextBox 3"/>
+          <p:cNvSpPr txBox="1"/>
+          <p:nvPr>
+            <p:ph idx="1"/>
+          </p:nvPr>
+        </p:nvSpPr>
+        <p:spPr>
+          <a:xfrm>
+            <a:off x="3568700" y="4076700"/>
+            <a:ext cx="5105400" cy="508000"/>
+          </a:xfrm>
+          <a:prstGeom prst="rect">
+            <a:avLst/>
+          </a:prstGeom>
+          <a:noFill/>
+        </p:spPr>
+        <p:txBody>
+          <a:bodyPr/>
+          <a:lstStyle/>
+          <a:p>
+            <a:pPr lvl="0" indent="0" marL="0" algn="ctr">
+              <a:buNone/>
+            </a:pPr>
+            <a:r>
+              <a:rPr/>
+              <a:t>Round-trip real: PUT /config contornando o GitOps → drift detectado → commit → CFG_CELL_ID=7 confirmado no cluster</a:t>
+            </a:r>
+          </a:p>
+        </p:txBody>
+      </p:sp>
+    </p:spTree>
+  </p:cSld>
+</p:sld>
+</file>
+
+<file path=ppt/slides/slide21.xml><?xml version="1.0" encoding="utf-8"?>
+<p:sld xmlns:a="http://schemas.openxmlformats.org/drawingml/2006/main" xmlns:r="http://schemas.openxmlformats.org/officeDocument/2006/relationships" xmlns:p="http://schemas.openxmlformats.org/presentationml/2006/main">
+  <p:cSld>
+    <p:spTree>
+      <p:nvGrpSpPr>
+        <p:cNvPr id="1" name=""/>
+        <p:cNvGrpSpPr/>
+        <p:nvPr/>
+      </p:nvGrpSpPr>
+      <p:grpSpPr>
+        <a:xfrm>
+          <a:off x="0" y="0"/>
+          <a:ext cx="0" cy="0"/>
+          <a:chOff x="0" y="0"/>
+          <a:chExt cx="0" cy="0"/>
+        </a:xfrm>
+      </p:grpSpPr>
+      <p:sp>
+        <p:nvSpPr>
+          <p:cNvPr id="2" name="Title 1"/>
+          <p:cNvSpPr>
+            <a:spLocks noGrp="1"/>
+          </p:cNvSpPr>
+          <p:nvPr>
+            <p:ph type="title"/>
+          </p:nvPr>
+        </p:nvSpPr>
+        <p:spPr>
+          <a:xfrm>
+            <a:off x="457201" y="204787"/>
+            <a:ext cx="3008313" cy="871538"/>
+          </a:xfrm>
+        </p:spPr>
+        <p:txBody>
+          <a:bodyPr/>
+          <a:lstStyle/>
+          <a:p>
+            <a:pPr lvl="0" indent="0" marL="0">
+              <a:buNone/>
+            </a:pPr>
+            <a:r>
+              <a:rPr/>
+              <a:t>Experimento 10 — rapp-autoscale (Non-RT RIC)</a:t>
+            </a:r>
+          </a:p>
+        </p:txBody>
+      </p:sp>
+      <p:sp>
+        <p:nvSpPr>
+          <p:cNvPr id="4" name="Text Placeholder 3"/>
+          <p:cNvSpPr>
+            <a:spLocks noGrp="1"/>
+          </p:cNvSpPr>
+          <p:nvPr>
+            <p:ph idx="2" sz="half" type="body"/>
+          </p:nvPr>
+        </p:nvSpPr>
+        <p:spPr/>
+        <p:txBody>
+          <a:bodyPr/>
+          <a:lstStyle/>
+          <a:p>
+            <a:pPr lvl="0"/>
+            <a:r>
+              <a:rPr/>
+              <a:t>Poller Python (não um operador </a:t>
+            </a:r>
+            <a:r>
+              <a:rPr>
+                <a:latin typeface="Courier"/>
+              </a:rPr>
+              <a:t>kopf</a:t>
+            </a:r>
+            <a:r>
+              <a:rPr/>
+              <a:t> — o estado observado não é um recurso do Kubernetes) que lê a taxa de requisições de </a:t>
+            </a:r>
+            <a:r>
+              <a:rPr>
+                <a:latin typeface="Courier"/>
+              </a:rPr>
+              <a:t>/metrics</a:t>
+            </a:r>
+            <a:r>
+              <a:rPr/>
+              <a:t> a cada </a:t>
+            </a:r>
+            <a:r>
+              <a:rPr b="1"/>
+              <a:t>30 s</a:t>
+            </a:r>
+          </a:p>
+          <a:p>
+            <a:pPr lvl="0"/>
+            <a:r>
+              <a:rPr/>
+              <a:t>Deliberadamente </a:t>
+            </a:r>
+            <a:r>
+              <a:rPr b="1"/>
+              <a:t>não-tempo-real</a:t>
+            </a:r>
+            <a:r>
+              <a:rPr/>
+              <a:t> — O-RAN define rApp como &gt;1 s, xApp como 10 ms–1 s</a:t>
+            </a:r>
+          </a:p>
+          <a:p>
+            <a:pPr lvl="0"/>
+            <a:r>
+              <a:rPr/>
+              <a:t>Política: </a:t>
+            </a:r>
+            <a:r>
+              <a:rPr>
+                <a:latin typeface="Courier"/>
+              </a:rPr>
+              <a:t>rate &gt; 1,0 req/s</a:t>
+            </a:r>
+            <a:r>
+              <a:rPr/>
+              <a:t> → escala pra cima; </a:t>
+            </a:r>
+            <a:r>
+              <a:rPr>
+                <a:latin typeface="Courier"/>
+              </a:rPr>
+              <a:t>rate &lt; 0,1 req/s</a:t>
+            </a:r>
+            <a:r>
+              <a:rPr/>
+              <a:t> → escala pra baixo</a:t>
+            </a:r>
+          </a:p>
+          <a:p>
+            <a:pPr lvl="0"/>
+            <a:r>
+              <a:rPr/>
+              <a:t>Ação via PATCH direto no </a:t>
+            </a:r>
+            <a:r>
+              <a:rPr>
+                <a:latin typeface="Courier"/>
+              </a:rPr>
+              <a:t>/scale</a:t>
+            </a:r>
+            <a:r>
+              <a:rPr/>
+              <a:t> — não publica uma policy A1, porque não há Near-RT RIC real neste laboratório</a:t>
+            </a:r>
+          </a:p>
+        </p:txBody>
+      </p:sp>
+      <p:pic>
+        <p:nvPicPr>
+          <p:cNvPr descr="assets/term-rapp-decision.png" id="0" name="Picture 1"/>
+          <p:cNvPicPr>
+            <a:picLocks noGrp="1" noChangeAspect="1"/>
+          </p:cNvPicPr>
+          <p:nvPr/>
+        </p:nvPicPr>
+        <p:blipFill>
+          <a:blip r:embed="rId3"/>
+          <a:stretch>
+            <a:fillRect/>
+          </a:stretch>
+        </p:blipFill>
+        <p:spPr bwMode="auto">
+          <a:xfrm>
+            <a:off x="3568700" y="977900"/>
+            <a:ext cx="5105400" cy="2324100"/>
+          </a:xfrm>
+          <a:prstGeom prst="rect">
+            <a:avLst/>
+          </a:prstGeom>
+          <a:noFill/>
+          <a:ln w="9525">
+            <a:noFill/>
+            <a:headEnd/>
+            <a:tailEnd/>
+          </a:ln>
+        </p:spPr>
+      </p:pic>
+      <p:sp>
+        <p:nvSpPr>
+          <p:cNvPr id="1" name="TextBox 3"/>
+          <p:cNvSpPr txBox="1"/>
+          <p:nvPr>
+            <p:ph idx="1"/>
+          </p:nvPr>
+        </p:nvSpPr>
+        <p:spPr>
+          <a:xfrm>
+            <a:off x="3568700" y="4076700"/>
+            <a:ext cx="5105400" cy="508000"/>
+          </a:xfrm>
+          <a:prstGeom prst="rect">
+            <a:avLst/>
+          </a:prstGeom>
+          <a:noFill/>
+        </p:spPr>
+        <p:txBody>
+          <a:bodyPr/>
+          <a:lstStyle/>
+          <a:p>
+            <a:pPr lvl="0" indent="0" marL="0" algn="ctr">
+              <a:buNone/>
+            </a:pPr>
+            <a:r>
+              <a:rPr/>
+              <a:t>Decisão real do rApp: rate=10.27 req/s dispara scale-up 1→2</a:t>
+            </a:r>
+          </a:p>
+        </p:txBody>
+      </p:sp>
+    </p:spTree>
+  </p:cSld>
+</p:sld>
+</file>
+
+<file path=ppt/slides/slide22.xml><?xml version="1.0" encoding="utf-8"?>
+<p:sld xmlns:a="http://schemas.openxmlformats.org/drawingml/2006/main" xmlns:r="http://schemas.openxmlformats.org/officeDocument/2006/relationships" xmlns:p="http://schemas.openxmlformats.org/presentationml/2006/main">
+  <p:cSld>
+    <p:spTree>
+      <p:nvGrpSpPr>
+        <p:cNvPr id="1" name=""/>
+        <p:cNvGrpSpPr/>
+        <p:nvPr/>
+      </p:nvGrpSpPr>
+      <p:grpSpPr>
+        <a:xfrm>
+          <a:off x="0" y="0"/>
+          <a:ext cx="0" cy="0"/>
+          <a:chOff x="0" y="0"/>
+          <a:chExt cx="0" cy="0"/>
+        </a:xfrm>
+      </p:grpSpPr>
+      <p:sp>
+        <p:nvSpPr>
+          <p:cNvPr id="2" name="Title 1"/>
+          <p:cNvSpPr>
+            <a:spLocks noGrp="1"/>
+          </p:cNvSpPr>
+          <p:nvPr>
+            <p:ph type="title"/>
+          </p:nvPr>
+        </p:nvSpPr>
+        <p:spPr/>
+        <p:txBody>
+          <a:bodyPr/>
+          <a:lstStyle/>
+          <a:p>
+            <a:pPr lvl="0" indent="0" marL="0">
+              <a:buNone/>
+            </a:pPr>
+            <a:r>
+              <a:rPr/>
+              <a:t>Achado real — conflito GitOps × controle imperativo</a:t>
+            </a:r>
+          </a:p>
+        </p:txBody>
+      </p:sp>
+      <p:sp>
+        <p:nvSpPr>
+          <p:cNvPr id="3" name="Content Placeholder 2"/>
+          <p:cNvSpPr>
+            <a:spLocks noGrp="1"/>
+          </p:cNvSpPr>
+          <p:nvPr>
+            <p:ph idx="1"/>
+          </p:nvPr>
+        </p:nvSpPr>
+        <p:spPr/>
+        <p:txBody>
+          <a:bodyPr/>
+          <a:lstStyle/>
+          <a:p>
+            <a:pPr lvl="0"/>
+            <a:r>
+              <a:rPr/>
+              <a:t>O PATCH </a:t>
+            </a:r>
+            <a:r>
+              <a:rPr>
+                <a:latin typeface="Courier"/>
+              </a:rPr>
+              <a:t>/scale</a:t>
+            </a:r>
+            <a:r>
+              <a:rPr/>
+              <a:t> aplicava </a:t>
+            </a:r>
+            <a:r>
+              <a:rPr>
+                <a:latin typeface="Courier"/>
+              </a:rPr>
+              <a:t>replicas:2</a:t>
+            </a:r>
+            <a:r>
+              <a:rPr/>
+              <a:t> com sucesso (</a:t>
+            </a:r>
+            <a:r>
+              <a:rPr>
+                <a:latin typeface="Courier"/>
+              </a:rPr>
+              <a:t>200</a:t>
+            </a:r>
+            <a:r>
+              <a:rPr/>
+              <a:t>) — mas a réplica </a:t>
+            </a:r>
+            <a:r>
+              <a:rPr b="1"/>
+              <a:t>voltava pra 1</a:t>
+            </a:r>
+            <a:r>
+              <a:rPr/>
+              <a:t> segundos depois</a:t>
+            </a:r>
+          </a:p>
+          <a:p>
+            <a:pPr lvl="0"/>
+            <a:r>
+              <a:rPr b="1"/>
+              <a:t>Causa raiz:</a:t>
+            </a:r>
+            <a:r>
+              <a:rPr/>
+              <a:t> o pacote no Git ainda declarava </a:t>
+            </a:r>
+            <a:r>
+              <a:rPr>
+                <a:latin typeface="Courier"/>
+              </a:rPr>
+              <a:t>replicas: 1</a:t>
+            </a:r>
+            <a:r>
+              <a:rPr/>
+              <a:t>, e o RootSync contínuo reconciliava de volta a cada ciclo — duas autoridades de orquestração competindo pelo mesmo campo</a:t>
+            </a:r>
+          </a:p>
+          <a:p>
+            <a:pPr lvl="0"/>
+            <a:r>
+              <a:rPr b="1"/>
+              <a:t>Correção:</a:t>
+            </a:r>
+            <a:r>
+              <a:rPr/>
+              <a:t> campo </a:t>
+            </a:r>
+            <a:r>
+              <a:rPr>
+                <a:latin typeface="Courier"/>
+              </a:rPr>
+              <a:t>replicas</a:t>
+            </a:r>
+            <a:r>
+              <a:rPr/>
+              <a:t> removido do pacote — como </a:t>
+            </a:r>
+            <a:r>
+              <a:rPr>
+                <a:latin typeface="Courier"/>
+              </a:rPr>
+              <a:t>kpt live apply</a:t>
+            </a:r>
+            <a:r>
+              <a:rPr/>
+              <a:t> e o Config Sync usam </a:t>
+            </a:r>
+            <a:r>
+              <a:rPr i="1"/>
+              <a:t>server-side apply</a:t>
+            </a:r>
+            <a:r>
+              <a:rPr/>
+              <a:t>, nenhum dos dois reivindica o campo quando ausente</a:t>
+            </a:r>
+          </a:p>
+          <a:p>
+            <a:pPr lvl="0"/>
+            <a:r>
+              <a:rPr/>
+              <a:t>Mesmo padrão usado na vida real quando um </a:t>
+            </a:r>
+            <a:r>
+              <a:rPr b="1"/>
+              <a:t>HPA coexiste com GitOps</a:t>
+            </a:r>
+            <a:r>
+              <a:rPr/>
+              <a:t> (Argo CD chama isso de </a:t>
+            </a:r>
+            <a:r>
+              <a:rPr>
+                <a:latin typeface="Courier"/>
+              </a:rPr>
+              <a:t>ignoreDifferences</a:t>
+            </a:r>
+            <a:r>
+              <a:rPr/>
+              <a:t>)</a:t>
+            </a:r>
+          </a:p>
+        </p:txBody>
+      </p:sp>
+    </p:spTree>
+  </p:cSld>
+</p:sld>
+</file>
+
+<file path=ppt/slides/slide23.xml><?xml version="1.0" encoding="utf-8"?>
+<p:sld xmlns:a="http://schemas.openxmlformats.org/drawingml/2006/main" xmlns:r="http://schemas.openxmlformats.org/officeDocument/2006/relationships" xmlns:p="http://schemas.openxmlformats.org/presentationml/2006/main">
+  <p:cSld>
+    <p:spTree>
+      <p:nvGrpSpPr>
+        <p:cNvPr id="1" name=""/>
+        <p:cNvGrpSpPr/>
+        <p:nvPr/>
+      </p:nvGrpSpPr>
+      <p:grpSpPr>
+        <a:xfrm>
+          <a:off x="0" y="0"/>
+          <a:ext cx="0" cy="0"/>
+          <a:chOff x="0" y="0"/>
+          <a:chExt cx="0" cy="0"/>
+        </a:xfrm>
+      </p:grpSpPr>
+      <p:sp>
+        <p:nvSpPr>
+          <p:cNvPr id="2" name="Title 1"/>
+          <p:cNvSpPr>
+            <a:spLocks noGrp="1"/>
+          </p:cNvSpPr>
+          <p:nvPr>
+            <p:ph type="title"/>
+          </p:nvPr>
+        </p:nvSpPr>
+        <p:spPr/>
+        <p:txBody>
+          <a:bodyPr/>
+          <a:lstStyle/>
+          <a:p>
+            <a:pPr lvl="0" indent="0" marL="0">
+              <a:buNone/>
+            </a:pPr>
+            <a:r>
+              <a:rPr/>
+              <a:t>Por que rApp, não xApp</a:t>
+            </a:r>
+          </a:p>
+        </p:txBody>
+      </p:sp>
+      <p:sp>
+        <p:nvSpPr>
+          <p:cNvPr id="3" name="Content Placeholder 2"/>
+          <p:cNvSpPr>
+            <a:spLocks noGrp="1"/>
+          </p:cNvSpPr>
+          <p:nvPr>
+            <p:ph idx="1"/>
+          </p:nvPr>
+        </p:nvSpPr>
+        <p:spPr/>
+        <p:txBody>
+          <a:bodyPr/>
+          <a:lstStyle/>
+          <a:p>
+            <a:pPr lvl="0"/>
+            <a:r>
+              <a:rPr/>
+              <a:t>rApp roda no </a:t>
+            </a:r>
+            <a:r>
+              <a:rPr b="1"/>
+              <a:t>Non-RT RIC</a:t>
+            </a:r>
+            <a:r>
+              <a:rPr/>
+              <a:t>, que é parte do próprio </a:t>
+            </a:r>
+            <a:r>
+              <a:rPr b="1"/>
+              <a:t>SMO</a:t>
+            </a:r>
+            <a:r>
+              <a:rPr/>
+              <a:t> — o escopo desta disciplina</a:t>
+            </a:r>
+          </a:p>
+          <a:p>
+            <a:pPr lvl="0"/>
+            <a:r>
+              <a:rPr/>
+              <a:t>xApp rodaria no Near-RT RIC e falaria </a:t>
+            </a:r>
+            <a:r>
+              <a:rPr b="1"/>
+              <a:t>E2</a:t>
+            </a:r>
+            <a:r>
+              <a:rPr/>
+              <a:t> com os “E2 Nodes” — protocolo que nossas CNFs simuladas não implementam</a:t>
+            </a:r>
+          </a:p>
+          <a:p>
+            <a:pPr lvl="0"/>
+            <a:r>
+              <a:rPr/>
+              <a:t>Simular um xApp exigiria inventar uma interface E2/Near-RT RIC inexistente no laboratório — contra a regra deste trabalho de nunca fingir que algo funciona</a:t>
+            </a:r>
+          </a:p>
+          <a:p>
+            <a:pPr lvl="0"/>
+            <a:r>
+              <a:rPr/>
+              <a:t>Não existe “A2” na especificação O-RAN — as interfaces reais do lado RIC são </a:t>
+            </a:r>
+            <a:r>
+              <a:rPr b="1"/>
+              <a:t>A1</a:t>
+            </a:r>
+            <a:r>
+              <a:rPr/>
+              <a:t> e </a:t>
+            </a:r>
+            <a:r>
+              <a:rPr b="1"/>
+              <a:t>E2</a:t>
+            </a:r>
+          </a:p>
+        </p:txBody>
+      </p:sp>
+    </p:spTree>
+  </p:cSld>
+</p:sld>
+</file>
+
+<file path=ppt/slides/slide24.xml><?xml version="1.0" encoding="utf-8"?>
+<p:sld xmlns:a="http://schemas.openxmlformats.org/drawingml/2006/main" xmlns:r="http://schemas.openxmlformats.org/officeDocument/2006/relationships" xmlns:p="http://schemas.openxmlformats.org/presentationml/2006/main">
+  <p:cSld>
+    <p:spTree>
+      <p:nvGrpSpPr>
+        <p:cNvPr id="1" name=""/>
+        <p:cNvGrpSpPr/>
+        <p:nvPr/>
+      </p:nvGrpSpPr>
+      <p:grpSpPr>
+        <a:xfrm>
+          <a:off x="0" y="0"/>
+          <a:ext cx="0" cy="0"/>
+          <a:chOff x="0" y="0"/>
+          <a:chExt cx="0" cy="0"/>
+        </a:xfrm>
+      </p:grpSpPr>
+      <p:sp>
+        <p:nvSpPr>
+          <p:cNvPr id="2" name="Title 1"/>
+          <p:cNvSpPr>
+            <a:spLocks noGrp="1"/>
+          </p:cNvSpPr>
+          <p:nvPr>
+            <p:ph type="title"/>
+          </p:nvPr>
+        </p:nvSpPr>
+        <p:spPr/>
+        <p:txBody>
+          <a:bodyPr/>
+          <a:lstStyle/>
+          <a:p>
+            <a:pPr lvl="0" indent="0" marL="0">
+              <a:buNone/>
+            </a:pPr>
+            <a:r>
+              <a:rPr/>
+              <a:t>Uso de RAM</a:t>
+            </a:r>
+          </a:p>
+        </p:txBody>
+      </p:sp>
+      <p:pic>
+        <p:nvPicPr>
+          <p:cNvPr descr="assets/ram-usage.png" id="0" name="Picture 1"/>
+          <p:cNvPicPr>
+            <a:picLocks noGrp="1" noChangeAspect="1"/>
+          </p:cNvPicPr>
+          <p:nvPr/>
+        </p:nvPicPr>
+        <p:blipFill>
+          <a:blip r:embed="rId3"/>
+          <a:stretch>
+            <a:fillRect/>
+          </a:stretch>
+        </p:blipFill>
+        <p:spPr bwMode="auto">
+          <a:xfrm>
+            <a:off x="1778000" y="1193800"/>
+            <a:ext cx="5588000" cy="2882900"/>
+          </a:xfrm>
+          <a:prstGeom prst="rect">
+            <a:avLst/>
+          </a:prstGeom>
+          <a:noFill/>
+          <a:ln w="9525">
+            <a:noFill/>
+            <a:headEnd/>
+            <a:tailEnd/>
+          </a:ln>
+        </p:spPr>
+      </p:pic>
+      <p:sp>
+        <p:nvSpPr>
+          <p:cNvPr id="1" name="TextBox 3"/>
+          <p:cNvSpPr txBox="1"/>
+          <p:nvPr>
+            <p:ph idx="1"/>
+          </p:nvPr>
+        </p:nvSpPr>
+        <p:spPr>
+          <a:xfrm>
+            <a:off x="457200" y="4076700"/>
+            <a:ext cx="8229600" cy="508000"/>
+          </a:xfrm>
+          <a:prstGeom prst="rect">
+            <a:avLst/>
+          </a:prstGeom>
+          <a:noFill/>
+        </p:spPr>
+        <p:txBody>
+          <a:bodyPr/>
+          <a:lstStyle/>
+          <a:p>
+            <a:pPr lvl="0" indent="0" marL="0" algn="ctr">
+              <a:buNone/>
+            </a:pPr>
+            <a:r>
+              <a:rPr/>
+              <a:t>Uso real de RAM: todos os componentes cabem folgado no orçamento do WSL2</a:t>
+            </a:r>
+          </a:p>
+        </p:txBody>
+      </p:sp>
+      <p:sp>
+        <p:nvSpPr>
+          <p:cNvPr id="3" name="Content Placeholder 2"/>
+          <p:cNvSpPr>
+            <a:spLocks noGrp="1"/>
+          </p:cNvSpPr>
+          <p:nvPr>
+            <p:ph idx="1"/>
+          </p:nvPr>
+        </p:nvSpPr>
+        <p:spPr/>
+        <p:txBody>
+          <a:bodyPr/>
+          <a:lstStyle/>
+          <a:p>
+            <a:pPr lvl="0"/>
+            <a:r>
+              <a:rPr>
+                <a:latin typeface="Courier"/>
+              </a:rPr>
+              <a:t>nephio-mgmt</a:t>
+            </a:r>
+            <a:r>
+              <a:rPr/>
+              <a:t>: ~3,8 GiB · </a:t>
+            </a:r>
+            <a:r>
+              <a:rPr>
+                <a:latin typeface="Courier"/>
+              </a:rPr>
+              <a:t>o-cloud-1</a:t>
+            </a:r>
+            <a:r>
+              <a:rPr/>
+              <a:t> (2 nós): ~2,3 GiB · 3 CNFs: &lt;200 MiB · </a:t>
+            </a:r>
+            <a:r>
+              <a:rPr>
+                <a:latin typeface="Courier"/>
+              </a:rPr>
+              <a:t>metrics-server</a:t>
+            </a:r>
+            <a:r>
+              <a:rPr/>
+              <a:t>+</a:t>
+            </a:r>
+            <a:r>
+              <a:rPr>
+                <a:latin typeface="Courier"/>
+              </a:rPr>
+              <a:t>config-bridge</a:t>
+            </a:r>
+            <a:r>
+              <a:rPr/>
+              <a:t>+</a:t>
+            </a:r>
+            <a:r>
+              <a:rPr>
+                <a:latin typeface="Courier"/>
+              </a:rPr>
+              <a:t>rapp-autoscale</a:t>
+            </a:r>
+            <a:r>
+              <a:rPr/>
+              <a:t>: ~130 MiB</a:t>
+            </a:r>
+          </a:p>
+          <a:p>
+            <a:pPr lvl="0"/>
+            <a:r>
+              <a:rPr b="1"/>
+              <a:t>Total: ~6,4 GiB usados de 9,7 GiB configurados</a:t>
+            </a:r>
+            <a:r>
+              <a:rPr/>
+              <a:t> — bem abaixo da meta de 10–12 GB do enunciado</a:t>
+            </a:r>
+          </a:p>
+        </p:txBody>
+      </p:sp>
+    </p:spTree>
+  </p:cSld>
+</p:sld>
+</file>
+
+<file path=ppt/slides/slide25.xml><?xml version="1.0" encoding="utf-8"?>
+<p:sld xmlns:a="http://schemas.openxmlformats.org/drawingml/2006/main" xmlns:r="http://schemas.openxmlformats.org/officeDocument/2006/relationships" xmlns:p="http://schemas.openxmlformats.org/presentationml/2006/main">
+  <p:cSld>
+    <p:spTree>
+      <p:nvGrpSpPr>
+        <p:cNvPr id="1" name=""/>
+        <p:cNvGrpSpPr/>
+        <p:nvPr/>
+      </p:nvGrpSpPr>
+      <p:grpSpPr>
+        <a:xfrm>
+          <a:off x="0" y="0"/>
+          <a:ext cx="0" cy="0"/>
+          <a:chOff x="0" y="0"/>
+          <a:chExt cx="0" cy="0"/>
+        </a:xfrm>
+      </p:grpSpPr>
+      <p:sp>
+        <p:nvSpPr>
+          <p:cNvPr id="2" name="Title 1"/>
+          <p:cNvSpPr>
+            <a:spLocks noGrp="1"/>
+          </p:cNvSpPr>
+          <p:nvPr>
+            <p:ph type="title"/>
+          </p:nvPr>
+        </p:nvSpPr>
+        <p:spPr/>
+        <p:txBody>
+          <a:bodyPr/>
+          <a:lstStyle/>
+          <a:p>
+            <a:pPr lvl="0" indent="0" marL="0">
+              <a:buNone/>
+            </a:pPr>
+            <a:r>
+              <a:rPr/>
+              <a:t>O que foi implementado × o que ficou de fora</a:t>
+            </a:r>
+          </a:p>
+        </p:txBody>
+      </p:sp>
+      <p:sp>
+        <p:nvSpPr>
+          <p:cNvPr id="3" name="Content Placeholder 2"/>
+          <p:cNvSpPr>
+            <a:spLocks noGrp="1"/>
+          </p:cNvSpPr>
+          <p:nvPr>
+            <p:ph idx="1"/>
+          </p:nvPr>
+        </p:nvSpPr>
+        <p:spPr/>
+        <p:txBody>
+          <a:bodyPr/>
+          <a:lstStyle/>
+          <a:p>
+            <a:pPr lvl="0"/>
+            <a:r>
+              <a:rPr b="1"/>
+              <a:t>Implementado e evidenciado:</a:t>
+            </a:r>
+            <a:r>
+              <a:rPr/>
+              <a:t> provisioning (O2 IMS + Porch), lifecycle Kubernetes completo (6 experimentos), GitOps contínuo, monitoramento real, sincronização </a:t>
+            </a:r>
+            <a:r>
+              <a:rPr>
+                <a:latin typeface="Courier"/>
+              </a:rPr>
+              <a:t>/config</a:t>
+            </a:r>
+            <a:r>
+              <a:rPr/>
+              <a:t> → pacote (parcial), uma primeira função de Non-RT RIC/rApp funcional</a:t>
+            </a:r>
+          </a:p>
+          <a:p>
+            <a:pPr lvl="0"/>
+            <a:r>
+              <a:rPr b="1"/>
+              <a:t>Ficou de fora, deliberadamente:</a:t>
+            </a:r>
+            <a:r>
+              <a:rPr/>
+              <a:t> O1 (FCAPS via NETCONF/YANG), xApp/E2/Near-RT RIC, NF O-RAN real, federação FOCOM com SMO externo, telemetria O-RAN nativa (VES/PM Jobs)</a:t>
+            </a:r>
+          </a:p>
+          <a:p>
+            <a:pPr lvl="0"/>
+            <a:r>
+              <a:rPr b="1"/>
+              <a:t>11 bugs de engenharia reais</a:t>
+            </a:r>
+            <a:r>
+              <a:rPr/>
+              <a:t> encontrados e corrigidos ao longo de toda a Parte 2 — nenhum escondido</a:t>
+            </a:r>
+          </a:p>
+        </p:txBody>
+      </p:sp>
+    </p:spTree>
+  </p:cSld>
+</p:sld>
+</file>
+
+<file path=ppt/slides/slide26.xml><?xml version="1.0" encoding="utf-8"?>
+<p:sld xmlns:a="http://schemas.openxmlformats.org/drawingml/2006/main" xmlns:r="http://schemas.openxmlformats.org/officeDocument/2006/relationships" xmlns:p="http://schemas.openxmlformats.org/presentationml/2006/main">
+  <p:cSld>
+    <p:spTree>
+      <p:nvGrpSpPr>
+        <p:cNvPr id="1" name=""/>
+        <p:cNvGrpSpPr/>
+        <p:nvPr/>
+      </p:nvGrpSpPr>
+      <p:grpSpPr>
+        <a:xfrm>
+          <a:off x="0" y="0"/>
+          <a:ext cx="0" cy="0"/>
+          <a:chOff x="0" y="0"/>
+          <a:chExt cx="0" cy="0"/>
+        </a:xfrm>
+      </p:grpSpPr>
+      <p:sp>
+        <p:nvSpPr>
+          <p:cNvPr id="2" name="Title 1"/>
+          <p:cNvSpPr>
+            <a:spLocks noGrp="1"/>
+          </p:cNvSpPr>
+          <p:nvPr>
+            <p:ph type="title"/>
+          </p:nvPr>
+        </p:nvSpPr>
+        <p:spPr/>
+        <p:txBody>
+          <a:bodyPr/>
+          <a:lstStyle/>
+          <a:p>
+            <a:pPr lvl="0" indent="0" marL="0">
+              <a:buNone/>
+            </a:pPr>
+            <a:r>
+              <a:rPr/>
+              <a:t>Conclusão</a:t>
+            </a:r>
+          </a:p>
+        </p:txBody>
+      </p:sp>
+      <p:sp>
+        <p:nvSpPr>
+          <p:cNvPr id="3" name="Content Placeholder 2"/>
+          <p:cNvSpPr>
+            <a:spLocks noGrp="1"/>
+          </p:cNvSpPr>
+          <p:nvPr>
+            <p:ph idx="1"/>
+          </p:nvPr>
+        </p:nvSpPr>
+        <p:spPr/>
+        <p:txBody>
+          <a:bodyPr/>
+          <a:lstStyle/>
+          <a:p>
+            <a:pPr lvl="0"/>
+            <a:r>
+              <a:rPr/>
+              <a:t>Nephio orquestrou o ciclo de vida completo de CNFs cloud-native — provisionamento, configuração, escala, atualização, recuperação e terminação — usando seus mecanismos nativos, não apenas </a:t>
+            </a:r>
+            <a:r>
+              <a:rPr>
+                <a:latin typeface="Courier"/>
+              </a:rPr>
+              <a:t>kubectl apply</a:t>
+            </a:r>
+          </a:p>
+          <a:p>
+            <a:pPr lvl="0"/>
+            <a:r>
+              <a:rPr/>
+              <a:t>O laboratório também demonstra GitOps contínuo, monitoramento real, e uma primeira função de Non-RT RIC funcional</a:t>
+            </a:r>
+          </a:p>
+          <a:p>
+            <a:pPr lvl="0"/>
+            <a:r>
+              <a:rPr/>
+              <a:t>O que é abstração: as NFs, o O-Cloud, a federação FOCOM, o xApp (deliberadamente não simulado)</a:t>
+            </a:r>
+          </a:p>
+          <a:p>
+            <a:pPr lvl="0"/>
+            <a:r>
+              <a:rPr/>
+              <a:t>O que é real: Porch/kpt/RootSync, provisionamento O2 IMS, monitoramento e um rApp funcional (com um achado genuíno sobre orquestração distribuída)</a:t>
+            </a:r>
+          </a:p>
+        </p:txBody>
+      </p:sp>
+    </p:spTree>
+  </p:cSld>
+</p:sld>
+</file>
+
+<file path=ppt/slides/slide3.xml><?xml version="1.0" encoding="utf-8"?>
+<p:sld xmlns:a="http://schemas.openxmlformats.org/drawingml/2006/main" xmlns:r="http://schemas.openxmlformats.org/officeDocument/2006/relationships" xmlns:p="http://schemas.openxmlformats.org/presentationml/2006/main">
+  <p:cSld>
+    <p:spTree>
+      <p:nvGrpSpPr>
+        <p:cNvPr id="1" name=""/>
+        <p:cNvGrpSpPr/>
+        <p:nvPr/>
+      </p:nvGrpSpPr>
+      <p:grpSpPr>
+        <a:xfrm>
+          <a:off x="0" y="0"/>
+          <a:ext cx="0" cy="0"/>
+          <a:chOff x="0" y="0"/>
+          <a:chExt cx="0" cy="0"/>
+        </a:xfrm>
+      </p:grpSpPr>
+      <p:sp>
+        <p:nvSpPr>
+          <p:cNvPr id="2" name="Title 1"/>
+          <p:cNvSpPr>
+            <a:spLocks noGrp="1"/>
+          </p:cNvSpPr>
+          <p:nvPr>
+            <p:ph type="title"/>
+          </p:nvPr>
+        </p:nvSpPr>
+        <p:spPr/>
+        <p:txBody>
+          <a:bodyPr/>
+          <a:lstStyle/>
+          <a:p>
+            <a:pPr lvl="0" indent="0" marL="0">
+              <a:buNone/>
+            </a:pPr>
+            <a:r>
+              <a:rPr/>
+              <a:t>Recapitulando a tese da Parte 1</a:t>
+            </a:r>
+          </a:p>
+        </p:txBody>
+      </p:sp>
+      <p:sp>
+        <p:nvSpPr>
+          <p:cNvPr id="3" name="Content Placeholder 2"/>
+          <p:cNvSpPr>
+            <a:spLocks noGrp="1"/>
+          </p:cNvSpPr>
+          <p:nvPr>
+            <p:ph idx="1"/>
+          </p:nvPr>
+        </p:nvSpPr>
+        <p:spPr/>
+        <p:txBody>
+          <a:bodyPr/>
+          <a:lstStyle/>
+          <a:p>
+            <a:pPr lvl="0" indent="0" marL="1270000">
+              <a:buNone/>
+            </a:pPr>
+            <a:r>
+              <a:rPr sz="2000"/>
+              <a:t>“Nephio is a cloud-native automation and orchestration platform that can implement or support functions associated with the SMO and O-Cloud management architecture.”</a:t>
+            </a:r>
+          </a:p>
+          <a:p>
+            <a:pPr lvl="0"/>
+            <a:r>
+              <a:rPr/>
+              <a:t>Nephio </a:t>
+            </a:r>
+            <a:r>
+              <a:rPr b="1"/>
+              <a:t>não é</a:t>
+            </a:r>
+            <a:r>
+              <a:rPr/>
+              <a:t> o SMO oficial da especificação O-RAN — é uma plataforma de automação cloud-native que implementa </a:t>
+            </a:r>
+            <a:r>
+              <a:rPr b="1"/>
+              <a:t>partes</a:t>
+            </a:r>
+            <a:r>
+              <a:rPr/>
+              <a:t> das funções do SMO</a:t>
+            </a:r>
+          </a:p>
+          <a:p>
+            <a:pPr lvl="0"/>
+            <a:r>
+              <a:rPr/>
+              <a:t>Forte em: provisioning de infraestrutura (O2 IMS), lifecycle de deployment Kubernetes</a:t>
+            </a:r>
+          </a:p>
+          <a:p>
+            <a:pPr lvl="0"/>
+            <a:r>
+              <a:rPr/>
+              <a:t>Fraco/ausente em: O1 (FCAPS via NETCONF/YANG), Non-RT RIC/A1 como plataforma, telemetria O-RAN nativa</a:t>
+            </a:r>
+          </a:p>
+          <a:p>
+            <a:pPr lvl="0"/>
+            <a:r>
+              <a:rPr/>
+              <a:t>Esta Parte 2 usa exatamente essa caracterização como roteiro dos experimentos</a:t>
+            </a:r>
+          </a:p>
+        </p:txBody>
+      </p:sp>
+    </p:spTree>
+  </p:cSld>
+</p:sld>
+</file>
+
+<file path=ppt/slides/slide4.xml><?xml version="1.0" encoding="utf-8"?>
+<p:sld xmlns:a="http://schemas.openxmlformats.org/drawingml/2006/main" xmlns:r="http://schemas.openxmlformats.org/officeDocument/2006/relationships" xmlns:p="http://schemas.openxmlformats.org/presentationml/2006/main">
+  <p:cSld>
+    <p:spTree>
+      <p:nvGrpSpPr>
+        <p:cNvPr id="1" name=""/>
+        <p:cNvGrpSpPr/>
+        <p:nvPr/>
+      </p:nvGrpSpPr>
+      <p:grpSpPr>
+        <a:xfrm>
+          <a:off x="0" y="0"/>
+          <a:ext cx="0" cy="0"/>
+          <a:chOff x="0" y="0"/>
+          <a:chExt cx="0" cy="0"/>
+        </a:xfrm>
+      </p:grpSpPr>
+      <p:sp>
+        <p:nvSpPr>
+          <p:cNvPr id="2" name="Title 1"/>
+          <p:cNvSpPr>
+            <a:spLocks noGrp="1"/>
+          </p:cNvSpPr>
+          <p:nvPr>
+            <p:ph type="title"/>
+          </p:nvPr>
+        </p:nvSpPr>
+        <p:spPr/>
+        <p:txBody>
+          <a:bodyPr/>
+          <a:lstStyle/>
+          <a:p>
+            <a:pPr lvl="0" indent="0" marL="0">
+              <a:buNone/>
+            </a:pPr>
+            <a:r>
+              <a:rPr/>
+              <a:t>Ambiente e por que essas escolhas</a:t>
+            </a:r>
+          </a:p>
+        </p:txBody>
+      </p:sp>
+      <p:sp>
+        <p:nvSpPr>
+          <p:cNvPr id="3" name="Content Placeholder 2"/>
+          <p:cNvSpPr>
+            <a:spLocks noGrp="1"/>
+          </p:cNvSpPr>
+          <p:nvPr>
+            <p:ph idx="1"/>
+          </p:nvPr>
+        </p:nvSpPr>
+        <p:spPr/>
+        <p:txBody>
+          <a:bodyPr/>
+          <a:lstStyle/>
+          <a:p>
+            <a:pPr lvl="0"/>
+            <a:r>
+              <a:rPr/>
+              <a:t>Windows 11 + WSL2 Ubuntu, Docker Engine </a:t>
+            </a:r>
+            <a:r>
+              <a:rPr b="1"/>
+              <a:t>nativo</a:t>
+            </a:r>
+            <a:r>
+              <a:rPr/>
+              <a:t> no WSL2 (não Docker Desktop) — menor overhead</a:t>
+            </a:r>
+          </a:p>
+          <a:p>
+            <a:pPr lvl="0"/>
+            <a:r>
+              <a:rPr/>
+              <a:t>Nephio R6 (</a:t>
+            </a:r>
+            <a:r>
+              <a:rPr>
+                <a:latin typeface="Courier"/>
+              </a:rPr>
+              <a:t>v6.0.0</a:t>
+            </a:r>
+            <a:r>
+              <a:rPr/>
+              <a:t>), instalado pacote-a-pacote via </a:t>
+            </a:r>
+            <a:r>
+              <a:rPr>
+                <a:latin typeface="Courier"/>
+              </a:rPr>
+              <a:t>kpt</a:t>
+            </a:r>
+            <a:r>
+              <a:rPr/>
+              <a:t> — não o instalador Ansible do sandbox (que traz Argo CD + Flux + WebUI completos, inviável em 16 GB)</a:t>
+            </a:r>
+          </a:p>
+          <a:p>
+            <a:pPr lvl="0"/>
+            <a:r>
+              <a:rPr>
+                <a:latin typeface="Courier"/>
+              </a:rPr>
+              <a:t>.wslconfig</a:t>
+            </a:r>
+            <a:r>
+              <a:rPr/>
+              <a:t>: teto de </a:t>
+            </a:r>
+            <a:r>
+              <a:rPr b="1"/>
+              <a:t>9,7 GB</a:t>
+            </a:r>
+            <a:r>
+              <a:rPr/>
+              <a:t> para todo o laboratório, dentro de uma máquina de 16 GB</a:t>
+            </a:r>
+          </a:p>
+          <a:p>
+            <a:pPr lvl="0"/>
+            <a:r>
+              <a:rPr/>
+              <a:t>100% local — sem cloud paga, sem OpenStack, sem cluster K8s externo</a:t>
+            </a:r>
+          </a:p>
+          <a:p>
+            <a:pPr lvl="0"/>
+            <a:r>
+              <a:rPr/>
+              <a:t>kind (Kubernetes-in-Docker) para os dois clusters — leve, sem VM pesada</a:t>
+            </a:r>
+          </a:p>
+        </p:txBody>
+      </p:sp>
+    </p:spTree>
+  </p:cSld>
+</p:sld>
+</file>
+
+<file path=ppt/slides/slide5.xml><?xml version="1.0" encoding="utf-8"?>
+<p:sld xmlns:a="http://schemas.openxmlformats.org/drawingml/2006/main" xmlns:r="http://schemas.openxmlformats.org/officeDocument/2006/relationships" xmlns:p="http://schemas.openxmlformats.org/presentationml/2006/main">
+  <p:cSld>
+    <p:spTree>
+      <p:nvGrpSpPr>
+        <p:cNvPr id="1" name=""/>
+        <p:cNvGrpSpPr/>
+        <p:nvPr/>
+      </p:nvGrpSpPr>
+      <p:grpSpPr>
+        <a:xfrm>
+          <a:off x="0" y="0"/>
+          <a:ext cx="0" cy="0"/>
+          <a:chOff x="0" y="0"/>
+          <a:chExt cx="0" cy="0"/>
+        </a:xfrm>
+      </p:grpSpPr>
+      <p:sp>
+        <p:nvSpPr>
+          <p:cNvPr id="2" name="Title 1"/>
+          <p:cNvSpPr>
+            <a:spLocks noGrp="1"/>
+          </p:cNvSpPr>
+          <p:nvPr>
+            <p:ph type="title"/>
+          </p:nvPr>
+        </p:nvSpPr>
+        <p:spPr/>
+        <p:txBody>
+          <a:bodyPr/>
+          <a:lstStyle/>
+          <a:p>
+            <a:pPr lvl="0" indent="0" marL="0">
+              <a:buNone/>
+            </a:pPr>
+            <a:r>
+              <a:rPr/>
+              <a:t>Arquitetura — as três camadas</a:t>
+            </a:r>
+          </a:p>
+        </p:txBody>
+      </p:sp>
+      <p:pic>
+        <p:nvPicPr>
+          <p:cNvPr descr="assets/architecture-final.png" id="0" name="Picture 1"/>
+          <p:cNvPicPr>
+            <a:picLocks noGrp="1" noChangeAspect="1"/>
+          </p:cNvPicPr>
+          <p:nvPr/>
+        </p:nvPicPr>
+        <p:blipFill>
+          <a:blip r:embed="rId3"/>
+          <a:stretch>
+            <a:fillRect/>
+          </a:stretch>
+        </p:blipFill>
+        <p:spPr bwMode="auto">
+          <a:xfrm>
+            <a:off x="3073400" y="1193800"/>
+            <a:ext cx="2997200" cy="2882900"/>
+          </a:xfrm>
+          <a:prstGeom prst="rect">
+            <a:avLst/>
+          </a:prstGeom>
+          <a:noFill/>
+          <a:ln w="9525">
+            <a:noFill/>
+            <a:headEnd/>
+            <a:tailEnd/>
+          </a:ln>
+        </p:spPr>
+      </p:pic>
+      <p:sp>
+        <p:nvSpPr>
+          <p:cNvPr id="1" name="TextBox 3"/>
+          <p:cNvSpPr txBox="1"/>
+          <p:nvPr>
+            <p:ph idx="1"/>
+          </p:nvPr>
+        </p:nvSpPr>
+        <p:spPr>
+          <a:xfrm>
+            <a:off x="457200" y="4076700"/>
+            <a:ext cx="8229600" cy="508000"/>
+          </a:xfrm>
+          <a:prstGeom prst="rect">
+            <a:avLst/>
+          </a:prstGeom>
+          <a:noFill/>
+        </p:spPr>
+        <p:txBody>
+          <a:bodyPr/>
+          <a:lstStyle/>
+          <a:p>
+            <a:pPr lvl="0" indent="0" marL="0" algn="ctr">
+              <a:buNone/>
+            </a:pPr>
+            <a:r>
+              <a:rPr/>
+              <a:t>Arquitetura completa: infraestrutura (O2 IMS), entrega de NF (Porch + RootSync contínuo) e operação (metrics-server, config-bridge, rapp-autoscale)</a:t>
+            </a:r>
+          </a:p>
+        </p:txBody>
+      </p:sp>
+      <p:sp>
+        <p:nvSpPr>
+          <p:cNvPr id="3" name="Content Placeholder 2"/>
+          <p:cNvSpPr>
+            <a:spLocks noGrp="1"/>
+          </p:cNvSpPr>
+          <p:nvPr>
+            <p:ph idx="1"/>
+          </p:nvPr>
+        </p:nvSpPr>
+        <p:spPr/>
+        <p:txBody>
+          <a:bodyPr/>
+          <a:lstStyle/>
+          <a:p>
+            <a:pPr lvl="0"/>
+            <a:r>
+              <a:rPr b="1"/>
+              <a:t>Camada 1 (infraestrutura):</a:t>
+            </a:r>
+            <a:r>
+              <a:rPr/>
+              <a:t> </a:t>
+            </a:r>
+            <a:r>
+              <a:rPr>
+                <a:latin typeface="Courier"/>
+              </a:rPr>
+              <a:t>ProvisioningRequest</a:t>
+            </a:r>
+            <a:r>
+              <a:rPr/>
+              <a:t> → </a:t>
+            </a:r>
+            <a:r>
+              <a:rPr>
+                <a:latin typeface="Courier"/>
+              </a:rPr>
+              <a:t>o2ims-operator</a:t>
+            </a:r>
+            <a:r>
+              <a:rPr/>
+              <a:t> → Cluster API/CAPD → </a:t>
+            </a:r>
+            <a:r>
+              <a:rPr>
+                <a:latin typeface="Courier"/>
+              </a:rPr>
+              <a:t>o-cloud-1</a:t>
+            </a:r>
+            <a:r>
+              <a:rPr/>
+              <a:t> — o </a:t>
+            </a:r>
+            <a:r>
+              <a:rPr>
+                <a:latin typeface="Courier"/>
+              </a:rPr>
+              <a:t>o-cloud-1</a:t>
+            </a:r>
+            <a:r>
+              <a:rPr/>
+              <a:t> foi </a:t>
+            </a:r>
+            <a:r>
+              <a:rPr b="1"/>
+              <a:t>provisionado pelo próprio Nephio</a:t>
+            </a:r>
+            <a:r>
+              <a:rPr/>
+              <a:t>, não um </a:t>
+            </a:r>
+            <a:r>
+              <a:rPr>
+                <a:latin typeface="Courier"/>
+              </a:rPr>
+              <a:t>kind create</a:t>
+            </a:r>
+            <a:r>
+              <a:rPr/>
+              <a:t> manual</a:t>
+            </a:r>
+          </a:p>
+          <a:p>
+            <a:pPr lvl="0"/>
+            <a:r>
+              <a:rPr b="1"/>
+              <a:t>Camada 2 (NFs):</a:t>
+            </a:r>
+            <a:r>
+              <a:rPr/>
+              <a:t> pacote kpt → Porch → </a:t>
+            </a:r>
+            <a:r>
+              <a:rPr>
+                <a:latin typeface="Courier"/>
+              </a:rPr>
+              <a:t>RootSync</a:t>
+            </a:r>
+            <a:r>
+              <a:rPr/>
+              <a:t> contínuo → </a:t>
+            </a:r>
+            <a:r>
+              <a:rPr>
+                <a:latin typeface="Courier"/>
+              </a:rPr>
+              <a:t>oran-cu/du/core</a:t>
+            </a:r>
+          </a:p>
+          <a:p>
+            <a:pPr lvl="0"/>
+            <a:r>
+              <a:rPr b="1"/>
+              <a:t>Camada 3 (operação):</a:t>
+            </a:r>
+            <a:r>
+              <a:rPr/>
+              <a:t> </a:t>
+            </a:r>
+            <a:r>
+              <a:rPr>
+                <a:latin typeface="Courier"/>
+              </a:rPr>
+              <a:t>metrics-server</a:t>
+            </a:r>
+            <a:r>
+              <a:rPr/>
+              <a:t>, </a:t>
+            </a:r>
+            <a:r>
+              <a:rPr>
+                <a:latin typeface="Courier"/>
+              </a:rPr>
+              <a:t>config-bridge</a:t>
+            </a:r>
+            <a:r>
+              <a:rPr/>
+              <a:t> e </a:t>
+            </a:r>
+            <a:r>
+              <a:rPr>
+                <a:latin typeface="Courier"/>
+              </a:rPr>
+              <a:t>rapp-autoscale</a:t>
+            </a:r>
+            <a:r>
+              <a:rPr/>
+              <a:t> rodam dentro do </a:t>
+            </a:r>
+            <a:r>
+              <a:rPr>
+                <a:latin typeface="Courier"/>
+              </a:rPr>
+              <a:t>o-cloud-1</a:t>
+            </a:r>
+            <a:r>
+              <a:rPr/>
+              <a:t>, consumindo as mesmas APIs que as camadas 1 e 2 já expõem</a:t>
+            </a:r>
+          </a:p>
+        </p:txBody>
+      </p:sp>
+    </p:spTree>
+  </p:cSld>
+</p:sld>
+</file>
+
+<file path=ppt/slides/slide6.xml><?xml version="1.0" encoding="utf-8"?>
+<p:sld xmlns:a="http://schemas.openxmlformats.org/drawingml/2006/main" xmlns:r="http://schemas.openxmlformats.org/officeDocument/2006/relationships" xmlns:p="http://schemas.openxmlformats.org/presentationml/2006/main">
+  <p:cSld>
+    <p:spTree>
+      <p:nvGrpSpPr>
+        <p:cNvPr id="1" name=""/>
+        <p:cNvGrpSpPr/>
+        <p:nvPr/>
+      </p:nvGrpSpPr>
+      <p:grpSpPr>
+        <a:xfrm>
+          <a:off x="0" y="0"/>
+          <a:ext cx="0" cy="0"/>
+          <a:chOff x="0" y="0"/>
+          <a:chExt cx="0" cy="0"/>
+        </a:xfrm>
+      </p:grpSpPr>
+      <p:sp>
+        <p:nvSpPr>
+          <p:cNvPr id="2" name="Title 1"/>
+          <p:cNvSpPr>
+            <a:spLocks noGrp="1"/>
+          </p:cNvSpPr>
+          <p:nvPr>
+            <p:ph type="title"/>
+          </p:nvPr>
+        </p:nvSpPr>
+        <p:spPr/>
+        <p:txBody>
+          <a:bodyPr/>
+          <a:lstStyle/>
+          <a:p>
+            <a:pPr lvl="0" indent="0" marL="0">
+              <a:buNone/>
+            </a:pPr>
+            <a:r>
+              <a:rPr/>
+              <a:t>Ferramentas e o papel de cada uma</a:t>
+            </a:r>
+          </a:p>
+        </p:txBody>
+      </p:sp>
+      <p:sp>
+        <p:nvSpPr>
+          <p:cNvPr id="3" name="Content Placeholder 2"/>
+          <p:cNvSpPr>
+            <a:spLocks noGrp="1"/>
+          </p:cNvSpPr>
+          <p:nvPr>
+            <p:ph idx="1"/>
+          </p:nvPr>
+        </p:nvSpPr>
+        <p:spPr/>
+        <p:txBody>
+          <a:bodyPr/>
+          <a:lstStyle/>
+          <a:p>
+            <a:pPr lvl="0"/>
+            <a:r>
+              <a:rPr b="1"/>
+              <a:t>kpt</a:t>
+            </a:r>
+            <a:r>
+              <a:rPr/>
+              <a:t> — autoria do pacote, pipeline de funções, inventário declarativo (</a:t>
+            </a:r>
+            <a:r>
+              <a:rPr>
+                <a:latin typeface="Courier"/>
+              </a:rPr>
+              <a:t>ResourceGroup</a:t>
+            </a:r>
+            <a:r>
+              <a:rPr/>
+              <a:t>)</a:t>
+            </a:r>
+          </a:p>
+          <a:p>
+            <a:pPr lvl="0"/>
+            <a:r>
+              <a:rPr b="1"/>
+              <a:t>Porch / </a:t>
+            </a:r>
+            <a:r>
+              <a:rPr b="1">
+                <a:latin typeface="Courier"/>
+              </a:rPr>
+              <a:t>porchctl</a:t>
+            </a:r>
+            <a:r>
+              <a:rPr/>
+              <a:t> — ciclo de vida do pacote: Draft → Proposed → Published</a:t>
+            </a:r>
+          </a:p>
+          <a:p>
+            <a:pPr lvl="0"/>
+            <a:r>
+              <a:rPr b="1"/>
+              <a:t>Config Sync / </a:t>
+            </a:r>
+            <a:r>
+              <a:rPr b="1">
+                <a:latin typeface="Courier"/>
+              </a:rPr>
+              <a:t>RootSync</a:t>
+            </a:r>
+            <a:r>
+              <a:rPr/>
+              <a:t> — reconciliação GitOps contínua do repositório </a:t>
+            </a:r>
+            <a:r>
+              <a:rPr>
+                <a:latin typeface="Courier"/>
+              </a:rPr>
+              <a:t>openran-cnfs</a:t>
+            </a:r>
+          </a:p>
+          <a:p>
+            <a:pPr lvl="0"/>
+            <a:r>
+              <a:rPr b="1"/>
+              <a:t>kind + Cluster API + CAPD</a:t>
+            </a:r>
+            <a:r>
+              <a:rPr/>
+              <a:t> — criação do </a:t>
+            </a:r>
+            <a:r>
+              <a:rPr>
+                <a:latin typeface="Courier"/>
+              </a:rPr>
+              <a:t>o-cloud-1</a:t>
+            </a:r>
+            <a:r>
+              <a:rPr/>
+              <a:t> via O2 IMS</a:t>
+            </a:r>
+          </a:p>
+          <a:p>
+            <a:pPr lvl="0"/>
+            <a:r>
+              <a:rPr b="1"/>
+              <a:t>metrics-server</a:t>
+            </a:r>
+            <a:r>
+              <a:rPr/>
+              <a:t> — métricas reais de CPU/RAM por nó e por pod</a:t>
+            </a:r>
+          </a:p>
+          <a:p>
+            <a:pPr lvl="0"/>
+            <a:r>
+              <a:rPr b="1"/>
+              <a:t>kubectl</a:t>
+            </a:r>
+            <a:r>
+              <a:rPr/>
+              <a:t> — operações imperativas de comparação (scale, delete pod) e validação</a:t>
+            </a:r>
+          </a:p>
+          <a:p>
+            <a:pPr lvl="0"/>
+            <a:r>
+              <a:rPr b="1"/>
+              <a:t>FastAPI/Python + Docker</a:t>
+            </a:r>
+            <a:r>
+              <a:rPr/>
+              <a:t> — as 3 CNFs simuladas, o </a:t>
+            </a:r>
+            <a:r>
+              <a:rPr>
+                <a:latin typeface="Courier"/>
+              </a:rPr>
+              <a:t>config-bridge</a:t>
+            </a:r>
+            <a:r>
+              <a:rPr/>
+              <a:t> e o </a:t>
+            </a:r>
+            <a:r>
+              <a:rPr>
+                <a:latin typeface="Courier"/>
+              </a:rPr>
+              <a:t>rapp-autoscale</a:t>
+            </a:r>
+          </a:p>
+        </p:txBody>
+      </p:sp>
+    </p:spTree>
+  </p:cSld>
+</p:sld>
+</file>
+
+<file path=ppt/slides/slide7.xml><?xml version="1.0" encoding="utf-8"?>
+<p:sld xmlns:a="http://schemas.openxmlformats.org/drawingml/2006/main" xmlns:r="http://schemas.openxmlformats.org/officeDocument/2006/relationships" xmlns:p="http://schemas.openxmlformats.org/presentationml/2006/main">
+  <p:cSld>
+    <p:spTree>
+      <p:nvGrpSpPr>
+        <p:cNvPr id="1" name=""/>
+        <p:cNvGrpSpPr/>
+        <p:nvPr/>
+      </p:nvGrpSpPr>
+      <p:grpSpPr>
+        <a:xfrm>
+          <a:off x="0" y="0"/>
+          <a:ext cx="0" cy="0"/>
+          <a:chOff x="0" y="0"/>
+          <a:chExt cx="0" cy="0"/>
+        </a:xfrm>
+      </p:grpSpPr>
+      <p:sp>
+        <p:nvSpPr>
+          <p:cNvPr id="2" name="Title 1"/>
+          <p:cNvSpPr>
+            <a:spLocks noGrp="1"/>
+          </p:cNvSpPr>
+          <p:nvPr>
+            <p:ph type="title"/>
+          </p:nvPr>
+        </p:nvSpPr>
+        <p:spPr/>
+        <p:txBody>
+          <a:bodyPr/>
+          <a:lstStyle/>
+          <a:p>
+            <a:pPr lvl="0" indent="0" marL="0">
+              <a:buNone/>
+            </a:pPr>
+            <a:r>
+              <a:rPr/>
+              <a:t>As Network Functions simuladas</a:t>
+            </a:r>
+          </a:p>
+        </p:txBody>
+      </p:sp>
+      <p:sp>
+        <p:nvSpPr>
+          <p:cNvPr id="3" name="Content Placeholder 2"/>
+          <p:cNvSpPr>
+            <a:spLocks noGrp="1"/>
+          </p:cNvSpPr>
+          <p:nvPr>
+            <p:ph idx="1"/>
+          </p:nvPr>
+        </p:nvSpPr>
+        <p:spPr/>
+        <p:txBody>
+          <a:bodyPr/>
+          <a:lstStyle/>
+          <a:p>
+            <a:pPr lvl="0"/>
+            <a:r>
+              <a:rPr>
+                <a:latin typeface="Courier"/>
+              </a:rPr>
+              <a:t>oran-cu</a:t>
+            </a:r>
+            <a:r>
+              <a:rPr/>
+              <a:t>, </a:t>
+            </a:r>
+            <a:r>
+              <a:rPr>
+                <a:latin typeface="Courier"/>
+              </a:rPr>
+              <a:t>oran-du</a:t>
+            </a:r>
+            <a:r>
+              <a:rPr/>
+              <a:t>, </a:t>
+            </a:r>
+            <a:r>
+              <a:rPr>
+                <a:latin typeface="Courier"/>
+              </a:rPr>
+              <a:t>oran-core</a:t>
+            </a:r>
+            <a:r>
+              <a:rPr/>
+              <a:t> — serviços FastAPI, ~30–50 MiB de RAM cada</a:t>
+            </a:r>
+          </a:p>
+          <a:p>
+            <a:pPr lvl="0"/>
+            <a:r>
+              <a:rPr/>
+              <a:t>Cada uma expõe </a:t>
+            </a:r>
+            <a:r>
+              <a:rPr>
+                <a:latin typeface="Courier"/>
+              </a:rPr>
+              <a:t>/health</a:t>
+            </a:r>
+            <a:r>
+              <a:rPr/>
+              <a:t>, </a:t>
+            </a:r>
+            <a:r>
+              <a:rPr>
+                <a:latin typeface="Courier"/>
+              </a:rPr>
+              <a:t>/config</a:t>
+            </a:r>
+            <a:r>
+              <a:rPr/>
+              <a:t> (GET/PUT/POST), </a:t>
+            </a:r>
+            <a:r>
+              <a:rPr>
+                <a:latin typeface="Courier"/>
+              </a:rPr>
+              <a:t>/metrics</a:t>
+            </a:r>
+            <a:r>
+              <a:rPr/>
+              <a:t> (formato Prometheus)</a:t>
+            </a:r>
+          </a:p>
+          <a:p>
+            <a:pPr lvl="0"/>
+            <a:r>
+              <a:rPr/>
+              <a:t>A config de domínio de </a:t>
+            </a:r>
+            <a:r>
+              <a:rPr>
+                <a:latin typeface="Courier"/>
+              </a:rPr>
+              <a:t>oran-du</a:t>
+            </a:r>
+            <a:r>
+              <a:rPr/>
+              <a:t> (</a:t>
+            </a:r>
+            <a:r>
+              <a:rPr>
+                <a:latin typeface="Courier"/>
+              </a:rPr>
+              <a:t>plmn_id</a:t>
+            </a:r>
+            <a:r>
+              <a:rPr/>
+              <a:t>, </a:t>
+            </a:r>
+            <a:r>
+              <a:rPr>
+                <a:latin typeface="Courier"/>
+              </a:rPr>
+              <a:t>cell_id</a:t>
+            </a:r>
+            <a:r>
+              <a:rPr/>
+              <a:t>, </a:t>
+            </a:r>
+            <a:r>
+              <a:rPr>
+                <a:latin typeface="Courier"/>
+              </a:rPr>
+              <a:t>tx_power_dbm</a:t>
+            </a:r>
+            <a:r>
+              <a:rPr/>
+              <a:t>, </a:t>
+            </a:r>
+            <a:r>
+              <a:rPr>
+                <a:latin typeface="Courier"/>
+              </a:rPr>
+              <a:t>du_id</a:t>
+            </a:r>
+            <a:r>
+              <a:rPr/>
+              <a:t>) vem do </a:t>
+            </a:r>
+            <a:r>
+              <a:rPr>
+                <a:latin typeface="Courier"/>
+              </a:rPr>
+              <a:t>ConfigMap</a:t>
+            </a:r>
+            <a:r>
+              <a:rPr/>
+              <a:t> do pacote — é o que permite ao </a:t>
+            </a:r>
+            <a:r>
+              <a:rPr>
+                <a:latin typeface="Courier"/>
+              </a:rPr>
+              <a:t>config-bridge</a:t>
+            </a:r>
+            <a:r>
+              <a:rPr/>
+              <a:t> saber qual é o estado publicado</a:t>
+            </a:r>
+          </a:p>
+          <a:p>
+            <a:pPr lvl="0"/>
+            <a:r>
+              <a:rPr b="1"/>
+              <a:t>Workloads representativos — não NFs O-RAN reais</a:t>
+            </a:r>
+            <a:r>
+              <a:rPr/>
+              <a:t>: sem protocolos de rádio, sem planos de usuário/controle, sem interfaces F1/E1/E2</a:t>
+            </a:r>
+          </a:p>
+        </p:txBody>
+      </p:sp>
+    </p:spTree>
+  </p:cSld>
+</p:sld>
+</file>
+
+<file path=ppt/slides/slide8.xml><?xml version="1.0" encoding="utf-8"?>
+<p:sld xmlns:a="http://schemas.openxmlformats.org/drawingml/2006/main" xmlns:r="http://schemas.openxmlformats.org/officeDocument/2006/relationships" xmlns:p="http://schemas.openxmlformats.org/presentationml/2006/main">
+  <p:cSld>
+    <p:spTree>
+      <p:nvGrpSpPr>
+        <p:cNvPr id="1" name=""/>
+        <p:cNvGrpSpPr/>
+        <p:nvPr/>
+      </p:nvGrpSpPr>
+      <p:grpSpPr>
+        <a:xfrm>
+          <a:off x="0" y="0"/>
+          <a:ext cx="0" cy="0"/>
+          <a:chOff x="0" y="0"/>
+          <a:chExt cx="0" cy="0"/>
+        </a:xfrm>
+      </p:grpSpPr>
+      <p:sp>
+        <p:nvSpPr>
+          <p:cNvPr id="2" name="Title 1"/>
+          <p:cNvSpPr>
+            <a:spLocks noGrp="1"/>
+          </p:cNvSpPr>
+          <p:nvPr>
+            <p:ph type="title"/>
+          </p:nvPr>
+        </p:nvSpPr>
+        <p:spPr/>
+        <p:txBody>
+          <a:bodyPr/>
+          <a:lstStyle/>
+          <a:p>
+            <a:pPr lvl="0" indent="0" marL="0">
+              <a:buNone/>
+            </a:pPr>
+            <a:r>
+              <a:rPr/>
+              <a:t>Por que não usei uma NF real (avaliação feita)</a:t>
+            </a:r>
+          </a:p>
+        </p:txBody>
+      </p:sp>
+      <p:sp>
+        <p:nvSpPr>
+          <p:cNvPr id="3" name="Content Placeholder 2"/>
+          <p:cNvSpPr>
+            <a:spLocks noGrp="1"/>
+          </p:cNvSpPr>
+          <p:nvPr>
+            <p:ph idx="1"/>
+          </p:nvPr>
+        </p:nvSpPr>
+        <p:spPr/>
+        <p:txBody>
+          <a:bodyPr/>
+          <a:lstStyle/>
+          <a:p>
+            <a:pPr lvl="0"/>
+            <a:r>
+              <a:rPr/>
+              <a:t>Avaliei 3 alternativas: </a:t>
+            </a:r>
+            <a:r>
+              <a:rPr b="1"/>
+              <a:t>UERANSIM</a:t>
+            </a:r>
+            <a:r>
+              <a:rPr/>
+              <a:t>, </a:t>
+            </a:r>
+            <a:r>
+              <a:rPr b="1"/>
+              <a:t>free5GC</a:t>
+            </a:r>
+            <a:r>
+              <a:rPr/>
+              <a:t>, </a:t>
+            </a:r>
+            <a:r>
+              <a:rPr b="1"/>
+              <a:t>OpenAirInterface</a:t>
+            </a:r>
+          </a:p>
+          <a:p>
+            <a:pPr lvl="0"/>
+            <a:r>
+              <a:rPr/>
+              <a:t>UERANSIM sozinho: ~2 GB/2 CPU — mas não funciona sem um AMF real por trás</a:t>
+            </a:r>
+          </a:p>
+          <a:p>
+            <a:pPr lvl="0"/>
+            <a:r>
+              <a:rPr/>
+              <a:t>free5GC completo: 4 GB mínimo / 8 GB recomendado — </a:t>
+            </a:r>
+            <a:r>
+              <a:rPr b="1"/>
+              <a:t>sozinho já consome quase todo o orçamento restante</a:t>
+            </a:r>
+          </a:p>
+          <a:p>
+            <a:pPr lvl="0"/>
+            <a:r>
+              <a:rPr/>
+              <a:t>OpenAirInterface: footprint imprevisível, maior complexidade — e o próprio enunciado pediu para não instalar</a:t>
+            </a:r>
+          </a:p>
+          <a:p>
+            <a:pPr lvl="0"/>
+            <a:r>
+              <a:rPr b="1"/>
+              <a:t>Decisão:</a:t>
+            </a:r>
+            <a:r>
+              <a:rPr/>
+              <a:t> nenhuma NF real cabia ao lado do Nephio completo em 16 GB — documentado, não simplesmente omitido (</a:t>
+            </a:r>
+            <a:r>
+              <a:rPr>
+                <a:latin typeface="Courier"/>
+              </a:rPr>
+              <a:t>docs/real-nf-extension.md</a:t>
+            </a:r>
+            <a:r>
+              <a:rPr/>
+              <a:t>)</a:t>
+            </a:r>
+          </a:p>
+        </p:txBody>
+      </p:sp>
+    </p:spTree>
+  </p:cSld>
+</p:sld>
+</file>
+
+<file path=ppt/slides/slide9.xml><?xml version="1.0" encoding="utf-8"?>
 <p:sld xmlns:a="http://schemas.openxmlformats.org/drawingml/2006/main" xmlns:r="http://schemas.openxmlformats.org/officeDocument/2006/relationships" xmlns:p="http://schemas.openxmlformats.org/presentationml/2006/main">
   <p:cSld>
     <p:spTree>
@@ -6055,7 +9745,7 @@
             </a:pPr>
             <a:r>
               <a:rPr/>
-              <a:t>Intent (pacote kpt autoral) → Package (Draft) → Repository (Published) → Reconciliation (kpt live apply) → Kubernetes → CNF</a:t>
+              <a:t>Intent (pacote kpt autoral) → Package (Draft) → Repository (Published) → Reconciliation → Kubernetes → CNF</a:t>
             </a:r>
           </a:p>
         </p:txBody>
@@ -6145,4253 +9835,6 @@
             <a:r>
               <a:rPr/>
               <a:t> sobre uma revisão já Published — histórico completo preservado)</a:t>
-            </a:r>
-          </a:p>
-        </p:txBody>
-      </p:sp>
-    </p:spTree>
-  </p:cSld>
-</p:sld>
-</file>
-
-<file path=ppt/slides/slide11.xml><?xml version="1.0" encoding="utf-8"?>
-<p:sld xmlns:a="http://schemas.openxmlformats.org/drawingml/2006/main" xmlns:r="http://schemas.openxmlformats.org/officeDocument/2006/relationships" xmlns:p="http://schemas.openxmlformats.org/presentationml/2006/main">
-  <p:cSld>
-    <p:spTree>
-      <p:nvGrpSpPr>
-        <p:cNvPr id="1" name=""/>
-        <p:cNvGrpSpPr/>
-        <p:nvPr/>
-      </p:nvGrpSpPr>
-      <p:grpSpPr>
-        <a:xfrm>
-          <a:off x="0" y="0"/>
-          <a:ext cx="0" cy="0"/>
-          <a:chOff x="0" y="0"/>
-          <a:chExt cx="0" cy="0"/>
-        </a:xfrm>
-      </p:grpSpPr>
-      <p:sp>
-        <p:nvSpPr>
-          <p:cNvPr id="2" name="Title 1"/>
-          <p:cNvSpPr>
-            <a:spLocks noGrp="1"/>
-          </p:cNvSpPr>
-          <p:nvPr>
-            <p:ph type="title"/>
-          </p:nvPr>
-        </p:nvSpPr>
-        <p:spPr>
-          <a:xfrm>
-            <a:off x="457201" y="204787"/>
-            <a:ext cx="3008313" cy="871538"/>
-          </a:xfrm>
-        </p:spPr>
-        <p:txBody>
-          <a:bodyPr/>
-          <a:lstStyle/>
-          <a:p>
-            <a:pPr lvl="0" indent="0" marL="0">
-              <a:buNone/>
-            </a:pPr>
-            <a:r>
-              <a:rPr/>
-              <a:t>Experimento 1 — Instantiate</a:t>
-            </a:r>
-          </a:p>
-        </p:txBody>
-      </p:sp>
-      <p:sp>
-        <p:nvSpPr>
-          <p:cNvPr id="4" name="Text Placeholder 3"/>
-          <p:cNvSpPr>
-            <a:spLocks noGrp="1"/>
-          </p:cNvSpPr>
-          <p:nvPr>
-            <p:ph idx="2" sz="half" type="body"/>
-          </p:nvPr>
-        </p:nvSpPr>
-        <p:spPr/>
-        <p:txBody>
-          <a:bodyPr/>
-          <a:lstStyle/>
-          <a:p>
-            <a:pPr lvl="0"/>
-            <a:r>
-              <a:rPr b="1"/>
-              <a:t>Comando:</a:t>
-            </a:r>
-            <a:r>
-              <a:rPr/>
-              <a:t> </a:t>
-            </a:r>
-            <a:r>
-              <a:rPr>
-                <a:latin typeface="Courier"/>
-              </a:rPr>
-              <a:t>bash lab/nephio/deploy-cnfs-via-porch.sh</a:t>
-            </a:r>
-          </a:p>
-          <a:p>
-            <a:pPr lvl="0"/>
-            <a:r>
-              <a:rPr b="1"/>
-              <a:t>O que faz:</a:t>
-            </a:r>
-            <a:r>
-              <a:rPr/>
-              <a:t> publica o pacote no Porch (</a:t>
-            </a:r>
-            <a:r>
-              <a:rPr>
-                <a:latin typeface="Courier"/>
-              </a:rPr>
-              <a:t>rpkg copy/push/propose/approve</a:t>
-            </a:r>
-            <a:r>
-              <a:rPr/>
-              <a:t>), depois </a:t>
-            </a:r>
-            <a:r>
-              <a:rPr>
-                <a:latin typeface="Courier"/>
-              </a:rPr>
-              <a:t>kpt live apply</a:t>
-            </a:r>
-            <a:r>
-              <a:rPr/>
-              <a:t> no </a:t>
-            </a:r>
-            <a:r>
-              <a:rPr>
-                <a:latin typeface="Courier"/>
-              </a:rPr>
-              <a:t>o-cloud-1</a:t>
-            </a:r>
-          </a:p>
-          <a:p>
-            <a:pPr lvl="0"/>
-            <a:r>
-              <a:rPr b="1"/>
-              <a:t>Resultado:</a:t>
-            </a:r>
-            <a:r>
-              <a:rPr/>
-              <a:t> 3/3 CNFs </a:t>
-            </a:r>
-            <a:r>
-              <a:rPr>
-                <a:latin typeface="Courier"/>
-              </a:rPr>
-              <a:t>Running</a:t>
-            </a:r>
-            <a:r>
-              <a:rPr/>
-              <a:t> do zero em </a:t>
-            </a:r>
-            <a:r>
-              <a:rPr b="1"/>
-              <a:t>20,4 s</a:t>
-            </a:r>
-          </a:p>
-        </p:txBody>
-      </p:sp>
-      <p:pic>
-        <p:nvPicPr>
-          <p:cNvPr descr="assets/term-exp1-apply.png" id="0" name="Picture 1"/>
-          <p:cNvPicPr>
-            <a:picLocks noGrp="1" noChangeAspect="1"/>
-          </p:cNvPicPr>
-          <p:nvPr/>
-        </p:nvPicPr>
-        <p:blipFill>
-          <a:blip r:embed="rId3"/>
-          <a:stretch>
-            <a:fillRect/>
-          </a:stretch>
-        </p:blipFill>
-        <p:spPr bwMode="auto">
-          <a:xfrm>
-            <a:off x="3568700" y="850900"/>
-            <a:ext cx="5105400" cy="2578100"/>
-          </a:xfrm>
-          <a:prstGeom prst="rect">
-            <a:avLst/>
-          </a:prstGeom>
-          <a:noFill/>
-          <a:ln w="9525">
-            <a:noFill/>
-            <a:headEnd/>
-            <a:tailEnd/>
-          </a:ln>
-        </p:spPr>
-      </p:pic>
-      <p:sp>
-        <p:nvSpPr>
-          <p:cNvPr id="1" name="TextBox 3"/>
-          <p:cNvSpPr txBox="1"/>
-          <p:nvPr>
-            <p:ph idx="1"/>
-          </p:nvPr>
-        </p:nvSpPr>
-        <p:spPr>
-          <a:xfrm>
-            <a:off x="3568700" y="4076700"/>
-            <a:ext cx="5105400" cy="508000"/>
-          </a:xfrm>
-          <a:prstGeom prst="rect">
-            <a:avLst/>
-          </a:prstGeom>
-          <a:noFill/>
-        </p:spPr>
-        <p:txBody>
-          <a:bodyPr/>
-          <a:lstStyle/>
-          <a:p>
-            <a:pPr lvl="0" indent="0" marL="0" algn="ctr">
-              <a:buNone/>
-            </a:pPr>
-            <a:r>
-              <a:rPr/>
-              <a:t>Terminal real: apply result 10 attempted, 10 successful — 3 CNFs Running</a:t>
-            </a:r>
-          </a:p>
-        </p:txBody>
-      </p:sp>
-    </p:spTree>
-  </p:cSld>
-</p:sld>
-</file>
-
-<file path=ppt/slides/slide12.xml><?xml version="1.0" encoding="utf-8"?>
-<p:sld xmlns:a="http://schemas.openxmlformats.org/drawingml/2006/main" xmlns:r="http://schemas.openxmlformats.org/officeDocument/2006/relationships" xmlns:p="http://schemas.openxmlformats.org/presentationml/2006/main">
-  <p:cSld>
-    <p:spTree>
-      <p:nvGrpSpPr>
-        <p:cNvPr id="1" name=""/>
-        <p:cNvGrpSpPr/>
-        <p:nvPr/>
-      </p:nvGrpSpPr>
-      <p:grpSpPr>
-        <a:xfrm>
-          <a:off x="0" y="0"/>
-          <a:ext cx="0" cy="0"/>
-          <a:chOff x="0" y="0"/>
-          <a:chExt cx="0" cy="0"/>
-        </a:xfrm>
-      </p:grpSpPr>
-      <p:sp>
-        <p:nvSpPr>
-          <p:cNvPr id="2" name="Title 1"/>
-          <p:cNvSpPr>
-            <a:spLocks noGrp="1"/>
-          </p:cNvSpPr>
-          <p:nvPr>
-            <p:ph type="title"/>
-          </p:nvPr>
-        </p:nvSpPr>
-        <p:spPr/>
-        <p:txBody>
-          <a:bodyPr/>
-          <a:lstStyle/>
-          <a:p>
-            <a:pPr lvl="0" indent="0" marL="0">
-              <a:buNone/>
-            </a:pPr>
-            <a:r>
-              <a:rPr/>
-              <a:t>Duas camadas de configuração — por que distinguir</a:t>
-            </a:r>
-          </a:p>
-        </p:txBody>
-      </p:sp>
-      <p:sp>
-        <p:nvSpPr>
-          <p:cNvPr id="3" name="Content Placeholder 2"/>
-          <p:cNvSpPr>
-            <a:spLocks noGrp="1"/>
-          </p:cNvSpPr>
-          <p:nvPr>
-            <p:ph idx="1"/>
-          </p:nvPr>
-        </p:nvSpPr>
-        <p:spPr/>
-        <p:txBody>
-          <a:bodyPr/>
-          <a:lstStyle/>
-          <a:p>
-            <a:pPr lvl="0"/>
-            <a:r>
-              <a:rPr b="1"/>
-              <a:t>Configuração operacional da NF</a:t>
-            </a:r>
-            <a:r>
-              <a:rPr/>
-              <a:t> — análoga ao que O1/NETCONF faria numa NF real: API própria </a:t>
-            </a:r>
-            <a:r>
-              <a:rPr>
-                <a:latin typeface="Courier"/>
-              </a:rPr>
-              <a:t>/config</a:t>
-            </a:r>
-            <a:r>
-              <a:rPr/>
-              <a:t> de cada CNF</a:t>
-            </a:r>
-          </a:p>
-          <a:p>
-            <a:pPr lvl="0"/>
-            <a:r>
-              <a:rPr b="1"/>
-              <a:t>Configuração de implantação</a:t>
-            </a:r>
-            <a:r>
-              <a:rPr/>
-              <a:t> (pacote/GitOps) — mudar o </a:t>
-            </a:r>
-            <a:r>
-              <a:rPr>
-                <a:latin typeface="Courier"/>
-              </a:rPr>
-              <a:t>ConfigMap</a:t>
-            </a:r>
-            <a:r>
-              <a:rPr/>
-              <a:t>/</a:t>
-            </a:r>
-            <a:r>
-              <a:rPr>
-                <a:latin typeface="Courier"/>
-              </a:rPr>
-              <a:t>Deployment</a:t>
-            </a:r>
-            <a:r>
-              <a:rPr/>
-              <a:t> no pacote autoral e republicar via Porch</a:t>
-            </a:r>
-          </a:p>
-          <a:p>
-            <a:pPr lvl="0"/>
-            <a:r>
-              <a:rPr/>
-              <a:t>Nephio </a:t>
-            </a:r>
-            <a:r>
-              <a:rPr b="1"/>
-              <a:t>não implementa O1</a:t>
-            </a:r>
-            <a:r>
-              <a:rPr/>
-              <a:t> — então a API </a:t>
-            </a:r>
-            <a:r>
-              <a:rPr>
-                <a:latin typeface="Courier"/>
-              </a:rPr>
-              <a:t>/config</a:t>
-            </a:r>
-            <a:r>
-              <a:rPr/>
-              <a:t> é o substituto de laboratório para essa camada, não uma alegação de que isso É O1</a:t>
-            </a:r>
-          </a:p>
-        </p:txBody>
-      </p:sp>
-    </p:spTree>
-  </p:cSld>
-</p:sld>
-</file>
-
-<file path=ppt/slides/slide13.xml><?xml version="1.0" encoding="utf-8"?>
-<p:sld xmlns:a="http://schemas.openxmlformats.org/drawingml/2006/main" xmlns:r="http://schemas.openxmlformats.org/officeDocument/2006/relationships" xmlns:p="http://schemas.openxmlformats.org/presentationml/2006/main">
-  <p:cSld>
-    <p:spTree>
-      <p:nvGrpSpPr>
-        <p:cNvPr id="1" name=""/>
-        <p:cNvGrpSpPr/>
-        <p:nvPr/>
-      </p:nvGrpSpPr>
-      <p:grpSpPr>
-        <a:xfrm>
-          <a:off x="0" y="0"/>
-          <a:ext cx="0" cy="0"/>
-          <a:chOff x="0" y="0"/>
-          <a:chExt cx="0" cy="0"/>
-        </a:xfrm>
-      </p:grpSpPr>
-      <p:sp>
-        <p:nvSpPr>
-          <p:cNvPr id="2" name="Title 1"/>
-          <p:cNvSpPr>
-            <a:spLocks noGrp="1"/>
-          </p:cNvSpPr>
-          <p:nvPr>
-            <p:ph type="title"/>
-          </p:nvPr>
-        </p:nvSpPr>
-        <p:spPr/>
-        <p:txBody>
-          <a:bodyPr/>
-          <a:lstStyle/>
-          <a:p>
-            <a:pPr lvl="0" indent="0" marL="0">
-              <a:buNone/>
-            </a:pPr>
-            <a:r>
-              <a:rPr/>
-              <a:t>Experimento 2 — Configuration management</a:t>
-            </a:r>
-          </a:p>
-        </p:txBody>
-      </p:sp>
-      <p:sp>
-        <p:nvSpPr>
-          <p:cNvPr id="3" name="Content Placeholder 2"/>
-          <p:cNvSpPr>
-            <a:spLocks noGrp="1"/>
-          </p:cNvSpPr>
-          <p:nvPr>
-            <p:ph idx="1"/>
-          </p:nvPr>
-        </p:nvSpPr>
-        <p:spPr/>
-        <p:txBody>
-          <a:bodyPr/>
-          <a:lstStyle/>
-          <a:p>
-            <a:pPr lvl="0"/>
-            <a:r>
-              <a:rPr b="1"/>
-              <a:t>Comando:</a:t>
-            </a:r>
-            <a:r>
-              <a:rPr/>
-              <a:t> </a:t>
-            </a:r>
-            <a:r>
-              <a:rPr>
-                <a:latin typeface="Courier"/>
-              </a:rPr>
-              <a:t>PUT /config {"cell_id": 2}</a:t>
-            </a:r>
-            <a:r>
-              <a:rPr/>
-              <a:t> no </a:t>
-            </a:r>
-            <a:r>
-              <a:rPr>
-                <a:latin typeface="Courier"/>
-              </a:rPr>
-              <a:t>oran-du</a:t>
-            </a:r>
-          </a:p>
-          <a:p>
-            <a:pPr lvl="0"/>
-            <a:r>
-              <a:rPr b="1"/>
-              <a:t>Resultado:</a:t>
-            </a:r>
-            <a:r>
-              <a:rPr/>
-              <a:t> </a:t>
-            </a:r>
-            <a:r>
-              <a:rPr>
-                <a:latin typeface="Courier"/>
-              </a:rPr>
-              <a:t>cell_id</a:t>
-            </a:r>
-            <a:r>
-              <a:rPr/>
-              <a:t> </a:t>
-            </a:r>
-            <a:r>
-              <a:rPr>
-                <a:latin typeface="Courier"/>
-              </a:rPr>
-              <a:t>1 → 2</a:t>
-            </a:r>
-            <a:r>
-              <a:rPr/>
-              <a:t>, </a:t>
-            </a:r>
-            <a:r>
-              <a:rPr>
-                <a:latin typeface="Courier"/>
-              </a:rPr>
-              <a:t>config_version</a:t>
-            </a:r>
-            <a:r>
-              <a:rPr/>
-              <a:t> </a:t>
-            </a:r>
-            <a:r>
-              <a:rPr>
-                <a:latin typeface="Courier"/>
-              </a:rPr>
-              <a:t>1 → 2</a:t>
-            </a:r>
-            <a:r>
-              <a:rPr/>
-              <a:t>, em </a:t>
-            </a:r>
-            <a:r>
-              <a:rPr b="1"/>
-              <a:t>0,7 s</a:t>
-            </a:r>
-          </a:p>
-          <a:p>
-            <a:pPr lvl="0"/>
-            <a:r>
-              <a:rPr/>
-              <a:t>Prova que a camada operacional da NF responde e versiona suas próprias mudanças</a:t>
-            </a:r>
-          </a:p>
-        </p:txBody>
-      </p:sp>
-    </p:spTree>
-  </p:cSld>
-</p:sld>
-</file>
-
-<file path=ppt/slides/slide14.xml><?xml version="1.0" encoding="utf-8"?>
-<p:sld xmlns:a="http://schemas.openxmlformats.org/drawingml/2006/main" xmlns:r="http://schemas.openxmlformats.org/officeDocument/2006/relationships" xmlns:p="http://schemas.openxmlformats.org/presentationml/2006/main">
-  <p:cSld>
-    <p:spTree>
-      <p:nvGrpSpPr>
-        <p:cNvPr id="1" name=""/>
-        <p:cNvGrpSpPr/>
-        <p:nvPr/>
-      </p:nvGrpSpPr>
-      <p:grpSpPr>
-        <a:xfrm>
-          <a:off x="0" y="0"/>
-          <a:ext cx="0" cy="0"/>
-          <a:chOff x="0" y="0"/>
-          <a:chExt cx="0" cy="0"/>
-        </a:xfrm>
-      </p:grpSpPr>
-      <p:sp>
-        <p:nvSpPr>
-          <p:cNvPr id="2" name="Title 1"/>
-          <p:cNvSpPr>
-            <a:spLocks noGrp="1"/>
-          </p:cNvSpPr>
-          <p:nvPr>
-            <p:ph type="title"/>
-          </p:nvPr>
-        </p:nvSpPr>
-        <p:spPr/>
-        <p:txBody>
-          <a:bodyPr/>
-          <a:lstStyle/>
-          <a:p>
-            <a:pPr lvl="0" indent="0" marL="0">
-              <a:buNone/>
-            </a:pPr>
-            <a:r>
-              <a:rPr/>
-              <a:t>Experimento 3 — Scale</a:t>
-            </a:r>
-          </a:p>
-        </p:txBody>
-      </p:sp>
-      <p:sp>
-        <p:nvSpPr>
-          <p:cNvPr id="3" name="Content Placeholder 2"/>
-          <p:cNvSpPr>
-            <a:spLocks noGrp="1"/>
-          </p:cNvSpPr>
-          <p:nvPr>
-            <p:ph idx="1"/>
-          </p:nvPr>
-        </p:nvSpPr>
-        <p:spPr/>
-        <p:txBody>
-          <a:bodyPr/>
-          <a:lstStyle/>
-          <a:p>
-            <a:pPr lvl="0"/>
-            <a:r>
-              <a:rPr b="1"/>
-              <a:t>Comando:</a:t>
-            </a:r>
-            <a:r>
-              <a:rPr/>
-              <a:t> </a:t>
-            </a:r>
-            <a:r>
-              <a:rPr>
-                <a:latin typeface="Courier"/>
-              </a:rPr>
-              <a:t>kubectl scale deploy/oran-cu --replicas=2</a:t>
-            </a:r>
-          </a:p>
-          <a:p>
-            <a:pPr lvl="0"/>
-            <a:r>
-              <a:rPr b="1"/>
-              <a:t>Resultado:</a:t>
-            </a:r>
-            <a:r>
-              <a:rPr/>
-              <a:t> rollout concluído, </a:t>
-            </a:r>
-            <a:r>
-              <a:rPr>
-                <a:latin typeface="Courier"/>
-              </a:rPr>
-              <a:t>oran-cu</a:t>
-            </a:r>
-            <a:r>
-              <a:rPr/>
-              <a:t> 2/2 </a:t>
-            </a:r>
-            <a:r>
-              <a:rPr>
-                <a:latin typeface="Courier"/>
-              </a:rPr>
-              <a:t>Running</a:t>
-            </a:r>
-            <a:r>
-              <a:rPr/>
-              <a:t>, em </a:t>
-            </a:r>
-            <a:r>
-              <a:rPr b="1"/>
-              <a:t>5,7 s</a:t>
-            </a:r>
-          </a:p>
-          <a:p>
-            <a:pPr lvl="0"/>
-            <a:r>
-              <a:rPr/>
-              <a:t>Mecanismo: </a:t>
-            </a:r>
-            <a:r>
-              <a:rPr b="1"/>
-              <a:t>ReplicaSet controller do Kubernetes</a:t>
-            </a:r>
-            <a:r>
-              <a:rPr/>
-              <a:t> — o mesmo mecanismo genérico usado por qualquer aplicação, não um scaling orientado por KPI de rede O-RAN</a:t>
-            </a:r>
-          </a:p>
-        </p:txBody>
-      </p:sp>
-    </p:spTree>
-  </p:cSld>
-</p:sld>
-</file>
-
-<file path=ppt/slides/slide15.xml><?xml version="1.0" encoding="utf-8"?>
-<p:sld xmlns:a="http://schemas.openxmlformats.org/drawingml/2006/main" xmlns:r="http://schemas.openxmlformats.org/officeDocument/2006/relationships" xmlns:p="http://schemas.openxmlformats.org/presentationml/2006/main">
-  <p:cSld>
-    <p:spTree>
-      <p:nvGrpSpPr>
-        <p:cNvPr id="1" name=""/>
-        <p:cNvGrpSpPr/>
-        <p:nvPr/>
-      </p:nvGrpSpPr>
-      <p:grpSpPr>
-        <a:xfrm>
-          <a:off x="0" y="0"/>
-          <a:ext cx="0" cy="0"/>
-          <a:chOff x="0" y="0"/>
-          <a:chExt cx="0" cy="0"/>
-        </a:xfrm>
-      </p:grpSpPr>
-      <p:sp>
-        <p:nvSpPr>
-          <p:cNvPr id="2" name="Title 1"/>
-          <p:cNvSpPr>
-            <a:spLocks noGrp="1"/>
-          </p:cNvSpPr>
-          <p:nvPr>
-            <p:ph type="title"/>
-          </p:nvPr>
-        </p:nvSpPr>
-        <p:spPr/>
-        <p:txBody>
-          <a:bodyPr/>
-          <a:lstStyle/>
-          <a:p>
-            <a:pPr lvl="0" indent="0" marL="0">
-              <a:buNone/>
-            </a:pPr>
-            <a:r>
-              <a:rPr/>
-              <a:t>Experimento 5 — Upgrade (achado real)</a:t>
-            </a:r>
-          </a:p>
-        </p:txBody>
-      </p:sp>
-      <p:sp>
-        <p:nvSpPr>
-          <p:cNvPr id="3" name="Content Placeholder 2"/>
-          <p:cNvSpPr>
-            <a:spLocks noGrp="1"/>
-          </p:cNvSpPr>
-          <p:nvPr>
-            <p:ph idx="1"/>
-          </p:nvPr>
-        </p:nvSpPr>
-        <p:spPr/>
-        <p:txBody>
-          <a:bodyPr/>
-          <a:lstStyle/>
-          <a:p>
-            <a:pPr lvl="0"/>
-            <a:r>
-              <a:rPr b="1"/>
-              <a:t>Comando:</a:t>
-            </a:r>
-            <a:r>
-              <a:rPr/>
-              <a:t> atualizar </a:t>
-            </a:r>
-            <a:r>
-              <a:rPr>
-                <a:latin typeface="Courier"/>
-              </a:rPr>
-              <a:t>NF_VERSION</a:t>
-            </a:r>
-            <a:r>
-              <a:rPr/>
-              <a:t> v1→v2 no pacote e republicar via Porch</a:t>
-            </a:r>
-          </a:p>
-          <a:p>
-            <a:pPr lvl="0"/>
-            <a:r>
-              <a:rPr b="1"/>
-              <a:t>Resultado:</a:t>
-            </a:r>
-            <a:r>
-              <a:rPr/>
-              <a:t> </a:t>
-            </a:r>
-            <a:r>
-              <a:rPr>
-                <a:latin typeface="Courier"/>
-              </a:rPr>
-              <a:t>revision</a:t>
-            </a:r>
-            <a:r>
-              <a:rPr/>
-              <a:t> do Deployment 1→2, rollout real, </a:t>
-            </a:r>
-            <a:r>
-              <a:rPr>
-                <a:latin typeface="Courier"/>
-              </a:rPr>
-              <a:t>/health.nf_version=v2</a:t>
-            </a:r>
-            <a:r>
-              <a:rPr/>
-              <a:t>, em </a:t>
-            </a:r>
-            <a:r>
-              <a:rPr b="1"/>
-              <a:t>15,0 s</a:t>
-            </a:r>
-          </a:p>
-          <a:p>
-            <a:pPr lvl="0"/>
-            <a:r>
-              <a:rPr b="1"/>
-              <a:t>Achado real:</a:t>
-            </a:r>
-            <a:r>
-              <a:rPr/>
-              <a:t> mudar </a:t>
-            </a:r>
-            <a:r>
-              <a:rPr b="1"/>
-              <a:t>só</a:t>
-            </a:r>
-            <a:r>
-              <a:rPr/>
-              <a:t> o </a:t>
-            </a:r>
-            <a:r>
-              <a:rPr>
-                <a:latin typeface="Courier"/>
-              </a:rPr>
-              <a:t>ConfigMap</a:t>
-            </a:r>
-            <a:r>
-              <a:rPr/>
-              <a:t> (consumido via </a:t>
-            </a:r>
-            <a:r>
-              <a:rPr>
-                <a:latin typeface="Courier"/>
-              </a:rPr>
-              <a:t>envFrom</a:t>
-            </a:r>
-            <a:r>
-              <a:rPr/>
-              <a:t>) </a:t>
-            </a:r>
-            <a:r>
-              <a:rPr b="1"/>
-              <a:t>não</a:t>
-            </a:r>
-            <a:r>
-              <a:rPr/>
-              <a:t> dispara rollout — o hash do pod template não muda</a:t>
-            </a:r>
-          </a:p>
-          <a:p>
-            <a:pPr lvl="0"/>
-            <a:r>
-              <a:rPr b="1"/>
-              <a:t>Correção:</a:t>
-            </a:r>
-            <a:r>
-              <a:rPr/>
-              <a:t> anotação de versão em </a:t>
-            </a:r>
-            <a:r>
-              <a:rPr>
-                <a:latin typeface="Courier"/>
-              </a:rPr>
-              <a:t>spec.template.metadata.annotations</a:t>
-            </a:r>
-            <a:r>
-              <a:rPr/>
-              <a:t>, que força um novo </a:t>
-            </a:r>
-            <a:r>
-              <a:rPr>
-                <a:latin typeface="Courier"/>
-              </a:rPr>
-              <a:t>ReplicaSet</a:t>
-            </a:r>
-          </a:p>
-        </p:txBody>
-      </p:sp>
-    </p:spTree>
-  </p:cSld>
-</p:sld>
-</file>
-
-<file path=ppt/slides/slide16.xml><?xml version="1.0" encoding="utf-8"?>
-<p:sld xmlns:a="http://schemas.openxmlformats.org/drawingml/2006/main" xmlns:r="http://schemas.openxmlformats.org/officeDocument/2006/relationships" xmlns:p="http://schemas.openxmlformats.org/presentationml/2006/main">
-  <p:cSld>
-    <p:spTree>
-      <p:nvGrpSpPr>
-        <p:cNvPr id="1" name=""/>
-        <p:cNvGrpSpPr/>
-        <p:nvPr/>
-      </p:nvGrpSpPr>
-      <p:grpSpPr>
-        <a:xfrm>
-          <a:off x="0" y="0"/>
-          <a:ext cx="0" cy="0"/>
-          <a:chOff x="0" y="0"/>
-          <a:chExt cx="0" cy="0"/>
-        </a:xfrm>
-      </p:grpSpPr>
-      <p:sp>
-        <p:nvSpPr>
-          <p:cNvPr id="2" name="Title 1"/>
-          <p:cNvSpPr>
-            <a:spLocks noGrp="1"/>
-          </p:cNvSpPr>
-          <p:nvPr>
-            <p:ph type="title"/>
-          </p:nvPr>
-        </p:nvSpPr>
-        <p:spPr/>
-        <p:txBody>
-          <a:bodyPr/>
-          <a:lstStyle/>
-          <a:p>
-            <a:pPr lvl="0" indent="0" marL="0">
-              <a:buNone/>
-            </a:pPr>
-            <a:r>
-              <a:rPr/>
-              <a:t>Experimento 4 — Recover</a:t>
-            </a:r>
-          </a:p>
-        </p:txBody>
-      </p:sp>
-      <p:sp>
-        <p:nvSpPr>
-          <p:cNvPr id="3" name="Content Placeholder 2"/>
-          <p:cNvSpPr>
-            <a:spLocks noGrp="1"/>
-          </p:cNvSpPr>
-          <p:nvPr>
-            <p:ph idx="1"/>
-          </p:nvPr>
-        </p:nvSpPr>
-        <p:spPr/>
-        <p:txBody>
-          <a:bodyPr/>
-          <a:lstStyle/>
-          <a:p>
-            <a:pPr lvl="0"/>
-            <a:r>
-              <a:rPr b="1"/>
-              <a:t>Comando:</a:t>
-            </a:r>
-            <a:r>
-              <a:rPr/>
-              <a:t> </a:t>
-            </a:r>
-            <a:r>
-              <a:rPr>
-                <a:latin typeface="Courier"/>
-              </a:rPr>
-              <a:t>kubectl delete pod</a:t>
-            </a:r>
-            <a:r>
-              <a:rPr/>
-              <a:t> no </a:t>
-            </a:r>
-            <a:r>
-              <a:rPr>
-                <a:latin typeface="Courier"/>
-              </a:rPr>
-              <a:t>oran-du</a:t>
-            </a:r>
-          </a:p>
-          <a:p>
-            <a:pPr lvl="0"/>
-            <a:r>
-              <a:rPr b="1"/>
-              <a:t>Resultado:</a:t>
-            </a:r>
-            <a:r>
-              <a:rPr/>
-              <a:t> ReplicaSet recria em </a:t>
-            </a:r>
-            <a:r>
-              <a:rPr b="1"/>
-              <a:t>3,9 s</a:t>
-            </a:r>
-            <a:r>
-              <a:rPr/>
-              <a:t> — pod novo, nome diferente</a:t>
-            </a:r>
-          </a:p>
-          <a:p>
-            <a:pPr lvl="0"/>
-            <a:r>
-              <a:rPr b="1"/>
-              <a:t>Isto é self-healing do Kubernetes</a:t>
-            </a:r>
-            <a:r>
-              <a:rPr/>
-              <a:t> (estado desejado × estado real) — </a:t>
-            </a:r>
-            <a:r>
-              <a:rPr b="1"/>
-              <a:t>não</a:t>
-            </a:r>
-            <a:r>
-              <a:rPr/>
-              <a:t> é healing de uma NF de telecom: sem estado de sessão, sem re-registro em interfaces O-RAN</a:t>
-            </a:r>
-          </a:p>
-        </p:txBody>
-      </p:sp>
-    </p:spTree>
-  </p:cSld>
-</p:sld>
-</file>
-
-<file path=ppt/slides/slide17.xml><?xml version="1.0" encoding="utf-8"?>
-<p:sld xmlns:a="http://schemas.openxmlformats.org/drawingml/2006/main" xmlns:r="http://schemas.openxmlformats.org/officeDocument/2006/relationships" xmlns:p="http://schemas.openxmlformats.org/presentationml/2006/main">
-  <p:cSld>
-    <p:spTree>
-      <p:nvGrpSpPr>
-        <p:cNvPr id="1" name=""/>
-        <p:cNvGrpSpPr/>
-        <p:nvPr/>
-      </p:nvGrpSpPr>
-      <p:grpSpPr>
-        <a:xfrm>
-          <a:off x="0" y="0"/>
-          <a:ext cx="0" cy="0"/>
-          <a:chOff x="0" y="0"/>
-          <a:chExt cx="0" cy="0"/>
-        </a:xfrm>
-      </p:grpSpPr>
-      <p:sp>
-        <p:nvSpPr>
-          <p:cNvPr id="2" name="Title 1"/>
-          <p:cNvSpPr>
-            <a:spLocks noGrp="1"/>
-          </p:cNvSpPr>
-          <p:nvPr>
-            <p:ph type="title"/>
-          </p:nvPr>
-        </p:nvSpPr>
-        <p:spPr/>
-        <p:txBody>
-          <a:bodyPr/>
-          <a:lstStyle/>
-          <a:p>
-            <a:pPr lvl="0" indent="0" marL="0">
-              <a:buNone/>
-            </a:pPr>
-            <a:r>
-              <a:rPr/>
-              <a:t>Experimento 6 — Terminate</a:t>
-            </a:r>
-          </a:p>
-        </p:txBody>
-      </p:sp>
-      <p:sp>
-        <p:nvSpPr>
-          <p:cNvPr id="3" name="Content Placeholder 2"/>
-          <p:cNvSpPr>
-            <a:spLocks noGrp="1"/>
-          </p:cNvSpPr>
-          <p:nvPr>
-            <p:ph idx="1"/>
-          </p:nvPr>
-        </p:nvSpPr>
-        <p:spPr/>
-        <p:txBody>
-          <a:bodyPr/>
-          <a:lstStyle/>
-          <a:p>
-            <a:pPr lvl="0"/>
-            <a:r>
-              <a:rPr b="1"/>
-              <a:t>Comando:</a:t>
-            </a:r>
-            <a:r>
-              <a:rPr/>
-              <a:t> remover </a:t>
-            </a:r>
-            <a:r>
-              <a:rPr>
-                <a:latin typeface="Courier"/>
-              </a:rPr>
-              <a:t>oran-core</a:t>
-            </a:r>
-            <a:r>
-              <a:rPr/>
-              <a:t> do pacote e republicar</a:t>
-            </a:r>
-          </a:p>
-          <a:p>
-            <a:pPr lvl="0"/>
-            <a:r>
-              <a:rPr b="1"/>
-              <a:t>Resultado:</a:t>
-            </a:r>
-            <a:r>
-              <a:rPr/>
-              <a:t> </a:t>
-            </a:r>
-            <a:r>
-              <a:rPr>
-                <a:latin typeface="Courier"/>
-              </a:rPr>
-              <a:t>oran-core</a:t>
-            </a:r>
-            <a:r>
-              <a:rPr/>
-              <a:t> removido via </a:t>
-            </a:r>
-            <a:r>
-              <a:rPr b="1"/>
-              <a:t>prune</a:t>
-            </a:r>
-            <a:r>
-              <a:rPr/>
-              <a:t> do </a:t>
-            </a:r>
-            <a:r>
-              <a:rPr>
-                <a:latin typeface="Courier"/>
-              </a:rPr>
-              <a:t>kpt live apply</a:t>
-            </a:r>
-            <a:r>
-              <a:rPr/>
-              <a:t>, em </a:t>
-            </a:r>
-            <a:r>
-              <a:rPr b="1"/>
-              <a:t>10,8 s</a:t>
-            </a:r>
-          </a:p>
-          <a:p>
-            <a:pPr lvl="0"/>
-            <a:r>
-              <a:rPr/>
-              <a:t>Terminação pelo </a:t>
-            </a:r>
-            <a:r>
-              <a:rPr b="1"/>
-              <a:t>mesmo mecanismo declarativo</a:t>
-            </a:r>
-            <a:r>
-              <a:rPr/>
-              <a:t> que criou o recurso — não um </a:t>
-            </a:r>
-            <a:r>
-              <a:rPr>
-                <a:latin typeface="Courier"/>
-              </a:rPr>
-              <a:t>kubectl delete</a:t>
-            </a:r>
-            <a:r>
-              <a:rPr/>
-              <a:t> avulso</a:t>
-            </a:r>
-          </a:p>
-        </p:txBody>
-      </p:sp>
-    </p:spTree>
-  </p:cSld>
-</p:sld>
-</file>
-
-<file path=ppt/slides/slide18.xml><?xml version="1.0" encoding="utf-8"?>
-<p:sld xmlns:a="http://schemas.openxmlformats.org/drawingml/2006/main" xmlns:r="http://schemas.openxmlformats.org/officeDocument/2006/relationships" xmlns:p="http://schemas.openxmlformats.org/presentationml/2006/main">
-  <p:cSld>
-    <p:spTree>
-      <p:nvGrpSpPr>
-        <p:cNvPr id="1" name=""/>
-        <p:cNvGrpSpPr/>
-        <p:nvPr/>
-      </p:nvGrpSpPr>
-      <p:grpSpPr>
-        <a:xfrm>
-          <a:off x="0" y="0"/>
-          <a:ext cx="0" cy="0"/>
-          <a:chOff x="0" y="0"/>
-          <a:chExt cx="0" cy="0"/>
-        </a:xfrm>
-      </p:grpSpPr>
-      <p:sp>
-        <p:nvSpPr>
-          <p:cNvPr id="2" name="Title 1"/>
-          <p:cNvSpPr>
-            <a:spLocks noGrp="1"/>
-          </p:cNvSpPr>
-          <p:nvPr>
-            <p:ph type="title"/>
-          </p:nvPr>
-        </p:nvSpPr>
-        <p:spPr/>
-        <p:txBody>
-          <a:bodyPr/>
-          <a:lstStyle/>
-          <a:p>
-            <a:pPr lvl="0" indent="0" marL="0">
-              <a:buNone/>
-            </a:pPr>
-            <a:r>
-              <a:rPr/>
-              <a:t>Resultados consolidados (entrega original)</a:t>
-            </a:r>
-          </a:p>
-        </p:txBody>
-      </p:sp>
-      <p:pic>
-        <p:nvPicPr>
-          <p:cNvPr descr="assets/experiments-duration.png" id="0" name="Picture 1"/>
-          <p:cNvPicPr>
-            <a:picLocks noGrp="1" noChangeAspect="1"/>
-          </p:cNvPicPr>
-          <p:nvPr/>
-        </p:nvPicPr>
-        <p:blipFill>
-          <a:blip r:embed="rId3"/>
-          <a:stretch>
-            <a:fillRect/>
-          </a:stretch>
-        </p:blipFill>
-        <p:spPr bwMode="auto">
-          <a:xfrm>
-            <a:off x="2273300" y="1193800"/>
-            <a:ext cx="4597400" cy="2882900"/>
-          </a:xfrm>
-          <a:prstGeom prst="rect">
-            <a:avLst/>
-          </a:prstGeom>
-          <a:noFill/>
-          <a:ln w="9525">
-            <a:noFill/>
-            <a:headEnd/>
-            <a:tailEnd/>
-          </a:ln>
-        </p:spPr>
-      </p:pic>
-      <p:sp>
-        <p:nvSpPr>
-          <p:cNvPr id="1" name="TextBox 3"/>
-          <p:cNvSpPr txBox="1"/>
-          <p:nvPr>
-            <p:ph idx="1"/>
-          </p:nvPr>
-        </p:nvSpPr>
-        <p:spPr>
-          <a:xfrm>
-            <a:off x="457200" y="4076700"/>
-            <a:ext cx="8229600" cy="508000"/>
-          </a:xfrm>
-          <a:prstGeom prst="rect">
-            <a:avLst/>
-          </a:prstGeom>
-          <a:noFill/>
-        </p:spPr>
-        <p:txBody>
-          <a:bodyPr/>
-          <a:lstStyle/>
-          <a:p>
-            <a:pPr lvl="0" indent="0" marL="0" algn="ctr">
-              <a:buNone/>
-            </a:pPr>
-            <a:r>
-              <a:rPr/>
-              <a:t>Duração real de todos os experimentos e melhorias, por categoria</a:t>
-            </a:r>
-          </a:p>
-        </p:txBody>
-      </p:sp>
-      <p:sp>
-        <p:nvSpPr>
-          <p:cNvPr id="3" name="Content Placeholder 2"/>
-          <p:cNvSpPr>
-            <a:spLocks noGrp="1"/>
-          </p:cNvSpPr>
-          <p:nvPr>
-            <p:ph idx="1"/>
-          </p:nvPr>
-        </p:nvSpPr>
-        <p:spPr/>
-        <p:txBody>
-          <a:bodyPr/>
-          <a:lstStyle/>
-          <a:p>
-            <a:pPr lvl="0"/>
-            <a:r>
-              <a:rPr b="1"/>
-              <a:t>6/6 experimentos formais: </a:t>
-            </a:r>
-            <a:r>
-              <a:rPr b="1">
-                <a:latin typeface="Courier"/>
-              </a:rPr>
-              <a:t>success</a:t>
-            </a:r>
-            <a:r>
-              <a:rPr/>
-              <a:t> (</a:t>
-            </a:r>
-            <a:r>
-              <a:rPr>
-                <a:latin typeface="Courier"/>
-              </a:rPr>
-              <a:t>results/experiments.csv</a:t>
-            </a:r>
-            <a:r>
-              <a:rPr/>
-              <a:t>)</a:t>
-            </a:r>
-          </a:p>
-          <a:p>
-            <a:pPr lvl="0"/>
-            <a:r>
-              <a:rPr>
-                <a:latin typeface="Courier"/>
-              </a:rPr>
-              <a:t>scripts/validate-lab.sh</a:t>
-            </a:r>
-            <a:r>
-              <a:rPr/>
-              <a:t>: </a:t>
-            </a:r>
-            <a:r>
-              <a:rPr b="1"/>
-              <a:t>10/10 PASS</a:t>
-            </a:r>
-            <a:r>
-              <a:rPr/>
-              <a:t>, reexecutando automaticamente instantiate/scale/recover/terminate</a:t>
-            </a:r>
-          </a:p>
-        </p:txBody>
-      </p:sp>
-      <p:pic>
-        <p:nvPicPr>
-          <p:cNvPr descr="assets/term-validate-lab.png" id="0" name="Picture 1"/>
-          <p:cNvPicPr>
-            <a:picLocks noGrp="1" noChangeAspect="1"/>
-          </p:cNvPicPr>
-          <p:nvPr/>
-        </p:nvPicPr>
-        <p:blipFill>
-          <a:blip r:embed="rId4"/>
-          <a:stretch>
-            <a:fillRect/>
-          </a:stretch>
-        </p:blipFill>
-        <p:spPr bwMode="auto">
-          <a:xfrm>
-            <a:off x="1003300" y="1193800"/>
-            <a:ext cx="7150100" cy="2882900"/>
-          </a:xfrm>
-          <a:prstGeom prst="rect">
-            <a:avLst/>
-          </a:prstGeom>
-          <a:noFill/>
-          <a:ln w="9525">
-            <a:noFill/>
-            <a:headEnd/>
-            <a:tailEnd/>
-          </a:ln>
-        </p:spPr>
-      </p:pic>
-      <p:sp>
-        <p:nvSpPr>
-          <p:cNvPr id="1" name="TextBox 3"/>
-          <p:cNvSpPr txBox="1"/>
-          <p:nvPr>
-            <p:ph idx="1"/>
-          </p:nvPr>
-        </p:nvSpPr>
-        <p:spPr>
-          <a:xfrm>
-            <a:off x="457200" y="4076700"/>
-            <a:ext cx="8229600" cy="508000"/>
-          </a:xfrm>
-          <a:prstGeom prst="rect">
-            <a:avLst/>
-          </a:prstGeom>
-          <a:noFill/>
-        </p:spPr>
-        <p:txBody>
-          <a:bodyPr/>
-          <a:lstStyle/>
-          <a:p>
-            <a:pPr lvl="0" indent="0" marL="0" algn="ctr">
-              <a:buNone/>
-            </a:pPr>
-            <a:r>
-              <a:rPr/>
-              <a:t>validate-lab.sh: 10/10 PASS</a:t>
-            </a:r>
-          </a:p>
-        </p:txBody>
-      </p:sp>
-    </p:spTree>
-  </p:cSld>
-</p:sld>
-</file>
-
-<file path=ppt/slides/slide19.xml><?xml version="1.0" encoding="utf-8"?>
-<p:sld xmlns:a="http://schemas.openxmlformats.org/drawingml/2006/main" xmlns:r="http://schemas.openxmlformats.org/officeDocument/2006/relationships" xmlns:p="http://schemas.openxmlformats.org/presentationml/2006/main">
-  <p:cSld>
-    <p:spTree>
-      <p:nvGrpSpPr>
-        <p:cNvPr id="1" name=""/>
-        <p:cNvGrpSpPr/>
-        <p:nvPr/>
-      </p:nvGrpSpPr>
-      <p:grpSpPr>
-        <a:xfrm>
-          <a:off x="0" y="0"/>
-          <a:ext cx="0" cy="0"/>
-          <a:chOff x="0" y="0"/>
-          <a:chExt cx="0" cy="0"/>
-        </a:xfrm>
-      </p:grpSpPr>
-      <p:sp>
-        <p:nvSpPr>
-          <p:cNvPr id="2" name="Title 1"/>
-          <p:cNvSpPr>
-            <a:spLocks noGrp="1"/>
-          </p:cNvSpPr>
-          <p:nvPr>
-            <p:ph type="title"/>
-          </p:nvPr>
-        </p:nvSpPr>
-        <p:spPr/>
-        <p:txBody>
-          <a:bodyPr/>
-          <a:lstStyle/>
-          <a:p>
-            <a:pPr lvl="0" indent="0" marL="0">
-              <a:buNone/>
-            </a:pPr>
-            <a:r>
-              <a:rPr/>
-              <a:t>Uso de RAM (entrega original)</a:t>
-            </a:r>
-          </a:p>
-        </p:txBody>
-      </p:sp>
-      <p:sp>
-        <p:nvSpPr>
-          <p:cNvPr id="3" name="Content Placeholder 2"/>
-          <p:cNvSpPr>
-            <a:spLocks noGrp="1"/>
-          </p:cNvSpPr>
-          <p:nvPr>
-            <p:ph idx="1"/>
-          </p:nvPr>
-        </p:nvSpPr>
-        <p:spPr/>
-        <p:txBody>
-          <a:bodyPr/>
-          <a:lstStyle/>
-          <a:p>
-            <a:pPr lvl="0"/>
-            <a:r>
-              <a:rPr>
-                <a:latin typeface="Courier"/>
-              </a:rPr>
-              <a:t>nephio-mgmt</a:t>
-            </a:r>
-            <a:r>
-              <a:rPr/>
-              <a:t> (Nephio R6 completo): </a:t>
-            </a:r>
-            <a:r>
-              <a:rPr b="1"/>
-              <a:t>~3,7–3,9 GiB</a:t>
-            </a:r>
-          </a:p>
-          <a:p>
-            <a:pPr lvl="0"/>
-            <a:r>
-              <a:rPr>
-                <a:latin typeface="Courier"/>
-              </a:rPr>
-              <a:t>o-cloud-1</a:t>
-            </a:r>
-            <a:r>
-              <a:rPr/>
-              <a:t> (2 nós K8s): </a:t>
-            </a:r>
-            <a:r>
-              <a:rPr b="1"/>
-              <a:t>~1,4 GiB</a:t>
-            </a:r>
-          </a:p>
-          <a:p>
-            <a:pPr lvl="0"/>
-            <a:r>
-              <a:rPr/>
-              <a:t>3 CNFs simuladas (juntas): </a:t>
-            </a:r>
-            <a:r>
-              <a:rPr b="1"/>
-              <a:t>&lt; 200 MiB</a:t>
-            </a:r>
-          </a:p>
-          <a:p>
-            <a:pPr lvl="0"/>
-            <a:r>
-              <a:rPr b="1"/>
-              <a:t>Total: ~3,9 GiB usados de 9,7 GiB configurados</a:t>
-            </a:r>
-            <a:r>
-              <a:rPr/>
-              <a:t> — bem abaixo da meta de 10–12 GB do enunciado</a:t>
-            </a:r>
-          </a:p>
-        </p:txBody>
-      </p:sp>
-    </p:spTree>
-  </p:cSld>
-</p:sld>
-</file>
-
-<file path=ppt/slides/slide2.xml><?xml version="1.0" encoding="utf-8"?>
-<p:sld xmlns:a="http://schemas.openxmlformats.org/drawingml/2006/main" xmlns:r="http://schemas.openxmlformats.org/officeDocument/2006/relationships" xmlns:p="http://schemas.openxmlformats.org/presentationml/2006/main">
-  <p:cSld>
-    <p:spTree>
-      <p:nvGrpSpPr>
-        <p:cNvPr id="1" name=""/>
-        <p:cNvGrpSpPr/>
-        <p:nvPr/>
-      </p:nvGrpSpPr>
-      <p:grpSpPr>
-        <a:xfrm>
-          <a:off x="0" y="0"/>
-          <a:ext cx="0" cy="0"/>
-          <a:chOff x="0" y="0"/>
-          <a:chExt cx="0" cy="0"/>
-        </a:xfrm>
-      </p:grpSpPr>
-      <p:sp>
-        <p:nvSpPr>
-          <p:cNvPr id="2" name="Title 1"/>
-          <p:cNvSpPr>
-            <a:spLocks noGrp="1"/>
-          </p:cNvSpPr>
-          <p:nvPr>
-            <p:ph type="title"/>
-          </p:nvPr>
-        </p:nvSpPr>
-        <p:spPr/>
-        <p:txBody>
-          <a:bodyPr/>
-          <a:lstStyle/>
-          <a:p>
-            <a:pPr lvl="0" indent="0" marL="0">
-              <a:buNone/>
-            </a:pPr>
-            <a:r>
-              <a:rPr/>
-              <a:t>Objetivo desta Parte 2</a:t>
-            </a:r>
-          </a:p>
-        </p:txBody>
-      </p:sp>
-      <p:sp>
-        <p:nvSpPr>
-          <p:cNvPr id="3" name="Content Placeholder 2"/>
-          <p:cNvSpPr>
-            <a:spLocks noGrp="1"/>
-          </p:cNvSpPr>
-          <p:nvPr>
-            <p:ph idx="1"/>
-          </p:nvPr>
-        </p:nvSpPr>
-        <p:spPr/>
-        <p:txBody>
-          <a:bodyPr/>
-          <a:lstStyle/>
-          <a:p>
-            <a:pPr lvl="0"/>
-            <a:r>
-              <a:rPr/>
-              <a:t>Demonstrar, com </a:t>
-            </a:r>
-            <a:r>
-              <a:rPr b="1"/>
-              <a:t>evidência mensurável</a:t>
-            </a:r>
-            <a:r>
-              <a:rPr/>
-              <a:t> (tempo, RAM, CPU), os quatro mecanismos centrais de SMO/orquestração: </a:t>
-            </a:r>
-            <a:r>
-              <a:rPr b="1"/>
-              <a:t>provisioning, configuration management, orchestration, lifecycle management</a:t>
-            </a:r>
-          </a:p>
-          <a:p>
-            <a:pPr lvl="0"/>
-            <a:r>
-              <a:rPr/>
-              <a:t>Não é um roteiro “follow-along” — é um experimento real, com bugs reais encontrados e corrigidos ao vivo, documentados em vez de escondidos</a:t>
-            </a:r>
-          </a:p>
-          <a:p>
-            <a:pPr lvl="0"/>
-            <a:r>
-              <a:rPr/>
-              <a:t>Critério de sucesso: cada operação tem que sair de um comando real, não de uma afirmação</a:t>
-            </a:r>
-          </a:p>
-          <a:p>
-            <a:pPr lvl="0"/>
-            <a:r>
-              <a:rPr/>
-              <a:t>Distinguir o tempo todo </a:t>
-            </a:r>
-            <a:r>
-              <a:rPr b="1"/>
-              <a:t>4 “ciclos de vida” diferentes</a:t>
-            </a:r>
-            <a:r>
-              <a:rPr/>
-              <a:t>: Kubernetes, Nephio/orquestração, O2 IMS, e NF O-RAN real (este último — nunca demonstrado, e digo isso com todas as letras)</a:t>
-            </a:r>
-          </a:p>
-        </p:txBody>
-      </p:sp>
-    </p:spTree>
-  </p:cSld>
-</p:sld>
-</file>
-
-<file path=ppt/slides/slide20.xml><?xml version="1.0" encoding="utf-8"?>
-<p:sld xmlns:a="http://schemas.openxmlformats.org/drawingml/2006/main" xmlns:r="http://schemas.openxmlformats.org/officeDocument/2006/relationships" xmlns:p="http://schemas.openxmlformats.org/presentationml/2006/main">
-  <p:cSld>
-    <p:spTree>
-      <p:nvGrpSpPr>
-        <p:cNvPr id="1" name=""/>
-        <p:cNvGrpSpPr/>
-        <p:nvPr/>
-      </p:nvGrpSpPr>
-      <p:grpSpPr>
-        <a:xfrm>
-          <a:off x="0" y="0"/>
-          <a:ext cx="0" cy="0"/>
-          <a:chOff x="0" y="0"/>
-          <a:chExt cx="0" cy="0"/>
-        </a:xfrm>
-      </p:grpSpPr>
-      <p:sp>
-        <p:nvSpPr>
-          <p:cNvPr id="2" name="Title 1"/>
-          <p:cNvSpPr>
-            <a:spLocks noGrp="1"/>
-          </p:cNvSpPr>
-          <p:nvPr>
-            <p:ph type="title"/>
-          </p:nvPr>
-        </p:nvSpPr>
-        <p:spPr/>
-        <p:txBody>
-          <a:bodyPr/>
-          <a:lstStyle/>
-          <a:p>
-            <a:pPr lvl="0" indent="0" marL="0">
-              <a:buNone/>
-            </a:pPr>
-            <a:r>
-              <a:rPr/>
-              <a:t>O que ficou de fora na entrega original</a:t>
-            </a:r>
-          </a:p>
-        </p:txBody>
-      </p:sp>
-      <p:sp>
-        <p:nvSpPr>
-          <p:cNvPr id="3" name="Content Placeholder 2"/>
-          <p:cNvSpPr>
-            <a:spLocks noGrp="1"/>
-          </p:cNvSpPr>
-          <p:nvPr>
-            <p:ph idx="1"/>
-          </p:nvPr>
-        </p:nvSpPr>
-        <p:spPr/>
-        <p:txBody>
-          <a:bodyPr/>
-          <a:lstStyle/>
-          <a:p>
-            <a:pPr lvl="0"/>
-            <a:r>
-              <a:rPr b="1"/>
-              <a:t>Sem GitOps contínuo no </a:t>
-            </a:r>
-            <a:r>
-              <a:rPr b="1">
-                <a:latin typeface="Courier"/>
-              </a:rPr>
-              <a:t>o-cloud-1</a:t>
-            </a:r>
-            <a:r>
-              <a:rPr/>
-              <a:t> — entrega via </a:t>
-            </a:r>
-            <a:r>
-              <a:rPr>
-                <a:latin typeface="Courier"/>
-              </a:rPr>
-              <a:t>kpt live apply</a:t>
-            </a:r>
-            <a:r>
-              <a:rPr/>
-              <a:t> sob demanda, não um </a:t>
-            </a:r>
-            <a:r>
-              <a:rPr>
-                <a:latin typeface="Courier"/>
-              </a:rPr>
-              <a:t>RootSync</a:t>
-            </a:r>
-            <a:r>
-              <a:rPr/>
-              <a:t> observando o repositório continuamente</a:t>
-            </a:r>
-          </a:p>
-          <a:p>
-            <a:pPr lvl="0"/>
-            <a:r>
-              <a:rPr b="1"/>
-              <a:t>Sem monitoramento por métrica</a:t>
-            </a:r>
-            <a:r>
-              <a:rPr/>
-              <a:t> — só </a:t>
-            </a:r>
-            <a:r>
-              <a:rPr>
-                <a:latin typeface="Courier"/>
-              </a:rPr>
-              <a:t>docker stats</a:t>
-            </a:r>
-            <a:r>
-              <a:rPr/>
-              <a:t>/eventos, sem </a:t>
-            </a:r>
-            <a:r>
-              <a:rPr>
-                <a:latin typeface="Courier"/>
-              </a:rPr>
-              <a:t>metrics-server</a:t>
-            </a:r>
-          </a:p>
-          <a:p>
-            <a:pPr lvl="0"/>
-            <a:r>
-              <a:rPr b="1">
-                <a:latin typeface="Courier"/>
-              </a:rPr>
-              <a:t>cell_id</a:t>
-            </a:r>
-            <a:r>
-              <a:rPr b="1"/>
-              <a:t> não propagava de volta ao pacote</a:t>
-            </a:r>
-            <a:r>
-              <a:rPr/>
-              <a:t> — mudança via </a:t>
-            </a:r>
-            <a:r>
-              <a:rPr>
-                <a:latin typeface="Courier"/>
-              </a:rPr>
-              <a:t>/config</a:t>
-            </a:r>
-            <a:r>
-              <a:rPr/>
-              <a:t> e via pacote eram caminhos independentes</a:t>
-            </a:r>
-          </a:p>
-          <a:p>
-            <a:pPr lvl="0"/>
-            <a:r>
-              <a:rPr b="1"/>
-              <a:t>Sem O1, sem NF real, sem Non-RT RIC/rApp, sem xApp/E2</a:t>
-            </a:r>
-            <a:r>
-              <a:rPr/>
-              <a:t> — fronteiras já mapeadas na Parte 1</a:t>
-            </a:r>
-          </a:p>
-        </p:txBody>
-      </p:sp>
-    </p:spTree>
-  </p:cSld>
-</p:sld>
-</file>
-
-<file path=ppt/slides/slide21.xml><?xml version="1.0" encoding="utf-8"?>
-<p:sld xmlns:a="http://schemas.openxmlformats.org/drawingml/2006/main" xmlns:r="http://schemas.openxmlformats.org/officeDocument/2006/relationships" xmlns:p="http://schemas.openxmlformats.org/presentationml/2006/main">
-  <p:cSld>
-    <p:spTree>
-      <p:nvGrpSpPr>
-        <p:cNvPr id="1" name=""/>
-        <p:cNvGrpSpPr/>
-        <p:nvPr/>
-      </p:nvGrpSpPr>
-      <p:grpSpPr>
-        <a:xfrm>
-          <a:off x="0" y="0"/>
-          <a:ext cx="0" cy="0"/>
-          <a:chOff x="0" y="0"/>
-          <a:chExt cx="0" cy="0"/>
-        </a:xfrm>
-      </p:grpSpPr>
-      <p:sp>
-        <p:nvSpPr>
-          <p:cNvPr id="2" name="Title 1"/>
-          <p:cNvSpPr>
-            <a:spLocks noGrp="1"/>
-          </p:cNvSpPr>
-          <p:nvPr>
-            <p:ph type="title"/>
-          </p:nvPr>
-        </p:nvSpPr>
-        <p:spPr/>
-        <p:txBody>
-          <a:bodyPr/>
-          <a:lstStyle/>
-          <a:p>
-            <a:pPr lvl="0" indent="0" marL="0">
-              <a:buNone/>
-            </a:pPr>
-            <a:r>
-              <a:rPr/>
-              <a:t>Por que as melhorias pós-entrega</a:t>
-            </a:r>
-          </a:p>
-        </p:txBody>
-      </p:sp>
-      <p:sp>
-        <p:nvSpPr>
-          <p:cNvPr id="3" name="Content Placeholder 2"/>
-          <p:cNvSpPr>
-            <a:spLocks noGrp="1"/>
-          </p:cNvSpPr>
-          <p:nvPr>
-            <p:ph idx="1"/>
-          </p:nvPr>
-        </p:nvSpPr>
-        <p:spPr/>
-        <p:txBody>
-          <a:bodyPr/>
-          <a:lstStyle/>
-          <a:p>
-            <a:pPr lvl="0"/>
-            <a:r>
-              <a:rPr/>
-              <a:t>Depois da entrega, revisei com o avaliador: “a parte de SMO foi bem implementada? O1/O2/A1 fazem sentido? Vale simular um xApp ou rApp?”</a:t>
-            </a:r>
-          </a:p>
-          <a:p>
-            <a:pPr lvl="0"/>
-            <a:r>
-              <a:rPr/>
-              <a:t>Decisão registrada: </a:t>
-            </a:r>
-            <a:r>
-              <a:rPr b="1"/>
-              <a:t>rApp faz sentido</a:t>
-            </a:r>
-            <a:r>
-              <a:rPr/>
-              <a:t> (roda no Non-RT RIC, parte do próprio SMO) — </a:t>
-            </a:r>
-            <a:r>
-              <a:rPr b="1"/>
-              <a:t>xApp não</a:t>
-            </a:r>
-            <a:r>
-              <a:rPr/>
-              <a:t> (exigiria Near-RT RIC + protocolo E2 real, que as CNFs não implementam — seria inventar uma interface inexistente)</a:t>
-            </a:r>
-          </a:p>
-          <a:p>
-            <a:pPr lvl="0"/>
-            <a:r>
-              <a:rPr/>
-              <a:t>Não existe “A2” na especificação O-RAN — as interfaces reais do lado RIC são </a:t>
-            </a:r>
-            <a:r>
-              <a:rPr b="1"/>
-              <a:t>A1</a:t>
-            </a:r>
-            <a:r>
-              <a:rPr/>
-              <a:t> e </a:t>
-            </a:r>
-            <a:r>
-              <a:rPr b="1"/>
-              <a:t>E2</a:t>
-            </a:r>
-          </a:p>
-          <a:p>
-            <a:pPr lvl="0"/>
-            <a:r>
-              <a:rPr/>
-              <a:t>Resultado: 4 melhorias, todas dentro do mesmo orçamento de 16 GB, cada uma com evidência real</a:t>
-            </a:r>
-          </a:p>
-        </p:txBody>
-      </p:sp>
-    </p:spTree>
-  </p:cSld>
-</p:sld>
-</file>
-
-<file path=ppt/slides/slide22.xml><?xml version="1.0" encoding="utf-8"?>
-<p:sld xmlns:a="http://schemas.openxmlformats.org/drawingml/2006/main" xmlns:r="http://schemas.openxmlformats.org/officeDocument/2006/relationships" xmlns:p="http://schemas.openxmlformats.org/presentationml/2006/main">
-  <p:cSld>
-    <p:spTree>
-      <p:nvGrpSpPr>
-        <p:cNvPr id="1" name=""/>
-        <p:cNvGrpSpPr/>
-        <p:nvPr/>
-      </p:nvGrpSpPr>
-      <p:grpSpPr>
-        <a:xfrm>
-          <a:off x="0" y="0"/>
-          <a:ext cx="0" cy="0"/>
-          <a:chOff x="0" y="0"/>
-          <a:chExt cx="0" cy="0"/>
-        </a:xfrm>
-      </p:grpSpPr>
-      <p:sp>
-        <p:nvSpPr>
-          <p:cNvPr id="2" name="Title 1"/>
-          <p:cNvSpPr>
-            <a:spLocks noGrp="1"/>
-          </p:cNvSpPr>
-          <p:nvPr>
-            <p:ph type="title"/>
-          </p:nvPr>
-        </p:nvSpPr>
-        <p:spPr>
-          <a:xfrm>
-            <a:off x="457201" y="204787"/>
-            <a:ext cx="3008313" cy="871538"/>
-          </a:xfrm>
-        </p:spPr>
-        <p:txBody>
-          <a:bodyPr/>
-          <a:lstStyle/>
-          <a:p>
-            <a:pPr lvl="0" indent="0" marL="0">
-              <a:buNone/>
-            </a:pPr>
-            <a:r>
-              <a:rPr/>
-              <a:t>Melhoria 1 — metrics-server (Monitoring)</a:t>
-            </a:r>
-          </a:p>
-        </p:txBody>
-      </p:sp>
-      <p:sp>
-        <p:nvSpPr>
-          <p:cNvPr id="4" name="Text Placeholder 3"/>
-          <p:cNvSpPr>
-            <a:spLocks noGrp="1"/>
-          </p:cNvSpPr>
-          <p:nvPr>
-            <p:ph idx="2" sz="half" type="body"/>
-          </p:nvPr>
-        </p:nvSpPr>
-        <p:spPr/>
-        <p:txBody>
-          <a:bodyPr/>
-          <a:lstStyle/>
-          <a:p>
-            <a:pPr lvl="0"/>
-            <a:r>
-              <a:rPr/>
-              <a:t>Instalado no </a:t>
-            </a:r>
-            <a:r>
-              <a:rPr>
-                <a:latin typeface="Courier"/>
-              </a:rPr>
-              <a:t>o-cloud-1</a:t>
-            </a:r>
-            <a:r>
-              <a:rPr/>
-              <a:t>: manifesto oficial + patch </a:t>
-            </a:r>
-            <a:r>
-              <a:rPr>
-                <a:latin typeface="Courier"/>
-              </a:rPr>
-              <a:t>--kubelet-insecure-tls</a:t>
-            </a:r>
-          </a:p>
-          <a:p>
-            <a:pPr lvl="0"/>
-            <a:r>
-              <a:rPr/>
-              <a:t>Fecha “Monitoring: não incluído nativamente” da tabela SMO×Nephio da Parte 1</a:t>
-            </a:r>
-          </a:p>
-          <a:p>
-            <a:pPr lvl="0"/>
-            <a:r>
-              <a:rPr/>
-              <a:t>Custo: </a:t>
-            </a:r>
-            <a:r>
-              <a:rPr b="1"/>
-              <a:t>~15 MiB de RAM</a:t>
-            </a:r>
-          </a:p>
-        </p:txBody>
-      </p:sp>
-      <p:pic>
-        <p:nvPicPr>
-          <p:cNvPr descr="assets/term-metrics-top.png" id="0" name="Picture 1"/>
-          <p:cNvPicPr>
-            <a:picLocks noGrp="1" noChangeAspect="1"/>
-          </p:cNvPicPr>
-          <p:nvPr/>
-        </p:nvPicPr>
-        <p:blipFill>
-          <a:blip r:embed="rId3"/>
-          <a:stretch>
-            <a:fillRect/>
-          </a:stretch>
-        </p:blipFill>
-        <p:spPr bwMode="auto">
-          <a:xfrm>
-            <a:off x="3568700" y="1308100"/>
-            <a:ext cx="5105400" cy="1676400"/>
-          </a:xfrm>
-          <a:prstGeom prst="rect">
-            <a:avLst/>
-          </a:prstGeom>
-          <a:noFill/>
-          <a:ln w="9525">
-            <a:noFill/>
-            <a:headEnd/>
-            <a:tailEnd/>
-          </a:ln>
-        </p:spPr>
-      </p:pic>
-      <p:sp>
-        <p:nvSpPr>
-          <p:cNvPr id="1" name="TextBox 3"/>
-          <p:cNvSpPr txBox="1"/>
-          <p:nvPr>
-            <p:ph idx="1"/>
-          </p:nvPr>
-        </p:nvSpPr>
-        <p:spPr>
-          <a:xfrm>
-            <a:off x="3568700" y="4076700"/>
-            <a:ext cx="5105400" cy="508000"/>
-          </a:xfrm>
-          <a:prstGeom prst="rect">
-            <a:avLst/>
-          </a:prstGeom>
-          <a:noFill/>
-        </p:spPr>
-        <p:txBody>
-          <a:bodyPr/>
-          <a:lstStyle/>
-          <a:p>
-            <a:pPr lvl="0" indent="0" marL="0" algn="ctr">
-              <a:buNone/>
-            </a:pPr>
-            <a:r>
-              <a:rPr/>
-              <a:t>kubectl top nodes/pods — dados reais de CPU e memória</a:t>
-            </a:r>
-          </a:p>
-        </p:txBody>
-      </p:sp>
-    </p:spTree>
-  </p:cSld>
-</p:sld>
-</file>
-
-<file path=ppt/slides/slide23.xml><?xml version="1.0" encoding="utf-8"?>
-<p:sld xmlns:a="http://schemas.openxmlformats.org/drawingml/2006/main" xmlns:r="http://schemas.openxmlformats.org/officeDocument/2006/relationships" xmlns:p="http://schemas.openxmlformats.org/presentationml/2006/main">
-  <p:cSld>
-    <p:spTree>
-      <p:nvGrpSpPr>
-        <p:cNvPr id="1" name=""/>
-        <p:cNvGrpSpPr/>
-        <p:nvPr/>
-      </p:nvGrpSpPr>
-      <p:grpSpPr>
-        <a:xfrm>
-          <a:off x="0" y="0"/>
-          <a:ext cx="0" cy="0"/>
-          <a:chOff x="0" y="0"/>
-          <a:chExt cx="0" cy="0"/>
-        </a:xfrm>
-      </p:grpSpPr>
-      <p:sp>
-        <p:nvSpPr>
-          <p:cNvPr id="2" name="Title 1"/>
-          <p:cNvSpPr>
-            <a:spLocks noGrp="1"/>
-          </p:cNvSpPr>
-          <p:nvPr>
-            <p:ph type="title"/>
-          </p:nvPr>
-        </p:nvSpPr>
-        <p:spPr/>
-        <p:txBody>
-          <a:bodyPr/>
-          <a:lstStyle/>
-          <a:p>
-            <a:pPr lvl="0" indent="0" marL="0">
-              <a:buNone/>
-            </a:pPr>
-            <a:r>
-              <a:rPr/>
-              <a:t>Melhoria 2 — RootSync contínuo (Orchestration)</a:t>
-            </a:r>
-          </a:p>
-        </p:txBody>
-      </p:sp>
-      <p:sp>
-        <p:nvSpPr>
-          <p:cNvPr id="3" name="Content Placeholder 2"/>
-          <p:cNvSpPr>
-            <a:spLocks noGrp="1"/>
-          </p:cNvSpPr>
-          <p:nvPr>
-            <p:ph idx="1"/>
-          </p:nvPr>
-        </p:nvSpPr>
-        <p:spPr/>
-        <p:txBody>
-          <a:bodyPr/>
-          <a:lstStyle/>
-          <a:p>
-            <a:pPr lvl="0"/>
-            <a:r>
-              <a:rPr/>
-              <a:t>Config Sync instalado no </a:t>
-            </a:r>
-            <a:r>
-              <a:rPr b="1"/>
-              <a:t>próprio</a:t>
-            </a:r>
-            <a:r>
-              <a:rPr/>
-              <a:t> </a:t>
-            </a:r>
-            <a:r>
-              <a:rPr>
-                <a:latin typeface="Courier"/>
-              </a:rPr>
-              <a:t>o-cloud-1</a:t>
-            </a:r>
-            <a:r>
-              <a:rPr/>
-              <a:t> (mesmo pacote kpt oficial do management cluster), com </a:t>
-            </a:r>
-            <a:r>
-              <a:rPr>
-                <a:latin typeface="Courier"/>
-              </a:rPr>
-              <a:t>RootSync</a:t>
-            </a:r>
-            <a:r>
-              <a:rPr/>
-              <a:t> apontando pro repositório </a:t>
-            </a:r>
-            <a:r>
-              <a:rPr>
-                <a:latin typeface="Courier"/>
-              </a:rPr>
-              <a:t>openran-cnfs</a:t>
-            </a:r>
-          </a:p>
-          <a:p>
-            <a:pPr lvl="0"/>
-            <a:r>
-              <a:rPr/>
-              <a:t>Fecha “sem GitOps contínuo” — a entrega deixa de depender de rodar o script manualmente</a:t>
-            </a:r>
-          </a:p>
-          <a:p>
-            <a:pPr lvl="0"/>
-            <a:r>
-              <a:rPr b="1"/>
-              <a:t>Prova real de continuidade:</a:t>
-            </a:r>
-            <a:r>
-              <a:rPr/>
-              <a:t> publiquei v3 no Porch </a:t>
-            </a:r>
-            <a:r>
-              <a:rPr b="1"/>
-              <a:t>sem tocar no cluster</a:t>
-            </a:r>
-            <a:r>
-              <a:rPr/>
-              <a:t> — aplicado sozinho em </a:t>
-            </a:r>
-            <a:r>
-              <a:rPr b="1"/>
-              <a:t>19 s</a:t>
-            </a:r>
-            <a:r>
-              <a:rPr/>
-              <a:t> (commit </a:t>
-            </a:r>
-            <a:r>
-              <a:rPr>
-                <a:latin typeface="Courier"/>
-              </a:rPr>
-              <a:t>1bdae53d</a:t>
-            </a:r>
-            <a:r>
-              <a:rPr/>
-              <a:t> → </a:t>
-            </a:r>
-            <a:r>
-              <a:rPr>
-                <a:latin typeface="Courier"/>
-              </a:rPr>
-              <a:t>oran-cu.nf-version=v3</a:t>
-            </a:r>
-            <a:r>
-              <a:rPr/>
-              <a:t>)</a:t>
-            </a:r>
-          </a:p>
-        </p:txBody>
-      </p:sp>
-    </p:spTree>
-  </p:cSld>
-</p:sld>
-</file>
-
-<file path=ppt/slides/slide24.xml><?xml version="1.0" encoding="utf-8"?>
-<p:sld xmlns:a="http://schemas.openxmlformats.org/drawingml/2006/main" xmlns:r="http://schemas.openxmlformats.org/officeDocument/2006/relationships" xmlns:p="http://schemas.openxmlformats.org/presentationml/2006/main">
-  <p:cSld>
-    <p:spTree>
-      <p:nvGrpSpPr>
-        <p:cNvPr id="1" name=""/>
-        <p:cNvGrpSpPr/>
-        <p:nvPr/>
-      </p:nvGrpSpPr>
-      <p:grpSpPr>
-        <a:xfrm>
-          <a:off x="0" y="0"/>
-          <a:ext cx="0" cy="0"/>
-          <a:chOff x="0" y="0"/>
-          <a:chExt cx="0" cy="0"/>
-        </a:xfrm>
-      </p:grpSpPr>
-      <p:sp>
-        <p:nvSpPr>
-          <p:cNvPr id="2" name="Title 1"/>
-          <p:cNvSpPr>
-            <a:spLocks noGrp="1"/>
-          </p:cNvSpPr>
-          <p:nvPr>
-            <p:ph type="title"/>
-          </p:nvPr>
-        </p:nvSpPr>
-        <p:spPr>
-          <a:xfrm>
-            <a:off x="457201" y="204787"/>
-            <a:ext cx="3008313" cy="871538"/>
-          </a:xfrm>
-        </p:spPr>
-        <p:txBody>
-          <a:bodyPr/>
-          <a:lstStyle/>
-          <a:p>
-            <a:pPr lvl="0" indent="0" marL="0">
-              <a:buNone/>
-            </a:pPr>
-            <a:r>
-              <a:rPr/>
-              <a:t>Melhoria 3 — config-bridge (Configuration)</a:t>
-            </a:r>
-          </a:p>
-        </p:txBody>
-      </p:sp>
-      <p:sp>
-        <p:nvSpPr>
-          <p:cNvPr id="4" name="Text Placeholder 3"/>
-          <p:cNvSpPr>
-            <a:spLocks noGrp="1"/>
-          </p:cNvSpPr>
-          <p:nvPr>
-            <p:ph idx="2" sz="half" type="body"/>
-          </p:nvPr>
-        </p:nvSpPr>
-        <p:spPr/>
-        <p:txBody>
-          <a:bodyPr/>
-          <a:lstStyle/>
-          <a:p>
-            <a:pPr lvl="0"/>
-            <a:r>
-              <a:rPr/>
-              <a:t>Fecha o loop </a:t>
-            </a:r>
-            <a:r>
-              <a:rPr>
-                <a:latin typeface="Courier"/>
-              </a:rPr>
-              <a:t>/config</a:t>
-            </a:r>
-            <a:r>
-              <a:rPr/>
-              <a:t> (NF) → pacote: um poller detecta drift entre o </a:t>
-            </a:r>
-            <a:r>
-              <a:rPr>
-                <a:latin typeface="Courier"/>
-              </a:rPr>
-              <a:t>/config</a:t>
-            </a:r>
-            <a:r>
-              <a:rPr/>
-              <a:t> ao vivo e o ConfigMap publicado, e comita a correção — o RootSync (Melhoria 2) reconcilia o resto sozinho</a:t>
-            </a:r>
-          </a:p>
-          <a:p>
-            <a:pPr lvl="0"/>
-            <a:r>
-              <a:rPr/>
-              <a:t>Pré-requisito: a config de domínio (</a:t>
-            </a:r>
-            <a:r>
-              <a:rPr>
-                <a:latin typeface="Courier"/>
-              </a:rPr>
-              <a:t>cell_id</a:t>
-            </a:r>
-            <a:r>
-              <a:rPr/>
-              <a:t> etc.) precisou passar a vir do ConfigMap — antes estava </a:t>
-            </a:r>
-            <a:r>
-              <a:rPr i="1"/>
-              <a:t>hardcoded</a:t>
-            </a:r>
-            <a:r>
-              <a:rPr/>
-              <a:t> no código da NF, e não havia nada real para sincronizar</a:t>
-            </a:r>
-          </a:p>
-        </p:txBody>
-      </p:sp>
-      <p:pic>
-        <p:nvPicPr>
-          <p:cNvPr descr="assets/term-configbridge-drift.png" id="0" name="Picture 1"/>
-          <p:cNvPicPr>
-            <a:picLocks noGrp="1" noChangeAspect="1"/>
-          </p:cNvPicPr>
-          <p:nvPr/>
-        </p:nvPicPr>
-        <p:blipFill>
-          <a:blip r:embed="rId3"/>
-          <a:stretch>
-            <a:fillRect/>
-          </a:stretch>
-        </p:blipFill>
-        <p:spPr bwMode="auto">
-          <a:xfrm>
-            <a:off x="3568700" y="1104900"/>
-            <a:ext cx="5105400" cy="2057400"/>
-          </a:xfrm>
-          <a:prstGeom prst="rect">
-            <a:avLst/>
-          </a:prstGeom>
-          <a:noFill/>
-          <a:ln w="9525">
-            <a:noFill/>
-            <a:headEnd/>
-            <a:tailEnd/>
-          </a:ln>
-        </p:spPr>
-      </p:pic>
-      <p:sp>
-        <p:nvSpPr>
-          <p:cNvPr id="1" name="TextBox 3"/>
-          <p:cNvSpPr txBox="1"/>
-          <p:nvPr>
-            <p:ph idx="1"/>
-          </p:nvPr>
-        </p:nvSpPr>
-        <p:spPr>
-          <a:xfrm>
-            <a:off x="3568700" y="4076700"/>
-            <a:ext cx="5105400" cy="508000"/>
-          </a:xfrm>
-          <a:prstGeom prst="rect">
-            <a:avLst/>
-          </a:prstGeom>
-          <a:noFill/>
-        </p:spPr>
-        <p:txBody>
-          <a:bodyPr/>
-          <a:lstStyle/>
-          <a:p>
-            <a:pPr lvl="0" indent="0" marL="0" algn="ctr">
-              <a:buNone/>
-            </a:pPr>
-            <a:r>
-              <a:rPr/>
-              <a:t>Round-trip real: PUT /config contornando o GitOps → drift detectado → commit → CFG_CELL_ID=7 confirmado no cluster</a:t>
-            </a:r>
-          </a:p>
-        </p:txBody>
-      </p:sp>
-    </p:spTree>
-  </p:cSld>
-</p:sld>
-</file>
-
-<file path=ppt/slides/slide25.xml><?xml version="1.0" encoding="utf-8"?>
-<p:sld xmlns:a="http://schemas.openxmlformats.org/drawingml/2006/main" xmlns:r="http://schemas.openxmlformats.org/officeDocument/2006/relationships" xmlns:p="http://schemas.openxmlformats.org/presentationml/2006/main">
-  <p:cSld>
-    <p:spTree>
-      <p:nvGrpSpPr>
-        <p:cNvPr id="1" name=""/>
-        <p:cNvGrpSpPr/>
-        <p:nvPr/>
-      </p:nvGrpSpPr>
-      <p:grpSpPr>
-        <a:xfrm>
-          <a:off x="0" y="0"/>
-          <a:ext cx="0" cy="0"/>
-          <a:chOff x="0" y="0"/>
-          <a:chExt cx="0" cy="0"/>
-        </a:xfrm>
-      </p:grpSpPr>
-      <p:sp>
-        <p:nvSpPr>
-          <p:cNvPr id="2" name="Title 1"/>
-          <p:cNvSpPr>
-            <a:spLocks noGrp="1"/>
-          </p:cNvSpPr>
-          <p:nvPr>
-            <p:ph type="title"/>
-          </p:nvPr>
-        </p:nvSpPr>
-        <p:spPr>
-          <a:xfrm>
-            <a:off x="457201" y="204787"/>
-            <a:ext cx="3008313" cy="871538"/>
-          </a:xfrm>
-        </p:spPr>
-        <p:txBody>
-          <a:bodyPr/>
-          <a:lstStyle/>
-          <a:p>
-            <a:pPr lvl="0" indent="0" marL="0">
-              <a:buNone/>
-            </a:pPr>
-            <a:r>
-              <a:rPr/>
-              <a:t>Melhoria 4 — rapp-autoscale (Non-RT RIC / SMO)</a:t>
-            </a:r>
-          </a:p>
-        </p:txBody>
-      </p:sp>
-      <p:sp>
-        <p:nvSpPr>
-          <p:cNvPr id="4" name="Text Placeholder 3"/>
-          <p:cNvSpPr>
-            <a:spLocks noGrp="1"/>
-          </p:cNvSpPr>
-          <p:nvPr>
-            <p:ph idx="2" sz="half" type="body"/>
-          </p:nvPr>
-        </p:nvSpPr>
-        <p:spPr/>
-        <p:txBody>
-          <a:bodyPr/>
-          <a:lstStyle/>
-          <a:p>
-            <a:pPr lvl="0"/>
-            <a:r>
-              <a:rPr/>
-              <a:t>Poller Python (não um operador </a:t>
-            </a:r>
-            <a:r>
-              <a:rPr>
-                <a:latin typeface="Courier"/>
-              </a:rPr>
-              <a:t>kopf</a:t>
-            </a:r>
-            <a:r>
-              <a:rPr/>
-              <a:t> — o estado observado não é um recurso do Kubernetes) que lê a taxa de requisições de </a:t>
-            </a:r>
-            <a:r>
-              <a:rPr>
-                <a:latin typeface="Courier"/>
-              </a:rPr>
-              <a:t>/metrics</a:t>
-            </a:r>
-            <a:r>
-              <a:rPr/>
-              <a:t> a cada </a:t>
-            </a:r>
-            <a:r>
-              <a:rPr b="1"/>
-              <a:t>30 s</a:t>
-            </a:r>
-          </a:p>
-          <a:p>
-            <a:pPr lvl="0"/>
-            <a:r>
-              <a:rPr/>
-              <a:t>Deliberadamente </a:t>
-            </a:r>
-            <a:r>
-              <a:rPr b="1"/>
-              <a:t>não-tempo-real</a:t>
-            </a:r>
-            <a:r>
-              <a:rPr/>
-              <a:t> — O-RAN define rApp como &gt;1 s, xApp como 10 ms–1 s; o próprio intervalo marca essa distinção na prática</a:t>
-            </a:r>
-          </a:p>
-          <a:p>
-            <a:pPr lvl="0"/>
-            <a:r>
-              <a:rPr/>
-              <a:t>Política: </a:t>
-            </a:r>
-            <a:r>
-              <a:rPr>
-                <a:latin typeface="Courier"/>
-              </a:rPr>
-              <a:t>rate &gt; 1,0 req/s</a:t>
-            </a:r>
-            <a:r>
-              <a:rPr/>
-              <a:t> → escala pra cima; </a:t>
-            </a:r>
-            <a:r>
-              <a:rPr>
-                <a:latin typeface="Courier"/>
-              </a:rPr>
-              <a:t>rate &lt; 0,1 req/s</a:t>
-            </a:r>
-            <a:r>
-              <a:rPr/>
-              <a:t> → escala pra baixo</a:t>
-            </a:r>
-          </a:p>
-          <a:p>
-            <a:pPr lvl="0"/>
-            <a:r>
-              <a:rPr/>
-              <a:t>Ação executada via PATCH direto no </a:t>
-            </a:r>
-            <a:r>
-              <a:rPr>
-                <a:latin typeface="Courier"/>
-              </a:rPr>
-              <a:t>/scale</a:t>
-            </a:r>
-            <a:r>
-              <a:rPr/>
-              <a:t> — simplificação documentada (não publica uma policy A1, porque não há Near-RT RIC real neste laboratório)</a:t>
-            </a:r>
-          </a:p>
-        </p:txBody>
-      </p:sp>
-      <p:pic>
-        <p:nvPicPr>
-          <p:cNvPr descr="assets/term-rapp-decision.png" id="0" name="Picture 1"/>
-          <p:cNvPicPr>
-            <a:picLocks noGrp="1" noChangeAspect="1"/>
-          </p:cNvPicPr>
-          <p:nvPr/>
-        </p:nvPicPr>
-        <p:blipFill>
-          <a:blip r:embed="rId3"/>
-          <a:stretch>
-            <a:fillRect/>
-          </a:stretch>
-        </p:blipFill>
-        <p:spPr bwMode="auto">
-          <a:xfrm>
-            <a:off x="3568700" y="1181100"/>
-            <a:ext cx="5105400" cy="1930400"/>
-          </a:xfrm>
-          <a:prstGeom prst="rect">
-            <a:avLst/>
-          </a:prstGeom>
-          <a:noFill/>
-          <a:ln w="9525">
-            <a:noFill/>
-            <a:headEnd/>
-            <a:tailEnd/>
-          </a:ln>
-        </p:spPr>
-      </p:pic>
-      <p:sp>
-        <p:nvSpPr>
-          <p:cNvPr id="1" name="TextBox 3"/>
-          <p:cNvSpPr txBox="1"/>
-          <p:nvPr>
-            <p:ph idx="1"/>
-          </p:nvPr>
-        </p:nvSpPr>
-        <p:spPr>
-          <a:xfrm>
-            <a:off x="3568700" y="4076700"/>
-            <a:ext cx="5105400" cy="508000"/>
-          </a:xfrm>
-          <a:prstGeom prst="rect">
-            <a:avLst/>
-          </a:prstGeom>
-          <a:noFill/>
-        </p:spPr>
-        <p:txBody>
-          <a:bodyPr/>
-          <a:lstStyle/>
-          <a:p>
-            <a:pPr lvl="0" indent="0" marL="0" algn="ctr">
-              <a:buNone/>
-            </a:pPr>
-            <a:r>
-              <a:rPr/>
-              <a:t>Decisão real do rApp: rate=10.27 req/s dispara scale-up 1→2</a:t>
-            </a:r>
-          </a:p>
-        </p:txBody>
-      </p:sp>
-    </p:spTree>
-  </p:cSld>
-</p:sld>
-</file>
-
-<file path=ppt/slides/slide26.xml><?xml version="1.0" encoding="utf-8"?>
-<p:sld xmlns:a="http://schemas.openxmlformats.org/drawingml/2006/main" xmlns:r="http://schemas.openxmlformats.org/officeDocument/2006/relationships" xmlns:p="http://schemas.openxmlformats.org/presentationml/2006/main">
-  <p:cSld>
-    <p:spTree>
-      <p:nvGrpSpPr>
-        <p:cNvPr id="1" name=""/>
-        <p:cNvGrpSpPr/>
-        <p:nvPr/>
-      </p:nvGrpSpPr>
-      <p:grpSpPr>
-        <a:xfrm>
-          <a:off x="0" y="0"/>
-          <a:ext cx="0" cy="0"/>
-          <a:chOff x="0" y="0"/>
-          <a:chExt cx="0" cy="0"/>
-        </a:xfrm>
-      </p:grpSpPr>
-      <p:sp>
-        <p:nvSpPr>
-          <p:cNvPr id="2" name="Title 1"/>
-          <p:cNvSpPr>
-            <a:spLocks noGrp="1"/>
-          </p:cNvSpPr>
-          <p:nvPr>
-            <p:ph type="title"/>
-          </p:nvPr>
-        </p:nvSpPr>
-        <p:spPr/>
-        <p:txBody>
-          <a:bodyPr/>
-          <a:lstStyle/>
-          <a:p>
-            <a:pPr lvl="0" indent="0" marL="0">
-              <a:buNone/>
-            </a:pPr>
-            <a:r>
-              <a:rPr/>
-              <a:t>Achado real — conflito GitOps × controle imperativo</a:t>
-            </a:r>
-          </a:p>
-        </p:txBody>
-      </p:sp>
-      <p:sp>
-        <p:nvSpPr>
-          <p:cNvPr id="3" name="Content Placeholder 2"/>
-          <p:cNvSpPr>
-            <a:spLocks noGrp="1"/>
-          </p:cNvSpPr>
-          <p:nvPr>
-            <p:ph idx="1"/>
-          </p:nvPr>
-        </p:nvSpPr>
-        <p:spPr/>
-        <p:txBody>
-          <a:bodyPr/>
-          <a:lstStyle/>
-          <a:p>
-            <a:pPr lvl="0"/>
-            <a:r>
-              <a:rPr/>
-              <a:t>O PATCH </a:t>
-            </a:r>
-            <a:r>
-              <a:rPr>
-                <a:latin typeface="Courier"/>
-              </a:rPr>
-              <a:t>/scale</a:t>
-            </a:r>
-            <a:r>
-              <a:rPr/>
-              <a:t> aplicava </a:t>
-            </a:r>
-            <a:r>
-              <a:rPr>
-                <a:latin typeface="Courier"/>
-              </a:rPr>
-              <a:t>replicas:2</a:t>
-            </a:r>
-            <a:r>
-              <a:rPr/>
-              <a:t> com sucesso (</a:t>
-            </a:r>
-            <a:r>
-              <a:rPr>
-                <a:latin typeface="Courier"/>
-              </a:rPr>
-              <a:t>200</a:t>
-            </a:r>
-            <a:r>
-              <a:rPr/>
-              <a:t>) — mas a réplica </a:t>
-            </a:r>
-            <a:r>
-              <a:rPr b="1"/>
-              <a:t>voltava pra 1</a:t>
-            </a:r>
-            <a:r>
-              <a:rPr/>
-              <a:t> segundos depois</a:t>
-            </a:r>
-          </a:p>
-          <a:p>
-            <a:pPr lvl="0"/>
-            <a:r>
-              <a:rPr b="1"/>
-              <a:t>Causa raiz:</a:t>
-            </a:r>
-            <a:r>
-              <a:rPr/>
-              <a:t> o pacote no Git ainda declarava </a:t>
-            </a:r>
-            <a:r>
-              <a:rPr>
-                <a:latin typeface="Courier"/>
-              </a:rPr>
-              <a:t>replicas: 1</a:t>
-            </a:r>
-            <a:r>
-              <a:rPr/>
-              <a:t>, e o RootSync contínuo (Melhoria 2) reconciliava de volta a cada ciclo — duas autoridades de orquestração competindo pelo mesmo campo</a:t>
-            </a:r>
-          </a:p>
-          <a:p>
-            <a:pPr lvl="0"/>
-            <a:r>
-              <a:rPr b="1"/>
-              <a:t>Correção:</a:t>
-            </a:r>
-            <a:r>
-              <a:rPr/>
-              <a:t> campo </a:t>
-            </a:r>
-            <a:r>
-              <a:rPr>
-                <a:latin typeface="Courier"/>
-              </a:rPr>
-              <a:t>replicas</a:t>
-            </a:r>
-            <a:r>
-              <a:rPr/>
-              <a:t> removido do pacote — como </a:t>
-            </a:r>
-            <a:r>
-              <a:rPr>
-                <a:latin typeface="Courier"/>
-              </a:rPr>
-              <a:t>kpt live apply</a:t>
-            </a:r>
-            <a:r>
-              <a:rPr/>
-              <a:t> e o Config Sync usam </a:t>
-            </a:r>
-            <a:r>
-              <a:rPr i="1"/>
-              <a:t>server-side apply</a:t>
-            </a:r>
-            <a:r>
-              <a:rPr/>
-              <a:t>, nenhum dos dois reivindica o campo quando ausente</a:t>
-            </a:r>
-          </a:p>
-          <a:p>
-            <a:pPr lvl="0"/>
-            <a:r>
-              <a:rPr/>
-              <a:t>Mesmo padrão usado na vida real quando um </a:t>
-            </a:r>
-            <a:r>
-              <a:rPr b="1"/>
-              <a:t>HPA coexiste com GitOps</a:t>
-            </a:r>
-            <a:r>
-              <a:rPr/>
-              <a:t> (Argo CD chama isso de </a:t>
-            </a:r>
-            <a:r>
-              <a:rPr>
-                <a:latin typeface="Courier"/>
-              </a:rPr>
-              <a:t>ignoreDifferences</a:t>
-            </a:r>
-            <a:r>
-              <a:rPr/>
-              <a:t>)</a:t>
-            </a:r>
-          </a:p>
-        </p:txBody>
-      </p:sp>
-    </p:spTree>
-  </p:cSld>
-</p:sld>
-</file>
-
-<file path=ppt/slides/slide27.xml><?xml version="1.0" encoding="utf-8"?>
-<p:sld xmlns:a="http://schemas.openxmlformats.org/drawingml/2006/main" xmlns:r="http://schemas.openxmlformats.org/officeDocument/2006/relationships" xmlns:p="http://schemas.openxmlformats.org/presentationml/2006/main">
-  <p:cSld>
-    <p:spTree>
-      <p:nvGrpSpPr>
-        <p:cNvPr id="1" name=""/>
-        <p:cNvGrpSpPr/>
-        <p:nvPr/>
-      </p:nvGrpSpPr>
-      <p:grpSpPr>
-        <a:xfrm>
-          <a:off x="0" y="0"/>
-          <a:ext cx="0" cy="0"/>
-          <a:chOff x="0" y="0"/>
-          <a:chExt cx="0" cy="0"/>
-        </a:xfrm>
-      </p:grpSpPr>
-      <p:sp>
-        <p:nvSpPr>
-          <p:cNvPr id="2" name="Title 1"/>
-          <p:cNvSpPr>
-            <a:spLocks noGrp="1"/>
-          </p:cNvSpPr>
-          <p:nvPr>
-            <p:ph type="title"/>
-          </p:nvPr>
-        </p:nvSpPr>
-        <p:spPr>
-          <a:xfrm>
-            <a:off x="457201" y="204787"/>
-            <a:ext cx="3008313" cy="871538"/>
-          </a:xfrm>
-        </p:spPr>
-        <p:txBody>
-          <a:bodyPr/>
-          <a:lstStyle/>
-          <a:p>
-            <a:pPr lvl="0" indent="0" marL="0">
-              <a:buNone/>
-            </a:pPr>
-            <a:r>
-              <a:rPr/>
-              <a:t>Status honesto e uso de RAM final</a:t>
-            </a:r>
-          </a:p>
-        </p:txBody>
-      </p:sp>
-      <p:sp>
-        <p:nvSpPr>
-          <p:cNvPr id="4" name="Text Placeholder 3"/>
-          <p:cNvSpPr>
-            <a:spLocks noGrp="1"/>
-          </p:cNvSpPr>
-          <p:nvPr>
-            <p:ph idx="2" sz="half" type="body"/>
-          </p:nvPr>
-        </p:nvSpPr>
-        <p:spPr/>
-        <p:txBody>
-          <a:bodyPr/>
-          <a:lstStyle/>
-          <a:p>
-            <a:pPr lvl="0"/>
-            <a:r>
-              <a:rPr/>
-              <a:t>Reverificação final do rApp (confirmar que o scale-up permanece estável após a correção) </a:t>
-            </a:r>
-            <a:r>
-              <a:rPr b="1"/>
-              <a:t>não foi concluída</a:t>
-            </a:r>
-            <a:r>
-              <a:rPr/>
-              <a:t> — o ambiente WSL2/Docker sofreu suspensões repetidas do host durante os testes finais desta sessão (containers de ambos os clusters caindo simultaneamente)</a:t>
-            </a:r>
-          </a:p>
-          <a:p>
-            <a:pPr lvl="0"/>
-            <a:r>
-              <a:rPr b="1"/>
-              <a:t>Nenhuma evidência foi forjada</a:t>
-            </a:r>
-            <a:r>
-              <a:rPr/>
-              <a:t> para cobrir essa lacuna — registrado com todas as letras, reproduzível via </a:t>
-            </a:r>
-            <a:r>
-              <a:rPr>
-                <a:latin typeface="Courier"/>
-              </a:rPr>
-              <a:t>scripts/13-rapp-autoscale.sh</a:t>
-            </a:r>
-            <a:r>
-              <a:rPr/>
-              <a:t> + </a:t>
-            </a:r>
-            <a:r>
-              <a:rPr>
-                <a:latin typeface="Courier"/>
-              </a:rPr>
-              <a:t>scripts/14-rapp-load-test.sh</a:t>
-            </a:r>
-          </a:p>
-        </p:txBody>
-      </p:sp>
-      <p:pic>
-        <p:nvPicPr>
-          <p:cNvPr descr="assets/ram-usage.png" id="0" name="Picture 1"/>
-          <p:cNvPicPr>
-            <a:picLocks noGrp="1" noChangeAspect="1"/>
-          </p:cNvPicPr>
-          <p:nvPr/>
-        </p:nvPicPr>
-        <p:blipFill>
-          <a:blip r:embed="rId3"/>
-          <a:stretch>
-            <a:fillRect/>
-          </a:stretch>
-        </p:blipFill>
-        <p:spPr bwMode="auto">
-          <a:xfrm>
-            <a:off x="3568700" y="825500"/>
-            <a:ext cx="5105400" cy="2641600"/>
-          </a:xfrm>
-          <a:prstGeom prst="rect">
-            <a:avLst/>
-          </a:prstGeom>
-          <a:noFill/>
-          <a:ln w="9525">
-            <a:noFill/>
-            <a:headEnd/>
-            <a:tailEnd/>
-          </a:ln>
-        </p:spPr>
-      </p:pic>
-      <p:sp>
-        <p:nvSpPr>
-          <p:cNvPr id="1" name="TextBox 3"/>
-          <p:cNvSpPr txBox="1"/>
-          <p:nvPr>
-            <p:ph idx="1"/>
-          </p:nvPr>
-        </p:nvSpPr>
-        <p:spPr>
-          <a:xfrm>
-            <a:off x="3568700" y="4076700"/>
-            <a:ext cx="5105400" cy="508000"/>
-          </a:xfrm>
-          <a:prstGeom prst="rect">
-            <a:avLst/>
-          </a:prstGeom>
-          <a:noFill/>
-        </p:spPr>
-        <p:txBody>
-          <a:bodyPr/>
-          <a:lstStyle/>
-          <a:p>
-            <a:pPr lvl="0" indent="0" marL="0" algn="ctr">
-              <a:buNone/>
-            </a:pPr>
-            <a:r>
-              <a:rPr/>
-              <a:t>Uso real de RAM: todas as 4 melhorias somadas cabem folgado no orçamento do WSL2</a:t>
-            </a:r>
-          </a:p>
-        </p:txBody>
-      </p:sp>
-    </p:spTree>
-  </p:cSld>
-</p:sld>
-</file>
-
-<file path=ppt/slides/slide28.xml><?xml version="1.0" encoding="utf-8"?>
-<p:sld xmlns:a="http://schemas.openxmlformats.org/drawingml/2006/main" xmlns:r="http://schemas.openxmlformats.org/officeDocument/2006/relationships" xmlns:p="http://schemas.openxmlformats.org/presentationml/2006/main">
-  <p:cSld>
-    <p:spTree>
-      <p:nvGrpSpPr>
-        <p:cNvPr id="1" name=""/>
-        <p:cNvGrpSpPr/>
-        <p:nvPr/>
-      </p:nvGrpSpPr>
-      <p:grpSpPr>
-        <a:xfrm>
-          <a:off x="0" y="0"/>
-          <a:ext cx="0" cy="0"/>
-          <a:chOff x="0" y="0"/>
-          <a:chExt cx="0" cy="0"/>
-        </a:xfrm>
-      </p:grpSpPr>
-      <p:sp>
-        <p:nvSpPr>
-          <p:cNvPr id="2" name="Title 1"/>
-          <p:cNvSpPr>
-            <a:spLocks noGrp="1"/>
-          </p:cNvSpPr>
-          <p:nvPr>
-            <p:ph type="title"/>
-          </p:nvPr>
-        </p:nvSpPr>
-        <p:spPr/>
-        <p:txBody>
-          <a:bodyPr/>
-          <a:lstStyle/>
-          <a:p>
-            <a:pPr lvl="0" indent="0" marL="0">
-              <a:buNone/>
-            </a:pPr>
-            <a:r>
-              <a:rPr/>
-              <a:t>O que foi implementado × o que ficou de fora</a:t>
-            </a:r>
-          </a:p>
-        </p:txBody>
-      </p:sp>
-      <p:sp>
-        <p:nvSpPr>
-          <p:cNvPr id="3" name="Content Placeholder 2"/>
-          <p:cNvSpPr>
-            <a:spLocks noGrp="1"/>
-          </p:cNvSpPr>
-          <p:nvPr>
-            <p:ph idx="1"/>
-          </p:nvPr>
-        </p:nvSpPr>
-        <p:spPr/>
-        <p:txBody>
-          <a:bodyPr/>
-          <a:lstStyle/>
-          <a:p>
-            <a:pPr lvl="0"/>
-            <a:r>
-              <a:rPr b="1"/>
-              <a:t>Implementado e evidenciado:</a:t>
-            </a:r>
-            <a:r>
-              <a:rPr/>
-              <a:t> provisioning (O2 IMS + Porch/kpt), lifecycle Kubernetes completo (6 experimentos), GitOps contínuo, monitoramento real, sincronização </a:t>
-            </a:r>
-            <a:r>
-              <a:rPr>
-                <a:latin typeface="Courier"/>
-              </a:rPr>
-              <a:t>/config</a:t>
-            </a:r>
-            <a:r>
-              <a:rPr/>
-              <a:t> → pacote (parcial), uma primeira função de Non-RT RIC/rApp</a:t>
-            </a:r>
-          </a:p>
-          <a:p>
-            <a:pPr lvl="0"/>
-            <a:r>
-              <a:rPr b="1"/>
-              <a:t>Ficou de fora, deliberadamente:</a:t>
-            </a:r>
-            <a:r>
-              <a:rPr/>
-              <a:t> O1 (FCAPS via NETCONF/YANG), xApp/E2/Near-RT RIC, NF O-RAN real, federação FOCOM com SMO externo, telemetria O-RAN nativa (VES/PM Jobs)</a:t>
-            </a:r>
-          </a:p>
-          <a:p>
-            <a:pPr lvl="0"/>
-            <a:r>
-              <a:rPr b="1"/>
-              <a:t>11 bugs de engenharia reais</a:t>
-            </a:r>
-            <a:r>
-              <a:rPr/>
-              <a:t> encontrados e corrigidos ao longo de toda a Parte 2 — nenhum escondido</a:t>
-            </a:r>
-          </a:p>
-        </p:txBody>
-      </p:sp>
-    </p:spTree>
-  </p:cSld>
-</p:sld>
-</file>
-
-<file path=ppt/slides/slide29.xml><?xml version="1.0" encoding="utf-8"?>
-<p:sld xmlns:a="http://schemas.openxmlformats.org/drawingml/2006/main" xmlns:r="http://schemas.openxmlformats.org/officeDocument/2006/relationships" xmlns:p="http://schemas.openxmlformats.org/presentationml/2006/main">
-  <p:cSld>
-    <p:spTree>
-      <p:nvGrpSpPr>
-        <p:cNvPr id="1" name=""/>
-        <p:cNvGrpSpPr/>
-        <p:nvPr/>
-      </p:nvGrpSpPr>
-      <p:grpSpPr>
-        <a:xfrm>
-          <a:off x="0" y="0"/>
-          <a:ext cx="0" cy="0"/>
-          <a:chOff x="0" y="0"/>
-          <a:chExt cx="0" cy="0"/>
-        </a:xfrm>
-      </p:grpSpPr>
-      <p:sp>
-        <p:nvSpPr>
-          <p:cNvPr id="2" name="Title 1"/>
-          <p:cNvSpPr>
-            <a:spLocks noGrp="1"/>
-          </p:cNvSpPr>
-          <p:nvPr>
-            <p:ph type="title"/>
-          </p:nvPr>
-        </p:nvSpPr>
-        <p:spPr/>
-        <p:txBody>
-          <a:bodyPr/>
-          <a:lstStyle/>
-          <a:p>
-            <a:pPr lvl="0" indent="0" marL="0">
-              <a:buNone/>
-            </a:pPr>
-            <a:r>
-              <a:rPr/>
-              <a:t>Conclusão</a:t>
-            </a:r>
-          </a:p>
-        </p:txBody>
-      </p:sp>
-      <p:sp>
-        <p:nvSpPr>
-          <p:cNvPr id="3" name="Content Placeholder 2"/>
-          <p:cNvSpPr>
-            <a:spLocks noGrp="1"/>
-          </p:cNvSpPr>
-          <p:nvPr>
-            <p:ph idx="1"/>
-          </p:nvPr>
-        </p:nvSpPr>
-        <p:spPr/>
-        <p:txBody>
-          <a:bodyPr/>
-          <a:lstStyle/>
-          <a:p>
-            <a:pPr lvl="0"/>
-            <a:r>
-              <a:rPr/>
-              <a:t>Nephio orquestrou o ciclo de vida completo de CNFs cloud-native — provisionamento, configuração, escala, atualização, recuperação e terminação — usando seus mecanismos nativos, não apenas </a:t>
-            </a:r>
-            <a:r>
-              <a:rPr>
-                <a:latin typeface="Courier"/>
-              </a:rPr>
-              <a:t>kubectl apply</a:t>
-            </a:r>
-          </a:p>
-          <a:p>
-            <a:pPr lvl="0"/>
-            <a:r>
-              <a:rPr/>
-              <a:t>As 4 melhorias pós-entrega evoluíram o laboratório de GitOps sob demanda para GitOps contínuo, monitoramento real, e uma primeira função de Non-RT RIC funcional</a:t>
-            </a:r>
-          </a:p>
-          <a:p>
-            <a:pPr lvl="0"/>
-            <a:r>
-              <a:rPr/>
-              <a:t>O que é abstração: as NFs, o O-Cloud, a federação FOCOM, o xApp (deliberadamente não simulado)</a:t>
-            </a:r>
-          </a:p>
-          <a:p>
-            <a:pPr lvl="0"/>
-            <a:r>
-              <a:rPr/>
-              <a:t>O que é real: Porch/kpt/RootSync, provisionamento O2 IMS, e agora monitoramento + um rApp funcional (com um achado genuíno sobre orquestração distribuída)</a:t>
-            </a:r>
-          </a:p>
-        </p:txBody>
-      </p:sp>
-    </p:spTree>
-  </p:cSld>
-</p:sld>
-</file>
-
-<file path=ppt/slides/slide3.xml><?xml version="1.0" encoding="utf-8"?>
-<p:sld xmlns:a="http://schemas.openxmlformats.org/drawingml/2006/main" xmlns:r="http://schemas.openxmlformats.org/officeDocument/2006/relationships" xmlns:p="http://schemas.openxmlformats.org/presentationml/2006/main">
-  <p:cSld>
-    <p:spTree>
-      <p:nvGrpSpPr>
-        <p:cNvPr id="1" name=""/>
-        <p:cNvGrpSpPr/>
-        <p:nvPr/>
-      </p:nvGrpSpPr>
-      <p:grpSpPr>
-        <a:xfrm>
-          <a:off x="0" y="0"/>
-          <a:ext cx="0" cy="0"/>
-          <a:chOff x="0" y="0"/>
-          <a:chExt cx="0" cy="0"/>
-        </a:xfrm>
-      </p:grpSpPr>
-      <p:sp>
-        <p:nvSpPr>
-          <p:cNvPr id="2" name="Title 1"/>
-          <p:cNvSpPr>
-            <a:spLocks noGrp="1"/>
-          </p:cNvSpPr>
-          <p:nvPr>
-            <p:ph type="title"/>
-          </p:nvPr>
-        </p:nvSpPr>
-        <p:spPr/>
-        <p:txBody>
-          <a:bodyPr/>
-          <a:lstStyle/>
-          <a:p>
-            <a:pPr lvl="0" indent="0" marL="0">
-              <a:buNone/>
-            </a:pPr>
-            <a:r>
-              <a:rPr/>
-              <a:t>Recapitulando a tese da Parte 1</a:t>
-            </a:r>
-          </a:p>
-        </p:txBody>
-      </p:sp>
-      <p:sp>
-        <p:nvSpPr>
-          <p:cNvPr id="3" name="Content Placeholder 2"/>
-          <p:cNvSpPr>
-            <a:spLocks noGrp="1"/>
-          </p:cNvSpPr>
-          <p:nvPr>
-            <p:ph idx="1"/>
-          </p:nvPr>
-        </p:nvSpPr>
-        <p:spPr/>
-        <p:txBody>
-          <a:bodyPr/>
-          <a:lstStyle/>
-          <a:p>
-            <a:pPr lvl="0" indent="0" marL="1270000">
-              <a:buNone/>
-            </a:pPr>
-            <a:r>
-              <a:rPr sz="2000"/>
-              <a:t>“Nephio is a cloud-native automation and orchestration platform that can implement or support functions associated with the SMO and O-Cloud management architecture.”</a:t>
-            </a:r>
-          </a:p>
-          <a:p>
-            <a:pPr lvl="0"/>
-            <a:r>
-              <a:rPr/>
-              <a:t>Nephio </a:t>
-            </a:r>
-            <a:r>
-              <a:rPr b="1"/>
-              <a:t>não é</a:t>
-            </a:r>
-            <a:r>
-              <a:rPr/>
-              <a:t> o SMO oficial da especificação O-RAN — é uma plataforma de automação cloud-native que implementa </a:t>
-            </a:r>
-            <a:r>
-              <a:rPr b="1"/>
-              <a:t>partes</a:t>
-            </a:r>
-            <a:r>
-              <a:rPr/>
-              <a:t> das funções do SMO</a:t>
-            </a:r>
-          </a:p>
-          <a:p>
-            <a:pPr lvl="0"/>
-            <a:r>
-              <a:rPr/>
-              <a:t>Forte em: provisioning de infraestrutura (O2 IMS), lifecycle de deployment Kubernetes</a:t>
-            </a:r>
-          </a:p>
-          <a:p>
-            <a:pPr lvl="0"/>
-            <a:r>
-              <a:rPr/>
-              <a:t>Fraco/ausente em: O1 (FCAPS via NETCONF/YANG), Non-RT RIC/A1, telemetria O-RAN nativa</a:t>
-            </a:r>
-          </a:p>
-          <a:p>
-            <a:pPr lvl="0"/>
-            <a:r>
-              <a:rPr/>
-              <a:t>Esta Parte 2 usa exatamente essa caracterização como roteiro dos experimentos</a:t>
-            </a:r>
-          </a:p>
-        </p:txBody>
-      </p:sp>
-    </p:spTree>
-  </p:cSld>
-</p:sld>
-</file>
-
-<file path=ppt/slides/slide4.xml><?xml version="1.0" encoding="utf-8"?>
-<p:sld xmlns:a="http://schemas.openxmlformats.org/drawingml/2006/main" xmlns:r="http://schemas.openxmlformats.org/officeDocument/2006/relationships" xmlns:p="http://schemas.openxmlformats.org/presentationml/2006/main">
-  <p:cSld>
-    <p:spTree>
-      <p:nvGrpSpPr>
-        <p:cNvPr id="1" name=""/>
-        <p:cNvGrpSpPr/>
-        <p:nvPr/>
-      </p:nvGrpSpPr>
-      <p:grpSpPr>
-        <a:xfrm>
-          <a:off x="0" y="0"/>
-          <a:ext cx="0" cy="0"/>
-          <a:chOff x="0" y="0"/>
-          <a:chExt cx="0" cy="0"/>
-        </a:xfrm>
-      </p:grpSpPr>
-      <p:sp>
-        <p:nvSpPr>
-          <p:cNvPr id="2" name="Title 1"/>
-          <p:cNvSpPr>
-            <a:spLocks noGrp="1"/>
-          </p:cNvSpPr>
-          <p:nvPr>
-            <p:ph type="title"/>
-          </p:nvPr>
-        </p:nvSpPr>
-        <p:spPr/>
-        <p:txBody>
-          <a:bodyPr/>
-          <a:lstStyle/>
-          <a:p>
-            <a:pPr lvl="0" indent="0" marL="0">
-              <a:buNone/>
-            </a:pPr>
-            <a:r>
-              <a:rPr/>
-              <a:t>Ambiente e por que essas escolhas</a:t>
-            </a:r>
-          </a:p>
-        </p:txBody>
-      </p:sp>
-      <p:sp>
-        <p:nvSpPr>
-          <p:cNvPr id="3" name="Content Placeholder 2"/>
-          <p:cNvSpPr>
-            <a:spLocks noGrp="1"/>
-          </p:cNvSpPr>
-          <p:nvPr>
-            <p:ph idx="1"/>
-          </p:nvPr>
-        </p:nvSpPr>
-        <p:spPr/>
-        <p:txBody>
-          <a:bodyPr/>
-          <a:lstStyle/>
-          <a:p>
-            <a:pPr lvl="0"/>
-            <a:r>
-              <a:rPr/>
-              <a:t>Windows 11 + WSL2 Ubuntu, Docker Engine </a:t>
-            </a:r>
-            <a:r>
-              <a:rPr b="1"/>
-              <a:t>nativo</a:t>
-            </a:r>
-            <a:r>
-              <a:rPr/>
-              <a:t> no WSL2 (não Docker Desktop) — menor overhead</a:t>
-            </a:r>
-          </a:p>
-          <a:p>
-            <a:pPr lvl="0"/>
-            <a:r>
-              <a:rPr/>
-              <a:t>Nephio R6 (</a:t>
-            </a:r>
-            <a:r>
-              <a:rPr>
-                <a:latin typeface="Courier"/>
-              </a:rPr>
-              <a:t>v6.0.0</a:t>
-            </a:r>
-            <a:r>
-              <a:rPr/>
-              <a:t>), instalado pacote-a-pacote via </a:t>
-            </a:r>
-            <a:r>
-              <a:rPr>
-                <a:latin typeface="Courier"/>
-              </a:rPr>
-              <a:t>kpt</a:t>
-            </a:r>
-            <a:r>
-              <a:rPr/>
-              <a:t> — não o instalador Ansible do sandbox (que traz Argo CD + Flux + WebUI completos, inviável em 16 GB)</a:t>
-            </a:r>
-          </a:p>
-          <a:p>
-            <a:pPr lvl="0"/>
-            <a:r>
-              <a:rPr>
-                <a:latin typeface="Courier"/>
-              </a:rPr>
-              <a:t>.wslconfig</a:t>
-            </a:r>
-            <a:r>
-              <a:rPr/>
-              <a:t>: teto de </a:t>
-            </a:r>
-            <a:r>
-              <a:rPr b="1"/>
-              <a:t>9,7 GB</a:t>
-            </a:r>
-            <a:r>
-              <a:rPr/>
-              <a:t> para todo o laboratório, dentro de uma máquina de 16 GB</a:t>
-            </a:r>
-          </a:p>
-          <a:p>
-            <a:pPr lvl="0"/>
-            <a:r>
-              <a:rPr/>
-              <a:t>100% local — sem cloud paga, sem OpenStack, sem cluster K8s externo</a:t>
-            </a:r>
-          </a:p>
-          <a:p>
-            <a:pPr lvl="0"/>
-            <a:r>
-              <a:rPr/>
-              <a:t>kind (Kubernetes-in-Docker) para os dois clusters — leve, sem VM pesada</a:t>
-            </a:r>
-          </a:p>
-        </p:txBody>
-      </p:sp>
-    </p:spTree>
-  </p:cSld>
-</p:sld>
-</file>
-
-<file path=ppt/slides/slide5.xml><?xml version="1.0" encoding="utf-8"?>
-<p:sld xmlns:a="http://schemas.openxmlformats.org/drawingml/2006/main" xmlns:r="http://schemas.openxmlformats.org/officeDocument/2006/relationships" xmlns:p="http://schemas.openxmlformats.org/presentationml/2006/main">
-  <p:cSld>
-    <p:spTree>
-      <p:nvGrpSpPr>
-        <p:cNvPr id="1" name=""/>
-        <p:cNvGrpSpPr/>
-        <p:nvPr/>
-      </p:nvGrpSpPr>
-      <p:grpSpPr>
-        <a:xfrm>
-          <a:off x="0" y="0"/>
-          <a:ext cx="0" cy="0"/>
-          <a:chOff x="0" y="0"/>
-          <a:chExt cx="0" cy="0"/>
-        </a:xfrm>
-      </p:grpSpPr>
-      <p:sp>
-        <p:nvSpPr>
-          <p:cNvPr id="2" name="Title 1"/>
-          <p:cNvSpPr>
-            <a:spLocks noGrp="1"/>
-          </p:cNvSpPr>
-          <p:nvPr>
-            <p:ph type="title"/>
-          </p:nvPr>
-        </p:nvSpPr>
-        <p:spPr/>
-        <p:txBody>
-          <a:bodyPr/>
-          <a:lstStyle/>
-          <a:p>
-            <a:pPr lvl="0" indent="0" marL="0">
-              <a:buNone/>
-            </a:pPr>
-            <a:r>
-              <a:rPr/>
-              <a:t>Arquitetura — conceito geral</a:t>
-            </a:r>
-          </a:p>
-        </p:txBody>
-      </p:sp>
-      <p:pic>
-        <p:nvPicPr>
-          <p:cNvPr descr="assets/nephio-arch.png" id="0" name="Picture 1"/>
-          <p:cNvPicPr>
-            <a:picLocks noGrp="1" noChangeAspect="1"/>
-          </p:cNvPicPr>
-          <p:nvPr/>
-        </p:nvPicPr>
-        <p:blipFill>
-          <a:blip r:embed="rId3"/>
-          <a:stretch>
-            <a:fillRect/>
-          </a:stretch>
-        </p:blipFill>
-        <p:spPr bwMode="auto">
-          <a:xfrm>
-            <a:off x="3581400" y="1193800"/>
-            <a:ext cx="1981200" cy="2882900"/>
-          </a:xfrm>
-          <a:prstGeom prst="rect">
-            <a:avLst/>
-          </a:prstGeom>
-          <a:noFill/>
-          <a:ln w="9525">
-            <a:noFill/>
-            <a:headEnd/>
-            <a:tailEnd/>
-          </a:ln>
-        </p:spPr>
-      </p:pic>
-      <p:sp>
-        <p:nvSpPr>
-          <p:cNvPr id="1" name="TextBox 3"/>
-          <p:cNvSpPr txBox="1"/>
-          <p:nvPr>
-            <p:ph idx="1"/>
-          </p:nvPr>
-        </p:nvSpPr>
-        <p:spPr>
-          <a:xfrm>
-            <a:off x="457200" y="4076700"/>
-            <a:ext cx="8229600" cy="508000"/>
-          </a:xfrm>
-          <a:prstGeom prst="rect">
-            <a:avLst/>
-          </a:prstGeom>
-          <a:noFill/>
-        </p:spPr>
-        <p:txBody>
-          <a:bodyPr/>
-          <a:lstStyle/>
-          <a:p>
-            <a:pPr lvl="0" indent="0" marL="0" algn="ctr">
-              <a:buNone/>
-            </a:pPr>
-            <a:r>
-              <a:rPr/>
-              <a:t>Duas camadas: Management Cluster decide o quê/como configurar; Workload Cluster(s) roda as CNFs, reconciliadas via GitOps</a:t>
-            </a:r>
-          </a:p>
-        </p:txBody>
-      </p:sp>
-      <p:sp>
-        <p:nvSpPr>
-          <p:cNvPr id="3" name="Content Placeholder 2"/>
-          <p:cNvSpPr>
-            <a:spLocks noGrp="1"/>
-          </p:cNvSpPr>
-          <p:nvPr>
-            <p:ph idx="1"/>
-          </p:nvPr>
-        </p:nvSpPr>
-        <p:spPr/>
-        <p:txBody>
-          <a:bodyPr/>
-          <a:lstStyle/>
-          <a:p>
-            <a:pPr lvl="0"/>
-            <a:r>
-              <a:rPr b="1"/>
-              <a:t>Management Cluster</a:t>
-            </a:r>
-            <a:r>
-              <a:rPr/>
-              <a:t> (</a:t>
-            </a:r>
-            <a:r>
-              <a:rPr>
-                <a:latin typeface="Courier"/>
-              </a:rPr>
-              <a:t>nephio-mgmt</a:t>
-            </a:r>
-            <a:r>
-              <a:rPr/>
-              <a:t>): Nephio Core, Porch, repositório de pacotes, Config Sync</a:t>
-            </a:r>
-          </a:p>
-          <a:p>
-            <a:pPr lvl="0"/>
-            <a:r>
-              <a:rPr b="1"/>
-              <a:t>Workload Cluster</a:t>
-            </a:r>
-            <a:r>
-              <a:rPr/>
-              <a:t> (</a:t>
-            </a:r>
-            <a:r>
-              <a:rPr>
-                <a:latin typeface="Courier"/>
-              </a:rPr>
-              <a:t>o-cloud-1</a:t>
-            </a:r>
-            <a:r>
-              <a:rPr/>
-              <a:t>): onde as CNFs realmente rodam</a:t>
-            </a:r>
-          </a:p>
-          <a:p>
-            <a:pPr lvl="0"/>
-            <a:r>
-              <a:rPr>
-                <a:latin typeface="Courier"/>
-              </a:rPr>
-              <a:t>o-cloud-1</a:t>
-            </a:r>
-            <a:r>
-              <a:rPr/>
-              <a:t> foi </a:t>
-            </a:r>
-            <a:r>
-              <a:rPr b="1"/>
-              <a:t>provisionado pelo próprio Nephio</a:t>
-            </a:r>
-            <a:r>
-              <a:rPr/>
-              <a:t> via O2 IMS — não um </a:t>
-            </a:r>
-            <a:r>
-              <a:rPr>
-                <a:latin typeface="Courier"/>
-              </a:rPr>
-              <a:t>kind create</a:t>
-            </a:r>
-            <a:r>
-              <a:rPr/>
-              <a:t> manual (resultado da Parte 1, reaproveitado aqui como base)</a:t>
-            </a:r>
-          </a:p>
-        </p:txBody>
-      </p:sp>
-    </p:spTree>
-  </p:cSld>
-</p:sld>
-</file>
-
-<file path=ppt/slides/slide6.xml><?xml version="1.0" encoding="utf-8"?>
-<p:sld xmlns:a="http://schemas.openxmlformats.org/drawingml/2006/main" xmlns:r="http://schemas.openxmlformats.org/officeDocument/2006/relationships" xmlns:p="http://schemas.openxmlformats.org/presentationml/2006/main">
-  <p:cSld>
-    <p:spTree>
-      <p:nvGrpSpPr>
-        <p:cNvPr id="1" name=""/>
-        <p:cNvGrpSpPr/>
-        <p:nvPr/>
-      </p:nvGrpSpPr>
-      <p:grpSpPr>
-        <a:xfrm>
-          <a:off x="0" y="0"/>
-          <a:ext cx="0" cy="0"/>
-          <a:chOff x="0" y="0"/>
-          <a:chExt cx="0" cy="0"/>
-        </a:xfrm>
-      </p:grpSpPr>
-      <p:sp>
-        <p:nvSpPr>
-          <p:cNvPr id="2" name="Title 1"/>
-          <p:cNvSpPr>
-            <a:spLocks noGrp="1"/>
-          </p:cNvSpPr>
-          <p:nvPr>
-            <p:ph type="title"/>
-          </p:nvPr>
-        </p:nvSpPr>
-        <p:spPr/>
-        <p:txBody>
-          <a:bodyPr/>
-          <a:lstStyle/>
-          <a:p>
-            <a:pPr lvl="0" indent="0" marL="0">
-              <a:buNone/>
-            </a:pPr>
-            <a:r>
-              <a:rPr/>
-              <a:t>Arquitetura final (com as 4 melhorias)</a:t>
-            </a:r>
-          </a:p>
-        </p:txBody>
-      </p:sp>
-      <p:pic>
-        <p:nvPicPr>
-          <p:cNvPr descr="assets/architecture-final.png" id="0" name="Picture 1"/>
-          <p:cNvPicPr>
-            <a:picLocks noGrp="1" noChangeAspect="1"/>
-          </p:cNvPicPr>
-          <p:nvPr/>
-        </p:nvPicPr>
-        <p:blipFill>
-          <a:blip r:embed="rId3"/>
-          <a:stretch>
-            <a:fillRect/>
-          </a:stretch>
-        </p:blipFill>
-        <p:spPr bwMode="auto">
-          <a:xfrm>
-            <a:off x="3073400" y="1193800"/>
-            <a:ext cx="2997200" cy="2882900"/>
-          </a:xfrm>
-          <a:prstGeom prst="rect">
-            <a:avLst/>
-          </a:prstGeom>
-          <a:noFill/>
-          <a:ln w="9525">
-            <a:noFill/>
-            <a:headEnd/>
-            <a:tailEnd/>
-          </a:ln>
-        </p:spPr>
-      </p:pic>
-      <p:sp>
-        <p:nvSpPr>
-          <p:cNvPr id="1" name="TextBox 3"/>
-          <p:cNvSpPr txBox="1"/>
-          <p:nvPr>
-            <p:ph idx="1"/>
-          </p:nvPr>
-        </p:nvSpPr>
-        <p:spPr>
-          <a:xfrm>
-            <a:off x="457200" y="4076700"/>
-            <a:ext cx="8229600" cy="508000"/>
-          </a:xfrm>
-          <a:prstGeom prst="rect">
-            <a:avLst/>
-          </a:prstGeom>
-          <a:noFill/>
-        </p:spPr>
-        <p:txBody>
-          <a:bodyPr/>
-          <a:lstStyle/>
-          <a:p>
-            <a:pPr lvl="0" indent="0" marL="0" algn="ctr">
-              <a:buNone/>
-            </a:pPr>
-            <a:r>
-              <a:rPr/>
-              <a:t>Arquitetura final: O2 IMS + entrega de CNFs via Porch, RootSync contínuo, config-bridge e rapp-autoscale (novos, em destaque)</a:t>
-            </a:r>
-          </a:p>
-        </p:txBody>
-      </p:sp>
-      <p:sp>
-        <p:nvSpPr>
-          <p:cNvPr id="3" name="Content Placeholder 2"/>
-          <p:cNvSpPr>
-            <a:spLocks noGrp="1"/>
-          </p:cNvSpPr>
-          <p:nvPr>
-            <p:ph idx="1"/>
-          </p:nvPr>
-        </p:nvSpPr>
-        <p:spPr/>
-        <p:txBody>
-          <a:bodyPr/>
-          <a:lstStyle/>
-          <a:p>
-            <a:pPr lvl="0"/>
-            <a:r>
-              <a:rPr/>
-              <a:t>Camada 1 (infraestrutura): </a:t>
-            </a:r>
-            <a:r>
-              <a:rPr>
-                <a:latin typeface="Courier"/>
-              </a:rPr>
-              <a:t>ProvisioningRequest</a:t>
-            </a:r>
-            <a:r>
-              <a:rPr/>
-              <a:t> → </a:t>
-            </a:r>
-            <a:r>
-              <a:rPr>
-                <a:latin typeface="Courier"/>
-              </a:rPr>
-              <a:t>o2ims-operator</a:t>
-            </a:r>
-            <a:r>
-              <a:rPr/>
-              <a:t> → Cluster API/CAPD → </a:t>
-            </a:r>
-            <a:r>
-              <a:rPr>
-                <a:latin typeface="Courier"/>
-              </a:rPr>
-              <a:t>o-cloud-1</a:t>
-            </a:r>
-          </a:p>
-          <a:p>
-            <a:pPr lvl="0"/>
-            <a:r>
-              <a:rPr/>
-              <a:t>Camada 2 (NFs): pacote kpt → Porch → </a:t>
-            </a:r>
-            <a:r>
-              <a:rPr>
-                <a:latin typeface="Courier"/>
-              </a:rPr>
-              <a:t>RootSync</a:t>
-            </a:r>
-            <a:r>
-              <a:rPr/>
-              <a:t> contínuo → </a:t>
-            </a:r>
-            <a:r>
-              <a:rPr>
-                <a:latin typeface="Courier"/>
-              </a:rPr>
-              <a:t>oran-cu/du/core</a:t>
-            </a:r>
-          </a:p>
-          <a:p>
-            <a:pPr lvl="0"/>
-            <a:r>
-              <a:rPr/>
-              <a:t>Três peças em destaque (teal) são as melhorias pós-entrega — detalhadas na segunda metade</a:t>
-            </a:r>
-          </a:p>
-        </p:txBody>
-      </p:sp>
-    </p:spTree>
-  </p:cSld>
-</p:sld>
-</file>
-
-<file path=ppt/slides/slide7.xml><?xml version="1.0" encoding="utf-8"?>
-<p:sld xmlns:a="http://schemas.openxmlformats.org/drawingml/2006/main" xmlns:r="http://schemas.openxmlformats.org/officeDocument/2006/relationships" xmlns:p="http://schemas.openxmlformats.org/presentationml/2006/main">
-  <p:cSld>
-    <p:spTree>
-      <p:nvGrpSpPr>
-        <p:cNvPr id="1" name=""/>
-        <p:cNvGrpSpPr/>
-        <p:nvPr/>
-      </p:nvGrpSpPr>
-      <p:grpSpPr>
-        <a:xfrm>
-          <a:off x="0" y="0"/>
-          <a:ext cx="0" cy="0"/>
-          <a:chOff x="0" y="0"/>
-          <a:chExt cx="0" cy="0"/>
-        </a:xfrm>
-      </p:grpSpPr>
-      <p:sp>
-        <p:nvSpPr>
-          <p:cNvPr id="2" name="Title 1"/>
-          <p:cNvSpPr>
-            <a:spLocks noGrp="1"/>
-          </p:cNvSpPr>
-          <p:nvPr>
-            <p:ph type="title"/>
-          </p:nvPr>
-        </p:nvSpPr>
-        <p:spPr/>
-        <p:txBody>
-          <a:bodyPr/>
-          <a:lstStyle/>
-          <a:p>
-            <a:pPr lvl="0" indent="0" marL="0">
-              <a:buNone/>
-            </a:pPr>
-            <a:r>
-              <a:rPr/>
-              <a:t>Ferramentas e o papel de cada uma</a:t>
-            </a:r>
-          </a:p>
-        </p:txBody>
-      </p:sp>
-      <p:sp>
-        <p:nvSpPr>
-          <p:cNvPr id="3" name="Content Placeholder 2"/>
-          <p:cNvSpPr>
-            <a:spLocks noGrp="1"/>
-          </p:cNvSpPr>
-          <p:nvPr>
-            <p:ph idx="1"/>
-          </p:nvPr>
-        </p:nvSpPr>
-        <p:spPr/>
-        <p:txBody>
-          <a:bodyPr/>
-          <a:lstStyle/>
-          <a:p>
-            <a:pPr lvl="0"/>
-            <a:r>
-              <a:rPr b="1"/>
-              <a:t>kpt</a:t>
-            </a:r>
-            <a:r>
-              <a:rPr/>
-              <a:t> — autoria do pacote, pipeline de funções, </a:t>
-            </a:r>
-            <a:r>
-              <a:rPr>
-                <a:latin typeface="Courier"/>
-              </a:rPr>
-              <a:t>kpt live apply</a:t>
-            </a:r>
-            <a:r>
-              <a:rPr/>
-              <a:t> (reconciliação declarativa com inventário </a:t>
-            </a:r>
-            <a:r>
-              <a:rPr>
-                <a:latin typeface="Courier"/>
-              </a:rPr>
-              <a:t>ResourceGroup</a:t>
-            </a:r>
-            <a:r>
-              <a:rPr/>
-              <a:t>)</a:t>
-            </a:r>
-          </a:p>
-          <a:p>
-            <a:pPr lvl="0"/>
-            <a:r>
-              <a:rPr b="1"/>
-              <a:t>Porch / </a:t>
-            </a:r>
-            <a:r>
-              <a:rPr b="1">
-                <a:latin typeface="Courier"/>
-              </a:rPr>
-              <a:t>porchctl</a:t>
-            </a:r>
-            <a:r>
-              <a:rPr/>
-              <a:t> — ciclo de vida do pacote: Draft → Proposed → Published</a:t>
-            </a:r>
-          </a:p>
-          <a:p>
-            <a:pPr lvl="0"/>
-            <a:r>
-              <a:rPr b="1"/>
-              <a:t>kind + Cluster API + CAPD</a:t>
-            </a:r>
-            <a:r>
-              <a:rPr/>
-              <a:t> — criação do </a:t>
-            </a:r>
-            <a:r>
-              <a:rPr>
-                <a:latin typeface="Courier"/>
-              </a:rPr>
-              <a:t>o-cloud-1</a:t>
-            </a:r>
-            <a:r>
-              <a:rPr/>
-              <a:t> via O2 IMS</a:t>
-            </a:r>
-          </a:p>
-          <a:p>
-            <a:pPr lvl="0"/>
-            <a:r>
-              <a:rPr b="1"/>
-              <a:t>kubectl</a:t>
-            </a:r>
-            <a:r>
-              <a:rPr/>
-              <a:t> — operações imperativas de comparação (scale, delete pod) e validação</a:t>
-            </a:r>
-          </a:p>
-          <a:p>
-            <a:pPr lvl="0"/>
-            <a:r>
-              <a:rPr b="1"/>
-              <a:t>FastAPI/Python + Docker</a:t>
-            </a:r>
-            <a:r>
-              <a:rPr/>
-              <a:t> — as 3 CNFs simuladas</a:t>
-            </a:r>
-          </a:p>
-        </p:txBody>
-      </p:sp>
-    </p:spTree>
-  </p:cSld>
-</p:sld>
-</file>
-
-<file path=ppt/slides/slide8.xml><?xml version="1.0" encoding="utf-8"?>
-<p:sld xmlns:a="http://schemas.openxmlformats.org/drawingml/2006/main" xmlns:r="http://schemas.openxmlformats.org/officeDocument/2006/relationships" xmlns:p="http://schemas.openxmlformats.org/presentationml/2006/main">
-  <p:cSld>
-    <p:spTree>
-      <p:nvGrpSpPr>
-        <p:cNvPr id="1" name=""/>
-        <p:cNvGrpSpPr/>
-        <p:nvPr/>
-      </p:nvGrpSpPr>
-      <p:grpSpPr>
-        <a:xfrm>
-          <a:off x="0" y="0"/>
-          <a:ext cx="0" cy="0"/>
-          <a:chOff x="0" y="0"/>
-          <a:chExt cx="0" cy="0"/>
-        </a:xfrm>
-      </p:grpSpPr>
-      <p:sp>
-        <p:nvSpPr>
-          <p:cNvPr id="2" name="Title 1"/>
-          <p:cNvSpPr>
-            <a:spLocks noGrp="1"/>
-          </p:cNvSpPr>
-          <p:nvPr>
-            <p:ph type="title"/>
-          </p:nvPr>
-        </p:nvSpPr>
-        <p:spPr/>
-        <p:txBody>
-          <a:bodyPr/>
-          <a:lstStyle/>
-          <a:p>
-            <a:pPr lvl="0" indent="0" marL="0">
-              <a:buNone/>
-            </a:pPr>
-            <a:r>
-              <a:rPr/>
-              <a:t>As Network Functions simuladas</a:t>
-            </a:r>
-          </a:p>
-        </p:txBody>
-      </p:sp>
-      <p:sp>
-        <p:nvSpPr>
-          <p:cNvPr id="3" name="Content Placeholder 2"/>
-          <p:cNvSpPr>
-            <a:spLocks noGrp="1"/>
-          </p:cNvSpPr>
-          <p:nvPr>
-            <p:ph idx="1"/>
-          </p:nvPr>
-        </p:nvSpPr>
-        <p:spPr/>
-        <p:txBody>
-          <a:bodyPr/>
-          <a:lstStyle/>
-          <a:p>
-            <a:pPr lvl="0"/>
-            <a:r>
-              <a:rPr>
-                <a:latin typeface="Courier"/>
-              </a:rPr>
-              <a:t>oran-cu</a:t>
-            </a:r>
-            <a:r>
-              <a:rPr/>
-              <a:t>, </a:t>
-            </a:r>
-            <a:r>
-              <a:rPr>
-                <a:latin typeface="Courier"/>
-              </a:rPr>
-              <a:t>oran-du</a:t>
-            </a:r>
-            <a:r>
-              <a:rPr/>
-              <a:t>, </a:t>
-            </a:r>
-            <a:r>
-              <a:rPr>
-                <a:latin typeface="Courier"/>
-              </a:rPr>
-              <a:t>oran-core</a:t>
-            </a:r>
-            <a:r>
-              <a:rPr/>
-              <a:t> — serviços FastAPI, ~30–50 MiB de RAM cada</a:t>
-            </a:r>
-          </a:p>
-          <a:p>
-            <a:pPr lvl="0"/>
-            <a:r>
-              <a:rPr/>
-              <a:t>Cada uma expõe </a:t>
-            </a:r>
-            <a:r>
-              <a:rPr>
-                <a:latin typeface="Courier"/>
-              </a:rPr>
-              <a:t>/health</a:t>
-            </a:r>
-            <a:r>
-              <a:rPr/>
-              <a:t>, </a:t>
-            </a:r>
-            <a:r>
-              <a:rPr>
-                <a:latin typeface="Courier"/>
-              </a:rPr>
-              <a:t>/config</a:t>
-            </a:r>
-            <a:r>
-              <a:rPr/>
-              <a:t> (GET/PUT/POST), </a:t>
-            </a:r>
-            <a:r>
-              <a:rPr>
-                <a:latin typeface="Courier"/>
-              </a:rPr>
-              <a:t>/metrics</a:t>
-            </a:r>
-            <a:r>
-              <a:rPr/>
-              <a:t> (formato Prometheus)</a:t>
-            </a:r>
-          </a:p>
-          <a:p>
-            <a:pPr lvl="0"/>
-            <a:r>
-              <a:rPr b="1"/>
-              <a:t>Workloads representativos — não NFs O-RAN reais</a:t>
-            </a:r>
-            <a:r>
-              <a:rPr/>
-              <a:t>: sem protocolos de rádio, sem planos de usuário/controle, sem interfaces F1/E1/E2</a:t>
-            </a:r>
-          </a:p>
-          <a:p>
-            <a:pPr lvl="0"/>
-            <a:r>
-              <a:rPr/>
-              <a:t>Servem para exercitar </a:t>
-            </a:r>
-            <a:r>
-              <a:rPr b="1"/>
-              <a:t>mecanismos de orquestração</a:t>
-            </a:r>
-            <a:r>
-              <a:rPr/>
-              <a:t>, não para simular tráfego de rede</a:t>
-            </a:r>
-          </a:p>
-        </p:txBody>
-      </p:sp>
-    </p:spTree>
-  </p:cSld>
-</p:sld>
-</file>
-
-<file path=ppt/slides/slide9.xml><?xml version="1.0" encoding="utf-8"?>
-<p:sld xmlns:a="http://schemas.openxmlformats.org/drawingml/2006/main" xmlns:r="http://schemas.openxmlformats.org/officeDocument/2006/relationships" xmlns:p="http://schemas.openxmlformats.org/presentationml/2006/main">
-  <p:cSld>
-    <p:spTree>
-      <p:nvGrpSpPr>
-        <p:cNvPr id="1" name=""/>
-        <p:cNvGrpSpPr/>
-        <p:nvPr/>
-      </p:nvGrpSpPr>
-      <p:grpSpPr>
-        <a:xfrm>
-          <a:off x="0" y="0"/>
-          <a:ext cx="0" cy="0"/>
-          <a:chOff x="0" y="0"/>
-          <a:chExt cx="0" cy="0"/>
-        </a:xfrm>
-      </p:grpSpPr>
-      <p:sp>
-        <p:nvSpPr>
-          <p:cNvPr id="2" name="Title 1"/>
-          <p:cNvSpPr>
-            <a:spLocks noGrp="1"/>
-          </p:cNvSpPr>
-          <p:nvPr>
-            <p:ph type="title"/>
-          </p:nvPr>
-        </p:nvSpPr>
-        <p:spPr/>
-        <p:txBody>
-          <a:bodyPr/>
-          <a:lstStyle/>
-          <a:p>
-            <a:pPr lvl="0" indent="0" marL="0">
-              <a:buNone/>
-            </a:pPr>
-            <a:r>
-              <a:rPr/>
-              <a:t>Por que não usei uma NF real (avaliação feita)</a:t>
-            </a:r>
-          </a:p>
-        </p:txBody>
-      </p:sp>
-      <p:sp>
-        <p:nvSpPr>
-          <p:cNvPr id="3" name="Content Placeholder 2"/>
-          <p:cNvSpPr>
-            <a:spLocks noGrp="1"/>
-          </p:cNvSpPr>
-          <p:nvPr>
-            <p:ph idx="1"/>
-          </p:nvPr>
-        </p:nvSpPr>
-        <p:spPr/>
-        <p:txBody>
-          <a:bodyPr/>
-          <a:lstStyle/>
-          <a:p>
-            <a:pPr lvl="0"/>
-            <a:r>
-              <a:rPr/>
-              <a:t>Avaliei 3 alternativas para o próximo passo: </a:t>
-            </a:r>
-            <a:r>
-              <a:rPr b="1"/>
-              <a:t>UERANSIM</a:t>
-            </a:r>
-            <a:r>
-              <a:rPr/>
-              <a:t>, </a:t>
-            </a:r>
-            <a:r>
-              <a:rPr b="1"/>
-              <a:t>free5GC</a:t>
-            </a:r>
-            <a:r>
-              <a:rPr/>
-              <a:t>, </a:t>
-            </a:r>
-            <a:r>
-              <a:rPr b="1"/>
-              <a:t>OpenAirInterface</a:t>
-            </a:r>
-          </a:p>
-          <a:p>
-            <a:pPr lvl="0"/>
-            <a:r>
-              <a:rPr/>
-              <a:t>UERANSIM sozinho: ~2 GB/2 CPU — mas não funciona sem um AMF real por trás</a:t>
-            </a:r>
-          </a:p>
-          <a:p>
-            <a:pPr lvl="0"/>
-            <a:r>
-              <a:rPr/>
-              <a:t>free5GC completo: 4 GB mínimo / 8 GB recomendado — </a:t>
-            </a:r>
-            <a:r>
-              <a:rPr b="1"/>
-              <a:t>sozinho já consome quase todo o orçamento restante</a:t>
-            </a:r>
-            <a:r>
-              <a:rPr/>
-              <a:t> (Nephio + O2 IMS + O-Cloud já usam ~3,9 GiB)</a:t>
-            </a:r>
-          </a:p>
-          <a:p>
-            <a:pPr lvl="0"/>
-            <a:r>
-              <a:rPr/>
-              <a:t>OpenAirInterface: footprint imprevisível, maior complexidade — e o próprio enunciado pediu para não instalar</a:t>
-            </a:r>
-          </a:p>
-          <a:p>
-            <a:pPr lvl="0"/>
-            <a:r>
-              <a:rPr b="1"/>
-              <a:t>Decisão:</a:t>
-            </a:r>
-            <a:r>
-              <a:rPr/>
-              <a:t> nenhuma NF real cabia ao lado do Nephio completo em 16 GB — documentado, não simplesmente omitido (</a:t>
-            </a:r>
-            <a:r>
-              <a:rPr>
-                <a:latin typeface="Courier"/>
-              </a:rPr>
-              <a:t>docs/real-nf-extension.md</a:t>
-            </a:r>
-            <a:r>
-              <a:rPr/>
-              <a:t>)</a:t>
             </a:r>
           </a:p>
         </p:txBody>
